--- a/Project Proposal/GAM708 Proposal Presentation.pptx
+++ b/Project Proposal/GAM708 Proposal Presentation.pptx
@@ -111,6 +111,11 @@
       </a:defRPr>
     </a:lvl9pPr>
   </p:defaultTextStyle>
+  <p:extLst>
+    <p:ext uri="{EFAFB233-063F-42B5-8137-9DF3F51BA10A}">
+      <p15:sldGuideLst xmlns:p15="http://schemas.microsoft.com/office/powerpoint/2012/main"/>
+    </p:ext>
+  </p:extLst>
 </p:presentation>
 </file>
 
@@ -263,7 +268,7 @@
           <a:p>
             <a:fld id="{A960F2F5-2F2F-4A65-8AC6-0AF42D8123C9}" type="datetimeFigureOut">
               <a:rPr lang="en-GB" smtClean="0"/>
-              <a:t>04/06/2026</a:t>
+              <a:t>08/06/2026</a:t>
             </a:fld>
             <a:endParaRPr lang="en-GB"/>
           </a:p>
@@ -463,7 +468,7 @@
           <a:p>
             <a:fld id="{A960F2F5-2F2F-4A65-8AC6-0AF42D8123C9}" type="datetimeFigureOut">
               <a:rPr lang="en-GB" smtClean="0"/>
-              <a:t>04/06/2026</a:t>
+              <a:t>08/06/2026</a:t>
             </a:fld>
             <a:endParaRPr lang="en-GB"/>
           </a:p>
@@ -673,7 +678,7 @@
           <a:p>
             <a:fld id="{A960F2F5-2F2F-4A65-8AC6-0AF42D8123C9}" type="datetimeFigureOut">
               <a:rPr lang="en-GB" smtClean="0"/>
-              <a:t>04/06/2026</a:t>
+              <a:t>08/06/2026</a:t>
             </a:fld>
             <a:endParaRPr lang="en-GB"/>
           </a:p>
@@ -873,7 +878,7 @@
           <a:p>
             <a:fld id="{A960F2F5-2F2F-4A65-8AC6-0AF42D8123C9}" type="datetimeFigureOut">
               <a:rPr lang="en-GB" smtClean="0"/>
-              <a:t>04/06/2026</a:t>
+              <a:t>08/06/2026</a:t>
             </a:fld>
             <a:endParaRPr lang="en-GB"/>
           </a:p>
@@ -1149,7 +1154,7 @@
           <a:p>
             <a:fld id="{A960F2F5-2F2F-4A65-8AC6-0AF42D8123C9}" type="datetimeFigureOut">
               <a:rPr lang="en-GB" smtClean="0"/>
-              <a:t>04/06/2026</a:t>
+              <a:t>08/06/2026</a:t>
             </a:fld>
             <a:endParaRPr lang="en-GB"/>
           </a:p>
@@ -1417,7 +1422,7 @@
           <a:p>
             <a:fld id="{A960F2F5-2F2F-4A65-8AC6-0AF42D8123C9}" type="datetimeFigureOut">
               <a:rPr lang="en-GB" smtClean="0"/>
-              <a:t>04/06/2026</a:t>
+              <a:t>08/06/2026</a:t>
             </a:fld>
             <a:endParaRPr lang="en-GB"/>
           </a:p>
@@ -1832,7 +1837,7 @@
           <a:p>
             <a:fld id="{A960F2F5-2F2F-4A65-8AC6-0AF42D8123C9}" type="datetimeFigureOut">
               <a:rPr lang="en-GB" smtClean="0"/>
-              <a:t>04/06/2026</a:t>
+              <a:t>08/06/2026</a:t>
             </a:fld>
             <a:endParaRPr lang="en-GB"/>
           </a:p>
@@ -1974,7 +1979,7 @@
           <a:p>
             <a:fld id="{A960F2F5-2F2F-4A65-8AC6-0AF42D8123C9}" type="datetimeFigureOut">
               <a:rPr lang="en-GB" smtClean="0"/>
-              <a:t>04/06/2026</a:t>
+              <a:t>08/06/2026</a:t>
             </a:fld>
             <a:endParaRPr lang="en-GB"/>
           </a:p>
@@ -2087,7 +2092,7 @@
           <a:p>
             <a:fld id="{A960F2F5-2F2F-4A65-8AC6-0AF42D8123C9}" type="datetimeFigureOut">
               <a:rPr lang="en-GB" smtClean="0"/>
-              <a:t>04/06/2026</a:t>
+              <a:t>08/06/2026</a:t>
             </a:fld>
             <a:endParaRPr lang="en-GB"/>
           </a:p>
@@ -2400,7 +2405,7 @@
           <a:p>
             <a:fld id="{A960F2F5-2F2F-4A65-8AC6-0AF42D8123C9}" type="datetimeFigureOut">
               <a:rPr lang="en-GB" smtClean="0"/>
-              <a:t>04/06/2026</a:t>
+              <a:t>08/06/2026</a:t>
             </a:fld>
             <a:endParaRPr lang="en-GB"/>
           </a:p>
@@ -2689,7 +2694,7 @@
           <a:p>
             <a:fld id="{A960F2F5-2F2F-4A65-8AC6-0AF42D8123C9}" type="datetimeFigureOut">
               <a:rPr lang="en-GB" smtClean="0"/>
-              <a:t>04/06/2026</a:t>
+              <a:t>08/06/2026</a:t>
             </a:fld>
             <a:endParaRPr lang="en-GB"/>
           </a:p>
@@ -2932,7 +2937,7 @@
           <a:p>
             <a:fld id="{A960F2F5-2F2F-4A65-8AC6-0AF42D8123C9}" type="datetimeFigureOut">
               <a:rPr lang="en-GB" smtClean="0"/>
-              <a:t>04/06/2026</a:t>
+              <a:t>08/06/2026</a:t>
             </a:fld>
             <a:endParaRPr lang="en-GB"/>
           </a:p>
@@ -3501,6 +3506,34 @@
               <a:t>What is my project (idk if  this means context of my project if its not then that’s probs a new slide job)(</a:t>
             </a:r>
           </a:p>
+          <a:p>
+            <a:endParaRPr lang="en-GB" dirty="0"/>
+          </a:p>
+          <a:p>
+            <a:r>
+              <a:rPr lang="en-GB" dirty="0"/>
+              <a:t>I will be </a:t>
+            </a:r>
+            <a:r>
+              <a:rPr lang="en-GB" dirty="0" err="1"/>
+              <a:t>investgating</a:t>
+            </a:r>
+            <a:r>
+              <a:rPr lang="en-GB" dirty="0"/>
+              <a:t> different guidance techniques and then how they work together and when to use them combined</a:t>
+            </a:r>
+          </a:p>
+          <a:p>
+            <a:r>
+              <a:rPr lang="en-GB" dirty="0"/>
+              <a:t>For example if you want the player to go into a room you may have audio coming from the room with maybe a light sign above it </a:t>
+            </a:r>
+            <a:r>
+              <a:rPr lang="en-GB"/>
+              <a:t>or something or have the door open </a:t>
+            </a:r>
+            <a:endParaRPr lang="en-GB" dirty="0"/>
+          </a:p>
         </p:txBody>
       </p:sp>
     </p:spTree>
@@ -3691,7 +3724,19 @@
           <a:bodyPr/>
           <a:lstStyle/>
           <a:p>
+            <a:r>
+              <a:rPr lang="en-GB" dirty="0"/>
+              <a:t>What professional designers and academics already know about player navigation </a:t>
+            </a:r>
+          </a:p>
+          <a:p>
             <a:endParaRPr lang="en-GB" dirty="0"/>
+          </a:p>
+          <a:p>
+            <a:r>
+              <a:rPr lang="en-GB" dirty="0"/>
+              <a:t>Research – Design Decisions – Prototyping – Testing </a:t>
+            </a:r>
           </a:p>
         </p:txBody>
       </p:sp>

--- a/Project Proposal/GAM708 Proposal Presentation.pptx
+++ b/Project Proposal/GAM708 Proposal Presentation.pptx
@@ -2,7 +2,7 @@
 <file path=ppt/presentation.xml><?xml version="1.0" encoding="utf-8"?>
 <p:presentation xmlns:a="http://schemas.openxmlformats.org/drawingml/2006/main" xmlns:r="http://schemas.openxmlformats.org/officeDocument/2006/relationships" xmlns:p="http://schemas.openxmlformats.org/presentationml/2006/main" saveSubsetFonts="1">
   <p:sldMasterIdLst>
-    <p:sldMasterId id="2147483648" r:id="rId1"/>
+    <p:sldMasterId id="2147483678" r:id="rId1"/>
   </p:sldMasterIdLst>
   <p:sldIdLst>
     <p:sldId id="256" r:id="rId2"/>
@@ -20,7 +20,7 @@
     <a:defPPr>
       <a:defRPr lang="en-US"/>
     </a:defPPr>
-    <a:lvl1pPr marL="0" algn="l" defTabSz="914400" rtl="0" eaLnBrk="1" latinLnBrk="0" hangingPunct="1">
+    <a:lvl1pPr marL="0" algn="l" defTabSz="457200" rtl="0" eaLnBrk="1" latinLnBrk="0" hangingPunct="1">
       <a:defRPr sz="1800" kern="1200">
         <a:solidFill>
           <a:schemeClr val="tx1"/>
@@ -30,7 +30,7 @@
         <a:cs typeface="+mn-cs"/>
       </a:defRPr>
     </a:lvl1pPr>
-    <a:lvl2pPr marL="457200" algn="l" defTabSz="914400" rtl="0" eaLnBrk="1" latinLnBrk="0" hangingPunct="1">
+    <a:lvl2pPr marL="457200" algn="l" defTabSz="457200" rtl="0" eaLnBrk="1" latinLnBrk="0" hangingPunct="1">
       <a:defRPr sz="1800" kern="1200">
         <a:solidFill>
           <a:schemeClr val="tx1"/>
@@ -40,7 +40,7 @@
         <a:cs typeface="+mn-cs"/>
       </a:defRPr>
     </a:lvl2pPr>
-    <a:lvl3pPr marL="914400" algn="l" defTabSz="914400" rtl="0" eaLnBrk="1" latinLnBrk="0" hangingPunct="1">
+    <a:lvl3pPr marL="914400" algn="l" defTabSz="457200" rtl="0" eaLnBrk="1" latinLnBrk="0" hangingPunct="1">
       <a:defRPr sz="1800" kern="1200">
         <a:solidFill>
           <a:schemeClr val="tx1"/>
@@ -50,7 +50,7 @@
         <a:cs typeface="+mn-cs"/>
       </a:defRPr>
     </a:lvl3pPr>
-    <a:lvl4pPr marL="1371600" algn="l" defTabSz="914400" rtl="0" eaLnBrk="1" latinLnBrk="0" hangingPunct="1">
+    <a:lvl4pPr marL="1371600" algn="l" defTabSz="457200" rtl="0" eaLnBrk="1" latinLnBrk="0" hangingPunct="1">
       <a:defRPr sz="1800" kern="1200">
         <a:solidFill>
           <a:schemeClr val="tx1"/>
@@ -60,7 +60,7 @@
         <a:cs typeface="+mn-cs"/>
       </a:defRPr>
     </a:lvl4pPr>
-    <a:lvl5pPr marL="1828800" algn="l" defTabSz="914400" rtl="0" eaLnBrk="1" latinLnBrk="0" hangingPunct="1">
+    <a:lvl5pPr marL="1828800" algn="l" defTabSz="457200" rtl="0" eaLnBrk="1" latinLnBrk="0" hangingPunct="1">
       <a:defRPr sz="1800" kern="1200">
         <a:solidFill>
           <a:schemeClr val="tx1"/>
@@ -70,7 +70,7 @@
         <a:cs typeface="+mn-cs"/>
       </a:defRPr>
     </a:lvl5pPr>
-    <a:lvl6pPr marL="2286000" algn="l" defTabSz="914400" rtl="0" eaLnBrk="1" latinLnBrk="0" hangingPunct="1">
+    <a:lvl6pPr marL="2286000" algn="l" defTabSz="457200" rtl="0" eaLnBrk="1" latinLnBrk="0" hangingPunct="1">
       <a:defRPr sz="1800" kern="1200">
         <a:solidFill>
           <a:schemeClr val="tx1"/>
@@ -80,7 +80,7 @@
         <a:cs typeface="+mn-cs"/>
       </a:defRPr>
     </a:lvl6pPr>
-    <a:lvl7pPr marL="2743200" algn="l" defTabSz="914400" rtl="0" eaLnBrk="1" latinLnBrk="0" hangingPunct="1">
+    <a:lvl7pPr marL="2743200" algn="l" defTabSz="457200" rtl="0" eaLnBrk="1" latinLnBrk="0" hangingPunct="1">
       <a:defRPr sz="1800" kern="1200">
         <a:solidFill>
           <a:schemeClr val="tx1"/>
@@ -90,7 +90,7 @@
         <a:cs typeface="+mn-cs"/>
       </a:defRPr>
     </a:lvl7pPr>
-    <a:lvl8pPr marL="3200400" algn="l" defTabSz="914400" rtl="0" eaLnBrk="1" latinLnBrk="0" hangingPunct="1">
+    <a:lvl8pPr marL="3200400" algn="l" defTabSz="457200" rtl="0" eaLnBrk="1" latinLnBrk="0" hangingPunct="1">
       <a:defRPr sz="1800" kern="1200">
         <a:solidFill>
           <a:schemeClr val="tx1"/>
@@ -100,7 +100,7 @@
         <a:cs typeface="+mn-cs"/>
       </a:defRPr>
     </a:lvl8pPr>
-    <a:lvl9pPr marL="3657600" algn="l" defTabSz="914400" rtl="0" eaLnBrk="1" latinLnBrk="0" hangingPunct="1">
+    <a:lvl9pPr marL="3657600" algn="l" defTabSz="457200" rtl="0" eaLnBrk="1" latinLnBrk="0" hangingPunct="1">
       <a:defRPr sz="1800" kern="1200">
         <a:solidFill>
           <a:schemeClr val="tx1"/>
@@ -138,13 +138,7 @@
       </p:grpSpPr>
       <p:sp>
         <p:nvSpPr>
-          <p:cNvPr id="2" name="Title 1">
-            <a:extLst>
-              <a:ext uri="{FF2B5EF4-FFF2-40B4-BE49-F238E27FC236}">
-                <a16:creationId xmlns:a16="http://schemas.microsoft.com/office/drawing/2014/main" id="{44BCB0F2-B4D5-DDC8-3484-BDCD627B6BD1}"/>
-              </a:ext>
-            </a:extLst>
-          </p:cNvPr>
+          <p:cNvPr id="2" name="Title 1"/>
           <p:cNvSpPr>
             <a:spLocks noGrp="1"/>
           </p:cNvSpPr>
@@ -154,15 +148,15 @@
         </p:nvSpPr>
         <p:spPr>
           <a:xfrm>
-            <a:off x="1524000" y="1122363"/>
-            <a:ext cx="9144000" cy="2387600"/>
+            <a:off x="1154955" y="1447800"/>
+            <a:ext cx="8825658" cy="3329581"/>
           </a:xfrm>
         </p:spPr>
         <p:txBody>
           <a:bodyPr anchor="b"/>
           <a:lstStyle>
-            <a:lvl1pPr algn="ctr">
-              <a:defRPr sz="6000"/>
+            <a:lvl1pPr>
+              <a:defRPr sz="7200"/>
             </a:lvl1pPr>
           </a:lstStyle>
           <a:p>
@@ -170,19 +164,13 @@
               <a:rPr lang="en-US"/>
               <a:t>Click to edit Master title style</a:t>
             </a:r>
-            <a:endParaRPr lang="en-GB"/>
-          </a:p>
-        </p:txBody>
-      </p:sp>
-      <p:sp>
-        <p:nvSpPr>
-          <p:cNvPr id="3" name="Subtitle 2">
-            <a:extLst>
-              <a:ext uri="{FF2B5EF4-FFF2-40B4-BE49-F238E27FC236}">
-                <a16:creationId xmlns:a16="http://schemas.microsoft.com/office/drawing/2014/main" id="{B9660120-FDD7-F6B8-DD14-1B6E114914DC}"/>
-              </a:ext>
-            </a:extLst>
-          </p:cNvPr>
+            <a:endParaRPr lang="en-US" dirty="0"/>
+          </a:p>
+        </p:txBody>
+      </p:sp>
+      <p:sp>
+        <p:nvSpPr>
+          <p:cNvPr id="3" name="Subtitle 2"/>
           <p:cNvSpPr>
             <a:spLocks noGrp="1"/>
           </p:cNvSpPr>
@@ -192,48 +180,103 @@
         </p:nvSpPr>
         <p:spPr>
           <a:xfrm>
-            <a:off x="1524000" y="3602038"/>
-            <a:ext cx="9144000" cy="1655762"/>
+            <a:off x="1154955" y="4777380"/>
+            <a:ext cx="8825658" cy="861420"/>
           </a:xfrm>
         </p:spPr>
         <p:txBody>
-          <a:bodyPr/>
+          <a:bodyPr anchor="t"/>
           <a:lstStyle>
-            <a:lvl1pPr marL="0" indent="0" algn="ctr">
-              <a:buNone/>
-              <a:defRPr sz="2400"/>
+            <a:lvl1pPr marL="0" indent="0" algn="l">
+              <a:buNone/>
+              <a:defRPr cap="all">
+                <a:solidFill>
+                  <a:schemeClr val="accent1">
+                    <a:lumMod val="60000"/>
+                    <a:lumOff val="40000"/>
+                  </a:schemeClr>
+                </a:solidFill>
+              </a:defRPr>
             </a:lvl1pPr>
             <a:lvl2pPr marL="457200" indent="0" algn="ctr">
               <a:buNone/>
-              <a:defRPr sz="2000"/>
+              <a:defRPr>
+                <a:solidFill>
+                  <a:schemeClr val="tx1">
+                    <a:tint val="75000"/>
+                  </a:schemeClr>
+                </a:solidFill>
+              </a:defRPr>
             </a:lvl2pPr>
             <a:lvl3pPr marL="914400" indent="0" algn="ctr">
               <a:buNone/>
-              <a:defRPr sz="1800"/>
+              <a:defRPr>
+                <a:solidFill>
+                  <a:schemeClr val="tx1">
+                    <a:tint val="75000"/>
+                  </a:schemeClr>
+                </a:solidFill>
+              </a:defRPr>
             </a:lvl3pPr>
             <a:lvl4pPr marL="1371600" indent="0" algn="ctr">
               <a:buNone/>
-              <a:defRPr sz="1600"/>
+              <a:defRPr>
+                <a:solidFill>
+                  <a:schemeClr val="tx1">
+                    <a:tint val="75000"/>
+                  </a:schemeClr>
+                </a:solidFill>
+              </a:defRPr>
             </a:lvl4pPr>
             <a:lvl5pPr marL="1828800" indent="0" algn="ctr">
               <a:buNone/>
-              <a:defRPr sz="1600"/>
+              <a:defRPr>
+                <a:solidFill>
+                  <a:schemeClr val="tx1">
+                    <a:tint val="75000"/>
+                  </a:schemeClr>
+                </a:solidFill>
+              </a:defRPr>
             </a:lvl5pPr>
             <a:lvl6pPr marL="2286000" indent="0" algn="ctr">
               <a:buNone/>
-              <a:defRPr sz="1600"/>
+              <a:defRPr>
+                <a:solidFill>
+                  <a:schemeClr val="tx1">
+                    <a:tint val="75000"/>
+                  </a:schemeClr>
+                </a:solidFill>
+              </a:defRPr>
             </a:lvl6pPr>
             <a:lvl7pPr marL="2743200" indent="0" algn="ctr">
               <a:buNone/>
-              <a:defRPr sz="1600"/>
+              <a:defRPr>
+                <a:solidFill>
+                  <a:schemeClr val="tx1">
+                    <a:tint val="75000"/>
+                  </a:schemeClr>
+                </a:solidFill>
+              </a:defRPr>
             </a:lvl7pPr>
             <a:lvl8pPr marL="3200400" indent="0" algn="ctr">
               <a:buNone/>
-              <a:defRPr sz="1600"/>
+              <a:defRPr>
+                <a:solidFill>
+                  <a:schemeClr val="tx1">
+                    <a:tint val="75000"/>
+                  </a:schemeClr>
+                </a:solidFill>
+              </a:defRPr>
             </a:lvl8pPr>
             <a:lvl9pPr marL="3657600" indent="0" algn="ctr">
               <a:buNone/>
-              <a:defRPr sz="1600"/>
+              <a:defRPr>
+                <a:solidFill>
+                  <a:schemeClr val="tx1">
+                    <a:tint val="75000"/>
+                  </a:schemeClr>
+                </a:solidFill>
+              </a:defRPr>
             </a:lvl9pPr>
           </a:lstStyle>
           <a:p>
@@ -241,19 +284,13 @@
               <a:rPr lang="en-US"/>
               <a:t>Click to edit Master subtitle style</a:t>
             </a:r>
-            <a:endParaRPr lang="en-GB"/>
-          </a:p>
-        </p:txBody>
-      </p:sp>
-      <p:sp>
-        <p:nvSpPr>
-          <p:cNvPr id="4" name="Date Placeholder 3">
-            <a:extLst>
-              <a:ext uri="{FF2B5EF4-FFF2-40B4-BE49-F238E27FC236}">
-                <a16:creationId xmlns:a16="http://schemas.microsoft.com/office/drawing/2014/main" id="{997701CF-18BE-7339-0134-6A7AD1B6BE53}"/>
-              </a:ext>
-            </a:extLst>
-          </p:cNvPr>
+            <a:endParaRPr lang="en-US" dirty="0"/>
+          </a:p>
+        </p:txBody>
+      </p:sp>
+      <p:sp>
+        <p:nvSpPr>
+          <p:cNvPr id="4" name="Date Placeholder 3"/>
           <p:cNvSpPr>
             <a:spLocks noGrp="1"/>
           </p:cNvSpPr>
@@ -268,7 +305,7 @@
           <a:p>
             <a:fld id="{A960F2F5-2F2F-4A65-8AC6-0AF42D8123C9}" type="datetimeFigureOut">
               <a:rPr lang="en-GB" smtClean="0"/>
-              <a:t>08/06/2026</a:t>
+              <a:t>15/06/2026</a:t>
             </a:fld>
             <a:endParaRPr lang="en-GB"/>
           </a:p>
@@ -276,13 +313,7 @@
       </p:sp>
       <p:sp>
         <p:nvSpPr>
-          <p:cNvPr id="5" name="Footer Placeholder 4">
-            <a:extLst>
-              <a:ext uri="{FF2B5EF4-FFF2-40B4-BE49-F238E27FC236}">
-                <a16:creationId xmlns:a16="http://schemas.microsoft.com/office/drawing/2014/main" id="{9BF138BB-9DC9-8C66-7524-F84696CBD8E3}"/>
-              </a:ext>
-            </a:extLst>
-          </p:cNvPr>
+          <p:cNvPr id="5" name="Footer Placeholder 4"/>
           <p:cNvSpPr>
             <a:spLocks noGrp="1"/>
           </p:cNvSpPr>
@@ -301,13 +332,7 @@
       </p:sp>
       <p:sp>
         <p:nvSpPr>
-          <p:cNvPr id="6" name="Slide Number Placeholder 5">
-            <a:extLst>
-              <a:ext uri="{FF2B5EF4-FFF2-40B4-BE49-F238E27FC236}">
-                <a16:creationId xmlns:a16="http://schemas.microsoft.com/office/drawing/2014/main" id="{049A8E48-655D-0B1D-C559-F16C0CCA558C}"/>
-              </a:ext>
-            </a:extLst>
-          </p:cNvPr>
+          <p:cNvPr id="6" name="Slide Number Placeholder 5"/>
           <p:cNvSpPr>
             <a:spLocks noGrp="1"/>
           </p:cNvSpPr>
@@ -331,7 +356,7 @@
     </p:spTree>
     <p:extLst>
       <p:ext uri="{BB962C8B-B14F-4D97-AF65-F5344CB8AC3E}">
-        <p14:creationId xmlns:p14="http://schemas.microsoft.com/office/powerpoint/2010/main" val="3938888637"/>
+        <p14:creationId xmlns:p14="http://schemas.microsoft.com/office/powerpoint/2010/main" val="1046222104"/>
       </p:ext>
     </p:extLst>
   </p:cSld>
@@ -342,6 +367,2539 @@
 </file>
 
 <file path=ppt/slideLayouts/slideLayout10.xml><?xml version="1.0" encoding="utf-8"?>
+<p:sldLayout xmlns:a="http://schemas.openxmlformats.org/drawingml/2006/main" xmlns:r="http://schemas.openxmlformats.org/officeDocument/2006/relationships" xmlns:p="http://schemas.openxmlformats.org/presentationml/2006/main" preserve="1">
+  <p:cSld name="Panoramic Picture with Caption">
+    <p:spTree>
+      <p:nvGrpSpPr>
+        <p:cNvPr id="1" name=""/>
+        <p:cNvGrpSpPr/>
+        <p:nvPr/>
+      </p:nvGrpSpPr>
+      <p:grpSpPr>
+        <a:xfrm>
+          <a:off x="0" y="0"/>
+          <a:ext cx="0" cy="0"/>
+          <a:chOff x="0" y="0"/>
+          <a:chExt cx="0" cy="0"/>
+        </a:xfrm>
+      </p:grpSpPr>
+      <p:sp>
+        <p:nvSpPr>
+          <p:cNvPr id="2" name="Title 1"/>
+          <p:cNvSpPr>
+            <a:spLocks noGrp="1"/>
+          </p:cNvSpPr>
+          <p:nvPr>
+            <p:ph type="title"/>
+          </p:nvPr>
+        </p:nvSpPr>
+        <p:spPr>
+          <a:xfrm>
+            <a:off x="1154956" y="4800587"/>
+            <a:ext cx="8825657" cy="566738"/>
+          </a:xfrm>
+        </p:spPr>
+        <p:txBody>
+          <a:bodyPr anchor="b">
+            <a:normAutofit/>
+          </a:bodyPr>
+          <a:lstStyle>
+            <a:lvl1pPr algn="l">
+              <a:defRPr sz="2400" b="0"/>
+            </a:lvl1pPr>
+          </a:lstStyle>
+          <a:p>
+            <a:r>
+              <a:rPr lang="en-US"/>
+              <a:t>Click to edit Master title style</a:t>
+            </a:r>
+            <a:endParaRPr lang="en-US" dirty="0"/>
+          </a:p>
+        </p:txBody>
+      </p:sp>
+      <p:sp>
+        <p:nvSpPr>
+          <p:cNvPr id="3" name="Picture Placeholder 2"/>
+          <p:cNvSpPr>
+            <a:spLocks noGrp="1" noChangeAspect="1"/>
+          </p:cNvSpPr>
+          <p:nvPr>
+            <p:ph type="pic" idx="1"/>
+          </p:nvPr>
+        </p:nvSpPr>
+        <p:spPr>
+          <a:xfrm>
+            <a:off x="1154955" y="685799"/>
+            <a:ext cx="8825658" cy="3640667"/>
+          </a:xfrm>
+          <a:prstGeom prst="roundRect">
+            <a:avLst>
+              <a:gd name="adj" fmla="val 1858"/>
+            </a:avLst>
+          </a:prstGeom>
+          <a:effectLst>
+            <a:outerShdw blurRad="50800" dist="50800" dir="5400000" algn="tl" rotWithShape="0">
+              <a:srgbClr val="000000">
+                <a:alpha val="43000"/>
+              </a:srgbClr>
+            </a:outerShdw>
+          </a:effectLst>
+        </p:spPr>
+        <p:txBody>
+          <a:bodyPr anchor="t">
+            <a:normAutofit/>
+          </a:bodyPr>
+          <a:lstStyle>
+            <a:lvl1pPr marL="0" indent="0" algn="ctr">
+              <a:buNone/>
+              <a:defRPr sz="1600"/>
+            </a:lvl1pPr>
+            <a:lvl2pPr marL="457200" indent="0">
+              <a:buNone/>
+              <a:defRPr sz="1600"/>
+            </a:lvl2pPr>
+            <a:lvl3pPr marL="914400" indent="0">
+              <a:buNone/>
+              <a:defRPr sz="1600"/>
+            </a:lvl3pPr>
+            <a:lvl4pPr marL="1371600" indent="0">
+              <a:buNone/>
+              <a:defRPr sz="1600"/>
+            </a:lvl4pPr>
+            <a:lvl5pPr marL="1828800" indent="0">
+              <a:buNone/>
+              <a:defRPr sz="1600"/>
+            </a:lvl5pPr>
+            <a:lvl6pPr marL="2286000" indent="0">
+              <a:buNone/>
+              <a:defRPr sz="1600"/>
+            </a:lvl6pPr>
+            <a:lvl7pPr marL="2743200" indent="0">
+              <a:buNone/>
+              <a:defRPr sz="1600"/>
+            </a:lvl7pPr>
+            <a:lvl8pPr marL="3200400" indent="0">
+              <a:buNone/>
+              <a:defRPr sz="1600"/>
+            </a:lvl8pPr>
+            <a:lvl9pPr marL="3657600" indent="0">
+              <a:buNone/>
+              <a:defRPr sz="1600"/>
+            </a:lvl9pPr>
+          </a:lstStyle>
+          <a:p>
+            <a:r>
+              <a:rPr lang="en-US"/>
+              <a:t>Click icon to add picture</a:t>
+            </a:r>
+            <a:endParaRPr lang="en-US" dirty="0"/>
+          </a:p>
+        </p:txBody>
+      </p:sp>
+      <p:sp>
+        <p:nvSpPr>
+          <p:cNvPr id="4" name="Text Placeholder 3"/>
+          <p:cNvSpPr>
+            <a:spLocks noGrp="1"/>
+          </p:cNvSpPr>
+          <p:nvPr>
+            <p:ph type="body" sz="half" idx="2"/>
+          </p:nvPr>
+        </p:nvSpPr>
+        <p:spPr>
+          <a:xfrm>
+            <a:off x="1154956" y="5367325"/>
+            <a:ext cx="8825656" cy="493712"/>
+          </a:xfrm>
+        </p:spPr>
+        <p:txBody>
+          <a:bodyPr>
+            <a:normAutofit/>
+          </a:bodyPr>
+          <a:lstStyle>
+            <a:lvl1pPr marL="0" indent="0">
+              <a:buNone/>
+              <a:defRPr sz="1200"/>
+            </a:lvl1pPr>
+            <a:lvl2pPr marL="457200" indent="0">
+              <a:buNone/>
+              <a:defRPr sz="1200"/>
+            </a:lvl2pPr>
+            <a:lvl3pPr marL="914400" indent="0">
+              <a:buNone/>
+              <a:defRPr sz="1000"/>
+            </a:lvl3pPr>
+            <a:lvl4pPr marL="1371600" indent="0">
+              <a:buNone/>
+              <a:defRPr sz="900"/>
+            </a:lvl4pPr>
+            <a:lvl5pPr marL="1828800" indent="0">
+              <a:buNone/>
+              <a:defRPr sz="900"/>
+            </a:lvl5pPr>
+            <a:lvl6pPr marL="2286000" indent="0">
+              <a:buNone/>
+              <a:defRPr sz="900"/>
+            </a:lvl6pPr>
+            <a:lvl7pPr marL="2743200" indent="0">
+              <a:buNone/>
+              <a:defRPr sz="900"/>
+            </a:lvl7pPr>
+            <a:lvl8pPr marL="3200400" indent="0">
+              <a:buNone/>
+              <a:defRPr sz="900"/>
+            </a:lvl8pPr>
+            <a:lvl9pPr marL="3657600" indent="0">
+              <a:buNone/>
+              <a:defRPr sz="900"/>
+            </a:lvl9pPr>
+          </a:lstStyle>
+          <a:p>
+            <a:pPr lvl="0"/>
+            <a:r>
+              <a:rPr lang="en-US"/>
+              <a:t>Click to edit Master text styles</a:t>
+            </a:r>
+          </a:p>
+        </p:txBody>
+      </p:sp>
+      <p:sp>
+        <p:nvSpPr>
+          <p:cNvPr id="5" name="Date Placeholder 4"/>
+          <p:cNvSpPr>
+            <a:spLocks noGrp="1"/>
+          </p:cNvSpPr>
+          <p:nvPr>
+            <p:ph type="dt" sz="half" idx="10"/>
+          </p:nvPr>
+        </p:nvSpPr>
+        <p:spPr/>
+        <p:txBody>
+          <a:bodyPr/>
+          <a:lstStyle/>
+          <a:p>
+            <a:fld id="{A960F2F5-2F2F-4A65-8AC6-0AF42D8123C9}" type="datetimeFigureOut">
+              <a:rPr lang="en-GB" smtClean="0"/>
+              <a:t>15/06/2026</a:t>
+            </a:fld>
+            <a:endParaRPr lang="en-GB"/>
+          </a:p>
+        </p:txBody>
+      </p:sp>
+      <p:sp>
+        <p:nvSpPr>
+          <p:cNvPr id="6" name="Footer Placeholder 5"/>
+          <p:cNvSpPr>
+            <a:spLocks noGrp="1"/>
+          </p:cNvSpPr>
+          <p:nvPr>
+            <p:ph type="ftr" sz="quarter" idx="11"/>
+          </p:nvPr>
+        </p:nvSpPr>
+        <p:spPr/>
+        <p:txBody>
+          <a:bodyPr/>
+          <a:lstStyle/>
+          <a:p>
+            <a:endParaRPr lang="en-GB"/>
+          </a:p>
+        </p:txBody>
+      </p:sp>
+      <p:sp>
+        <p:nvSpPr>
+          <p:cNvPr id="7" name="Slide Number Placeholder 6"/>
+          <p:cNvSpPr>
+            <a:spLocks noGrp="1"/>
+          </p:cNvSpPr>
+          <p:nvPr>
+            <p:ph type="sldNum" sz="quarter" idx="12"/>
+          </p:nvPr>
+        </p:nvSpPr>
+        <p:spPr/>
+        <p:txBody>
+          <a:bodyPr/>
+          <a:lstStyle/>
+          <a:p>
+            <a:fld id="{0247CF7A-2BD3-4410-AED9-8E63B73B7826}" type="slidenum">
+              <a:rPr lang="en-GB" smtClean="0"/>
+              <a:t>‹#›</a:t>
+            </a:fld>
+            <a:endParaRPr lang="en-GB"/>
+          </a:p>
+        </p:txBody>
+      </p:sp>
+    </p:spTree>
+    <p:extLst>
+      <p:ext uri="{BB962C8B-B14F-4D97-AF65-F5344CB8AC3E}">
+        <p14:creationId xmlns:p14="http://schemas.microsoft.com/office/powerpoint/2010/main" val="623494212"/>
+      </p:ext>
+    </p:extLst>
+  </p:cSld>
+  <p:clrMapOvr>
+    <a:masterClrMapping/>
+  </p:clrMapOvr>
+</p:sldLayout>
+</file>
+
+<file path=ppt/slideLayouts/slideLayout11.xml><?xml version="1.0" encoding="utf-8"?>
+<p:sldLayout xmlns:a="http://schemas.openxmlformats.org/drawingml/2006/main" xmlns:r="http://schemas.openxmlformats.org/officeDocument/2006/relationships" xmlns:p="http://schemas.openxmlformats.org/presentationml/2006/main" preserve="1">
+  <p:cSld name="Title and Caption">
+    <p:spTree>
+      <p:nvGrpSpPr>
+        <p:cNvPr id="1" name=""/>
+        <p:cNvGrpSpPr/>
+        <p:nvPr/>
+      </p:nvGrpSpPr>
+      <p:grpSpPr>
+        <a:xfrm>
+          <a:off x="0" y="0"/>
+          <a:ext cx="0" cy="0"/>
+          <a:chOff x="0" y="0"/>
+          <a:chExt cx="0" cy="0"/>
+        </a:xfrm>
+      </p:grpSpPr>
+      <p:sp>
+        <p:nvSpPr>
+          <p:cNvPr id="2" name="Title 1"/>
+          <p:cNvSpPr>
+            <a:spLocks noGrp="1"/>
+          </p:cNvSpPr>
+          <p:nvPr>
+            <p:ph type="title"/>
+          </p:nvPr>
+        </p:nvSpPr>
+        <p:spPr>
+          <a:xfrm>
+            <a:off x="1154954" y="1447800"/>
+            <a:ext cx="8825659" cy="1981200"/>
+          </a:xfrm>
+        </p:spPr>
+        <p:txBody>
+          <a:bodyPr/>
+          <a:lstStyle>
+            <a:lvl1pPr>
+              <a:defRPr sz="4800"/>
+            </a:lvl1pPr>
+          </a:lstStyle>
+          <a:p>
+            <a:r>
+              <a:rPr lang="en-US"/>
+              <a:t>Click to edit Master title style</a:t>
+            </a:r>
+            <a:endParaRPr lang="en-US" dirty="0"/>
+          </a:p>
+        </p:txBody>
+      </p:sp>
+      <p:sp>
+        <p:nvSpPr>
+          <p:cNvPr id="8" name="Text Placeholder 3"/>
+          <p:cNvSpPr>
+            <a:spLocks noGrp="1"/>
+          </p:cNvSpPr>
+          <p:nvPr>
+            <p:ph type="body" sz="half" idx="2"/>
+          </p:nvPr>
+        </p:nvSpPr>
+        <p:spPr>
+          <a:xfrm>
+            <a:off x="1154954" y="3657600"/>
+            <a:ext cx="8825659" cy="2362200"/>
+          </a:xfrm>
+        </p:spPr>
+        <p:txBody>
+          <a:bodyPr anchor="ctr">
+            <a:normAutofit/>
+          </a:bodyPr>
+          <a:lstStyle>
+            <a:lvl1pPr marL="0" indent="0">
+              <a:buNone/>
+              <a:defRPr sz="1800"/>
+            </a:lvl1pPr>
+            <a:lvl2pPr marL="457200" indent="0">
+              <a:buNone/>
+              <a:defRPr sz="1200"/>
+            </a:lvl2pPr>
+            <a:lvl3pPr marL="914400" indent="0">
+              <a:buNone/>
+              <a:defRPr sz="1000"/>
+            </a:lvl3pPr>
+            <a:lvl4pPr marL="1371600" indent="0">
+              <a:buNone/>
+              <a:defRPr sz="900"/>
+            </a:lvl4pPr>
+            <a:lvl5pPr marL="1828800" indent="0">
+              <a:buNone/>
+              <a:defRPr sz="900"/>
+            </a:lvl5pPr>
+            <a:lvl6pPr marL="2286000" indent="0">
+              <a:buNone/>
+              <a:defRPr sz="900"/>
+            </a:lvl6pPr>
+            <a:lvl7pPr marL="2743200" indent="0">
+              <a:buNone/>
+              <a:defRPr sz="900"/>
+            </a:lvl7pPr>
+            <a:lvl8pPr marL="3200400" indent="0">
+              <a:buNone/>
+              <a:defRPr sz="900"/>
+            </a:lvl8pPr>
+            <a:lvl9pPr marL="3657600" indent="0">
+              <a:buNone/>
+              <a:defRPr sz="900"/>
+            </a:lvl9pPr>
+          </a:lstStyle>
+          <a:p>
+            <a:pPr lvl="0"/>
+            <a:r>
+              <a:rPr lang="en-US"/>
+              <a:t>Click to edit Master text styles</a:t>
+            </a:r>
+          </a:p>
+        </p:txBody>
+      </p:sp>
+      <p:sp>
+        <p:nvSpPr>
+          <p:cNvPr id="4" name="Date Placeholder 3"/>
+          <p:cNvSpPr>
+            <a:spLocks noGrp="1"/>
+          </p:cNvSpPr>
+          <p:nvPr>
+            <p:ph type="dt" sz="half" idx="10"/>
+          </p:nvPr>
+        </p:nvSpPr>
+        <p:spPr/>
+        <p:txBody>
+          <a:bodyPr/>
+          <a:lstStyle/>
+          <a:p>
+            <a:fld id="{A960F2F5-2F2F-4A65-8AC6-0AF42D8123C9}" type="datetimeFigureOut">
+              <a:rPr lang="en-GB" smtClean="0"/>
+              <a:t>15/06/2026</a:t>
+            </a:fld>
+            <a:endParaRPr lang="en-GB"/>
+          </a:p>
+        </p:txBody>
+      </p:sp>
+      <p:sp>
+        <p:nvSpPr>
+          <p:cNvPr id="5" name="Footer Placeholder 4"/>
+          <p:cNvSpPr>
+            <a:spLocks noGrp="1"/>
+          </p:cNvSpPr>
+          <p:nvPr>
+            <p:ph type="ftr" sz="quarter" idx="11"/>
+          </p:nvPr>
+        </p:nvSpPr>
+        <p:spPr/>
+        <p:txBody>
+          <a:bodyPr/>
+          <a:lstStyle/>
+          <a:p>
+            <a:endParaRPr lang="en-GB"/>
+          </a:p>
+        </p:txBody>
+      </p:sp>
+      <p:sp>
+        <p:nvSpPr>
+          <p:cNvPr id="6" name="Slide Number Placeholder 5"/>
+          <p:cNvSpPr>
+            <a:spLocks noGrp="1"/>
+          </p:cNvSpPr>
+          <p:nvPr>
+            <p:ph type="sldNum" sz="quarter" idx="12"/>
+          </p:nvPr>
+        </p:nvSpPr>
+        <p:spPr/>
+        <p:txBody>
+          <a:bodyPr/>
+          <a:lstStyle/>
+          <a:p>
+            <a:fld id="{0247CF7A-2BD3-4410-AED9-8E63B73B7826}" type="slidenum">
+              <a:rPr lang="en-GB" smtClean="0"/>
+              <a:t>‹#›</a:t>
+            </a:fld>
+            <a:endParaRPr lang="en-GB"/>
+          </a:p>
+        </p:txBody>
+      </p:sp>
+    </p:spTree>
+    <p:extLst>
+      <p:ext uri="{BB962C8B-B14F-4D97-AF65-F5344CB8AC3E}">
+        <p14:creationId xmlns:p14="http://schemas.microsoft.com/office/powerpoint/2010/main" val="2013666884"/>
+      </p:ext>
+    </p:extLst>
+  </p:cSld>
+  <p:clrMapOvr>
+    <a:masterClrMapping/>
+  </p:clrMapOvr>
+</p:sldLayout>
+</file>
+
+<file path=ppt/slideLayouts/slideLayout12.xml><?xml version="1.0" encoding="utf-8"?>
+<p:sldLayout xmlns:a="http://schemas.openxmlformats.org/drawingml/2006/main" xmlns:r="http://schemas.openxmlformats.org/officeDocument/2006/relationships" xmlns:p="http://schemas.openxmlformats.org/presentationml/2006/main" preserve="1">
+  <p:cSld name="Quote with Caption">
+    <p:spTree>
+      <p:nvGrpSpPr>
+        <p:cNvPr id="1" name=""/>
+        <p:cNvGrpSpPr/>
+        <p:nvPr/>
+      </p:nvGrpSpPr>
+      <p:grpSpPr>
+        <a:xfrm>
+          <a:off x="0" y="0"/>
+          <a:ext cx="0" cy="0"/>
+          <a:chOff x="0" y="0"/>
+          <a:chExt cx="0" cy="0"/>
+        </a:xfrm>
+      </p:grpSpPr>
+      <p:sp>
+        <p:nvSpPr>
+          <p:cNvPr id="2" name="Title 1"/>
+          <p:cNvSpPr>
+            <a:spLocks noGrp="1"/>
+          </p:cNvSpPr>
+          <p:nvPr>
+            <p:ph type="title"/>
+          </p:nvPr>
+        </p:nvSpPr>
+        <p:spPr>
+          <a:xfrm>
+            <a:off x="1574800" y="1447800"/>
+            <a:ext cx="7999315" cy="2323374"/>
+          </a:xfrm>
+        </p:spPr>
+        <p:txBody>
+          <a:bodyPr/>
+          <a:lstStyle>
+            <a:lvl1pPr>
+              <a:defRPr sz="4800"/>
+            </a:lvl1pPr>
+          </a:lstStyle>
+          <a:p>
+            <a:r>
+              <a:rPr lang="en-US"/>
+              <a:t>Click to edit Master title style</a:t>
+            </a:r>
+            <a:endParaRPr lang="en-US" dirty="0"/>
+          </a:p>
+        </p:txBody>
+      </p:sp>
+      <p:sp>
+        <p:nvSpPr>
+          <p:cNvPr id="14" name="Text Placeholder 3"/>
+          <p:cNvSpPr>
+            <a:spLocks noGrp="1"/>
+          </p:cNvSpPr>
+          <p:nvPr>
+            <p:ph type="body" sz="half" idx="13"/>
+          </p:nvPr>
+        </p:nvSpPr>
+        <p:spPr>
+          <a:xfrm>
+            <a:off x="1930400" y="3771174"/>
+            <a:ext cx="7279649" cy="342174"/>
+          </a:xfrm>
+        </p:spPr>
+        <p:txBody>
+          <a:bodyPr anchor="t">
+            <a:normAutofit/>
+          </a:bodyPr>
+          <a:lstStyle>
+            <a:lvl1pPr marL="0" indent="0">
+              <a:buNone/>
+              <a:defRPr lang="en-US" sz="1400" b="0" i="0" kern="1200" cap="small" dirty="0">
+                <a:solidFill>
+                  <a:schemeClr val="accent1">
+                    <a:lumMod val="60000"/>
+                    <a:lumOff val="40000"/>
+                  </a:schemeClr>
+                </a:solidFill>
+                <a:latin typeface="+mj-lt"/>
+                <a:ea typeface="+mj-ea"/>
+                <a:cs typeface="+mj-cs"/>
+              </a:defRPr>
+            </a:lvl1pPr>
+            <a:lvl2pPr marL="457200" indent="0">
+              <a:buNone/>
+              <a:defRPr sz="1200"/>
+            </a:lvl2pPr>
+            <a:lvl3pPr marL="914400" indent="0">
+              <a:buNone/>
+              <a:defRPr sz="1000"/>
+            </a:lvl3pPr>
+            <a:lvl4pPr marL="1371600" indent="0">
+              <a:buNone/>
+              <a:defRPr sz="900"/>
+            </a:lvl4pPr>
+            <a:lvl5pPr marL="1828800" indent="0">
+              <a:buNone/>
+              <a:defRPr sz="900"/>
+            </a:lvl5pPr>
+            <a:lvl6pPr marL="2286000" indent="0">
+              <a:buNone/>
+              <a:defRPr sz="900"/>
+            </a:lvl6pPr>
+            <a:lvl7pPr marL="2743200" indent="0">
+              <a:buNone/>
+              <a:defRPr sz="900"/>
+            </a:lvl7pPr>
+            <a:lvl8pPr marL="3200400" indent="0">
+              <a:buNone/>
+              <a:defRPr sz="900"/>
+            </a:lvl8pPr>
+            <a:lvl9pPr marL="3657600" indent="0">
+              <a:buNone/>
+              <a:defRPr sz="900"/>
+            </a:lvl9pPr>
+          </a:lstStyle>
+          <a:p>
+            <a:pPr lvl="0"/>
+            <a:r>
+              <a:rPr lang="en-US"/>
+              <a:t>Click to edit Master text styles</a:t>
+            </a:r>
+          </a:p>
+        </p:txBody>
+      </p:sp>
+      <p:sp>
+        <p:nvSpPr>
+          <p:cNvPr id="10" name="Text Placeholder 3"/>
+          <p:cNvSpPr>
+            <a:spLocks noGrp="1"/>
+          </p:cNvSpPr>
+          <p:nvPr>
+            <p:ph type="body" sz="half" idx="2"/>
+          </p:nvPr>
+        </p:nvSpPr>
+        <p:spPr>
+          <a:xfrm>
+            <a:off x="1154954" y="4350657"/>
+            <a:ext cx="8825659" cy="1676400"/>
+          </a:xfrm>
+        </p:spPr>
+        <p:txBody>
+          <a:bodyPr anchor="ctr">
+            <a:normAutofit/>
+          </a:bodyPr>
+          <a:lstStyle>
+            <a:lvl1pPr marL="0" indent="0">
+              <a:buNone/>
+              <a:defRPr sz="1800"/>
+            </a:lvl1pPr>
+            <a:lvl2pPr marL="457200" indent="0">
+              <a:buNone/>
+              <a:defRPr sz="1200"/>
+            </a:lvl2pPr>
+            <a:lvl3pPr marL="914400" indent="0">
+              <a:buNone/>
+              <a:defRPr sz="1000"/>
+            </a:lvl3pPr>
+            <a:lvl4pPr marL="1371600" indent="0">
+              <a:buNone/>
+              <a:defRPr sz="900"/>
+            </a:lvl4pPr>
+            <a:lvl5pPr marL="1828800" indent="0">
+              <a:buNone/>
+              <a:defRPr sz="900"/>
+            </a:lvl5pPr>
+            <a:lvl6pPr marL="2286000" indent="0">
+              <a:buNone/>
+              <a:defRPr sz="900"/>
+            </a:lvl6pPr>
+            <a:lvl7pPr marL="2743200" indent="0">
+              <a:buNone/>
+              <a:defRPr sz="900"/>
+            </a:lvl7pPr>
+            <a:lvl8pPr marL="3200400" indent="0">
+              <a:buNone/>
+              <a:defRPr sz="900"/>
+            </a:lvl8pPr>
+            <a:lvl9pPr marL="3657600" indent="0">
+              <a:buNone/>
+              <a:defRPr sz="900"/>
+            </a:lvl9pPr>
+          </a:lstStyle>
+          <a:p>
+            <a:pPr lvl="0"/>
+            <a:r>
+              <a:rPr lang="en-US"/>
+              <a:t>Click to edit Master text styles</a:t>
+            </a:r>
+          </a:p>
+        </p:txBody>
+      </p:sp>
+      <p:sp>
+        <p:nvSpPr>
+          <p:cNvPr id="4" name="Date Placeholder 3"/>
+          <p:cNvSpPr>
+            <a:spLocks noGrp="1"/>
+          </p:cNvSpPr>
+          <p:nvPr>
+            <p:ph type="dt" sz="half" idx="10"/>
+          </p:nvPr>
+        </p:nvSpPr>
+        <p:spPr/>
+        <p:txBody>
+          <a:bodyPr/>
+          <a:lstStyle/>
+          <a:p>
+            <a:fld id="{A960F2F5-2F2F-4A65-8AC6-0AF42D8123C9}" type="datetimeFigureOut">
+              <a:rPr lang="en-GB" smtClean="0"/>
+              <a:t>15/06/2026</a:t>
+            </a:fld>
+            <a:endParaRPr lang="en-GB"/>
+          </a:p>
+        </p:txBody>
+      </p:sp>
+      <p:sp>
+        <p:nvSpPr>
+          <p:cNvPr id="5" name="Footer Placeholder 4"/>
+          <p:cNvSpPr>
+            <a:spLocks noGrp="1"/>
+          </p:cNvSpPr>
+          <p:nvPr>
+            <p:ph type="ftr" sz="quarter" idx="11"/>
+          </p:nvPr>
+        </p:nvSpPr>
+        <p:spPr/>
+        <p:txBody>
+          <a:bodyPr/>
+          <a:lstStyle/>
+          <a:p>
+            <a:endParaRPr lang="en-GB"/>
+          </a:p>
+        </p:txBody>
+      </p:sp>
+      <p:sp>
+        <p:nvSpPr>
+          <p:cNvPr id="6" name="Slide Number Placeholder 5"/>
+          <p:cNvSpPr>
+            <a:spLocks noGrp="1"/>
+          </p:cNvSpPr>
+          <p:nvPr>
+            <p:ph type="sldNum" sz="quarter" idx="12"/>
+          </p:nvPr>
+        </p:nvSpPr>
+        <p:spPr/>
+        <p:txBody>
+          <a:bodyPr/>
+          <a:lstStyle/>
+          <a:p>
+            <a:fld id="{0247CF7A-2BD3-4410-AED9-8E63B73B7826}" type="slidenum">
+              <a:rPr lang="en-GB" smtClean="0"/>
+              <a:t>‹#›</a:t>
+            </a:fld>
+            <a:endParaRPr lang="en-GB"/>
+          </a:p>
+        </p:txBody>
+      </p:sp>
+      <p:sp>
+        <p:nvSpPr>
+          <p:cNvPr id="12" name="TextBox 11"/>
+          <p:cNvSpPr txBox="1"/>
+          <p:nvPr/>
+        </p:nvSpPr>
+        <p:spPr>
+          <a:xfrm>
+            <a:off x="898295" y="971253"/>
+            <a:ext cx="801912" cy="1969770"/>
+          </a:xfrm>
+          <a:prstGeom prst="rect">
+            <a:avLst/>
+          </a:prstGeom>
+          <a:noFill/>
+        </p:spPr>
+        <p:txBody>
+          <a:bodyPr wrap="square" rtlCol="0">
+            <a:spAutoFit/>
+          </a:bodyPr>
+          <a:lstStyle/>
+          <a:p>
+            <a:pPr algn="r"/>
+            <a:r>
+              <a:rPr lang="en-US" sz="12200" b="0" i="0" dirty="0">
+                <a:solidFill>
+                  <a:schemeClr val="accent1">
+                    <a:lumMod val="60000"/>
+                    <a:lumOff val="40000"/>
+                  </a:schemeClr>
+                </a:solidFill>
+                <a:latin typeface="Arial"/>
+                <a:ea typeface="+mj-ea"/>
+                <a:cs typeface="+mj-cs"/>
+              </a:rPr>
+              <a:t>“</a:t>
+            </a:r>
+          </a:p>
+        </p:txBody>
+      </p:sp>
+      <p:sp>
+        <p:nvSpPr>
+          <p:cNvPr id="11" name="TextBox 10"/>
+          <p:cNvSpPr txBox="1"/>
+          <p:nvPr/>
+        </p:nvSpPr>
+        <p:spPr>
+          <a:xfrm>
+            <a:off x="9330490" y="2613787"/>
+            <a:ext cx="801912" cy="1969770"/>
+          </a:xfrm>
+          <a:prstGeom prst="rect">
+            <a:avLst/>
+          </a:prstGeom>
+          <a:noFill/>
+        </p:spPr>
+        <p:txBody>
+          <a:bodyPr wrap="square" rtlCol="0">
+            <a:spAutoFit/>
+          </a:bodyPr>
+          <a:lstStyle/>
+          <a:p>
+            <a:pPr algn="r"/>
+            <a:r>
+              <a:rPr lang="en-US" sz="12200" b="0" i="0" dirty="0">
+                <a:solidFill>
+                  <a:schemeClr val="accent1">
+                    <a:lumMod val="60000"/>
+                    <a:lumOff val="40000"/>
+                  </a:schemeClr>
+                </a:solidFill>
+                <a:latin typeface="Arial"/>
+                <a:ea typeface="+mj-ea"/>
+                <a:cs typeface="+mj-cs"/>
+              </a:rPr>
+              <a:t>”</a:t>
+            </a:r>
+          </a:p>
+        </p:txBody>
+      </p:sp>
+    </p:spTree>
+    <p:extLst>
+      <p:ext uri="{BB962C8B-B14F-4D97-AF65-F5344CB8AC3E}">
+        <p14:creationId xmlns:p14="http://schemas.microsoft.com/office/powerpoint/2010/main" val="3793658147"/>
+      </p:ext>
+    </p:extLst>
+  </p:cSld>
+  <p:clrMapOvr>
+    <a:masterClrMapping/>
+  </p:clrMapOvr>
+</p:sldLayout>
+</file>
+
+<file path=ppt/slideLayouts/slideLayout13.xml><?xml version="1.0" encoding="utf-8"?>
+<p:sldLayout xmlns:a="http://schemas.openxmlformats.org/drawingml/2006/main" xmlns:r="http://schemas.openxmlformats.org/officeDocument/2006/relationships" xmlns:p="http://schemas.openxmlformats.org/presentationml/2006/main" preserve="1">
+  <p:cSld name="Name Card">
+    <p:spTree>
+      <p:nvGrpSpPr>
+        <p:cNvPr id="1" name=""/>
+        <p:cNvGrpSpPr/>
+        <p:nvPr/>
+      </p:nvGrpSpPr>
+      <p:grpSpPr>
+        <a:xfrm>
+          <a:off x="0" y="0"/>
+          <a:ext cx="0" cy="0"/>
+          <a:chOff x="0" y="0"/>
+          <a:chExt cx="0" cy="0"/>
+        </a:xfrm>
+      </p:grpSpPr>
+      <p:sp>
+        <p:nvSpPr>
+          <p:cNvPr id="2" name="Title 1"/>
+          <p:cNvSpPr>
+            <a:spLocks noGrp="1"/>
+          </p:cNvSpPr>
+          <p:nvPr>
+            <p:ph type="title"/>
+          </p:nvPr>
+        </p:nvSpPr>
+        <p:spPr>
+          <a:xfrm>
+            <a:off x="1154954" y="3124201"/>
+            <a:ext cx="8825659" cy="1653180"/>
+          </a:xfrm>
+        </p:spPr>
+        <p:txBody>
+          <a:bodyPr anchor="b"/>
+          <a:lstStyle>
+            <a:lvl1pPr algn="l">
+              <a:defRPr sz="4000" b="0" cap="none"/>
+            </a:lvl1pPr>
+          </a:lstStyle>
+          <a:p>
+            <a:r>
+              <a:rPr lang="en-US"/>
+              <a:t>Click to edit Master title style</a:t>
+            </a:r>
+            <a:endParaRPr lang="en-US" dirty="0"/>
+          </a:p>
+        </p:txBody>
+      </p:sp>
+      <p:sp>
+        <p:nvSpPr>
+          <p:cNvPr id="3" name="Text Placeholder 2"/>
+          <p:cNvSpPr>
+            <a:spLocks noGrp="1"/>
+          </p:cNvSpPr>
+          <p:nvPr>
+            <p:ph type="body" idx="1"/>
+          </p:nvPr>
+        </p:nvSpPr>
+        <p:spPr>
+          <a:xfrm>
+            <a:off x="1154955" y="4777381"/>
+            <a:ext cx="8825658" cy="860400"/>
+          </a:xfrm>
+        </p:spPr>
+        <p:txBody>
+          <a:bodyPr anchor="t"/>
+          <a:lstStyle>
+            <a:lvl1pPr marL="0" indent="0" algn="l">
+              <a:buNone/>
+              <a:defRPr sz="2000" cap="none">
+                <a:solidFill>
+                  <a:schemeClr val="accent1">
+                    <a:lumMod val="60000"/>
+                    <a:lumOff val="40000"/>
+                  </a:schemeClr>
+                </a:solidFill>
+              </a:defRPr>
+            </a:lvl1pPr>
+            <a:lvl2pPr marL="457200" indent="0">
+              <a:buNone/>
+              <a:defRPr sz="1800">
+                <a:solidFill>
+                  <a:schemeClr val="tx1">
+                    <a:tint val="75000"/>
+                  </a:schemeClr>
+                </a:solidFill>
+              </a:defRPr>
+            </a:lvl2pPr>
+            <a:lvl3pPr marL="914400" indent="0">
+              <a:buNone/>
+              <a:defRPr sz="1600">
+                <a:solidFill>
+                  <a:schemeClr val="tx1">
+                    <a:tint val="75000"/>
+                  </a:schemeClr>
+                </a:solidFill>
+              </a:defRPr>
+            </a:lvl3pPr>
+            <a:lvl4pPr marL="1371600" indent="0">
+              <a:buNone/>
+              <a:defRPr sz="1400">
+                <a:solidFill>
+                  <a:schemeClr val="tx1">
+                    <a:tint val="75000"/>
+                  </a:schemeClr>
+                </a:solidFill>
+              </a:defRPr>
+            </a:lvl4pPr>
+            <a:lvl5pPr marL="1828800" indent="0">
+              <a:buNone/>
+              <a:defRPr sz="1400">
+                <a:solidFill>
+                  <a:schemeClr val="tx1">
+                    <a:tint val="75000"/>
+                  </a:schemeClr>
+                </a:solidFill>
+              </a:defRPr>
+            </a:lvl5pPr>
+            <a:lvl6pPr marL="2286000" indent="0">
+              <a:buNone/>
+              <a:defRPr sz="1400">
+                <a:solidFill>
+                  <a:schemeClr val="tx1">
+                    <a:tint val="75000"/>
+                  </a:schemeClr>
+                </a:solidFill>
+              </a:defRPr>
+            </a:lvl6pPr>
+            <a:lvl7pPr marL="2743200" indent="0">
+              <a:buNone/>
+              <a:defRPr sz="1400">
+                <a:solidFill>
+                  <a:schemeClr val="tx1">
+                    <a:tint val="75000"/>
+                  </a:schemeClr>
+                </a:solidFill>
+              </a:defRPr>
+            </a:lvl7pPr>
+            <a:lvl8pPr marL="3200400" indent="0">
+              <a:buNone/>
+              <a:defRPr sz="1400">
+                <a:solidFill>
+                  <a:schemeClr val="tx1">
+                    <a:tint val="75000"/>
+                  </a:schemeClr>
+                </a:solidFill>
+              </a:defRPr>
+            </a:lvl8pPr>
+            <a:lvl9pPr marL="3657600" indent="0">
+              <a:buNone/>
+              <a:defRPr sz="1400">
+                <a:solidFill>
+                  <a:schemeClr val="tx1">
+                    <a:tint val="75000"/>
+                  </a:schemeClr>
+                </a:solidFill>
+              </a:defRPr>
+            </a:lvl9pPr>
+          </a:lstStyle>
+          <a:p>
+            <a:pPr lvl="0"/>
+            <a:r>
+              <a:rPr lang="en-US"/>
+              <a:t>Click to edit Master text styles</a:t>
+            </a:r>
+          </a:p>
+        </p:txBody>
+      </p:sp>
+      <p:sp>
+        <p:nvSpPr>
+          <p:cNvPr id="4" name="Date Placeholder 3"/>
+          <p:cNvSpPr>
+            <a:spLocks noGrp="1"/>
+          </p:cNvSpPr>
+          <p:nvPr>
+            <p:ph type="dt" sz="half" idx="10"/>
+          </p:nvPr>
+        </p:nvSpPr>
+        <p:spPr/>
+        <p:txBody>
+          <a:bodyPr/>
+          <a:lstStyle/>
+          <a:p>
+            <a:fld id="{A960F2F5-2F2F-4A65-8AC6-0AF42D8123C9}" type="datetimeFigureOut">
+              <a:rPr lang="en-GB" smtClean="0"/>
+              <a:t>15/06/2026</a:t>
+            </a:fld>
+            <a:endParaRPr lang="en-GB"/>
+          </a:p>
+        </p:txBody>
+      </p:sp>
+      <p:sp>
+        <p:nvSpPr>
+          <p:cNvPr id="5" name="Footer Placeholder 4"/>
+          <p:cNvSpPr>
+            <a:spLocks noGrp="1"/>
+          </p:cNvSpPr>
+          <p:nvPr>
+            <p:ph type="ftr" sz="quarter" idx="11"/>
+          </p:nvPr>
+        </p:nvSpPr>
+        <p:spPr/>
+        <p:txBody>
+          <a:bodyPr/>
+          <a:lstStyle/>
+          <a:p>
+            <a:endParaRPr lang="en-GB"/>
+          </a:p>
+        </p:txBody>
+      </p:sp>
+      <p:sp>
+        <p:nvSpPr>
+          <p:cNvPr id="6" name="Slide Number Placeholder 5"/>
+          <p:cNvSpPr>
+            <a:spLocks noGrp="1"/>
+          </p:cNvSpPr>
+          <p:nvPr>
+            <p:ph type="sldNum" sz="quarter" idx="12"/>
+          </p:nvPr>
+        </p:nvSpPr>
+        <p:spPr/>
+        <p:txBody>
+          <a:bodyPr/>
+          <a:lstStyle/>
+          <a:p>
+            <a:fld id="{0247CF7A-2BD3-4410-AED9-8E63B73B7826}" type="slidenum">
+              <a:rPr lang="en-GB" smtClean="0"/>
+              <a:t>‹#›</a:t>
+            </a:fld>
+            <a:endParaRPr lang="en-GB"/>
+          </a:p>
+        </p:txBody>
+      </p:sp>
+    </p:spTree>
+    <p:extLst>
+      <p:ext uri="{BB962C8B-B14F-4D97-AF65-F5344CB8AC3E}">
+        <p14:creationId xmlns:p14="http://schemas.microsoft.com/office/powerpoint/2010/main" val="2246576422"/>
+      </p:ext>
+    </p:extLst>
+  </p:cSld>
+  <p:clrMapOvr>
+    <a:masterClrMapping/>
+  </p:clrMapOvr>
+</p:sldLayout>
+</file>
+
+<file path=ppt/slideLayouts/slideLayout14.xml><?xml version="1.0" encoding="utf-8"?>
+<p:sldLayout xmlns:a="http://schemas.openxmlformats.org/drawingml/2006/main" xmlns:r="http://schemas.openxmlformats.org/officeDocument/2006/relationships" xmlns:p="http://schemas.openxmlformats.org/presentationml/2006/main" preserve="1">
+  <p:cSld name="3 Column">
+    <p:spTree>
+      <p:nvGrpSpPr>
+        <p:cNvPr id="1" name=""/>
+        <p:cNvGrpSpPr/>
+        <p:nvPr/>
+      </p:nvGrpSpPr>
+      <p:grpSpPr>
+        <a:xfrm>
+          <a:off x="0" y="0"/>
+          <a:ext cx="0" cy="0"/>
+          <a:chOff x="0" y="0"/>
+          <a:chExt cx="0" cy="0"/>
+        </a:xfrm>
+      </p:grpSpPr>
+      <p:sp>
+        <p:nvSpPr>
+          <p:cNvPr id="2" name="Title 1"/>
+          <p:cNvSpPr>
+            <a:spLocks noGrp="1"/>
+          </p:cNvSpPr>
+          <p:nvPr>
+            <p:ph type="title"/>
+          </p:nvPr>
+        </p:nvSpPr>
+        <p:spPr/>
+        <p:txBody>
+          <a:bodyPr/>
+          <a:lstStyle>
+            <a:lvl1pPr>
+              <a:defRPr sz="4200"/>
+            </a:lvl1pPr>
+          </a:lstStyle>
+          <a:p>
+            <a:r>
+              <a:rPr lang="en-US"/>
+              <a:t>Click to edit Master title style</a:t>
+            </a:r>
+            <a:endParaRPr lang="en-US" dirty="0"/>
+          </a:p>
+        </p:txBody>
+      </p:sp>
+      <p:sp>
+        <p:nvSpPr>
+          <p:cNvPr id="3" name="Text Placeholder 2"/>
+          <p:cNvSpPr>
+            <a:spLocks noGrp="1"/>
+          </p:cNvSpPr>
+          <p:nvPr>
+            <p:ph type="body" idx="1"/>
+          </p:nvPr>
+        </p:nvSpPr>
+        <p:spPr>
+          <a:xfrm>
+            <a:off x="632947" y="1981200"/>
+            <a:ext cx="2946866" cy="576262"/>
+          </a:xfrm>
+        </p:spPr>
+        <p:txBody>
+          <a:bodyPr anchor="b">
+            <a:noAutofit/>
+          </a:bodyPr>
+          <a:lstStyle>
+            <a:lvl1pPr marL="0" indent="0">
+              <a:buNone/>
+              <a:defRPr sz="2400" b="0">
+                <a:solidFill>
+                  <a:schemeClr val="accent1">
+                    <a:lumMod val="60000"/>
+                    <a:lumOff val="40000"/>
+                  </a:schemeClr>
+                </a:solidFill>
+              </a:defRPr>
+            </a:lvl1pPr>
+            <a:lvl2pPr marL="457200" indent="0">
+              <a:buNone/>
+              <a:defRPr sz="2000" b="1"/>
+            </a:lvl2pPr>
+            <a:lvl3pPr marL="914400" indent="0">
+              <a:buNone/>
+              <a:defRPr sz="1800" b="1"/>
+            </a:lvl3pPr>
+            <a:lvl4pPr marL="1371600" indent="0">
+              <a:buNone/>
+              <a:defRPr sz="1600" b="1"/>
+            </a:lvl4pPr>
+            <a:lvl5pPr marL="1828800" indent="0">
+              <a:buNone/>
+              <a:defRPr sz="1600" b="1"/>
+            </a:lvl5pPr>
+            <a:lvl6pPr marL="2286000" indent="0">
+              <a:buNone/>
+              <a:defRPr sz="1600" b="1"/>
+            </a:lvl6pPr>
+            <a:lvl7pPr marL="2743200" indent="0">
+              <a:buNone/>
+              <a:defRPr sz="1600" b="1"/>
+            </a:lvl7pPr>
+            <a:lvl8pPr marL="3200400" indent="0">
+              <a:buNone/>
+              <a:defRPr sz="1600" b="1"/>
+            </a:lvl8pPr>
+            <a:lvl9pPr marL="3657600" indent="0">
+              <a:buNone/>
+              <a:defRPr sz="1600" b="1"/>
+            </a:lvl9pPr>
+          </a:lstStyle>
+          <a:p>
+            <a:pPr lvl="0"/>
+            <a:r>
+              <a:rPr lang="en-US"/>
+              <a:t>Click to edit Master text styles</a:t>
+            </a:r>
+          </a:p>
+        </p:txBody>
+      </p:sp>
+      <p:sp>
+        <p:nvSpPr>
+          <p:cNvPr id="16" name="Text Placeholder 3"/>
+          <p:cNvSpPr>
+            <a:spLocks noGrp="1"/>
+          </p:cNvSpPr>
+          <p:nvPr>
+            <p:ph type="body" sz="half" idx="15"/>
+          </p:nvPr>
+        </p:nvSpPr>
+        <p:spPr>
+          <a:xfrm>
+            <a:off x="652463" y="2667000"/>
+            <a:ext cx="2927350" cy="3589338"/>
+          </a:xfrm>
+        </p:spPr>
+        <p:txBody>
+          <a:bodyPr anchor="t">
+            <a:normAutofit/>
+          </a:bodyPr>
+          <a:lstStyle>
+            <a:lvl1pPr marL="0" indent="0">
+              <a:buNone/>
+              <a:defRPr sz="1400"/>
+            </a:lvl1pPr>
+            <a:lvl2pPr marL="457200" indent="0">
+              <a:buNone/>
+              <a:defRPr sz="1200"/>
+            </a:lvl2pPr>
+            <a:lvl3pPr marL="914400" indent="0">
+              <a:buNone/>
+              <a:defRPr sz="1000"/>
+            </a:lvl3pPr>
+            <a:lvl4pPr marL="1371600" indent="0">
+              <a:buNone/>
+              <a:defRPr sz="900"/>
+            </a:lvl4pPr>
+            <a:lvl5pPr marL="1828800" indent="0">
+              <a:buNone/>
+              <a:defRPr sz="900"/>
+            </a:lvl5pPr>
+            <a:lvl6pPr marL="2286000" indent="0">
+              <a:buNone/>
+              <a:defRPr sz="900"/>
+            </a:lvl6pPr>
+            <a:lvl7pPr marL="2743200" indent="0">
+              <a:buNone/>
+              <a:defRPr sz="900"/>
+            </a:lvl7pPr>
+            <a:lvl8pPr marL="3200400" indent="0">
+              <a:buNone/>
+              <a:defRPr sz="900"/>
+            </a:lvl8pPr>
+            <a:lvl9pPr marL="3657600" indent="0">
+              <a:buNone/>
+              <a:defRPr sz="900"/>
+            </a:lvl9pPr>
+          </a:lstStyle>
+          <a:p>
+            <a:pPr lvl="0"/>
+            <a:r>
+              <a:rPr lang="en-US"/>
+              <a:t>Click to edit Master text styles</a:t>
+            </a:r>
+          </a:p>
+        </p:txBody>
+      </p:sp>
+      <p:sp>
+        <p:nvSpPr>
+          <p:cNvPr id="5" name="Text Placeholder 4"/>
+          <p:cNvSpPr>
+            <a:spLocks noGrp="1"/>
+          </p:cNvSpPr>
+          <p:nvPr>
+            <p:ph type="body" sz="quarter" idx="3"/>
+          </p:nvPr>
+        </p:nvSpPr>
+        <p:spPr>
+          <a:xfrm>
+            <a:off x="3883659" y="1981200"/>
+            <a:ext cx="2936241" cy="576262"/>
+          </a:xfrm>
+        </p:spPr>
+        <p:txBody>
+          <a:bodyPr anchor="b">
+            <a:noAutofit/>
+          </a:bodyPr>
+          <a:lstStyle>
+            <a:lvl1pPr marL="0" indent="0">
+              <a:buNone/>
+              <a:defRPr sz="2400" b="0">
+                <a:solidFill>
+                  <a:schemeClr val="accent1">
+                    <a:lumMod val="60000"/>
+                    <a:lumOff val="40000"/>
+                  </a:schemeClr>
+                </a:solidFill>
+              </a:defRPr>
+            </a:lvl1pPr>
+            <a:lvl2pPr marL="457200" indent="0">
+              <a:buNone/>
+              <a:defRPr sz="2000" b="1"/>
+            </a:lvl2pPr>
+            <a:lvl3pPr marL="914400" indent="0">
+              <a:buNone/>
+              <a:defRPr sz="1800" b="1"/>
+            </a:lvl3pPr>
+            <a:lvl4pPr marL="1371600" indent="0">
+              <a:buNone/>
+              <a:defRPr sz="1600" b="1"/>
+            </a:lvl4pPr>
+            <a:lvl5pPr marL="1828800" indent="0">
+              <a:buNone/>
+              <a:defRPr sz="1600" b="1"/>
+            </a:lvl5pPr>
+            <a:lvl6pPr marL="2286000" indent="0">
+              <a:buNone/>
+              <a:defRPr sz="1600" b="1"/>
+            </a:lvl6pPr>
+            <a:lvl7pPr marL="2743200" indent="0">
+              <a:buNone/>
+              <a:defRPr sz="1600" b="1"/>
+            </a:lvl7pPr>
+            <a:lvl8pPr marL="3200400" indent="0">
+              <a:buNone/>
+              <a:defRPr sz="1600" b="1"/>
+            </a:lvl8pPr>
+            <a:lvl9pPr marL="3657600" indent="0">
+              <a:buNone/>
+              <a:defRPr sz="1600" b="1"/>
+            </a:lvl9pPr>
+          </a:lstStyle>
+          <a:p>
+            <a:pPr lvl="0"/>
+            <a:r>
+              <a:rPr lang="en-US"/>
+              <a:t>Click to edit Master text styles</a:t>
+            </a:r>
+          </a:p>
+        </p:txBody>
+      </p:sp>
+      <p:sp>
+        <p:nvSpPr>
+          <p:cNvPr id="19" name="Text Placeholder 3"/>
+          <p:cNvSpPr>
+            <a:spLocks noGrp="1"/>
+          </p:cNvSpPr>
+          <p:nvPr>
+            <p:ph type="body" sz="half" idx="16"/>
+          </p:nvPr>
+        </p:nvSpPr>
+        <p:spPr>
+          <a:xfrm>
+            <a:off x="3873106" y="2667000"/>
+            <a:ext cx="2946794" cy="3589338"/>
+          </a:xfrm>
+        </p:spPr>
+        <p:txBody>
+          <a:bodyPr anchor="t">
+            <a:normAutofit/>
+          </a:bodyPr>
+          <a:lstStyle>
+            <a:lvl1pPr marL="0" indent="0">
+              <a:buNone/>
+              <a:defRPr sz="1400"/>
+            </a:lvl1pPr>
+            <a:lvl2pPr marL="457200" indent="0">
+              <a:buNone/>
+              <a:defRPr sz="1200"/>
+            </a:lvl2pPr>
+            <a:lvl3pPr marL="914400" indent="0">
+              <a:buNone/>
+              <a:defRPr sz="1000"/>
+            </a:lvl3pPr>
+            <a:lvl4pPr marL="1371600" indent="0">
+              <a:buNone/>
+              <a:defRPr sz="900"/>
+            </a:lvl4pPr>
+            <a:lvl5pPr marL="1828800" indent="0">
+              <a:buNone/>
+              <a:defRPr sz="900"/>
+            </a:lvl5pPr>
+            <a:lvl6pPr marL="2286000" indent="0">
+              <a:buNone/>
+              <a:defRPr sz="900"/>
+            </a:lvl6pPr>
+            <a:lvl7pPr marL="2743200" indent="0">
+              <a:buNone/>
+              <a:defRPr sz="900"/>
+            </a:lvl7pPr>
+            <a:lvl8pPr marL="3200400" indent="0">
+              <a:buNone/>
+              <a:defRPr sz="900"/>
+            </a:lvl8pPr>
+            <a:lvl9pPr marL="3657600" indent="0">
+              <a:buNone/>
+              <a:defRPr sz="900"/>
+            </a:lvl9pPr>
+          </a:lstStyle>
+          <a:p>
+            <a:pPr lvl="0"/>
+            <a:r>
+              <a:rPr lang="en-US"/>
+              <a:t>Click to edit Master text styles</a:t>
+            </a:r>
+          </a:p>
+        </p:txBody>
+      </p:sp>
+      <p:sp>
+        <p:nvSpPr>
+          <p:cNvPr id="14" name="Text Placeholder 4"/>
+          <p:cNvSpPr>
+            <a:spLocks noGrp="1"/>
+          </p:cNvSpPr>
+          <p:nvPr>
+            <p:ph type="body" sz="quarter" idx="13"/>
+          </p:nvPr>
+        </p:nvSpPr>
+        <p:spPr>
+          <a:xfrm>
+            <a:off x="7124700" y="1981200"/>
+            <a:ext cx="2932113" cy="576262"/>
+          </a:xfrm>
+        </p:spPr>
+        <p:txBody>
+          <a:bodyPr anchor="b">
+            <a:noAutofit/>
+          </a:bodyPr>
+          <a:lstStyle>
+            <a:lvl1pPr marL="0" indent="0">
+              <a:buNone/>
+              <a:defRPr sz="2400" b="0">
+                <a:solidFill>
+                  <a:schemeClr val="accent1">
+                    <a:lumMod val="60000"/>
+                    <a:lumOff val="40000"/>
+                  </a:schemeClr>
+                </a:solidFill>
+              </a:defRPr>
+            </a:lvl1pPr>
+            <a:lvl2pPr marL="457200" indent="0">
+              <a:buNone/>
+              <a:defRPr sz="2000" b="1"/>
+            </a:lvl2pPr>
+            <a:lvl3pPr marL="914400" indent="0">
+              <a:buNone/>
+              <a:defRPr sz="1800" b="1"/>
+            </a:lvl3pPr>
+            <a:lvl4pPr marL="1371600" indent="0">
+              <a:buNone/>
+              <a:defRPr sz="1600" b="1"/>
+            </a:lvl4pPr>
+            <a:lvl5pPr marL="1828800" indent="0">
+              <a:buNone/>
+              <a:defRPr sz="1600" b="1"/>
+            </a:lvl5pPr>
+            <a:lvl6pPr marL="2286000" indent="0">
+              <a:buNone/>
+              <a:defRPr sz="1600" b="1"/>
+            </a:lvl6pPr>
+            <a:lvl7pPr marL="2743200" indent="0">
+              <a:buNone/>
+              <a:defRPr sz="1600" b="1"/>
+            </a:lvl7pPr>
+            <a:lvl8pPr marL="3200400" indent="0">
+              <a:buNone/>
+              <a:defRPr sz="1600" b="1"/>
+            </a:lvl8pPr>
+            <a:lvl9pPr marL="3657600" indent="0">
+              <a:buNone/>
+              <a:defRPr sz="1600" b="1"/>
+            </a:lvl9pPr>
+          </a:lstStyle>
+          <a:p>
+            <a:pPr lvl="0"/>
+            <a:r>
+              <a:rPr lang="en-US"/>
+              <a:t>Click to edit Master text styles</a:t>
+            </a:r>
+          </a:p>
+        </p:txBody>
+      </p:sp>
+      <p:sp>
+        <p:nvSpPr>
+          <p:cNvPr id="20" name="Text Placeholder 3"/>
+          <p:cNvSpPr>
+            <a:spLocks noGrp="1"/>
+          </p:cNvSpPr>
+          <p:nvPr>
+            <p:ph type="body" sz="half" idx="17"/>
+          </p:nvPr>
+        </p:nvSpPr>
+        <p:spPr>
+          <a:xfrm>
+            <a:off x="7124700" y="2667000"/>
+            <a:ext cx="2932113" cy="3589338"/>
+          </a:xfrm>
+        </p:spPr>
+        <p:txBody>
+          <a:bodyPr anchor="t">
+            <a:normAutofit/>
+          </a:bodyPr>
+          <a:lstStyle>
+            <a:lvl1pPr marL="0" indent="0">
+              <a:buNone/>
+              <a:defRPr sz="1400"/>
+            </a:lvl1pPr>
+            <a:lvl2pPr marL="457200" indent="0">
+              <a:buNone/>
+              <a:defRPr sz="1200"/>
+            </a:lvl2pPr>
+            <a:lvl3pPr marL="914400" indent="0">
+              <a:buNone/>
+              <a:defRPr sz="1000"/>
+            </a:lvl3pPr>
+            <a:lvl4pPr marL="1371600" indent="0">
+              <a:buNone/>
+              <a:defRPr sz="900"/>
+            </a:lvl4pPr>
+            <a:lvl5pPr marL="1828800" indent="0">
+              <a:buNone/>
+              <a:defRPr sz="900"/>
+            </a:lvl5pPr>
+            <a:lvl6pPr marL="2286000" indent="0">
+              <a:buNone/>
+              <a:defRPr sz="900"/>
+            </a:lvl6pPr>
+            <a:lvl7pPr marL="2743200" indent="0">
+              <a:buNone/>
+              <a:defRPr sz="900"/>
+            </a:lvl7pPr>
+            <a:lvl8pPr marL="3200400" indent="0">
+              <a:buNone/>
+              <a:defRPr sz="900"/>
+            </a:lvl8pPr>
+            <a:lvl9pPr marL="3657600" indent="0">
+              <a:buNone/>
+              <a:defRPr sz="900"/>
+            </a:lvl9pPr>
+          </a:lstStyle>
+          <a:p>
+            <a:pPr lvl="0"/>
+            <a:r>
+              <a:rPr lang="en-US"/>
+              <a:t>Click to edit Master text styles</a:t>
+            </a:r>
+          </a:p>
+        </p:txBody>
+      </p:sp>
+      <p:cxnSp>
+        <p:nvCxnSpPr>
+          <p:cNvPr id="17" name="Straight Connector 16"/>
+          <p:cNvCxnSpPr/>
+          <p:nvPr/>
+        </p:nvCxnSpPr>
+        <p:spPr>
+          <a:xfrm>
+            <a:off x="3726142" y="2133600"/>
+            <a:ext cx="0" cy="3962400"/>
+          </a:xfrm>
+          <a:prstGeom prst="line">
+            <a:avLst/>
+          </a:prstGeom>
+          <a:ln w="12700" cmpd="sng">
+            <a:solidFill>
+              <a:schemeClr val="accent1">
+                <a:alpha val="40000"/>
+              </a:schemeClr>
+            </a:solidFill>
+          </a:ln>
+        </p:spPr>
+        <p:style>
+          <a:lnRef idx="2">
+            <a:schemeClr val="accent1"/>
+          </a:lnRef>
+          <a:fillRef idx="0">
+            <a:schemeClr val="accent1"/>
+          </a:fillRef>
+          <a:effectRef idx="1">
+            <a:schemeClr val="accent1"/>
+          </a:effectRef>
+          <a:fontRef idx="minor">
+            <a:schemeClr val="tx1"/>
+          </a:fontRef>
+        </p:style>
+      </p:cxnSp>
+      <p:cxnSp>
+        <p:nvCxnSpPr>
+          <p:cNvPr id="18" name="Straight Connector 17"/>
+          <p:cNvCxnSpPr/>
+          <p:nvPr/>
+        </p:nvCxnSpPr>
+        <p:spPr>
+          <a:xfrm>
+            <a:off x="6962227" y="2133600"/>
+            <a:ext cx="0" cy="3966882"/>
+          </a:xfrm>
+          <a:prstGeom prst="line">
+            <a:avLst/>
+          </a:prstGeom>
+          <a:ln w="12700" cmpd="sng">
+            <a:solidFill>
+              <a:schemeClr val="accent1">
+                <a:alpha val="40000"/>
+              </a:schemeClr>
+            </a:solidFill>
+          </a:ln>
+        </p:spPr>
+        <p:style>
+          <a:lnRef idx="2">
+            <a:schemeClr val="accent1"/>
+          </a:lnRef>
+          <a:fillRef idx="0">
+            <a:schemeClr val="accent1"/>
+          </a:fillRef>
+          <a:effectRef idx="1">
+            <a:schemeClr val="accent1"/>
+          </a:effectRef>
+          <a:fontRef idx="minor">
+            <a:schemeClr val="tx1"/>
+          </a:fontRef>
+        </p:style>
+      </p:cxnSp>
+      <p:sp>
+        <p:nvSpPr>
+          <p:cNvPr id="7" name="Date Placeholder 3"/>
+          <p:cNvSpPr>
+            <a:spLocks noGrp="1"/>
+          </p:cNvSpPr>
+          <p:nvPr>
+            <p:ph type="dt" sz="half" idx="10"/>
+          </p:nvPr>
+        </p:nvSpPr>
+        <p:spPr/>
+        <p:txBody>
+          <a:bodyPr/>
+          <a:lstStyle/>
+          <a:p>
+            <a:fld id="{A960F2F5-2F2F-4A65-8AC6-0AF42D8123C9}" type="datetimeFigureOut">
+              <a:rPr lang="en-GB" smtClean="0"/>
+              <a:t>15/06/2026</a:t>
+            </a:fld>
+            <a:endParaRPr lang="en-GB"/>
+          </a:p>
+        </p:txBody>
+      </p:sp>
+      <p:sp>
+        <p:nvSpPr>
+          <p:cNvPr id="4" name="Footer Placeholder 4"/>
+          <p:cNvSpPr>
+            <a:spLocks noGrp="1"/>
+          </p:cNvSpPr>
+          <p:nvPr>
+            <p:ph type="ftr" sz="quarter" idx="11"/>
+          </p:nvPr>
+        </p:nvSpPr>
+        <p:spPr/>
+        <p:txBody>
+          <a:bodyPr/>
+          <a:lstStyle/>
+          <a:p>
+            <a:endParaRPr lang="en-GB"/>
+          </a:p>
+        </p:txBody>
+      </p:sp>
+      <p:sp>
+        <p:nvSpPr>
+          <p:cNvPr id="6" name="Slide Number Placeholder 5"/>
+          <p:cNvSpPr>
+            <a:spLocks noGrp="1"/>
+          </p:cNvSpPr>
+          <p:nvPr>
+            <p:ph type="sldNum" sz="quarter" idx="12"/>
+          </p:nvPr>
+        </p:nvSpPr>
+        <p:spPr/>
+        <p:txBody>
+          <a:bodyPr/>
+          <a:lstStyle/>
+          <a:p>
+            <a:fld id="{0247CF7A-2BD3-4410-AED9-8E63B73B7826}" type="slidenum">
+              <a:rPr lang="en-GB" smtClean="0"/>
+              <a:t>‹#›</a:t>
+            </a:fld>
+            <a:endParaRPr lang="en-GB"/>
+          </a:p>
+        </p:txBody>
+      </p:sp>
+    </p:spTree>
+    <p:extLst>
+      <p:ext uri="{BB962C8B-B14F-4D97-AF65-F5344CB8AC3E}">
+        <p14:creationId xmlns:p14="http://schemas.microsoft.com/office/powerpoint/2010/main" val="964593599"/>
+      </p:ext>
+    </p:extLst>
+  </p:cSld>
+  <p:clrMapOvr>
+    <a:masterClrMapping/>
+  </p:clrMapOvr>
+</p:sldLayout>
+</file>
+
+<file path=ppt/slideLayouts/slideLayout15.xml><?xml version="1.0" encoding="utf-8"?>
+<p:sldLayout xmlns:a="http://schemas.openxmlformats.org/drawingml/2006/main" xmlns:r="http://schemas.openxmlformats.org/officeDocument/2006/relationships" xmlns:p="http://schemas.openxmlformats.org/presentationml/2006/main" preserve="1">
+  <p:cSld name="3 Picture Column">
+    <p:spTree>
+      <p:nvGrpSpPr>
+        <p:cNvPr id="1" name=""/>
+        <p:cNvGrpSpPr/>
+        <p:nvPr/>
+      </p:nvGrpSpPr>
+      <p:grpSpPr>
+        <a:xfrm>
+          <a:off x="0" y="0"/>
+          <a:ext cx="0" cy="0"/>
+          <a:chOff x="0" y="0"/>
+          <a:chExt cx="0" cy="0"/>
+        </a:xfrm>
+      </p:grpSpPr>
+      <p:sp>
+        <p:nvSpPr>
+          <p:cNvPr id="2" name="Title 1"/>
+          <p:cNvSpPr>
+            <a:spLocks noGrp="1"/>
+          </p:cNvSpPr>
+          <p:nvPr>
+            <p:ph type="title"/>
+          </p:nvPr>
+        </p:nvSpPr>
+        <p:spPr/>
+        <p:txBody>
+          <a:bodyPr/>
+          <a:lstStyle>
+            <a:lvl1pPr>
+              <a:defRPr sz="4200"/>
+            </a:lvl1pPr>
+          </a:lstStyle>
+          <a:p>
+            <a:r>
+              <a:rPr lang="en-US"/>
+              <a:t>Click to edit Master title style</a:t>
+            </a:r>
+            <a:endParaRPr lang="en-US" dirty="0"/>
+          </a:p>
+        </p:txBody>
+      </p:sp>
+      <p:sp>
+        <p:nvSpPr>
+          <p:cNvPr id="3" name="Text Placeholder 2"/>
+          <p:cNvSpPr>
+            <a:spLocks noGrp="1"/>
+          </p:cNvSpPr>
+          <p:nvPr>
+            <p:ph type="body" idx="1"/>
+          </p:nvPr>
+        </p:nvSpPr>
+        <p:spPr>
+          <a:xfrm>
+            <a:off x="652463" y="4250949"/>
+            <a:ext cx="2940050" cy="576262"/>
+          </a:xfrm>
+        </p:spPr>
+        <p:txBody>
+          <a:bodyPr anchor="b">
+            <a:noAutofit/>
+          </a:bodyPr>
+          <a:lstStyle>
+            <a:lvl1pPr marL="0" indent="0">
+              <a:buNone/>
+              <a:defRPr sz="2400" b="0">
+                <a:solidFill>
+                  <a:schemeClr val="accent1"/>
+                </a:solidFill>
+              </a:defRPr>
+            </a:lvl1pPr>
+            <a:lvl2pPr marL="457200" indent="0">
+              <a:buNone/>
+              <a:defRPr sz="2000" b="1"/>
+            </a:lvl2pPr>
+            <a:lvl3pPr marL="914400" indent="0">
+              <a:buNone/>
+              <a:defRPr sz="1800" b="1"/>
+            </a:lvl3pPr>
+            <a:lvl4pPr marL="1371600" indent="0">
+              <a:buNone/>
+              <a:defRPr sz="1600" b="1"/>
+            </a:lvl4pPr>
+            <a:lvl5pPr marL="1828800" indent="0">
+              <a:buNone/>
+              <a:defRPr sz="1600" b="1"/>
+            </a:lvl5pPr>
+            <a:lvl6pPr marL="2286000" indent="0">
+              <a:buNone/>
+              <a:defRPr sz="1600" b="1"/>
+            </a:lvl6pPr>
+            <a:lvl7pPr marL="2743200" indent="0">
+              <a:buNone/>
+              <a:defRPr sz="1600" b="1"/>
+            </a:lvl7pPr>
+            <a:lvl8pPr marL="3200400" indent="0">
+              <a:buNone/>
+              <a:defRPr sz="1600" b="1"/>
+            </a:lvl8pPr>
+            <a:lvl9pPr marL="3657600" indent="0">
+              <a:buNone/>
+              <a:defRPr sz="1600" b="1"/>
+            </a:lvl9pPr>
+          </a:lstStyle>
+          <a:p>
+            <a:pPr lvl="0"/>
+            <a:r>
+              <a:rPr lang="en-US"/>
+              <a:t>Click to edit Master text styles</a:t>
+            </a:r>
+          </a:p>
+        </p:txBody>
+      </p:sp>
+      <p:sp>
+        <p:nvSpPr>
+          <p:cNvPr id="29" name="Picture Placeholder 2"/>
+          <p:cNvSpPr>
+            <a:spLocks noGrp="1" noChangeAspect="1"/>
+          </p:cNvSpPr>
+          <p:nvPr>
+            <p:ph type="pic" idx="15"/>
+          </p:nvPr>
+        </p:nvSpPr>
+        <p:spPr>
+          <a:xfrm>
+            <a:off x="652463" y="2209800"/>
+            <a:ext cx="2940050" cy="1524000"/>
+          </a:xfrm>
+          <a:prstGeom prst="roundRect">
+            <a:avLst>
+              <a:gd name="adj" fmla="val 1858"/>
+            </a:avLst>
+          </a:prstGeom>
+          <a:effectLst>
+            <a:outerShdw blurRad="50800" dist="50800" dir="5400000" algn="tl" rotWithShape="0">
+              <a:srgbClr val="000000">
+                <a:alpha val="43000"/>
+              </a:srgbClr>
+            </a:outerShdw>
+          </a:effectLst>
+        </p:spPr>
+        <p:txBody>
+          <a:bodyPr anchor="t">
+            <a:normAutofit/>
+          </a:bodyPr>
+          <a:lstStyle>
+            <a:lvl1pPr marL="0" indent="0" algn="ctr">
+              <a:buNone/>
+              <a:defRPr sz="1600"/>
+            </a:lvl1pPr>
+            <a:lvl2pPr marL="457200" indent="0">
+              <a:buNone/>
+              <a:defRPr sz="1600"/>
+            </a:lvl2pPr>
+            <a:lvl3pPr marL="914400" indent="0">
+              <a:buNone/>
+              <a:defRPr sz="1600"/>
+            </a:lvl3pPr>
+            <a:lvl4pPr marL="1371600" indent="0">
+              <a:buNone/>
+              <a:defRPr sz="1600"/>
+            </a:lvl4pPr>
+            <a:lvl5pPr marL="1828800" indent="0">
+              <a:buNone/>
+              <a:defRPr sz="1600"/>
+            </a:lvl5pPr>
+            <a:lvl6pPr marL="2286000" indent="0">
+              <a:buNone/>
+              <a:defRPr sz="1600"/>
+            </a:lvl6pPr>
+            <a:lvl7pPr marL="2743200" indent="0">
+              <a:buNone/>
+              <a:defRPr sz="1600"/>
+            </a:lvl7pPr>
+            <a:lvl8pPr marL="3200400" indent="0">
+              <a:buNone/>
+              <a:defRPr sz="1600"/>
+            </a:lvl8pPr>
+            <a:lvl9pPr marL="3657600" indent="0">
+              <a:buNone/>
+              <a:defRPr sz="1600"/>
+            </a:lvl9pPr>
+          </a:lstStyle>
+          <a:p>
+            <a:r>
+              <a:rPr lang="en-US"/>
+              <a:t>Click icon to add picture</a:t>
+            </a:r>
+            <a:endParaRPr lang="en-US" dirty="0"/>
+          </a:p>
+        </p:txBody>
+      </p:sp>
+      <p:sp>
+        <p:nvSpPr>
+          <p:cNvPr id="22" name="Text Placeholder 3"/>
+          <p:cNvSpPr>
+            <a:spLocks noGrp="1"/>
+          </p:cNvSpPr>
+          <p:nvPr>
+            <p:ph type="body" sz="half" idx="18"/>
+          </p:nvPr>
+        </p:nvSpPr>
+        <p:spPr>
+          <a:xfrm>
+            <a:off x="652463" y="4827211"/>
+            <a:ext cx="2940050" cy="659189"/>
+          </a:xfrm>
+        </p:spPr>
+        <p:txBody>
+          <a:bodyPr anchor="t">
+            <a:normAutofit/>
+          </a:bodyPr>
+          <a:lstStyle>
+            <a:lvl1pPr marL="0" indent="0">
+              <a:buNone/>
+              <a:defRPr sz="1400"/>
+            </a:lvl1pPr>
+            <a:lvl2pPr marL="457200" indent="0">
+              <a:buNone/>
+              <a:defRPr sz="1200"/>
+            </a:lvl2pPr>
+            <a:lvl3pPr marL="914400" indent="0">
+              <a:buNone/>
+              <a:defRPr sz="1000"/>
+            </a:lvl3pPr>
+            <a:lvl4pPr marL="1371600" indent="0">
+              <a:buNone/>
+              <a:defRPr sz="900"/>
+            </a:lvl4pPr>
+            <a:lvl5pPr marL="1828800" indent="0">
+              <a:buNone/>
+              <a:defRPr sz="900"/>
+            </a:lvl5pPr>
+            <a:lvl6pPr marL="2286000" indent="0">
+              <a:buNone/>
+              <a:defRPr sz="900"/>
+            </a:lvl6pPr>
+            <a:lvl7pPr marL="2743200" indent="0">
+              <a:buNone/>
+              <a:defRPr sz="900"/>
+            </a:lvl7pPr>
+            <a:lvl8pPr marL="3200400" indent="0">
+              <a:buNone/>
+              <a:defRPr sz="900"/>
+            </a:lvl8pPr>
+            <a:lvl9pPr marL="3657600" indent="0">
+              <a:buNone/>
+              <a:defRPr sz="900"/>
+            </a:lvl9pPr>
+          </a:lstStyle>
+          <a:p>
+            <a:pPr lvl="0"/>
+            <a:r>
+              <a:rPr lang="en-US"/>
+              <a:t>Click to edit Master text styles</a:t>
+            </a:r>
+          </a:p>
+        </p:txBody>
+      </p:sp>
+      <p:sp>
+        <p:nvSpPr>
+          <p:cNvPr id="5" name="Text Placeholder 4"/>
+          <p:cNvSpPr>
+            <a:spLocks noGrp="1"/>
+          </p:cNvSpPr>
+          <p:nvPr>
+            <p:ph type="body" sz="quarter" idx="3"/>
+          </p:nvPr>
+        </p:nvSpPr>
+        <p:spPr>
+          <a:xfrm>
+            <a:off x="3889375" y="4250949"/>
+            <a:ext cx="2930525" cy="576262"/>
+          </a:xfrm>
+        </p:spPr>
+        <p:txBody>
+          <a:bodyPr anchor="b">
+            <a:noAutofit/>
+          </a:bodyPr>
+          <a:lstStyle>
+            <a:lvl1pPr marL="0" indent="0">
+              <a:buNone/>
+              <a:defRPr sz="2400" b="0">
+                <a:solidFill>
+                  <a:schemeClr val="accent1"/>
+                </a:solidFill>
+              </a:defRPr>
+            </a:lvl1pPr>
+            <a:lvl2pPr marL="457200" indent="0">
+              <a:buNone/>
+              <a:defRPr sz="2000" b="1"/>
+            </a:lvl2pPr>
+            <a:lvl3pPr marL="914400" indent="0">
+              <a:buNone/>
+              <a:defRPr sz="1800" b="1"/>
+            </a:lvl3pPr>
+            <a:lvl4pPr marL="1371600" indent="0">
+              <a:buNone/>
+              <a:defRPr sz="1600" b="1"/>
+            </a:lvl4pPr>
+            <a:lvl5pPr marL="1828800" indent="0">
+              <a:buNone/>
+              <a:defRPr sz="1600" b="1"/>
+            </a:lvl5pPr>
+            <a:lvl6pPr marL="2286000" indent="0">
+              <a:buNone/>
+              <a:defRPr sz="1600" b="1"/>
+            </a:lvl6pPr>
+            <a:lvl7pPr marL="2743200" indent="0">
+              <a:buNone/>
+              <a:defRPr sz="1600" b="1"/>
+            </a:lvl7pPr>
+            <a:lvl8pPr marL="3200400" indent="0">
+              <a:buNone/>
+              <a:defRPr sz="1600" b="1"/>
+            </a:lvl8pPr>
+            <a:lvl9pPr marL="3657600" indent="0">
+              <a:buNone/>
+              <a:defRPr sz="1600" b="1"/>
+            </a:lvl9pPr>
+          </a:lstStyle>
+          <a:p>
+            <a:pPr lvl="0"/>
+            <a:r>
+              <a:rPr lang="en-US"/>
+              <a:t>Click to edit Master text styles</a:t>
+            </a:r>
+          </a:p>
+        </p:txBody>
+      </p:sp>
+      <p:sp>
+        <p:nvSpPr>
+          <p:cNvPr id="30" name="Picture Placeholder 2"/>
+          <p:cNvSpPr>
+            <a:spLocks noGrp="1" noChangeAspect="1"/>
+          </p:cNvSpPr>
+          <p:nvPr>
+            <p:ph type="pic" idx="21"/>
+          </p:nvPr>
+        </p:nvSpPr>
+        <p:spPr>
+          <a:xfrm>
+            <a:off x="3889374" y="2209800"/>
+            <a:ext cx="2930525" cy="1524000"/>
+          </a:xfrm>
+          <a:prstGeom prst="roundRect">
+            <a:avLst>
+              <a:gd name="adj" fmla="val 1858"/>
+            </a:avLst>
+          </a:prstGeom>
+          <a:effectLst>
+            <a:outerShdw blurRad="50800" dist="50800" dir="5400000" algn="tl" rotWithShape="0">
+              <a:srgbClr val="000000">
+                <a:alpha val="43000"/>
+              </a:srgbClr>
+            </a:outerShdw>
+          </a:effectLst>
+        </p:spPr>
+        <p:txBody>
+          <a:bodyPr anchor="t">
+            <a:normAutofit/>
+          </a:bodyPr>
+          <a:lstStyle>
+            <a:lvl1pPr marL="0" indent="0" algn="ctr">
+              <a:buNone/>
+              <a:defRPr sz="1600"/>
+            </a:lvl1pPr>
+            <a:lvl2pPr marL="457200" indent="0">
+              <a:buNone/>
+              <a:defRPr sz="1600"/>
+            </a:lvl2pPr>
+            <a:lvl3pPr marL="914400" indent="0">
+              <a:buNone/>
+              <a:defRPr sz="1600"/>
+            </a:lvl3pPr>
+            <a:lvl4pPr marL="1371600" indent="0">
+              <a:buNone/>
+              <a:defRPr sz="1600"/>
+            </a:lvl4pPr>
+            <a:lvl5pPr marL="1828800" indent="0">
+              <a:buNone/>
+              <a:defRPr sz="1600"/>
+            </a:lvl5pPr>
+            <a:lvl6pPr marL="2286000" indent="0">
+              <a:buNone/>
+              <a:defRPr sz="1600"/>
+            </a:lvl6pPr>
+            <a:lvl7pPr marL="2743200" indent="0">
+              <a:buNone/>
+              <a:defRPr sz="1600"/>
+            </a:lvl7pPr>
+            <a:lvl8pPr marL="3200400" indent="0">
+              <a:buNone/>
+              <a:defRPr sz="1600"/>
+            </a:lvl8pPr>
+            <a:lvl9pPr marL="3657600" indent="0">
+              <a:buNone/>
+              <a:defRPr sz="1600"/>
+            </a:lvl9pPr>
+          </a:lstStyle>
+          <a:p>
+            <a:r>
+              <a:rPr lang="en-US"/>
+              <a:t>Click icon to add picture</a:t>
+            </a:r>
+            <a:endParaRPr lang="en-US" dirty="0"/>
+          </a:p>
+        </p:txBody>
+      </p:sp>
+      <p:sp>
+        <p:nvSpPr>
+          <p:cNvPr id="23" name="Text Placeholder 3"/>
+          <p:cNvSpPr>
+            <a:spLocks noGrp="1"/>
+          </p:cNvSpPr>
+          <p:nvPr>
+            <p:ph type="body" sz="half" idx="19"/>
+          </p:nvPr>
+        </p:nvSpPr>
+        <p:spPr>
+          <a:xfrm>
+            <a:off x="3888022" y="4827210"/>
+            <a:ext cx="2934406" cy="659189"/>
+          </a:xfrm>
+        </p:spPr>
+        <p:txBody>
+          <a:bodyPr anchor="t">
+            <a:normAutofit/>
+          </a:bodyPr>
+          <a:lstStyle>
+            <a:lvl1pPr marL="0" indent="0">
+              <a:buNone/>
+              <a:defRPr sz="1400"/>
+            </a:lvl1pPr>
+            <a:lvl2pPr marL="457200" indent="0">
+              <a:buNone/>
+              <a:defRPr sz="1200"/>
+            </a:lvl2pPr>
+            <a:lvl3pPr marL="914400" indent="0">
+              <a:buNone/>
+              <a:defRPr sz="1000"/>
+            </a:lvl3pPr>
+            <a:lvl4pPr marL="1371600" indent="0">
+              <a:buNone/>
+              <a:defRPr sz="900"/>
+            </a:lvl4pPr>
+            <a:lvl5pPr marL="1828800" indent="0">
+              <a:buNone/>
+              <a:defRPr sz="900"/>
+            </a:lvl5pPr>
+            <a:lvl6pPr marL="2286000" indent="0">
+              <a:buNone/>
+              <a:defRPr sz="900"/>
+            </a:lvl6pPr>
+            <a:lvl7pPr marL="2743200" indent="0">
+              <a:buNone/>
+              <a:defRPr sz="900"/>
+            </a:lvl7pPr>
+            <a:lvl8pPr marL="3200400" indent="0">
+              <a:buNone/>
+              <a:defRPr sz="900"/>
+            </a:lvl8pPr>
+            <a:lvl9pPr marL="3657600" indent="0">
+              <a:buNone/>
+              <a:defRPr sz="900"/>
+            </a:lvl9pPr>
+          </a:lstStyle>
+          <a:p>
+            <a:pPr lvl="0"/>
+            <a:r>
+              <a:rPr lang="en-US"/>
+              <a:t>Click to edit Master text styles</a:t>
+            </a:r>
+          </a:p>
+        </p:txBody>
+      </p:sp>
+      <p:sp>
+        <p:nvSpPr>
+          <p:cNvPr id="14" name="Text Placeholder 4"/>
+          <p:cNvSpPr>
+            <a:spLocks noGrp="1"/>
+          </p:cNvSpPr>
+          <p:nvPr>
+            <p:ph type="body" sz="quarter" idx="13"/>
+          </p:nvPr>
+        </p:nvSpPr>
+        <p:spPr>
+          <a:xfrm>
+            <a:off x="7124700" y="4250949"/>
+            <a:ext cx="2932113" cy="576262"/>
+          </a:xfrm>
+        </p:spPr>
+        <p:txBody>
+          <a:bodyPr anchor="b">
+            <a:noAutofit/>
+          </a:bodyPr>
+          <a:lstStyle>
+            <a:lvl1pPr marL="0" indent="0">
+              <a:buNone/>
+              <a:defRPr sz="2400" b="0">
+                <a:solidFill>
+                  <a:schemeClr val="accent1"/>
+                </a:solidFill>
+              </a:defRPr>
+            </a:lvl1pPr>
+            <a:lvl2pPr marL="457200" indent="0">
+              <a:buNone/>
+              <a:defRPr sz="2000" b="1"/>
+            </a:lvl2pPr>
+            <a:lvl3pPr marL="914400" indent="0">
+              <a:buNone/>
+              <a:defRPr sz="1800" b="1"/>
+            </a:lvl3pPr>
+            <a:lvl4pPr marL="1371600" indent="0">
+              <a:buNone/>
+              <a:defRPr sz="1600" b="1"/>
+            </a:lvl4pPr>
+            <a:lvl5pPr marL="1828800" indent="0">
+              <a:buNone/>
+              <a:defRPr sz="1600" b="1"/>
+            </a:lvl5pPr>
+            <a:lvl6pPr marL="2286000" indent="0">
+              <a:buNone/>
+              <a:defRPr sz="1600" b="1"/>
+            </a:lvl6pPr>
+            <a:lvl7pPr marL="2743200" indent="0">
+              <a:buNone/>
+              <a:defRPr sz="1600" b="1"/>
+            </a:lvl7pPr>
+            <a:lvl8pPr marL="3200400" indent="0">
+              <a:buNone/>
+              <a:defRPr sz="1600" b="1"/>
+            </a:lvl8pPr>
+            <a:lvl9pPr marL="3657600" indent="0">
+              <a:buNone/>
+              <a:defRPr sz="1600" b="1"/>
+            </a:lvl9pPr>
+          </a:lstStyle>
+          <a:p>
+            <a:pPr lvl="0"/>
+            <a:r>
+              <a:rPr lang="en-US"/>
+              <a:t>Click to edit Master text styles</a:t>
+            </a:r>
+          </a:p>
+        </p:txBody>
+      </p:sp>
+      <p:sp>
+        <p:nvSpPr>
+          <p:cNvPr id="31" name="Picture Placeholder 2"/>
+          <p:cNvSpPr>
+            <a:spLocks noGrp="1" noChangeAspect="1"/>
+          </p:cNvSpPr>
+          <p:nvPr>
+            <p:ph type="pic" idx="22"/>
+          </p:nvPr>
+        </p:nvSpPr>
+        <p:spPr>
+          <a:xfrm>
+            <a:off x="7124699" y="2209800"/>
+            <a:ext cx="2932113" cy="1524000"/>
+          </a:xfrm>
+          <a:prstGeom prst="roundRect">
+            <a:avLst>
+              <a:gd name="adj" fmla="val 1858"/>
+            </a:avLst>
+          </a:prstGeom>
+          <a:effectLst>
+            <a:outerShdw blurRad="50800" dist="50800" dir="5400000" algn="tl" rotWithShape="0">
+              <a:srgbClr val="000000">
+                <a:alpha val="43000"/>
+              </a:srgbClr>
+            </a:outerShdw>
+          </a:effectLst>
+        </p:spPr>
+        <p:txBody>
+          <a:bodyPr anchor="t">
+            <a:normAutofit/>
+          </a:bodyPr>
+          <a:lstStyle>
+            <a:lvl1pPr marL="0" indent="0" algn="ctr">
+              <a:buNone/>
+              <a:defRPr sz="1600"/>
+            </a:lvl1pPr>
+            <a:lvl2pPr marL="457200" indent="0">
+              <a:buNone/>
+              <a:defRPr sz="1600"/>
+            </a:lvl2pPr>
+            <a:lvl3pPr marL="914400" indent="0">
+              <a:buNone/>
+              <a:defRPr sz="1600"/>
+            </a:lvl3pPr>
+            <a:lvl4pPr marL="1371600" indent="0">
+              <a:buNone/>
+              <a:defRPr sz="1600"/>
+            </a:lvl4pPr>
+            <a:lvl5pPr marL="1828800" indent="0">
+              <a:buNone/>
+              <a:defRPr sz="1600"/>
+            </a:lvl5pPr>
+            <a:lvl6pPr marL="2286000" indent="0">
+              <a:buNone/>
+              <a:defRPr sz="1600"/>
+            </a:lvl6pPr>
+            <a:lvl7pPr marL="2743200" indent="0">
+              <a:buNone/>
+              <a:defRPr sz="1600"/>
+            </a:lvl7pPr>
+            <a:lvl8pPr marL="3200400" indent="0">
+              <a:buNone/>
+              <a:defRPr sz="1600"/>
+            </a:lvl8pPr>
+            <a:lvl9pPr marL="3657600" indent="0">
+              <a:buNone/>
+              <a:defRPr sz="1600"/>
+            </a:lvl9pPr>
+          </a:lstStyle>
+          <a:p>
+            <a:r>
+              <a:rPr lang="en-US"/>
+              <a:t>Click icon to add picture</a:t>
+            </a:r>
+            <a:endParaRPr lang="en-US" dirty="0"/>
+          </a:p>
+        </p:txBody>
+      </p:sp>
+      <p:sp>
+        <p:nvSpPr>
+          <p:cNvPr id="24" name="Text Placeholder 3"/>
+          <p:cNvSpPr>
+            <a:spLocks noGrp="1"/>
+          </p:cNvSpPr>
+          <p:nvPr>
+            <p:ph type="body" sz="half" idx="20"/>
+          </p:nvPr>
+        </p:nvSpPr>
+        <p:spPr>
+          <a:xfrm>
+            <a:off x="7124575" y="4827208"/>
+            <a:ext cx="2935997" cy="659189"/>
+          </a:xfrm>
+        </p:spPr>
+        <p:txBody>
+          <a:bodyPr anchor="t">
+            <a:normAutofit/>
+          </a:bodyPr>
+          <a:lstStyle>
+            <a:lvl1pPr marL="0" indent="0">
+              <a:buNone/>
+              <a:defRPr sz="1400"/>
+            </a:lvl1pPr>
+            <a:lvl2pPr marL="457200" indent="0">
+              <a:buNone/>
+              <a:defRPr sz="1200"/>
+            </a:lvl2pPr>
+            <a:lvl3pPr marL="914400" indent="0">
+              <a:buNone/>
+              <a:defRPr sz="1000"/>
+            </a:lvl3pPr>
+            <a:lvl4pPr marL="1371600" indent="0">
+              <a:buNone/>
+              <a:defRPr sz="900"/>
+            </a:lvl4pPr>
+            <a:lvl5pPr marL="1828800" indent="0">
+              <a:buNone/>
+              <a:defRPr sz="900"/>
+            </a:lvl5pPr>
+            <a:lvl6pPr marL="2286000" indent="0">
+              <a:buNone/>
+              <a:defRPr sz="900"/>
+            </a:lvl6pPr>
+            <a:lvl7pPr marL="2743200" indent="0">
+              <a:buNone/>
+              <a:defRPr sz="900"/>
+            </a:lvl7pPr>
+            <a:lvl8pPr marL="3200400" indent="0">
+              <a:buNone/>
+              <a:defRPr sz="900"/>
+            </a:lvl8pPr>
+            <a:lvl9pPr marL="3657600" indent="0">
+              <a:buNone/>
+              <a:defRPr sz="900"/>
+            </a:lvl9pPr>
+          </a:lstStyle>
+          <a:p>
+            <a:pPr lvl="0"/>
+            <a:r>
+              <a:rPr lang="en-US"/>
+              <a:t>Click to edit Master text styles</a:t>
+            </a:r>
+          </a:p>
+        </p:txBody>
+      </p:sp>
+      <p:cxnSp>
+        <p:nvCxnSpPr>
+          <p:cNvPr id="17" name="Straight Connector 16"/>
+          <p:cNvCxnSpPr/>
+          <p:nvPr/>
+        </p:nvCxnSpPr>
+        <p:spPr>
+          <a:xfrm>
+            <a:off x="3726142" y="2133600"/>
+            <a:ext cx="0" cy="3962400"/>
+          </a:xfrm>
+          <a:prstGeom prst="line">
+            <a:avLst/>
+          </a:prstGeom>
+          <a:ln w="12700" cmpd="sng">
+            <a:solidFill>
+              <a:schemeClr val="accent1">
+                <a:alpha val="40000"/>
+              </a:schemeClr>
+            </a:solidFill>
+          </a:ln>
+        </p:spPr>
+        <p:style>
+          <a:lnRef idx="2">
+            <a:schemeClr val="accent1"/>
+          </a:lnRef>
+          <a:fillRef idx="0">
+            <a:schemeClr val="accent1"/>
+          </a:fillRef>
+          <a:effectRef idx="1">
+            <a:schemeClr val="accent1"/>
+          </a:effectRef>
+          <a:fontRef idx="minor">
+            <a:schemeClr val="tx1"/>
+          </a:fontRef>
+        </p:style>
+      </p:cxnSp>
+      <p:cxnSp>
+        <p:nvCxnSpPr>
+          <p:cNvPr id="18" name="Straight Connector 17"/>
+          <p:cNvCxnSpPr/>
+          <p:nvPr/>
+        </p:nvCxnSpPr>
+        <p:spPr>
+          <a:xfrm>
+            <a:off x="6962227" y="2133600"/>
+            <a:ext cx="0" cy="3966882"/>
+          </a:xfrm>
+          <a:prstGeom prst="line">
+            <a:avLst/>
+          </a:prstGeom>
+          <a:ln w="12700" cmpd="sng">
+            <a:solidFill>
+              <a:schemeClr val="accent1">
+                <a:alpha val="40000"/>
+              </a:schemeClr>
+            </a:solidFill>
+          </a:ln>
+        </p:spPr>
+        <p:style>
+          <a:lnRef idx="2">
+            <a:schemeClr val="accent1"/>
+          </a:lnRef>
+          <a:fillRef idx="0">
+            <a:schemeClr val="accent1"/>
+          </a:fillRef>
+          <a:effectRef idx="1">
+            <a:schemeClr val="accent1"/>
+          </a:effectRef>
+          <a:fontRef idx="minor">
+            <a:schemeClr val="tx1"/>
+          </a:fontRef>
+        </p:style>
+      </p:cxnSp>
+      <p:sp>
+        <p:nvSpPr>
+          <p:cNvPr id="7" name="Date Placeholder 3"/>
+          <p:cNvSpPr>
+            <a:spLocks noGrp="1"/>
+          </p:cNvSpPr>
+          <p:nvPr>
+            <p:ph type="dt" sz="half" idx="10"/>
+          </p:nvPr>
+        </p:nvSpPr>
+        <p:spPr/>
+        <p:txBody>
+          <a:bodyPr/>
+          <a:lstStyle/>
+          <a:p>
+            <a:fld id="{A960F2F5-2F2F-4A65-8AC6-0AF42D8123C9}" type="datetimeFigureOut">
+              <a:rPr lang="en-GB" smtClean="0"/>
+              <a:t>15/06/2026</a:t>
+            </a:fld>
+            <a:endParaRPr lang="en-GB"/>
+          </a:p>
+        </p:txBody>
+      </p:sp>
+      <p:sp>
+        <p:nvSpPr>
+          <p:cNvPr id="4" name="Footer Placeholder 4"/>
+          <p:cNvSpPr>
+            <a:spLocks noGrp="1"/>
+          </p:cNvSpPr>
+          <p:nvPr>
+            <p:ph type="ftr" sz="quarter" idx="11"/>
+          </p:nvPr>
+        </p:nvSpPr>
+        <p:spPr/>
+        <p:txBody>
+          <a:bodyPr/>
+          <a:lstStyle/>
+          <a:p>
+            <a:endParaRPr lang="en-GB"/>
+          </a:p>
+        </p:txBody>
+      </p:sp>
+      <p:sp>
+        <p:nvSpPr>
+          <p:cNvPr id="6" name="Slide Number Placeholder 5"/>
+          <p:cNvSpPr>
+            <a:spLocks noGrp="1"/>
+          </p:cNvSpPr>
+          <p:nvPr>
+            <p:ph type="sldNum" sz="quarter" idx="12"/>
+          </p:nvPr>
+        </p:nvSpPr>
+        <p:spPr/>
+        <p:txBody>
+          <a:bodyPr/>
+          <a:lstStyle/>
+          <a:p>
+            <a:fld id="{0247CF7A-2BD3-4410-AED9-8E63B73B7826}" type="slidenum">
+              <a:rPr lang="en-GB" smtClean="0"/>
+              <a:t>‹#›</a:t>
+            </a:fld>
+            <a:endParaRPr lang="en-GB"/>
+          </a:p>
+        </p:txBody>
+      </p:sp>
+    </p:spTree>
+    <p:extLst>
+      <p:ext uri="{BB962C8B-B14F-4D97-AF65-F5344CB8AC3E}">
+        <p14:creationId xmlns:p14="http://schemas.microsoft.com/office/powerpoint/2010/main" val="4256590481"/>
+      </p:ext>
+    </p:extLst>
+  </p:cSld>
+  <p:clrMapOvr>
+    <a:masterClrMapping/>
+  </p:clrMapOvr>
+</p:sldLayout>
+</file>
+
+<file path=ppt/slideLayouts/slideLayout16.xml><?xml version="1.0" encoding="utf-8"?>
 <p:sldLayout xmlns:a="http://schemas.openxmlformats.org/drawingml/2006/main" xmlns:r="http://schemas.openxmlformats.org/officeDocument/2006/relationships" xmlns:p="http://schemas.openxmlformats.org/presentationml/2006/main" type="vertTx" preserve="1">
   <p:cSld name="Title and Vertical Text">
     <p:spTree>
@@ -360,13 +2918,7 @@
       </p:grpSpPr>
       <p:sp>
         <p:nvSpPr>
-          <p:cNvPr id="2" name="Title 1">
-            <a:extLst>
-              <a:ext uri="{FF2B5EF4-FFF2-40B4-BE49-F238E27FC236}">
-                <a16:creationId xmlns:a16="http://schemas.microsoft.com/office/drawing/2014/main" id="{6C529260-21EE-3303-1245-CCB49C8C28F6}"/>
-              </a:ext>
-            </a:extLst>
-          </p:cNvPr>
+          <p:cNvPr id="2" name="Title 1"/>
           <p:cNvSpPr>
             <a:spLocks noGrp="1"/>
           </p:cNvSpPr>
@@ -383,19 +2935,13 @@
               <a:rPr lang="en-US"/>
               <a:t>Click to edit Master title style</a:t>
             </a:r>
-            <a:endParaRPr lang="en-GB"/>
-          </a:p>
-        </p:txBody>
-      </p:sp>
-      <p:sp>
-        <p:nvSpPr>
-          <p:cNvPr id="3" name="Vertical Text Placeholder 2">
-            <a:extLst>
-              <a:ext uri="{FF2B5EF4-FFF2-40B4-BE49-F238E27FC236}">
-                <a16:creationId xmlns:a16="http://schemas.microsoft.com/office/drawing/2014/main" id="{AC94845A-3811-6D39-D76B-7F750E28A912}"/>
-              </a:ext>
-            </a:extLst>
-          </p:cNvPr>
+            <a:endParaRPr lang="en-US" dirty="0"/>
+          </a:p>
+        </p:txBody>
+      </p:sp>
+      <p:sp>
+        <p:nvSpPr>
+          <p:cNvPr id="3" name="Vertical Text Placeholder 2"/>
           <p:cNvSpPr>
             <a:spLocks noGrp="1"/>
           </p:cNvSpPr>
@@ -405,7 +2951,7 @@
         </p:nvSpPr>
         <p:spPr/>
         <p:txBody>
-          <a:bodyPr vert="eaVert"/>
+          <a:bodyPr vert="eaVert" anchor="t" anchorCtr="0"/>
           <a:lstStyle/>
           <a:p>
             <a:pPr lvl="0"/>
@@ -441,19 +2987,13 @@
               <a:rPr lang="en-US"/>
               <a:t>Fifth level</a:t>
             </a:r>
-            <a:endParaRPr lang="en-GB"/>
-          </a:p>
-        </p:txBody>
-      </p:sp>
-      <p:sp>
-        <p:nvSpPr>
-          <p:cNvPr id="4" name="Date Placeholder 3">
-            <a:extLst>
-              <a:ext uri="{FF2B5EF4-FFF2-40B4-BE49-F238E27FC236}">
-                <a16:creationId xmlns:a16="http://schemas.microsoft.com/office/drawing/2014/main" id="{DFFC536E-9A93-D031-B722-17F931D929CD}"/>
-              </a:ext>
-            </a:extLst>
-          </p:cNvPr>
+            <a:endParaRPr lang="en-US" dirty="0"/>
+          </a:p>
+        </p:txBody>
+      </p:sp>
+      <p:sp>
+        <p:nvSpPr>
+          <p:cNvPr id="4" name="Date Placeholder 3"/>
           <p:cNvSpPr>
             <a:spLocks noGrp="1"/>
           </p:cNvSpPr>
@@ -468,7 +3008,7 @@
           <a:p>
             <a:fld id="{A960F2F5-2F2F-4A65-8AC6-0AF42D8123C9}" type="datetimeFigureOut">
               <a:rPr lang="en-GB" smtClean="0"/>
-              <a:t>08/06/2026</a:t>
+              <a:t>15/06/2026</a:t>
             </a:fld>
             <a:endParaRPr lang="en-GB"/>
           </a:p>
@@ -476,13 +3016,7 @@
       </p:sp>
       <p:sp>
         <p:nvSpPr>
-          <p:cNvPr id="5" name="Footer Placeholder 4">
-            <a:extLst>
-              <a:ext uri="{FF2B5EF4-FFF2-40B4-BE49-F238E27FC236}">
-                <a16:creationId xmlns:a16="http://schemas.microsoft.com/office/drawing/2014/main" id="{8C131D3F-24A9-69BA-AE7B-3256A1EBA47C}"/>
-              </a:ext>
-            </a:extLst>
-          </p:cNvPr>
+          <p:cNvPr id="5" name="Footer Placeholder 4"/>
           <p:cNvSpPr>
             <a:spLocks noGrp="1"/>
           </p:cNvSpPr>
@@ -501,13 +3035,7 @@
       </p:sp>
       <p:sp>
         <p:nvSpPr>
-          <p:cNvPr id="6" name="Slide Number Placeholder 5">
-            <a:extLst>
-              <a:ext uri="{FF2B5EF4-FFF2-40B4-BE49-F238E27FC236}">
-                <a16:creationId xmlns:a16="http://schemas.microsoft.com/office/drawing/2014/main" id="{CB559A2E-5C72-18CB-9A16-4A9FF408FCB4}"/>
-              </a:ext>
-            </a:extLst>
-          </p:cNvPr>
+          <p:cNvPr id="6" name="Slide Number Placeholder 5"/>
           <p:cNvSpPr>
             <a:spLocks noGrp="1"/>
           </p:cNvSpPr>
@@ -531,7 +3059,7 @@
     </p:spTree>
     <p:extLst>
       <p:ext uri="{BB962C8B-B14F-4D97-AF65-F5344CB8AC3E}">
-        <p14:creationId xmlns:p14="http://schemas.microsoft.com/office/powerpoint/2010/main" val="953587337"/>
+        <p14:creationId xmlns:p14="http://schemas.microsoft.com/office/powerpoint/2010/main" val="3624993347"/>
       </p:ext>
     </p:extLst>
   </p:cSld>
@@ -541,7 +3069,7 @@
 </p:sldLayout>
 </file>
 
-<file path=ppt/slideLayouts/slideLayout11.xml><?xml version="1.0" encoding="utf-8"?>
+<file path=ppt/slideLayouts/slideLayout17.xml><?xml version="1.0" encoding="utf-8"?>
 <p:sldLayout xmlns:a="http://schemas.openxmlformats.org/drawingml/2006/main" xmlns:r="http://schemas.openxmlformats.org/officeDocument/2006/relationships" xmlns:p="http://schemas.openxmlformats.org/presentationml/2006/main" type="vertTitleAndTx" preserve="1">
   <p:cSld name="Vertical Title and Text">
     <p:spTree>
@@ -560,13 +3088,7 @@
       </p:grpSpPr>
       <p:sp>
         <p:nvSpPr>
-          <p:cNvPr id="2" name="Vertical Title 1">
-            <a:extLst>
-              <a:ext uri="{FF2B5EF4-FFF2-40B4-BE49-F238E27FC236}">
-                <a16:creationId xmlns:a16="http://schemas.microsoft.com/office/drawing/2014/main" id="{CC650986-735C-A0B9-25DD-99BD0749521F}"/>
-              </a:ext>
-            </a:extLst>
-          </p:cNvPr>
+          <p:cNvPr id="2" name="Vertical Title 1"/>
           <p:cNvSpPr>
             <a:spLocks noGrp="1"/>
           </p:cNvSpPr>
@@ -576,31 +3098,25 @@
         </p:nvSpPr>
         <p:spPr>
           <a:xfrm>
-            <a:off x="8724900" y="365125"/>
-            <a:ext cx="2628900" cy="5811838"/>
+            <a:off x="8304212" y="430213"/>
+            <a:ext cx="1752601" cy="5826125"/>
           </a:xfrm>
         </p:spPr>
         <p:txBody>
-          <a:bodyPr vert="eaVert"/>
+          <a:bodyPr vert="eaVert" anchor="b" anchorCtr="0"/>
           <a:lstStyle/>
           <a:p>
             <a:r>
               <a:rPr lang="en-US"/>
               <a:t>Click to edit Master title style</a:t>
             </a:r>
-            <a:endParaRPr lang="en-GB"/>
-          </a:p>
-        </p:txBody>
-      </p:sp>
-      <p:sp>
-        <p:nvSpPr>
-          <p:cNvPr id="3" name="Vertical Text Placeholder 2">
-            <a:extLst>
-              <a:ext uri="{FF2B5EF4-FFF2-40B4-BE49-F238E27FC236}">
-                <a16:creationId xmlns:a16="http://schemas.microsoft.com/office/drawing/2014/main" id="{D41D6422-FAD5-9FCB-2AF9-17F78DB213BA}"/>
-              </a:ext>
-            </a:extLst>
-          </p:cNvPr>
+            <a:endParaRPr lang="en-US" dirty="0"/>
+          </a:p>
+        </p:txBody>
+      </p:sp>
+      <p:sp>
+        <p:nvSpPr>
+          <p:cNvPr id="3" name="Vertical Text Placeholder 2"/>
           <p:cNvSpPr>
             <a:spLocks noGrp="1"/>
           </p:cNvSpPr>
@@ -610,8 +3126,8 @@
         </p:nvSpPr>
         <p:spPr>
           <a:xfrm>
-            <a:off x="838200" y="365125"/>
-            <a:ext cx="7734300" cy="5811838"/>
+            <a:off x="652463" y="887414"/>
+            <a:ext cx="7423149" cy="5368924"/>
           </a:xfrm>
         </p:spPr>
         <p:txBody>
@@ -651,19 +3167,13 @@
               <a:rPr lang="en-US"/>
               <a:t>Fifth level</a:t>
             </a:r>
-            <a:endParaRPr lang="en-GB"/>
-          </a:p>
-        </p:txBody>
-      </p:sp>
-      <p:sp>
-        <p:nvSpPr>
-          <p:cNvPr id="4" name="Date Placeholder 3">
-            <a:extLst>
-              <a:ext uri="{FF2B5EF4-FFF2-40B4-BE49-F238E27FC236}">
-                <a16:creationId xmlns:a16="http://schemas.microsoft.com/office/drawing/2014/main" id="{879AAF07-3CCE-B948-B4F9-351B432A50C5}"/>
-              </a:ext>
-            </a:extLst>
-          </p:cNvPr>
+            <a:endParaRPr lang="en-US" dirty="0"/>
+          </a:p>
+        </p:txBody>
+      </p:sp>
+      <p:sp>
+        <p:nvSpPr>
+          <p:cNvPr id="4" name="Date Placeholder 3"/>
           <p:cNvSpPr>
             <a:spLocks noGrp="1"/>
           </p:cNvSpPr>
@@ -678,7 +3188,7 @@
           <a:p>
             <a:fld id="{A960F2F5-2F2F-4A65-8AC6-0AF42D8123C9}" type="datetimeFigureOut">
               <a:rPr lang="en-GB" smtClean="0"/>
-              <a:t>08/06/2026</a:t>
+              <a:t>15/06/2026</a:t>
             </a:fld>
             <a:endParaRPr lang="en-GB"/>
           </a:p>
@@ -686,13 +3196,7 @@
       </p:sp>
       <p:sp>
         <p:nvSpPr>
-          <p:cNvPr id="5" name="Footer Placeholder 4">
-            <a:extLst>
-              <a:ext uri="{FF2B5EF4-FFF2-40B4-BE49-F238E27FC236}">
-                <a16:creationId xmlns:a16="http://schemas.microsoft.com/office/drawing/2014/main" id="{71C70E7C-6A51-434D-C3EF-029C6535D2A4}"/>
-              </a:ext>
-            </a:extLst>
-          </p:cNvPr>
+          <p:cNvPr id="5" name="Footer Placeholder 4"/>
           <p:cNvSpPr>
             <a:spLocks noGrp="1"/>
           </p:cNvSpPr>
@@ -711,13 +3215,7 @@
       </p:sp>
       <p:sp>
         <p:nvSpPr>
-          <p:cNvPr id="6" name="Slide Number Placeholder 5">
-            <a:extLst>
-              <a:ext uri="{FF2B5EF4-FFF2-40B4-BE49-F238E27FC236}">
-                <a16:creationId xmlns:a16="http://schemas.microsoft.com/office/drawing/2014/main" id="{69EC99D1-510B-B990-BB81-9A64F9B1F093}"/>
-              </a:ext>
-            </a:extLst>
-          </p:cNvPr>
+          <p:cNvPr id="6" name="Slide Number Placeholder 5"/>
           <p:cNvSpPr>
             <a:spLocks noGrp="1"/>
           </p:cNvSpPr>
@@ -741,7 +3239,7 @@
     </p:spTree>
     <p:extLst>
       <p:ext uri="{BB962C8B-B14F-4D97-AF65-F5344CB8AC3E}">
-        <p14:creationId xmlns:p14="http://schemas.microsoft.com/office/powerpoint/2010/main" val="503874569"/>
+        <p14:creationId xmlns:p14="http://schemas.microsoft.com/office/powerpoint/2010/main" val="1008607116"/>
       </p:ext>
     </p:extLst>
   </p:cSld>
@@ -770,13 +3268,7 @@
       </p:grpSpPr>
       <p:sp>
         <p:nvSpPr>
-          <p:cNvPr id="2" name="Title 1">
-            <a:extLst>
-              <a:ext uri="{FF2B5EF4-FFF2-40B4-BE49-F238E27FC236}">
-                <a16:creationId xmlns:a16="http://schemas.microsoft.com/office/drawing/2014/main" id="{26E98A60-6557-7CE3-98DD-66D43F13B046}"/>
-              </a:ext>
-            </a:extLst>
-          </p:cNvPr>
+          <p:cNvPr id="2" name="Title 1"/>
           <p:cNvSpPr>
             <a:spLocks noGrp="1"/>
           </p:cNvSpPr>
@@ -793,19 +3285,13 @@
               <a:rPr lang="en-US"/>
               <a:t>Click to edit Master title style</a:t>
             </a:r>
-            <a:endParaRPr lang="en-GB"/>
-          </a:p>
-        </p:txBody>
-      </p:sp>
-      <p:sp>
-        <p:nvSpPr>
-          <p:cNvPr id="3" name="Content Placeholder 2">
-            <a:extLst>
-              <a:ext uri="{FF2B5EF4-FFF2-40B4-BE49-F238E27FC236}">
-                <a16:creationId xmlns:a16="http://schemas.microsoft.com/office/drawing/2014/main" id="{689FD573-E2D5-7C71-F6C7-8B475BA77279}"/>
-              </a:ext>
-            </a:extLst>
-          </p:cNvPr>
+            <a:endParaRPr lang="en-US" dirty="0"/>
+          </a:p>
+        </p:txBody>
+      </p:sp>
+      <p:sp>
+        <p:nvSpPr>
+          <p:cNvPr id="3" name="Content Placeholder 2"/>
           <p:cNvSpPr>
             <a:spLocks noGrp="1"/>
           </p:cNvSpPr>
@@ -851,19 +3337,13 @@
               <a:rPr lang="en-US"/>
               <a:t>Fifth level</a:t>
             </a:r>
-            <a:endParaRPr lang="en-GB"/>
-          </a:p>
-        </p:txBody>
-      </p:sp>
-      <p:sp>
-        <p:nvSpPr>
-          <p:cNvPr id="4" name="Date Placeholder 3">
-            <a:extLst>
-              <a:ext uri="{FF2B5EF4-FFF2-40B4-BE49-F238E27FC236}">
-                <a16:creationId xmlns:a16="http://schemas.microsoft.com/office/drawing/2014/main" id="{D3EBEA53-9762-FEB3-58B4-574D8FCAB9F7}"/>
-              </a:ext>
-            </a:extLst>
-          </p:cNvPr>
+            <a:endParaRPr lang="en-US" dirty="0"/>
+          </a:p>
+        </p:txBody>
+      </p:sp>
+      <p:sp>
+        <p:nvSpPr>
+          <p:cNvPr id="4" name="Date Placeholder 3"/>
           <p:cNvSpPr>
             <a:spLocks noGrp="1"/>
           </p:cNvSpPr>
@@ -878,7 +3358,7 @@
           <a:p>
             <a:fld id="{A960F2F5-2F2F-4A65-8AC6-0AF42D8123C9}" type="datetimeFigureOut">
               <a:rPr lang="en-GB" smtClean="0"/>
-              <a:t>08/06/2026</a:t>
+              <a:t>15/06/2026</a:t>
             </a:fld>
             <a:endParaRPr lang="en-GB"/>
           </a:p>
@@ -886,13 +3366,7 @@
       </p:sp>
       <p:sp>
         <p:nvSpPr>
-          <p:cNvPr id="5" name="Footer Placeholder 4">
-            <a:extLst>
-              <a:ext uri="{FF2B5EF4-FFF2-40B4-BE49-F238E27FC236}">
-                <a16:creationId xmlns:a16="http://schemas.microsoft.com/office/drawing/2014/main" id="{C3A41DA0-14F3-7D00-EF23-D90D44F7F92B}"/>
-              </a:ext>
-            </a:extLst>
-          </p:cNvPr>
+          <p:cNvPr id="5" name="Footer Placeholder 4"/>
           <p:cNvSpPr>
             <a:spLocks noGrp="1"/>
           </p:cNvSpPr>
@@ -911,13 +3385,7 @@
       </p:sp>
       <p:sp>
         <p:nvSpPr>
-          <p:cNvPr id="6" name="Slide Number Placeholder 5">
-            <a:extLst>
-              <a:ext uri="{FF2B5EF4-FFF2-40B4-BE49-F238E27FC236}">
-                <a16:creationId xmlns:a16="http://schemas.microsoft.com/office/drawing/2014/main" id="{D424E3B9-D497-EDC4-5293-82804F40FB2F}"/>
-              </a:ext>
-            </a:extLst>
-          </p:cNvPr>
+          <p:cNvPr id="6" name="Slide Number Placeholder 5"/>
           <p:cNvSpPr>
             <a:spLocks noGrp="1"/>
           </p:cNvSpPr>
@@ -941,7 +3409,7 @@
     </p:spTree>
     <p:extLst>
       <p:ext uri="{BB962C8B-B14F-4D97-AF65-F5344CB8AC3E}">
-        <p14:creationId xmlns:p14="http://schemas.microsoft.com/office/powerpoint/2010/main" val="2423163006"/>
+        <p14:creationId xmlns:p14="http://schemas.microsoft.com/office/powerpoint/2010/main" val="2833079542"/>
       </p:ext>
     </p:extLst>
   </p:cSld>
@@ -970,13 +3438,7 @@
       </p:grpSpPr>
       <p:sp>
         <p:nvSpPr>
-          <p:cNvPr id="2" name="Title 1">
-            <a:extLst>
-              <a:ext uri="{FF2B5EF4-FFF2-40B4-BE49-F238E27FC236}">
-                <a16:creationId xmlns:a16="http://schemas.microsoft.com/office/drawing/2014/main" id="{9D7A6780-2ADA-7189-B89F-455A1CED850A}"/>
-              </a:ext>
-            </a:extLst>
-          </p:cNvPr>
+          <p:cNvPr id="2" name="Title 1"/>
           <p:cNvSpPr>
             <a:spLocks noGrp="1"/>
           </p:cNvSpPr>
@@ -986,15 +3448,15 @@
         </p:nvSpPr>
         <p:spPr>
           <a:xfrm>
-            <a:off x="831850" y="1709738"/>
-            <a:ext cx="10515600" cy="2852737"/>
+            <a:off x="1154956" y="2861733"/>
+            <a:ext cx="8825657" cy="1915647"/>
           </a:xfrm>
         </p:spPr>
         <p:txBody>
           <a:bodyPr anchor="b"/>
           <a:lstStyle>
-            <a:lvl1pPr>
-              <a:defRPr sz="6000"/>
+            <a:lvl1pPr algn="l">
+              <a:defRPr sz="4000" b="0" cap="none"/>
             </a:lvl1pPr>
           </a:lstStyle>
           <a:p>
@@ -1002,19 +3464,13 @@
               <a:rPr lang="en-US"/>
               <a:t>Click to edit Master title style</a:t>
             </a:r>
-            <a:endParaRPr lang="en-GB"/>
-          </a:p>
-        </p:txBody>
-      </p:sp>
-      <p:sp>
-        <p:nvSpPr>
-          <p:cNvPr id="3" name="Text Placeholder 2">
-            <a:extLst>
-              <a:ext uri="{FF2B5EF4-FFF2-40B4-BE49-F238E27FC236}">
-                <a16:creationId xmlns:a16="http://schemas.microsoft.com/office/drawing/2014/main" id="{65FAAEE1-C596-3DC9-7930-CE0B4659E5C7}"/>
-              </a:ext>
-            </a:extLst>
-          </p:cNvPr>
+            <a:endParaRPr lang="en-US" dirty="0"/>
+          </a:p>
+        </p:txBody>
+      </p:sp>
+      <p:sp>
+        <p:nvSpPr>
+          <p:cNvPr id="3" name="Text Placeholder 2"/>
           <p:cNvSpPr>
             <a:spLocks noGrp="1"/>
           </p:cNvSpPr>
@@ -1024,99 +3480,100 @@
         </p:nvSpPr>
         <p:spPr>
           <a:xfrm>
-            <a:off x="831850" y="4589463"/>
-            <a:ext cx="10515600" cy="1500187"/>
+            <a:off x="1154955" y="4777381"/>
+            <a:ext cx="8825658" cy="860400"/>
           </a:xfrm>
         </p:spPr>
         <p:txBody>
-          <a:bodyPr/>
+          <a:bodyPr anchor="t"/>
           <a:lstStyle>
-            <a:lvl1pPr marL="0" indent="0">
-              <a:buNone/>
-              <a:defRPr sz="2400">
+            <a:lvl1pPr marL="0" indent="0" algn="l">
+              <a:buNone/>
+              <a:defRPr sz="2000" cap="all">
                 <a:solidFill>
-                  <a:schemeClr val="tx1">
-                    <a:tint val="82000"/>
+                  <a:schemeClr val="accent1">
+                    <a:lumMod val="60000"/>
+                    <a:lumOff val="40000"/>
                   </a:schemeClr>
                 </a:solidFill>
               </a:defRPr>
             </a:lvl1pPr>
             <a:lvl2pPr marL="457200" indent="0">
               <a:buNone/>
-              <a:defRPr sz="2000">
+              <a:defRPr sz="1800">
                 <a:solidFill>
                   <a:schemeClr val="tx1">
-                    <a:tint val="82000"/>
+                    <a:tint val="75000"/>
                   </a:schemeClr>
                 </a:solidFill>
               </a:defRPr>
             </a:lvl2pPr>
             <a:lvl3pPr marL="914400" indent="0">
               <a:buNone/>
-              <a:defRPr sz="1800">
+              <a:defRPr sz="1600">
                 <a:solidFill>
                   <a:schemeClr val="tx1">
-                    <a:tint val="82000"/>
+                    <a:tint val="75000"/>
                   </a:schemeClr>
                 </a:solidFill>
               </a:defRPr>
             </a:lvl3pPr>
             <a:lvl4pPr marL="1371600" indent="0">
               <a:buNone/>
-              <a:defRPr sz="1600">
+              <a:defRPr sz="1400">
                 <a:solidFill>
                   <a:schemeClr val="tx1">
-                    <a:tint val="82000"/>
+                    <a:tint val="75000"/>
                   </a:schemeClr>
                 </a:solidFill>
               </a:defRPr>
             </a:lvl4pPr>
             <a:lvl5pPr marL="1828800" indent="0">
               <a:buNone/>
-              <a:defRPr sz="1600">
+              <a:defRPr sz="1400">
                 <a:solidFill>
                   <a:schemeClr val="tx1">
-                    <a:tint val="82000"/>
+                    <a:tint val="75000"/>
                   </a:schemeClr>
                 </a:solidFill>
               </a:defRPr>
             </a:lvl5pPr>
             <a:lvl6pPr marL="2286000" indent="0">
               <a:buNone/>
-              <a:defRPr sz="1600">
+              <a:defRPr sz="1400">
                 <a:solidFill>
                   <a:schemeClr val="tx1">
-                    <a:tint val="82000"/>
+                    <a:tint val="75000"/>
                   </a:schemeClr>
                 </a:solidFill>
               </a:defRPr>
             </a:lvl6pPr>
             <a:lvl7pPr marL="2743200" indent="0">
               <a:buNone/>
-              <a:defRPr sz="1600">
+              <a:defRPr sz="1400">
                 <a:solidFill>
                   <a:schemeClr val="tx1">
-                    <a:tint val="82000"/>
+                    <a:tint val="75000"/>
                   </a:schemeClr>
                 </a:solidFill>
               </a:defRPr>
             </a:lvl7pPr>
             <a:lvl8pPr marL="3200400" indent="0">
               <a:buNone/>
-              <a:defRPr sz="1600">
+              <a:defRPr sz="1400">
                 <a:solidFill>
                   <a:schemeClr val="tx1">
-                    <a:tint val="82000"/>
+                    <a:tint val="75000"/>
                   </a:schemeClr>
                 </a:solidFill>
               </a:defRPr>
             </a:lvl8pPr>
             <a:lvl9pPr marL="3657600" indent="0">
               <a:buNone/>
-              <a:defRPr sz="1600">
+              <a:defRPr sz="1400">
                 <a:solidFill>
                   <a:schemeClr val="tx1">
-                    <a:tint val="82000"/>
+                    <a:tint val="75000"/>
                   </a:schemeClr>
                 </a:solidFill>
               </a:defRPr>
@@ -1133,13 +3590,7 @@
       </p:sp>
       <p:sp>
         <p:nvSpPr>
-          <p:cNvPr id="4" name="Date Placeholder 3">
-            <a:extLst>
-              <a:ext uri="{FF2B5EF4-FFF2-40B4-BE49-F238E27FC236}">
-                <a16:creationId xmlns:a16="http://schemas.microsoft.com/office/drawing/2014/main" id="{B08A4B46-52EF-51BB-70BA-545AEE6570F9}"/>
-              </a:ext>
-            </a:extLst>
-          </p:cNvPr>
+          <p:cNvPr id="4" name="Date Placeholder 3"/>
           <p:cNvSpPr>
             <a:spLocks noGrp="1"/>
           </p:cNvSpPr>
@@ -1154,7 +3605,7 @@
           <a:p>
             <a:fld id="{A960F2F5-2F2F-4A65-8AC6-0AF42D8123C9}" type="datetimeFigureOut">
               <a:rPr lang="en-GB" smtClean="0"/>
-              <a:t>08/06/2026</a:t>
+              <a:t>15/06/2026</a:t>
             </a:fld>
             <a:endParaRPr lang="en-GB"/>
           </a:p>
@@ -1162,13 +3613,7 @@
       </p:sp>
       <p:sp>
         <p:nvSpPr>
-          <p:cNvPr id="5" name="Footer Placeholder 4">
-            <a:extLst>
-              <a:ext uri="{FF2B5EF4-FFF2-40B4-BE49-F238E27FC236}">
-                <a16:creationId xmlns:a16="http://schemas.microsoft.com/office/drawing/2014/main" id="{0CD126C8-9F0A-CF79-D646-5027F29721D3}"/>
-              </a:ext>
-            </a:extLst>
-          </p:cNvPr>
+          <p:cNvPr id="5" name="Footer Placeholder 4"/>
           <p:cNvSpPr>
             <a:spLocks noGrp="1"/>
           </p:cNvSpPr>
@@ -1187,13 +3632,7 @@
       </p:sp>
       <p:sp>
         <p:nvSpPr>
-          <p:cNvPr id="6" name="Slide Number Placeholder 5">
-            <a:extLst>
-              <a:ext uri="{FF2B5EF4-FFF2-40B4-BE49-F238E27FC236}">
-                <a16:creationId xmlns:a16="http://schemas.microsoft.com/office/drawing/2014/main" id="{D6536D76-2EBC-1807-A8BE-62F95D5D5954}"/>
-              </a:ext>
-            </a:extLst>
-          </p:cNvPr>
+          <p:cNvPr id="6" name="Slide Number Placeholder 5"/>
           <p:cNvSpPr>
             <a:spLocks noGrp="1"/>
           </p:cNvSpPr>
@@ -1217,7 +3656,7 @@
     </p:spTree>
     <p:extLst>
       <p:ext uri="{BB962C8B-B14F-4D97-AF65-F5344CB8AC3E}">
-        <p14:creationId xmlns:p14="http://schemas.microsoft.com/office/powerpoint/2010/main" val="3278476787"/>
+        <p14:creationId xmlns:p14="http://schemas.microsoft.com/office/powerpoint/2010/main" val="934482510"/>
       </p:ext>
     </p:extLst>
   </p:cSld>
@@ -1246,13 +3685,7 @@
       </p:grpSpPr>
       <p:sp>
         <p:nvSpPr>
-          <p:cNvPr id="2" name="Title 1">
-            <a:extLst>
-              <a:ext uri="{FF2B5EF4-FFF2-40B4-BE49-F238E27FC236}">
-                <a16:creationId xmlns:a16="http://schemas.microsoft.com/office/drawing/2014/main" id="{06C3B5EA-2FD6-819C-71CC-F12E30CF0F9F}"/>
-              </a:ext>
-            </a:extLst>
-          </p:cNvPr>
+          <p:cNvPr id="2" name="Title 1"/>
           <p:cNvSpPr>
             <a:spLocks noGrp="1"/>
           </p:cNvSpPr>
@@ -1269,19 +3702,13 @@
               <a:rPr lang="en-US"/>
               <a:t>Click to edit Master title style</a:t>
             </a:r>
-            <a:endParaRPr lang="en-GB"/>
-          </a:p>
-        </p:txBody>
-      </p:sp>
-      <p:sp>
-        <p:nvSpPr>
-          <p:cNvPr id="3" name="Content Placeholder 2">
-            <a:extLst>
-              <a:ext uri="{FF2B5EF4-FFF2-40B4-BE49-F238E27FC236}">
-                <a16:creationId xmlns:a16="http://schemas.microsoft.com/office/drawing/2014/main" id="{BF9E1FF8-F992-CC3D-32D7-65B2F0D8C447}"/>
-              </a:ext>
-            </a:extLst>
-          </p:cNvPr>
+            <a:endParaRPr lang="en-US" dirty="0"/>
+          </a:p>
+        </p:txBody>
+      </p:sp>
+      <p:sp>
+        <p:nvSpPr>
+          <p:cNvPr id="3" name="Content Placeholder 2"/>
           <p:cNvSpPr>
             <a:spLocks noGrp="1"/>
           </p:cNvSpPr>
@@ -1291,13 +3718,43 @@
         </p:nvSpPr>
         <p:spPr>
           <a:xfrm>
-            <a:off x="838200" y="1825625"/>
-            <a:ext cx="5181600" cy="4351338"/>
+            <a:off x="1103312" y="2060575"/>
+            <a:ext cx="4396339" cy="4195763"/>
           </a:xfrm>
         </p:spPr>
         <p:txBody>
-          <a:bodyPr/>
-          <a:lstStyle/>
+          <a:bodyPr>
+            <a:normAutofit/>
+          </a:bodyPr>
+          <a:lstStyle>
+            <a:lvl1pPr>
+              <a:defRPr sz="1800"/>
+            </a:lvl1pPr>
+            <a:lvl2pPr>
+              <a:defRPr sz="1600"/>
+            </a:lvl2pPr>
+            <a:lvl3pPr>
+              <a:defRPr sz="1400"/>
+            </a:lvl3pPr>
+            <a:lvl4pPr>
+              <a:defRPr sz="1200"/>
+            </a:lvl4pPr>
+            <a:lvl5pPr>
+              <a:defRPr sz="1200"/>
+            </a:lvl5pPr>
+            <a:lvl6pPr>
+              <a:defRPr sz="1200"/>
+            </a:lvl6pPr>
+            <a:lvl7pPr>
+              <a:defRPr sz="1200"/>
+            </a:lvl7pPr>
+            <a:lvl8pPr>
+              <a:defRPr sz="1200"/>
+            </a:lvl8pPr>
+            <a:lvl9pPr>
+              <a:defRPr sz="1200"/>
+            </a:lvl9pPr>
+          </a:lstStyle>
           <a:p>
             <a:pPr lvl="0"/>
             <a:r>
@@ -1332,19 +3789,13 @@
               <a:rPr lang="en-US"/>
               <a:t>Fifth level</a:t>
             </a:r>
-            <a:endParaRPr lang="en-GB"/>
-          </a:p>
-        </p:txBody>
-      </p:sp>
-      <p:sp>
-        <p:nvSpPr>
-          <p:cNvPr id="4" name="Content Placeholder 3">
-            <a:extLst>
-              <a:ext uri="{FF2B5EF4-FFF2-40B4-BE49-F238E27FC236}">
-                <a16:creationId xmlns:a16="http://schemas.microsoft.com/office/drawing/2014/main" id="{84DAC6C5-E032-C536-7311-89AA39CA0DDA}"/>
-              </a:ext>
-            </a:extLst>
-          </p:cNvPr>
+            <a:endParaRPr lang="en-US" dirty="0"/>
+          </a:p>
+        </p:txBody>
+      </p:sp>
+      <p:sp>
+        <p:nvSpPr>
+          <p:cNvPr id="4" name="Content Placeholder 3"/>
           <p:cNvSpPr>
             <a:spLocks noGrp="1"/>
           </p:cNvSpPr>
@@ -1354,13 +3805,43 @@
         </p:nvSpPr>
         <p:spPr>
           <a:xfrm>
-            <a:off x="6172200" y="1825625"/>
-            <a:ext cx="5181600" cy="4351338"/>
+            <a:off x="5654493" y="2056092"/>
+            <a:ext cx="4396341" cy="4200245"/>
           </a:xfrm>
         </p:spPr>
         <p:txBody>
-          <a:bodyPr/>
-          <a:lstStyle/>
+          <a:bodyPr>
+            <a:normAutofit/>
+          </a:bodyPr>
+          <a:lstStyle>
+            <a:lvl1pPr>
+              <a:defRPr sz="1800"/>
+            </a:lvl1pPr>
+            <a:lvl2pPr>
+              <a:defRPr sz="1600"/>
+            </a:lvl2pPr>
+            <a:lvl3pPr>
+              <a:defRPr sz="1400"/>
+            </a:lvl3pPr>
+            <a:lvl4pPr>
+              <a:defRPr sz="1200"/>
+            </a:lvl4pPr>
+            <a:lvl5pPr>
+              <a:defRPr sz="1200"/>
+            </a:lvl5pPr>
+            <a:lvl6pPr>
+              <a:defRPr sz="1200"/>
+            </a:lvl6pPr>
+            <a:lvl7pPr>
+              <a:defRPr sz="1200"/>
+            </a:lvl7pPr>
+            <a:lvl8pPr>
+              <a:defRPr sz="1200"/>
+            </a:lvl8pPr>
+            <a:lvl9pPr>
+              <a:defRPr sz="1200"/>
+            </a:lvl9pPr>
+          </a:lstStyle>
           <a:p>
             <a:pPr lvl="0"/>
             <a:r>
@@ -1395,19 +3876,13 @@
               <a:rPr lang="en-US"/>
               <a:t>Fifth level</a:t>
             </a:r>
-            <a:endParaRPr lang="en-GB"/>
-          </a:p>
-        </p:txBody>
-      </p:sp>
-      <p:sp>
-        <p:nvSpPr>
-          <p:cNvPr id="5" name="Date Placeholder 4">
-            <a:extLst>
-              <a:ext uri="{FF2B5EF4-FFF2-40B4-BE49-F238E27FC236}">
-                <a16:creationId xmlns:a16="http://schemas.microsoft.com/office/drawing/2014/main" id="{9FA4F636-3E0C-044E-BE59-1DBF5A88D2C0}"/>
-              </a:ext>
-            </a:extLst>
-          </p:cNvPr>
+            <a:endParaRPr lang="en-US" dirty="0"/>
+          </a:p>
+        </p:txBody>
+      </p:sp>
+      <p:sp>
+        <p:nvSpPr>
+          <p:cNvPr id="5" name="Date Placeholder 4"/>
           <p:cNvSpPr>
             <a:spLocks noGrp="1"/>
           </p:cNvSpPr>
@@ -1422,7 +3897,7 @@
           <a:p>
             <a:fld id="{A960F2F5-2F2F-4A65-8AC6-0AF42D8123C9}" type="datetimeFigureOut">
               <a:rPr lang="en-GB" smtClean="0"/>
-              <a:t>08/06/2026</a:t>
+              <a:t>15/06/2026</a:t>
             </a:fld>
             <a:endParaRPr lang="en-GB"/>
           </a:p>
@@ -1430,13 +3905,7 @@
       </p:sp>
       <p:sp>
         <p:nvSpPr>
-          <p:cNvPr id="6" name="Footer Placeholder 5">
-            <a:extLst>
-              <a:ext uri="{FF2B5EF4-FFF2-40B4-BE49-F238E27FC236}">
-                <a16:creationId xmlns:a16="http://schemas.microsoft.com/office/drawing/2014/main" id="{15DEC941-2687-341D-8F4B-9086F84B61E3}"/>
-              </a:ext>
-            </a:extLst>
-          </p:cNvPr>
+          <p:cNvPr id="6" name="Footer Placeholder 5"/>
           <p:cNvSpPr>
             <a:spLocks noGrp="1"/>
           </p:cNvSpPr>
@@ -1455,13 +3924,7 @@
       </p:sp>
       <p:sp>
         <p:nvSpPr>
-          <p:cNvPr id="7" name="Slide Number Placeholder 6">
-            <a:extLst>
-              <a:ext uri="{FF2B5EF4-FFF2-40B4-BE49-F238E27FC236}">
-                <a16:creationId xmlns:a16="http://schemas.microsoft.com/office/drawing/2014/main" id="{75A9F20E-B824-A628-94FB-FCAD05F654BB}"/>
-              </a:ext>
-            </a:extLst>
-          </p:cNvPr>
+          <p:cNvPr id="7" name="Slide Number Placeholder 6"/>
           <p:cNvSpPr>
             <a:spLocks noGrp="1"/>
           </p:cNvSpPr>
@@ -1485,7 +3948,7 @@
     </p:spTree>
     <p:extLst>
       <p:ext uri="{BB962C8B-B14F-4D97-AF65-F5344CB8AC3E}">
-        <p14:creationId xmlns:p14="http://schemas.microsoft.com/office/powerpoint/2010/main" val="2613229239"/>
+        <p14:creationId xmlns:p14="http://schemas.microsoft.com/office/powerpoint/2010/main" val="2406124345"/>
       </p:ext>
     </p:extLst>
   </p:cSld>
@@ -1514,66 +3977,62 @@
       </p:grpSpPr>
       <p:sp>
         <p:nvSpPr>
-          <p:cNvPr id="2" name="Title 1">
-            <a:extLst>
-              <a:ext uri="{FF2B5EF4-FFF2-40B4-BE49-F238E27FC236}">
-                <a16:creationId xmlns:a16="http://schemas.microsoft.com/office/drawing/2014/main" id="{AB4EF3EC-4F87-2C8F-7FCB-C013E0FBA3B2}"/>
-              </a:ext>
-            </a:extLst>
-          </p:cNvPr>
+          <p:cNvPr id="2" name="Title 1"/>
           <p:cNvSpPr>
             <a:spLocks noGrp="1"/>
           </p:cNvSpPr>
           <p:nvPr>
             <p:ph type="title"/>
+          </p:nvPr>
+        </p:nvSpPr>
+        <p:spPr/>
+        <p:txBody>
+          <a:bodyPr/>
+          <a:lstStyle>
+            <a:lvl1pPr>
+              <a:defRPr/>
+            </a:lvl1pPr>
+          </a:lstStyle>
+          <a:p>
+            <a:r>
+              <a:rPr lang="en-US"/>
+              <a:t>Click to edit Master title style</a:t>
+            </a:r>
+            <a:endParaRPr lang="en-US" dirty="0"/>
+          </a:p>
+        </p:txBody>
+      </p:sp>
+      <p:sp>
+        <p:nvSpPr>
+          <p:cNvPr id="3" name="Text Placeholder 2"/>
+          <p:cNvSpPr>
+            <a:spLocks noGrp="1"/>
+          </p:cNvSpPr>
+          <p:nvPr>
+            <p:ph type="body" idx="1"/>
           </p:nvPr>
         </p:nvSpPr>
         <p:spPr>
           <a:xfrm>
-            <a:off x="839788" y="365125"/>
-            <a:ext cx="10515600" cy="1325563"/>
+            <a:off x="1103313" y="1905000"/>
+            <a:ext cx="4396338" cy="576262"/>
           </a:xfrm>
         </p:spPr>
         <p:txBody>
-          <a:bodyPr/>
-          <a:lstStyle/>
-          <a:p>
-            <a:r>
-              <a:rPr lang="en-US"/>
-              <a:t>Click to edit Master title style</a:t>
-            </a:r>
-            <a:endParaRPr lang="en-GB"/>
-          </a:p>
-        </p:txBody>
-      </p:sp>
-      <p:sp>
-        <p:nvSpPr>
-          <p:cNvPr id="3" name="Text Placeholder 2">
-            <a:extLst>
-              <a:ext uri="{FF2B5EF4-FFF2-40B4-BE49-F238E27FC236}">
-                <a16:creationId xmlns:a16="http://schemas.microsoft.com/office/drawing/2014/main" id="{75090A3D-0AA7-B60B-7B48-31B9BCF90EC7}"/>
-              </a:ext>
-            </a:extLst>
-          </p:cNvPr>
-          <p:cNvSpPr>
-            <a:spLocks noGrp="1"/>
-          </p:cNvSpPr>
-          <p:nvPr>
-            <p:ph type="body" idx="1"/>
-          </p:nvPr>
-        </p:nvSpPr>
-        <p:spPr>
-          <a:xfrm>
-            <a:off x="839788" y="1681163"/>
-            <a:ext cx="5157787" cy="823912"/>
-          </a:xfrm>
-        </p:spPr>
-        <p:txBody>
-          <a:bodyPr anchor="b"/>
+          <a:bodyPr anchor="b">
+            <a:noAutofit/>
+          </a:bodyPr>
           <a:lstStyle>
             <a:lvl1pPr marL="0" indent="0">
               <a:buNone/>
-              <a:defRPr sz="2400" b="1"/>
+              <a:defRPr sz="2400" b="0">
+                <a:solidFill>
+                  <a:schemeClr val="accent1">
+                    <a:lumMod val="60000"/>
+                    <a:lumOff val="40000"/>
+                  </a:schemeClr>
+                </a:solidFill>
+              </a:defRPr>
             </a:lvl1pPr>
             <a:lvl2pPr marL="457200" indent="0">
               <a:buNone/>
@@ -1619,13 +4078,7 @@
       </p:sp>
       <p:sp>
         <p:nvSpPr>
-          <p:cNvPr id="4" name="Content Placeholder 3">
-            <a:extLst>
-              <a:ext uri="{FF2B5EF4-FFF2-40B4-BE49-F238E27FC236}">
-                <a16:creationId xmlns:a16="http://schemas.microsoft.com/office/drawing/2014/main" id="{6CCF8429-69DB-94D9-1414-260CE410AD84}"/>
-              </a:ext>
-            </a:extLst>
-          </p:cNvPr>
+          <p:cNvPr id="4" name="Content Placeholder 3"/>
           <p:cNvSpPr>
             <a:spLocks noGrp="1"/>
           </p:cNvSpPr>
@@ -1635,13 +4088,43 @@
         </p:nvSpPr>
         <p:spPr>
           <a:xfrm>
-            <a:off x="839788" y="2505075"/>
-            <a:ext cx="5157787" cy="3684588"/>
+            <a:off x="1103312" y="2514600"/>
+            <a:ext cx="4396339" cy="3741738"/>
           </a:xfrm>
         </p:spPr>
         <p:txBody>
-          <a:bodyPr/>
-          <a:lstStyle/>
+          <a:bodyPr>
+            <a:normAutofit/>
+          </a:bodyPr>
+          <a:lstStyle>
+            <a:lvl1pPr>
+              <a:defRPr sz="1800"/>
+            </a:lvl1pPr>
+            <a:lvl2pPr>
+              <a:defRPr sz="1600"/>
+            </a:lvl2pPr>
+            <a:lvl3pPr>
+              <a:defRPr sz="1400"/>
+            </a:lvl3pPr>
+            <a:lvl4pPr>
+              <a:defRPr sz="1200"/>
+            </a:lvl4pPr>
+            <a:lvl5pPr>
+              <a:defRPr sz="1200"/>
+            </a:lvl5pPr>
+            <a:lvl6pPr>
+              <a:defRPr sz="1200"/>
+            </a:lvl6pPr>
+            <a:lvl7pPr>
+              <a:defRPr sz="1200"/>
+            </a:lvl7pPr>
+            <a:lvl8pPr>
+              <a:defRPr sz="1200"/>
+            </a:lvl8pPr>
+            <a:lvl9pPr>
+              <a:defRPr sz="1200"/>
+            </a:lvl9pPr>
+          </a:lstStyle>
           <a:p>
             <a:pPr lvl="0"/>
             <a:r>
@@ -1676,19 +4159,13 @@
               <a:rPr lang="en-US"/>
               <a:t>Fifth level</a:t>
             </a:r>
-            <a:endParaRPr lang="en-GB"/>
-          </a:p>
-        </p:txBody>
-      </p:sp>
-      <p:sp>
-        <p:nvSpPr>
-          <p:cNvPr id="5" name="Text Placeholder 4">
-            <a:extLst>
-              <a:ext uri="{FF2B5EF4-FFF2-40B4-BE49-F238E27FC236}">
-                <a16:creationId xmlns:a16="http://schemas.microsoft.com/office/drawing/2014/main" id="{5EA46A2B-5611-3ECF-5A62-99ECE21F4FB5}"/>
-              </a:ext>
-            </a:extLst>
-          </p:cNvPr>
+            <a:endParaRPr lang="en-US" dirty="0"/>
+          </a:p>
+        </p:txBody>
+      </p:sp>
+      <p:sp>
+        <p:nvSpPr>
+          <p:cNvPr id="5" name="Text Placeholder 4"/>
           <p:cNvSpPr>
             <a:spLocks noGrp="1"/>
           </p:cNvSpPr>
@@ -1698,16 +4175,25 @@
         </p:nvSpPr>
         <p:spPr>
           <a:xfrm>
-            <a:off x="6172200" y="1681163"/>
-            <a:ext cx="5183188" cy="823912"/>
+            <a:off x="5654495" y="1905000"/>
+            <a:ext cx="4396339" cy="576262"/>
           </a:xfrm>
         </p:spPr>
         <p:txBody>
-          <a:bodyPr anchor="b"/>
+          <a:bodyPr anchor="b">
+            <a:noAutofit/>
+          </a:bodyPr>
           <a:lstStyle>
             <a:lvl1pPr marL="0" indent="0">
               <a:buNone/>
-              <a:defRPr sz="2400" b="1"/>
+              <a:defRPr sz="2400" b="0">
+                <a:solidFill>
+                  <a:schemeClr val="accent1">
+                    <a:lumMod val="60000"/>
+                    <a:lumOff val="40000"/>
+                  </a:schemeClr>
+                </a:solidFill>
+              </a:defRPr>
             </a:lvl1pPr>
             <a:lvl2pPr marL="457200" indent="0">
               <a:buNone/>
@@ -1753,13 +4239,7 @@
       </p:sp>
       <p:sp>
         <p:nvSpPr>
-          <p:cNvPr id="6" name="Content Placeholder 5">
-            <a:extLst>
-              <a:ext uri="{FF2B5EF4-FFF2-40B4-BE49-F238E27FC236}">
-                <a16:creationId xmlns:a16="http://schemas.microsoft.com/office/drawing/2014/main" id="{C546DBBE-C9DD-E0CE-A960-07D6C21C59EC}"/>
-              </a:ext>
-            </a:extLst>
-          </p:cNvPr>
+          <p:cNvPr id="6" name="Content Placeholder 5"/>
           <p:cNvSpPr>
             <a:spLocks noGrp="1"/>
           </p:cNvSpPr>
@@ -1769,13 +4249,43 @@
         </p:nvSpPr>
         <p:spPr>
           <a:xfrm>
-            <a:off x="6172200" y="2505075"/>
-            <a:ext cx="5183188" cy="3684588"/>
+            <a:off x="5654495" y="2514600"/>
+            <a:ext cx="4396339" cy="3741738"/>
           </a:xfrm>
         </p:spPr>
         <p:txBody>
-          <a:bodyPr/>
-          <a:lstStyle/>
+          <a:bodyPr>
+            <a:normAutofit/>
+          </a:bodyPr>
+          <a:lstStyle>
+            <a:lvl1pPr>
+              <a:defRPr sz="1800"/>
+            </a:lvl1pPr>
+            <a:lvl2pPr>
+              <a:defRPr sz="1600"/>
+            </a:lvl2pPr>
+            <a:lvl3pPr>
+              <a:defRPr sz="1400"/>
+            </a:lvl3pPr>
+            <a:lvl4pPr>
+              <a:defRPr sz="1200"/>
+            </a:lvl4pPr>
+            <a:lvl5pPr>
+              <a:defRPr sz="1200"/>
+            </a:lvl5pPr>
+            <a:lvl6pPr>
+              <a:defRPr sz="1200"/>
+            </a:lvl6pPr>
+            <a:lvl7pPr>
+              <a:defRPr sz="1200"/>
+            </a:lvl7pPr>
+            <a:lvl8pPr>
+              <a:defRPr sz="1200"/>
+            </a:lvl8pPr>
+            <a:lvl9pPr>
+              <a:defRPr sz="1200"/>
+            </a:lvl9pPr>
+          </a:lstStyle>
           <a:p>
             <a:pPr lvl="0"/>
             <a:r>
@@ -1810,19 +4320,13 @@
               <a:rPr lang="en-US"/>
               <a:t>Fifth level</a:t>
             </a:r>
-            <a:endParaRPr lang="en-GB"/>
-          </a:p>
-        </p:txBody>
-      </p:sp>
-      <p:sp>
-        <p:nvSpPr>
-          <p:cNvPr id="7" name="Date Placeholder 6">
-            <a:extLst>
-              <a:ext uri="{FF2B5EF4-FFF2-40B4-BE49-F238E27FC236}">
-                <a16:creationId xmlns:a16="http://schemas.microsoft.com/office/drawing/2014/main" id="{5D321C2A-5092-AB49-54E3-595B2B201CCC}"/>
-              </a:ext>
-            </a:extLst>
-          </p:cNvPr>
+            <a:endParaRPr lang="en-US" dirty="0"/>
+          </a:p>
+        </p:txBody>
+      </p:sp>
+      <p:sp>
+        <p:nvSpPr>
+          <p:cNvPr id="7" name="Date Placeholder 6"/>
           <p:cNvSpPr>
             <a:spLocks noGrp="1"/>
           </p:cNvSpPr>
@@ -1837,7 +4341,7 @@
           <a:p>
             <a:fld id="{A960F2F5-2F2F-4A65-8AC6-0AF42D8123C9}" type="datetimeFigureOut">
               <a:rPr lang="en-GB" smtClean="0"/>
-              <a:t>08/06/2026</a:t>
+              <a:t>15/06/2026</a:t>
             </a:fld>
             <a:endParaRPr lang="en-GB"/>
           </a:p>
@@ -1845,13 +4349,7 @@
       </p:sp>
       <p:sp>
         <p:nvSpPr>
-          <p:cNvPr id="8" name="Footer Placeholder 7">
-            <a:extLst>
-              <a:ext uri="{FF2B5EF4-FFF2-40B4-BE49-F238E27FC236}">
-                <a16:creationId xmlns:a16="http://schemas.microsoft.com/office/drawing/2014/main" id="{D7BBA369-A64C-E3D6-98BF-62B0B33AF83E}"/>
-              </a:ext>
-            </a:extLst>
-          </p:cNvPr>
+          <p:cNvPr id="8" name="Footer Placeholder 7"/>
           <p:cNvSpPr>
             <a:spLocks noGrp="1"/>
           </p:cNvSpPr>
@@ -1870,13 +4368,7 @@
       </p:sp>
       <p:sp>
         <p:nvSpPr>
-          <p:cNvPr id="9" name="Slide Number Placeholder 8">
-            <a:extLst>
-              <a:ext uri="{FF2B5EF4-FFF2-40B4-BE49-F238E27FC236}">
-                <a16:creationId xmlns:a16="http://schemas.microsoft.com/office/drawing/2014/main" id="{924DFE79-365B-2727-E6D6-051D82CEA04F}"/>
-              </a:ext>
-            </a:extLst>
-          </p:cNvPr>
+          <p:cNvPr id="9" name="Slide Number Placeholder 8"/>
           <p:cNvSpPr>
             <a:spLocks noGrp="1"/>
           </p:cNvSpPr>
@@ -1900,7 +4392,7 @@
     </p:spTree>
     <p:extLst>
       <p:ext uri="{BB962C8B-B14F-4D97-AF65-F5344CB8AC3E}">
-        <p14:creationId xmlns:p14="http://schemas.microsoft.com/office/powerpoint/2010/main" val="692641155"/>
+        <p14:creationId xmlns:p14="http://schemas.microsoft.com/office/powerpoint/2010/main" val="606360852"/>
       </p:ext>
     </p:extLst>
   </p:cSld>
@@ -1929,13 +4421,7 @@
       </p:grpSpPr>
       <p:sp>
         <p:nvSpPr>
-          <p:cNvPr id="2" name="Title 1">
-            <a:extLst>
-              <a:ext uri="{FF2B5EF4-FFF2-40B4-BE49-F238E27FC236}">
-                <a16:creationId xmlns:a16="http://schemas.microsoft.com/office/drawing/2014/main" id="{FF8A3240-BD59-60F9-B83E-E16A97338E09}"/>
-              </a:ext>
-            </a:extLst>
-          </p:cNvPr>
+          <p:cNvPr id="2" name="Title 1"/>
           <p:cNvSpPr>
             <a:spLocks noGrp="1"/>
           </p:cNvSpPr>
@@ -1952,19 +4438,13 @@
               <a:rPr lang="en-US"/>
               <a:t>Click to edit Master title style</a:t>
             </a:r>
-            <a:endParaRPr lang="en-GB"/>
-          </a:p>
-        </p:txBody>
-      </p:sp>
-      <p:sp>
-        <p:nvSpPr>
-          <p:cNvPr id="3" name="Date Placeholder 2">
-            <a:extLst>
-              <a:ext uri="{FF2B5EF4-FFF2-40B4-BE49-F238E27FC236}">
-                <a16:creationId xmlns:a16="http://schemas.microsoft.com/office/drawing/2014/main" id="{8B456E95-A250-F55C-DA3D-751E4F70085E}"/>
-              </a:ext>
-            </a:extLst>
-          </p:cNvPr>
+            <a:endParaRPr lang="en-US" dirty="0"/>
+          </a:p>
+        </p:txBody>
+      </p:sp>
+      <p:sp>
+        <p:nvSpPr>
+          <p:cNvPr id="7" name="Date Placeholder 2"/>
           <p:cNvSpPr>
             <a:spLocks noGrp="1"/>
           </p:cNvSpPr>
@@ -1979,7 +4459,7 @@
           <a:p>
             <a:fld id="{A960F2F5-2F2F-4A65-8AC6-0AF42D8123C9}" type="datetimeFigureOut">
               <a:rPr lang="en-GB" smtClean="0"/>
-              <a:t>08/06/2026</a:t>
+              <a:t>15/06/2026</a:t>
             </a:fld>
             <a:endParaRPr lang="en-GB"/>
           </a:p>
@@ -1987,13 +4467,7 @@
       </p:sp>
       <p:sp>
         <p:nvSpPr>
-          <p:cNvPr id="4" name="Footer Placeholder 3">
-            <a:extLst>
-              <a:ext uri="{FF2B5EF4-FFF2-40B4-BE49-F238E27FC236}">
-                <a16:creationId xmlns:a16="http://schemas.microsoft.com/office/drawing/2014/main" id="{9F33F0BE-0809-330C-34E9-AB590A3A115E}"/>
-              </a:ext>
-            </a:extLst>
-          </p:cNvPr>
+          <p:cNvPr id="5" name="Footer Placeholder 3"/>
           <p:cNvSpPr>
             <a:spLocks noGrp="1"/>
           </p:cNvSpPr>
@@ -2012,13 +4486,7 @@
       </p:sp>
       <p:sp>
         <p:nvSpPr>
-          <p:cNvPr id="5" name="Slide Number Placeholder 4">
-            <a:extLst>
-              <a:ext uri="{FF2B5EF4-FFF2-40B4-BE49-F238E27FC236}">
-                <a16:creationId xmlns:a16="http://schemas.microsoft.com/office/drawing/2014/main" id="{9F03F77B-32E8-0F96-5599-6047717E6A9F}"/>
-              </a:ext>
-            </a:extLst>
-          </p:cNvPr>
+          <p:cNvPr id="6" name="Slide Number Placeholder 4"/>
           <p:cNvSpPr>
             <a:spLocks noGrp="1"/>
           </p:cNvSpPr>
@@ -2042,7 +4510,7 @@
     </p:spTree>
     <p:extLst>
       <p:ext uri="{BB962C8B-B14F-4D97-AF65-F5344CB8AC3E}">
-        <p14:creationId xmlns:p14="http://schemas.microsoft.com/office/powerpoint/2010/main" val="2725550879"/>
+        <p14:creationId xmlns:p14="http://schemas.microsoft.com/office/powerpoint/2010/main" val="3130767917"/>
       </p:ext>
     </p:extLst>
   </p:cSld>
@@ -2071,13 +4539,7 @@
       </p:grpSpPr>
       <p:sp>
         <p:nvSpPr>
-          <p:cNvPr id="2" name="Date Placeholder 1">
-            <a:extLst>
-              <a:ext uri="{FF2B5EF4-FFF2-40B4-BE49-F238E27FC236}">
-                <a16:creationId xmlns:a16="http://schemas.microsoft.com/office/drawing/2014/main" id="{21EFD1A9-0678-ACB4-F50D-539AB8BD2F1D}"/>
-              </a:ext>
-            </a:extLst>
-          </p:cNvPr>
+          <p:cNvPr id="7" name="Date Placeholder 1"/>
           <p:cNvSpPr>
             <a:spLocks noGrp="1"/>
           </p:cNvSpPr>
@@ -2092,7 +4554,7 @@
           <a:p>
             <a:fld id="{A960F2F5-2F2F-4A65-8AC6-0AF42D8123C9}" type="datetimeFigureOut">
               <a:rPr lang="en-GB" smtClean="0"/>
-              <a:t>08/06/2026</a:t>
+              <a:t>15/06/2026</a:t>
             </a:fld>
             <a:endParaRPr lang="en-GB"/>
           </a:p>
@@ -2100,13 +4562,7 @@
       </p:sp>
       <p:sp>
         <p:nvSpPr>
-          <p:cNvPr id="3" name="Footer Placeholder 2">
-            <a:extLst>
-              <a:ext uri="{FF2B5EF4-FFF2-40B4-BE49-F238E27FC236}">
-                <a16:creationId xmlns:a16="http://schemas.microsoft.com/office/drawing/2014/main" id="{1EB1D98B-3565-30BE-51E3-EDFED6ADFE80}"/>
-              </a:ext>
-            </a:extLst>
-          </p:cNvPr>
+          <p:cNvPr id="5" name="Footer Placeholder 2"/>
           <p:cNvSpPr>
             <a:spLocks noGrp="1"/>
           </p:cNvSpPr>
@@ -2125,13 +4581,7 @@
       </p:sp>
       <p:sp>
         <p:nvSpPr>
-          <p:cNvPr id="4" name="Slide Number Placeholder 3">
-            <a:extLst>
-              <a:ext uri="{FF2B5EF4-FFF2-40B4-BE49-F238E27FC236}">
-                <a16:creationId xmlns:a16="http://schemas.microsoft.com/office/drawing/2014/main" id="{0A0517C9-B391-33EF-BD19-B3147FDDBF95}"/>
-              </a:ext>
-            </a:extLst>
-          </p:cNvPr>
+          <p:cNvPr id="6" name="Slide Number Placeholder 3"/>
           <p:cNvSpPr>
             <a:spLocks noGrp="1"/>
           </p:cNvSpPr>
@@ -2155,7 +4605,7 @@
     </p:spTree>
     <p:extLst>
       <p:ext uri="{BB962C8B-B14F-4D97-AF65-F5344CB8AC3E}">
-        <p14:creationId xmlns:p14="http://schemas.microsoft.com/office/powerpoint/2010/main" val="1386267328"/>
+        <p14:creationId xmlns:p14="http://schemas.microsoft.com/office/powerpoint/2010/main" val="1544723589"/>
       </p:ext>
     </p:extLst>
   </p:cSld>
@@ -2184,13 +4634,7 @@
       </p:grpSpPr>
       <p:sp>
         <p:nvSpPr>
-          <p:cNvPr id="2" name="Title 1">
-            <a:extLst>
-              <a:ext uri="{FF2B5EF4-FFF2-40B4-BE49-F238E27FC236}">
-                <a16:creationId xmlns:a16="http://schemas.microsoft.com/office/drawing/2014/main" id="{4F5CB2B0-E1BB-C961-A724-7D27DABBF3B1}"/>
-              </a:ext>
-            </a:extLst>
-          </p:cNvPr>
+          <p:cNvPr id="2" name="Title 1"/>
           <p:cNvSpPr>
             <a:spLocks noGrp="1"/>
           </p:cNvSpPr>
@@ -2200,15 +4644,15 @@
         </p:nvSpPr>
         <p:spPr>
           <a:xfrm>
-            <a:off x="839788" y="457200"/>
-            <a:ext cx="3932237" cy="1600200"/>
+            <a:off x="1154954" y="1447800"/>
+            <a:ext cx="3401063" cy="1447800"/>
           </a:xfrm>
         </p:spPr>
         <p:txBody>
           <a:bodyPr anchor="b"/>
           <a:lstStyle>
-            <a:lvl1pPr>
-              <a:defRPr sz="3200"/>
+            <a:lvl1pPr algn="l">
+              <a:defRPr sz="2400" b="0"/>
             </a:lvl1pPr>
           </a:lstStyle>
           <a:p>
@@ -2216,19 +4660,13 @@
               <a:rPr lang="en-US"/>
               <a:t>Click to edit Master title style</a:t>
             </a:r>
-            <a:endParaRPr lang="en-GB"/>
-          </a:p>
-        </p:txBody>
-      </p:sp>
-      <p:sp>
-        <p:nvSpPr>
-          <p:cNvPr id="3" name="Content Placeholder 2">
-            <a:extLst>
-              <a:ext uri="{FF2B5EF4-FFF2-40B4-BE49-F238E27FC236}">
-                <a16:creationId xmlns:a16="http://schemas.microsoft.com/office/drawing/2014/main" id="{E2D654F8-D23C-0EC7-2893-73ABA978E9F0}"/>
-              </a:ext>
-            </a:extLst>
-          </p:cNvPr>
+            <a:endParaRPr lang="en-US" dirty="0"/>
+          </a:p>
+        </p:txBody>
+      </p:sp>
+      <p:sp>
+        <p:nvSpPr>
+          <p:cNvPr id="3" name="Content Placeholder 2"/>
           <p:cNvSpPr>
             <a:spLocks noGrp="1"/>
           </p:cNvSpPr>
@@ -2238,39 +4676,41 @@
         </p:nvSpPr>
         <p:spPr>
           <a:xfrm>
-            <a:off x="5183188" y="987425"/>
-            <a:ext cx="6172200" cy="4873625"/>
+            <a:off x="4784616" y="1447800"/>
+            <a:ext cx="5195997" cy="4572000"/>
           </a:xfrm>
         </p:spPr>
         <p:txBody>
-          <a:bodyPr/>
+          <a:bodyPr anchor="ctr">
+            <a:normAutofit/>
+          </a:bodyPr>
           <a:lstStyle>
             <a:lvl1pPr>
-              <a:defRPr sz="3200"/>
+              <a:defRPr sz="2000"/>
             </a:lvl1pPr>
             <a:lvl2pPr>
-              <a:defRPr sz="2800"/>
+              <a:defRPr sz="1800"/>
             </a:lvl2pPr>
             <a:lvl3pPr>
-              <a:defRPr sz="2400"/>
+              <a:defRPr sz="1600"/>
             </a:lvl3pPr>
             <a:lvl4pPr>
-              <a:defRPr sz="2000"/>
+              <a:defRPr sz="1400"/>
             </a:lvl4pPr>
             <a:lvl5pPr>
-              <a:defRPr sz="2000"/>
+              <a:defRPr sz="1400"/>
             </a:lvl5pPr>
             <a:lvl6pPr>
-              <a:defRPr sz="2000"/>
+              <a:defRPr sz="1400"/>
             </a:lvl6pPr>
             <a:lvl7pPr>
-              <a:defRPr sz="2000"/>
+              <a:defRPr sz="1400"/>
             </a:lvl7pPr>
             <a:lvl8pPr>
-              <a:defRPr sz="2000"/>
+              <a:defRPr sz="1400"/>
             </a:lvl8pPr>
             <a:lvl9pPr>
-              <a:defRPr sz="2000"/>
+              <a:defRPr sz="1400"/>
             </a:lvl9pPr>
           </a:lstStyle>
           <a:p>
@@ -2307,19 +4747,13 @@
               <a:rPr lang="en-US"/>
               <a:t>Fifth level</a:t>
             </a:r>
-            <a:endParaRPr lang="en-GB"/>
-          </a:p>
-        </p:txBody>
-      </p:sp>
-      <p:sp>
-        <p:nvSpPr>
-          <p:cNvPr id="4" name="Text Placeholder 3">
-            <a:extLst>
-              <a:ext uri="{FF2B5EF4-FFF2-40B4-BE49-F238E27FC236}">
-                <a16:creationId xmlns:a16="http://schemas.microsoft.com/office/drawing/2014/main" id="{CD5BCA58-1FCC-C000-EE50-26E6C83EB102}"/>
-              </a:ext>
-            </a:extLst>
-          </p:cNvPr>
+            <a:endParaRPr lang="en-US" dirty="0"/>
+          </a:p>
+        </p:txBody>
+      </p:sp>
+      <p:sp>
+        <p:nvSpPr>
+          <p:cNvPr id="4" name="Text Placeholder 3"/>
           <p:cNvSpPr>
             <a:spLocks noGrp="1"/>
           </p:cNvSpPr>
@@ -2329,8 +4763,8 @@
         </p:nvSpPr>
         <p:spPr>
           <a:xfrm>
-            <a:off x="839788" y="2057400"/>
-            <a:ext cx="3932237" cy="3811588"/>
+            <a:off x="1154955" y="3129280"/>
+            <a:ext cx="3401062" cy="2895599"/>
           </a:xfrm>
         </p:spPr>
         <p:txBody>
@@ -2338,39 +4772,39 @@
           <a:lstStyle>
             <a:lvl1pPr marL="0" indent="0">
               <a:buNone/>
-              <a:defRPr sz="1600"/>
+              <a:defRPr sz="1400"/>
             </a:lvl1pPr>
             <a:lvl2pPr marL="457200" indent="0">
               <a:buNone/>
-              <a:defRPr sz="1400"/>
+              <a:defRPr sz="1200"/>
             </a:lvl2pPr>
             <a:lvl3pPr marL="914400" indent="0">
               <a:buNone/>
-              <a:defRPr sz="1200"/>
+              <a:defRPr sz="1000"/>
             </a:lvl3pPr>
             <a:lvl4pPr marL="1371600" indent="0">
               <a:buNone/>
-              <a:defRPr sz="1000"/>
+              <a:defRPr sz="900"/>
             </a:lvl4pPr>
             <a:lvl5pPr marL="1828800" indent="0">
               <a:buNone/>
-              <a:defRPr sz="1000"/>
+              <a:defRPr sz="900"/>
             </a:lvl5pPr>
             <a:lvl6pPr marL="2286000" indent="0">
               <a:buNone/>
-              <a:defRPr sz="1000"/>
+              <a:defRPr sz="900"/>
             </a:lvl6pPr>
             <a:lvl7pPr marL="2743200" indent="0">
               <a:buNone/>
-              <a:defRPr sz="1000"/>
+              <a:defRPr sz="900"/>
             </a:lvl7pPr>
             <a:lvl8pPr marL="3200400" indent="0">
               <a:buNone/>
-              <a:defRPr sz="1000"/>
+              <a:defRPr sz="900"/>
             </a:lvl8pPr>
             <a:lvl9pPr marL="3657600" indent="0">
               <a:buNone/>
-              <a:defRPr sz="1000"/>
+              <a:defRPr sz="900"/>
             </a:lvl9pPr>
           </a:lstStyle>
           <a:p>
@@ -2384,13 +4818,7 @@
       </p:sp>
       <p:sp>
         <p:nvSpPr>
-          <p:cNvPr id="5" name="Date Placeholder 4">
-            <a:extLst>
-              <a:ext uri="{FF2B5EF4-FFF2-40B4-BE49-F238E27FC236}">
-                <a16:creationId xmlns:a16="http://schemas.microsoft.com/office/drawing/2014/main" id="{7671F1CC-9222-DCDB-0673-523AEBEBE61C}"/>
-              </a:ext>
-            </a:extLst>
-          </p:cNvPr>
+          <p:cNvPr id="7" name="Date Placeholder 4"/>
           <p:cNvSpPr>
             <a:spLocks noGrp="1"/>
           </p:cNvSpPr>
@@ -2405,7 +4833,7 @@
           <a:p>
             <a:fld id="{A960F2F5-2F2F-4A65-8AC6-0AF42D8123C9}" type="datetimeFigureOut">
               <a:rPr lang="en-GB" smtClean="0"/>
-              <a:t>08/06/2026</a:t>
+              <a:t>15/06/2026</a:t>
             </a:fld>
             <a:endParaRPr lang="en-GB"/>
           </a:p>
@@ -2413,13 +4841,7 @@
       </p:sp>
       <p:sp>
         <p:nvSpPr>
-          <p:cNvPr id="6" name="Footer Placeholder 5">
-            <a:extLst>
-              <a:ext uri="{FF2B5EF4-FFF2-40B4-BE49-F238E27FC236}">
-                <a16:creationId xmlns:a16="http://schemas.microsoft.com/office/drawing/2014/main" id="{E8E2A361-BF86-CE47-5734-29A4D8681C4C}"/>
-              </a:ext>
-            </a:extLst>
-          </p:cNvPr>
+          <p:cNvPr id="5" name="Footer Placeholder 5"/>
           <p:cNvSpPr>
             <a:spLocks noGrp="1"/>
           </p:cNvSpPr>
@@ -2438,13 +4860,7 @@
       </p:sp>
       <p:sp>
         <p:nvSpPr>
-          <p:cNvPr id="7" name="Slide Number Placeholder 6">
-            <a:extLst>
-              <a:ext uri="{FF2B5EF4-FFF2-40B4-BE49-F238E27FC236}">
-                <a16:creationId xmlns:a16="http://schemas.microsoft.com/office/drawing/2014/main" id="{F198446C-AA62-C45E-93DD-DAC85FE10129}"/>
-              </a:ext>
-            </a:extLst>
-          </p:cNvPr>
+          <p:cNvPr id="6" name="Slide Number Placeholder 6"/>
           <p:cNvSpPr>
             <a:spLocks noGrp="1"/>
           </p:cNvSpPr>
@@ -2468,7 +4884,7 @@
     </p:spTree>
     <p:extLst>
       <p:ext uri="{BB962C8B-B14F-4D97-AF65-F5344CB8AC3E}">
-        <p14:creationId xmlns:p14="http://schemas.microsoft.com/office/powerpoint/2010/main" val="3275617290"/>
+        <p14:creationId xmlns:p14="http://schemas.microsoft.com/office/powerpoint/2010/main" val="1396672789"/>
       </p:ext>
     </p:extLst>
   </p:cSld>
@@ -2497,13 +4913,7 @@
       </p:grpSpPr>
       <p:sp>
         <p:nvSpPr>
-          <p:cNvPr id="2" name="Title 1">
-            <a:extLst>
-              <a:ext uri="{FF2B5EF4-FFF2-40B4-BE49-F238E27FC236}">
-                <a16:creationId xmlns:a16="http://schemas.microsoft.com/office/drawing/2014/main" id="{C9C78831-8A7D-EBDC-120A-2523F0261F31}"/>
-              </a:ext>
-            </a:extLst>
-          </p:cNvPr>
+          <p:cNvPr id="2" name="Title 1"/>
           <p:cNvSpPr>
             <a:spLocks noGrp="1"/>
           </p:cNvSpPr>
@@ -2513,15 +4923,17 @@
         </p:nvSpPr>
         <p:spPr>
           <a:xfrm>
-            <a:off x="839788" y="457200"/>
-            <a:ext cx="3932237" cy="1600200"/>
+            <a:off x="1153907" y="1854192"/>
+            <a:ext cx="5092906" cy="1574808"/>
           </a:xfrm>
         </p:spPr>
         <p:txBody>
-          <a:bodyPr anchor="b"/>
+          <a:bodyPr anchor="b">
+            <a:normAutofit/>
+          </a:bodyPr>
           <a:lstStyle>
-            <a:lvl1pPr>
-              <a:defRPr sz="3200"/>
+            <a:lvl1pPr algn="l">
+              <a:defRPr sz="3600" b="0"/>
             </a:lvl1pPr>
           </a:lstStyle>
           <a:p>
@@ -2529,21 +4941,15 @@
               <a:rPr lang="en-US"/>
               <a:t>Click to edit Master title style</a:t>
             </a:r>
-            <a:endParaRPr lang="en-GB"/>
-          </a:p>
-        </p:txBody>
-      </p:sp>
-      <p:sp>
-        <p:nvSpPr>
-          <p:cNvPr id="3" name="Picture Placeholder 2">
-            <a:extLst>
-              <a:ext uri="{FF2B5EF4-FFF2-40B4-BE49-F238E27FC236}">
-                <a16:creationId xmlns:a16="http://schemas.microsoft.com/office/drawing/2014/main" id="{EF40AA6B-9E24-57E3-6399-BBBE678576AF}"/>
-              </a:ext>
-            </a:extLst>
-          </p:cNvPr>
-          <p:cNvSpPr>
-            <a:spLocks noGrp="1"/>
+            <a:endParaRPr lang="en-US" dirty="0"/>
+          </a:p>
+        </p:txBody>
+      </p:sp>
+      <p:sp>
+        <p:nvSpPr>
+          <p:cNvPr id="3" name="Picture Placeholder 2"/>
+          <p:cNvSpPr>
+            <a:spLocks noGrp="1" noChangeAspect="1"/>
           </p:cNvSpPr>
           <p:nvPr>
             <p:ph type="pic" idx="1"/>
@@ -2551,118 +4957,132 @@
         </p:nvSpPr>
         <p:spPr>
           <a:xfrm>
-            <a:off x="5183188" y="987425"/>
-            <a:ext cx="6172200" cy="4873625"/>
+            <a:off x="6949546" y="1143000"/>
+            <a:ext cx="3200400" cy="4572000"/>
           </a:xfrm>
+          <a:prstGeom prst="roundRect">
+            <a:avLst>
+              <a:gd name="adj" fmla="val 1858"/>
+            </a:avLst>
+          </a:prstGeom>
+          <a:effectLst>
+            <a:outerShdw blurRad="50800" dist="50800" dir="5400000" algn="tl" rotWithShape="0">
+              <a:srgbClr val="000000">
+                <a:alpha val="43000"/>
+              </a:srgbClr>
+            </a:outerShdw>
+          </a:effectLst>
         </p:spPr>
         <p:txBody>
-          <a:bodyPr/>
+          <a:bodyPr anchor="t">
+            <a:normAutofit/>
+          </a:bodyPr>
           <a:lstStyle>
-            <a:lvl1pPr marL="0" indent="0">
-              <a:buNone/>
-              <a:defRPr sz="3200"/>
-            </a:lvl1pPr>
-            <a:lvl2pPr marL="457200" indent="0">
-              <a:buNone/>
-              <a:defRPr sz="2800"/>
-            </a:lvl2pPr>
-            <a:lvl3pPr marL="914400" indent="0">
-              <a:buNone/>
-              <a:defRPr sz="2400"/>
-            </a:lvl3pPr>
-            <a:lvl4pPr marL="1371600" indent="0">
-              <a:buNone/>
-              <a:defRPr sz="2000"/>
-            </a:lvl4pPr>
-            <a:lvl5pPr marL="1828800" indent="0">
-              <a:buNone/>
-              <a:defRPr sz="2000"/>
-            </a:lvl5pPr>
-            <a:lvl6pPr marL="2286000" indent="0">
-              <a:buNone/>
-              <a:defRPr sz="2000"/>
-            </a:lvl6pPr>
-            <a:lvl7pPr marL="2743200" indent="0">
-              <a:buNone/>
-              <a:defRPr sz="2000"/>
-            </a:lvl7pPr>
-            <a:lvl8pPr marL="3200400" indent="0">
-              <a:buNone/>
-              <a:defRPr sz="2000"/>
-            </a:lvl8pPr>
-            <a:lvl9pPr marL="3657600" indent="0">
-              <a:buNone/>
-              <a:defRPr sz="2000"/>
-            </a:lvl9pPr>
-          </a:lstStyle>
-          <a:p>
-            <a:endParaRPr lang="en-GB"/>
-          </a:p>
-        </p:txBody>
-      </p:sp>
-      <p:sp>
-        <p:nvSpPr>
-          <p:cNvPr id="4" name="Text Placeholder 3">
-            <a:extLst>
-              <a:ext uri="{FF2B5EF4-FFF2-40B4-BE49-F238E27FC236}">
-                <a16:creationId xmlns:a16="http://schemas.microsoft.com/office/drawing/2014/main" id="{C157C9D0-27D4-F707-5788-E5F723FE9D44}"/>
-              </a:ext>
-            </a:extLst>
-          </p:cNvPr>
-          <p:cNvSpPr>
-            <a:spLocks noGrp="1"/>
-          </p:cNvSpPr>
-          <p:nvPr>
-            <p:ph type="body" sz="half" idx="2"/>
-          </p:nvPr>
-        </p:nvSpPr>
-        <p:spPr>
-          <a:xfrm>
-            <a:off x="839788" y="2057400"/>
-            <a:ext cx="3932237" cy="3811588"/>
-          </a:xfrm>
-        </p:spPr>
-        <p:txBody>
-          <a:bodyPr/>
-          <a:lstStyle>
-            <a:lvl1pPr marL="0" indent="0">
+            <a:lvl1pPr marL="0" indent="0" algn="ctr">
               <a:buNone/>
               <a:defRPr sz="1600"/>
             </a:lvl1pPr>
             <a:lvl2pPr marL="457200" indent="0">
               <a:buNone/>
-              <a:defRPr sz="1400"/>
+              <a:defRPr sz="1600"/>
             </a:lvl2pPr>
             <a:lvl3pPr marL="914400" indent="0">
               <a:buNone/>
-              <a:defRPr sz="1200"/>
+              <a:defRPr sz="1600"/>
             </a:lvl3pPr>
             <a:lvl4pPr marL="1371600" indent="0">
               <a:buNone/>
-              <a:defRPr sz="1000"/>
+              <a:defRPr sz="1600"/>
             </a:lvl4pPr>
             <a:lvl5pPr marL="1828800" indent="0">
               <a:buNone/>
-              <a:defRPr sz="1000"/>
+              <a:defRPr sz="1600"/>
             </a:lvl5pPr>
             <a:lvl6pPr marL="2286000" indent="0">
               <a:buNone/>
-              <a:defRPr sz="1000"/>
+              <a:defRPr sz="1600"/>
             </a:lvl6pPr>
             <a:lvl7pPr marL="2743200" indent="0">
               <a:buNone/>
-              <a:defRPr sz="1000"/>
+              <a:defRPr sz="1600"/>
             </a:lvl7pPr>
             <a:lvl8pPr marL="3200400" indent="0">
               <a:buNone/>
-              <a:defRPr sz="1000"/>
+              <a:defRPr sz="1600"/>
             </a:lvl8pPr>
             <a:lvl9pPr marL="3657600" indent="0">
               <a:buNone/>
-              <a:defRPr sz="1000"/>
+              <a:defRPr sz="1600"/>
             </a:lvl9pPr>
           </a:lstStyle>
           <a:p>
+            <a:r>
+              <a:rPr lang="en-US"/>
+              <a:t>Click icon to add picture</a:t>
+            </a:r>
+            <a:endParaRPr lang="en-US" dirty="0"/>
+          </a:p>
+        </p:txBody>
+      </p:sp>
+      <p:sp>
+        <p:nvSpPr>
+          <p:cNvPr id="4" name="Text Placeholder 3"/>
+          <p:cNvSpPr>
+            <a:spLocks noGrp="1"/>
+          </p:cNvSpPr>
+          <p:nvPr>
+            <p:ph type="body" sz="half" idx="2"/>
+          </p:nvPr>
+        </p:nvSpPr>
+        <p:spPr>
+          <a:xfrm>
+            <a:off x="1154954" y="3657600"/>
+            <a:ext cx="5084979" cy="1371600"/>
+          </a:xfrm>
+        </p:spPr>
+        <p:txBody>
+          <a:bodyPr>
+            <a:normAutofit/>
+          </a:bodyPr>
+          <a:lstStyle>
+            <a:lvl1pPr marL="0" indent="0">
+              <a:buNone/>
+              <a:defRPr sz="1400"/>
+            </a:lvl1pPr>
+            <a:lvl2pPr marL="457200" indent="0">
+              <a:buNone/>
+              <a:defRPr sz="1200"/>
+            </a:lvl2pPr>
+            <a:lvl3pPr marL="914400" indent="0">
+              <a:buNone/>
+              <a:defRPr sz="1000"/>
+            </a:lvl3pPr>
+            <a:lvl4pPr marL="1371600" indent="0">
+              <a:buNone/>
+              <a:defRPr sz="900"/>
+            </a:lvl4pPr>
+            <a:lvl5pPr marL="1828800" indent="0">
+              <a:buNone/>
+              <a:defRPr sz="900"/>
+            </a:lvl5pPr>
+            <a:lvl6pPr marL="2286000" indent="0">
+              <a:buNone/>
+              <a:defRPr sz="900"/>
+            </a:lvl6pPr>
+            <a:lvl7pPr marL="2743200" indent="0">
+              <a:buNone/>
+              <a:defRPr sz="900"/>
+            </a:lvl7pPr>
+            <a:lvl8pPr marL="3200400" indent="0">
+              <a:buNone/>
+              <a:defRPr sz="900"/>
+            </a:lvl8pPr>
+            <a:lvl9pPr marL="3657600" indent="0">
+              <a:buNone/>
+              <a:defRPr sz="900"/>
+            </a:lvl9pPr>
+          </a:lstStyle>
+          <a:p>
             <a:pPr lvl="0"/>
             <a:r>
               <a:rPr lang="en-US"/>
@@ -2673,13 +5093,7 @@
       </p:sp>
       <p:sp>
         <p:nvSpPr>
-          <p:cNvPr id="5" name="Date Placeholder 4">
-            <a:extLst>
-              <a:ext uri="{FF2B5EF4-FFF2-40B4-BE49-F238E27FC236}">
-                <a16:creationId xmlns:a16="http://schemas.microsoft.com/office/drawing/2014/main" id="{1A501FBD-53F9-6695-3D15-1A5AF5D98039}"/>
-              </a:ext>
-            </a:extLst>
-          </p:cNvPr>
+          <p:cNvPr id="5" name="Date Placeholder 4"/>
           <p:cNvSpPr>
             <a:spLocks noGrp="1"/>
           </p:cNvSpPr>
@@ -2694,7 +5108,7 @@
           <a:p>
             <a:fld id="{A960F2F5-2F2F-4A65-8AC6-0AF42D8123C9}" type="datetimeFigureOut">
               <a:rPr lang="en-GB" smtClean="0"/>
-              <a:t>08/06/2026</a:t>
+              <a:t>15/06/2026</a:t>
             </a:fld>
             <a:endParaRPr lang="en-GB"/>
           </a:p>
@@ -2702,13 +5116,7 @@
       </p:sp>
       <p:sp>
         <p:nvSpPr>
-          <p:cNvPr id="6" name="Footer Placeholder 5">
-            <a:extLst>
-              <a:ext uri="{FF2B5EF4-FFF2-40B4-BE49-F238E27FC236}">
-                <a16:creationId xmlns:a16="http://schemas.microsoft.com/office/drawing/2014/main" id="{F46B172C-FBED-8353-D690-829A16440DE6}"/>
-              </a:ext>
-            </a:extLst>
-          </p:cNvPr>
+          <p:cNvPr id="6" name="Footer Placeholder 5"/>
           <p:cNvSpPr>
             <a:spLocks noGrp="1"/>
           </p:cNvSpPr>
@@ -2727,13 +5135,7 @@
       </p:sp>
       <p:sp>
         <p:nvSpPr>
-          <p:cNvPr id="7" name="Slide Number Placeholder 6">
-            <a:extLst>
-              <a:ext uri="{FF2B5EF4-FFF2-40B4-BE49-F238E27FC236}">
-                <a16:creationId xmlns:a16="http://schemas.microsoft.com/office/drawing/2014/main" id="{767F8445-4643-E25C-3C5D-74F62718689C}"/>
-              </a:ext>
-            </a:extLst>
-          </p:cNvPr>
+          <p:cNvPr id="7" name="Slide Number Placeholder 6"/>
           <p:cNvSpPr>
             <a:spLocks noGrp="1"/>
           </p:cNvSpPr>
@@ -2757,7 +5159,7 @@
     </p:spTree>
     <p:extLst>
       <p:ext uri="{BB962C8B-B14F-4D97-AF65-F5344CB8AC3E}">
-        <p14:creationId xmlns:p14="http://schemas.microsoft.com/office/powerpoint/2010/main" val="875105115"/>
+        <p14:creationId xmlns:p14="http://schemas.microsoft.com/office/powerpoint/2010/main" val="894775919"/>
       </p:ext>
     </p:extLst>
   </p:cSld>
@@ -2771,8 +5173,8 @@
 <p:sldMaster xmlns:a="http://schemas.openxmlformats.org/drawingml/2006/main" xmlns:r="http://schemas.openxmlformats.org/officeDocument/2006/relationships" xmlns:p="http://schemas.openxmlformats.org/presentationml/2006/main">
   <p:cSld>
     <p:bg>
-      <p:bgRef idx="1001">
-        <a:schemeClr val="bg1"/>
+      <p:bgRef idx="1003">
+        <a:schemeClr val="bg2"/>
       </p:bgRef>
     </p:bg>
     <p:spTree>
@@ -2789,146 +5191,338 @@
           <a:chExt cx="0" cy="0"/>
         </a:xfrm>
       </p:grpSpPr>
-      <p:sp>
-        <p:nvSpPr>
-          <p:cNvPr id="2" name="Title Placeholder 1">
+      <p:pic>
+        <p:nvPicPr>
+          <p:cNvPr id="8" name="Picture 7"/>
+          <p:cNvPicPr>
+            <a:picLocks noChangeAspect="1"/>
+          </p:cNvPicPr>
+          <p:nvPr/>
+        </p:nvPicPr>
+        <p:blipFill rotWithShape="1">
+          <a:blip r:embed="rId19">
             <a:extLst>
-              <a:ext uri="{FF2B5EF4-FFF2-40B4-BE49-F238E27FC236}">
-                <a16:creationId xmlns:a16="http://schemas.microsoft.com/office/drawing/2014/main" id="{9F5F2D95-2F81-B12E-E4EA-AD12C36348EA}"/>
+              <a:ext uri="{28A0092B-C50C-407E-A947-70E740481C1C}">
+                <a14:useLocalDpi xmlns:a14="http://schemas.microsoft.com/office/drawing/2010/main" val="0"/>
               </a:ext>
             </a:extLst>
-          </p:cNvPr>
-          <p:cNvSpPr>
-            <a:spLocks noGrp="1"/>
-          </p:cNvSpPr>
-          <p:nvPr>
-            <p:ph type="title"/>
-          </p:nvPr>
-        </p:nvSpPr>
+          </a:blip>
+          <a:srcRect l="3644"/>
+          <a:stretch/>
+        </p:blipFill>
         <p:spPr>
           <a:xfrm>
-            <a:off x="838200" y="365125"/>
-            <a:ext cx="10515600" cy="1325563"/>
+            <a:off x="0" y="2669685"/>
+            <a:ext cx="4035669" cy="4188315"/>
           </a:xfrm>
           <a:prstGeom prst="rect">
             <a:avLst/>
           </a:prstGeom>
         </p:spPr>
-        <p:txBody>
-          <a:bodyPr vert="horz" lIns="91440" tIns="45720" rIns="91440" bIns="45720" rtlCol="0" anchor="ctr">
-            <a:normAutofit/>
-          </a:bodyPr>
-          <a:lstStyle/>
-          <a:p>
-            <a:r>
-              <a:rPr lang="en-US"/>
-              <a:t>Click to edit Master title style</a:t>
-            </a:r>
-            <a:endParaRPr lang="en-GB"/>
-          </a:p>
-        </p:txBody>
-      </p:sp>
-      <p:sp>
-        <p:nvSpPr>
-          <p:cNvPr id="3" name="Text Placeholder 2">
+      </p:pic>
+      <p:pic>
+        <p:nvPicPr>
+          <p:cNvPr id="7" name="Picture 6"/>
+          <p:cNvPicPr>
+            <a:picLocks noChangeAspect="1"/>
+          </p:cNvPicPr>
+          <p:nvPr/>
+        </p:nvPicPr>
+        <p:blipFill rotWithShape="1">
+          <a:blip r:embed="rId20">
             <a:extLst>
-              <a:ext uri="{FF2B5EF4-FFF2-40B4-BE49-F238E27FC236}">
-                <a16:creationId xmlns:a16="http://schemas.microsoft.com/office/drawing/2014/main" id="{EA5DA0E5-41DC-54C0-A8D2-6FD51C4B4E85}"/>
+              <a:ext uri="{28A0092B-C50C-407E-A947-70E740481C1C}">
+                <a14:useLocalDpi xmlns:a14="http://schemas.microsoft.com/office/drawing/2010/main" val="0"/>
               </a:ext>
             </a:extLst>
-          </p:cNvPr>
-          <p:cNvSpPr>
-            <a:spLocks noGrp="1"/>
-          </p:cNvSpPr>
-          <p:nvPr>
-            <p:ph type="body" idx="1"/>
-          </p:nvPr>
-        </p:nvSpPr>
+          </a:blip>
+          <a:srcRect l="35640"/>
+          <a:stretch/>
+        </p:blipFill>
         <p:spPr>
           <a:xfrm>
-            <a:off x="838200" y="1825625"/>
-            <a:ext cx="10515600" cy="4351338"/>
+            <a:off x="0" y="2892347"/>
+            <a:ext cx="1522412" cy="2365453"/>
           </a:xfrm>
           <a:prstGeom prst="rect">
             <a:avLst/>
           </a:prstGeom>
         </p:spPr>
-        <p:txBody>
-          <a:bodyPr vert="horz" lIns="91440" tIns="45720" rIns="91440" bIns="45720" rtlCol="0">
-            <a:normAutofit/>
-          </a:bodyPr>
-          <a:lstStyle/>
-          <a:p>
-            <a:pPr lvl="0"/>
-            <a:r>
-              <a:rPr lang="en-US"/>
-              <a:t>Click to edit Master text styles</a:t>
-            </a:r>
-          </a:p>
-          <a:p>
-            <a:pPr lvl="1"/>
-            <a:r>
-              <a:rPr lang="en-US"/>
-              <a:t>Second level</a:t>
-            </a:r>
-          </a:p>
-          <a:p>
-            <a:pPr lvl="2"/>
-            <a:r>
-              <a:rPr lang="en-US"/>
-              <a:t>Third level</a:t>
-            </a:r>
-          </a:p>
-          <a:p>
-            <a:pPr lvl="3"/>
-            <a:r>
-              <a:rPr lang="en-US"/>
-              <a:t>Fourth level</a:t>
-            </a:r>
-          </a:p>
-          <a:p>
-            <a:pPr lvl="4"/>
-            <a:r>
-              <a:rPr lang="en-US"/>
-              <a:t>Fifth level</a:t>
-            </a:r>
-            <a:endParaRPr lang="en-GB"/>
-          </a:p>
-        </p:txBody>
-      </p:sp>
-      <p:sp>
-        <p:nvSpPr>
-          <p:cNvPr id="4" name="Date Placeholder 3">
+      </p:pic>
+      <p:sp>
+        <p:nvSpPr>
+          <p:cNvPr id="16" name="Oval 15"/>
+          <p:cNvSpPr/>
+          <p:nvPr/>
+        </p:nvSpPr>
+        <p:spPr>
+          <a:xfrm>
+            <a:off x="8609012" y="1676400"/>
+            <a:ext cx="2819400" cy="2819400"/>
+          </a:xfrm>
+          <a:prstGeom prst="ellipse">
+            <a:avLst/>
+          </a:prstGeom>
+          <a:gradFill flip="none" rotWithShape="1">
+            <a:gsLst>
+              <a:gs pos="0">
+                <a:schemeClr val="accent5">
+                  <a:alpha val="7000"/>
+                </a:schemeClr>
+              </a:gs>
+              <a:gs pos="69000">
+                <a:schemeClr val="accent5">
+                  <a:alpha val="0"/>
+                </a:schemeClr>
+              </a:gs>
+              <a:gs pos="36000">
+                <a:schemeClr val="accent5">
+                  <a:alpha val="6000"/>
+                </a:schemeClr>
+              </a:gs>
+            </a:gsLst>
+            <a:path path="circle">
+              <a:fillToRect l="50000" t="50000" r="50000" b="50000"/>
+            </a:path>
+            <a:tileRect/>
+          </a:gradFill>
+          <a:ln>
+            <a:noFill/>
+          </a:ln>
+          <a:effectLst/>
+        </p:spPr>
+        <p:style>
+          <a:lnRef idx="1">
+            <a:schemeClr val="accent1"/>
+          </a:lnRef>
+          <a:fillRef idx="3">
+            <a:schemeClr val="accent1"/>
+          </a:fillRef>
+          <a:effectRef idx="2">
+            <a:schemeClr val="accent1"/>
+          </a:effectRef>
+          <a:fontRef idx="minor">
+            <a:schemeClr val="lt1"/>
+          </a:fontRef>
+        </p:style>
+      </p:sp>
+      <p:pic>
+        <p:nvPicPr>
+          <p:cNvPr id="9" name="Picture 8"/>
+          <p:cNvPicPr>
+            <a:picLocks noChangeAspect="1"/>
+          </p:cNvPicPr>
+          <p:nvPr/>
+        </p:nvPicPr>
+        <p:blipFill rotWithShape="1">
+          <a:blip r:embed="rId21">
             <a:extLst>
-              <a:ext uri="{FF2B5EF4-FFF2-40B4-BE49-F238E27FC236}">
-                <a16:creationId xmlns:a16="http://schemas.microsoft.com/office/drawing/2014/main" id="{9A263D50-C640-7D93-DED1-AE45F09EA72B}"/>
+              <a:ext uri="{28A0092B-C50C-407E-A947-70E740481C1C}">
+                <a14:useLocalDpi xmlns:a14="http://schemas.microsoft.com/office/drawing/2010/main" val="0"/>
               </a:ext>
             </a:extLst>
-          </p:cNvPr>
-          <p:cNvSpPr>
-            <a:spLocks noGrp="1"/>
-          </p:cNvSpPr>
-          <p:nvPr>
-            <p:ph type="dt" sz="half" idx="2"/>
-          </p:nvPr>
-        </p:nvSpPr>
+          </a:blip>
+          <a:srcRect t="28813"/>
+          <a:stretch/>
+        </p:blipFill>
         <p:spPr>
           <a:xfrm>
-            <a:off x="838200" y="6356350"/>
-            <a:ext cx="2743200" cy="365125"/>
+            <a:off x="7999412" y="0"/>
+            <a:ext cx="1603387" cy="1141407"/>
           </a:xfrm>
           <a:prstGeom prst="rect">
             <a:avLst/>
           </a:prstGeom>
         </p:spPr>
-        <p:txBody>
-          <a:bodyPr vert="horz" lIns="91440" tIns="45720" rIns="91440" bIns="45720" rtlCol="0" anchor="ctr"/>
+      </p:pic>
+      <p:pic>
+        <p:nvPicPr>
+          <p:cNvPr id="10" name="Picture 9"/>
+          <p:cNvPicPr>
+            <a:picLocks noChangeAspect="1"/>
+          </p:cNvPicPr>
+          <p:nvPr/>
+        </p:nvPicPr>
+        <p:blipFill rotWithShape="1">
+          <a:blip r:embed="rId22">
+            <a:extLst>
+              <a:ext uri="{28A0092B-C50C-407E-A947-70E740481C1C}">
+                <a14:useLocalDpi xmlns:a14="http://schemas.microsoft.com/office/drawing/2010/main" val="0"/>
+              </a:ext>
+            </a:extLst>
+          </a:blip>
+          <a:srcRect b="23320"/>
+          <a:stretch/>
+        </p:blipFill>
+        <p:spPr>
+          <a:xfrm>
+            <a:off x="8609012" y="6096000"/>
+            <a:ext cx="993734" cy="762000"/>
+          </a:xfrm>
+          <a:prstGeom prst="rect">
+            <a:avLst/>
+          </a:prstGeom>
+        </p:spPr>
+      </p:pic>
+      <p:sp>
+        <p:nvSpPr>
+          <p:cNvPr id="14" name="Rectangle 13"/>
+          <p:cNvSpPr/>
+          <p:nvPr/>
+        </p:nvSpPr>
+        <p:spPr>
+          <a:xfrm>
+            <a:off x="10437812" y="0"/>
+            <a:ext cx="685800" cy="1143000"/>
+          </a:xfrm>
+          <a:prstGeom prst="rect">
+            <a:avLst/>
+          </a:prstGeom>
+          <a:solidFill>
+            <a:schemeClr val="accent1"/>
+          </a:solidFill>
+          <a:ln>
+            <a:noFill/>
+          </a:ln>
+        </p:spPr>
+        <p:style>
+          <a:lnRef idx="1">
+            <a:schemeClr val="accent1"/>
+          </a:lnRef>
+          <a:fillRef idx="3">
+            <a:schemeClr val="accent1"/>
+          </a:fillRef>
+          <a:effectRef idx="2">
+            <a:schemeClr val="accent1"/>
+          </a:effectRef>
+          <a:fontRef idx="minor">
+            <a:schemeClr val="lt1"/>
+          </a:fontRef>
+        </p:style>
+      </p:sp>
+      <p:sp>
+        <p:nvSpPr>
+          <p:cNvPr id="2" name="Title Placeholder 1"/>
+          <p:cNvSpPr>
+            <a:spLocks noGrp="1"/>
+          </p:cNvSpPr>
+          <p:nvPr>
+            <p:ph type="title"/>
+          </p:nvPr>
+        </p:nvSpPr>
+        <p:spPr>
+          <a:xfrm>
+            <a:off x="646111" y="452718"/>
+            <a:ext cx="9404723" cy="1400530"/>
+          </a:xfrm>
+          <a:prstGeom prst="rect">
+            <a:avLst/>
+          </a:prstGeom>
+        </p:spPr>
+        <p:txBody>
+          <a:bodyPr vert="horz" lIns="91440" tIns="45720" rIns="91440" bIns="45720" rtlCol="0" anchor="t">
+            <a:noAutofit/>
+          </a:bodyPr>
+          <a:lstStyle/>
+          <a:p>
+            <a:r>
+              <a:rPr lang="en-US"/>
+              <a:t>Click to edit Master title style</a:t>
+            </a:r>
+            <a:endParaRPr lang="en-US" dirty="0"/>
+          </a:p>
+        </p:txBody>
+      </p:sp>
+      <p:sp>
+        <p:nvSpPr>
+          <p:cNvPr id="3" name="Text Placeholder 2"/>
+          <p:cNvSpPr>
+            <a:spLocks noGrp="1"/>
+          </p:cNvSpPr>
+          <p:nvPr>
+            <p:ph type="body" idx="1"/>
+          </p:nvPr>
+        </p:nvSpPr>
+        <p:spPr>
+          <a:xfrm>
+            <a:off x="1103312" y="2052918"/>
+            <a:ext cx="8946541" cy="4195481"/>
+          </a:xfrm>
+          <a:prstGeom prst="rect">
+            <a:avLst/>
+          </a:prstGeom>
+        </p:spPr>
+        <p:txBody>
+          <a:bodyPr vert="horz" lIns="91440" tIns="45720" rIns="91440" bIns="45720" rtlCol="0">
+            <a:normAutofit/>
+          </a:bodyPr>
+          <a:lstStyle/>
+          <a:p>
+            <a:pPr lvl="0"/>
+            <a:r>
+              <a:rPr lang="en-US"/>
+              <a:t>Click to edit Master text styles</a:t>
+            </a:r>
+          </a:p>
+          <a:p>
+            <a:pPr lvl="1"/>
+            <a:r>
+              <a:rPr lang="en-US"/>
+              <a:t>Second level</a:t>
+            </a:r>
+          </a:p>
+          <a:p>
+            <a:pPr lvl="2"/>
+            <a:r>
+              <a:rPr lang="en-US"/>
+              <a:t>Third level</a:t>
+            </a:r>
+          </a:p>
+          <a:p>
+            <a:pPr lvl="3"/>
+            <a:r>
+              <a:rPr lang="en-US"/>
+              <a:t>Fourth level</a:t>
+            </a:r>
+          </a:p>
+          <a:p>
+            <a:pPr lvl="4"/>
+            <a:r>
+              <a:rPr lang="en-US"/>
+              <a:t>Fifth level</a:t>
+            </a:r>
+            <a:endParaRPr lang="en-US" dirty="0"/>
+          </a:p>
+        </p:txBody>
+      </p:sp>
+      <p:sp>
+        <p:nvSpPr>
+          <p:cNvPr id="4" name="Date Placeholder 3"/>
+          <p:cNvSpPr>
+            <a:spLocks noGrp="1"/>
+          </p:cNvSpPr>
+          <p:nvPr>
+            <p:ph type="dt" sz="half" idx="2"/>
+          </p:nvPr>
+        </p:nvSpPr>
+        <p:spPr>
+          <a:xfrm rot="5400000">
+            <a:off x="10155639" y="1790701"/>
+            <a:ext cx="990599" cy="304799"/>
+          </a:xfrm>
+          <a:prstGeom prst="rect">
+            <a:avLst/>
+          </a:prstGeom>
+        </p:spPr>
+        <p:txBody>
+          <a:bodyPr vert="horz" lIns="91440" tIns="45720" rIns="91440" bIns="45720" rtlCol="0" anchor="t"/>
           <a:lstStyle>
             <a:lvl1pPr algn="l">
-              <a:defRPr sz="1200">
+              <a:defRPr sz="1100" b="0" i="0">
                 <a:solidFill>
                   <a:schemeClr val="tx1">
-                    <a:tint val="82000"/>
+                    <a:tint val="75000"/>
+                    <a:alpha val="60000"/>
                   </a:schemeClr>
                 </a:solidFill>
               </a:defRPr>
@@ -2937,7 +5531,7 @@
           <a:p>
             <a:fld id="{A960F2F5-2F2F-4A65-8AC6-0AF42D8123C9}" type="datetimeFigureOut">
               <a:rPr lang="en-GB" smtClean="0"/>
-              <a:t>08/06/2026</a:t>
+              <a:t>15/06/2026</a:t>
             </a:fld>
             <a:endParaRPr lang="en-GB"/>
           </a:p>
@@ -2945,13 +5539,7 @@
       </p:sp>
       <p:sp>
         <p:nvSpPr>
-          <p:cNvPr id="5" name="Footer Placeholder 4">
-            <a:extLst>
-              <a:ext uri="{FF2B5EF4-FFF2-40B4-BE49-F238E27FC236}">
-                <a16:creationId xmlns:a16="http://schemas.microsoft.com/office/drawing/2014/main" id="{C2A35838-0333-5065-B5D8-DB1584BAB277}"/>
-              </a:ext>
-            </a:extLst>
-          </p:cNvPr>
+          <p:cNvPr id="5" name="Footer Placeholder 4"/>
           <p:cNvSpPr>
             <a:spLocks noGrp="1"/>
           </p:cNvSpPr>
@@ -2960,22 +5548,23 @@
           </p:nvPr>
         </p:nvSpPr>
         <p:spPr>
-          <a:xfrm>
-            <a:off x="4038600" y="6356350"/>
-            <a:ext cx="4114800" cy="365125"/>
+          <a:xfrm rot="5400000">
+            <a:off x="8951573" y="3225297"/>
+            <a:ext cx="3859795" cy="304801"/>
           </a:xfrm>
           <a:prstGeom prst="rect">
             <a:avLst/>
           </a:prstGeom>
         </p:spPr>
         <p:txBody>
-          <a:bodyPr vert="horz" lIns="91440" tIns="45720" rIns="91440" bIns="45720" rtlCol="0" anchor="ctr"/>
+          <a:bodyPr vert="horz" lIns="91440" tIns="45720" rIns="91440" bIns="45720" rtlCol="0" anchor="b"/>
           <a:lstStyle>
-            <a:lvl1pPr algn="ctr">
-              <a:defRPr sz="1200">
+            <a:lvl1pPr algn="l">
+              <a:defRPr sz="1100" b="0" i="0">
                 <a:solidFill>
                   <a:schemeClr val="tx1">
-                    <a:tint val="82000"/>
+                    <a:tint val="75000"/>
+                    <a:alpha val="60000"/>
                   </a:schemeClr>
                 </a:solidFill>
               </a:defRPr>
@@ -2988,13 +5577,7 @@
       </p:sp>
       <p:sp>
         <p:nvSpPr>
-          <p:cNvPr id="6" name="Slide Number Placeholder 5">
-            <a:extLst>
-              <a:ext uri="{FF2B5EF4-FFF2-40B4-BE49-F238E27FC236}">
-                <a16:creationId xmlns:a16="http://schemas.microsoft.com/office/drawing/2014/main" id="{8A47AC3C-5D02-4243-9250-51480560A635}"/>
-              </a:ext>
-            </a:extLst>
-          </p:cNvPr>
+          <p:cNvPr id="6" name="Slide Number Placeholder 5"/>
           <p:cNvSpPr>
             <a:spLocks noGrp="1"/>
           </p:cNvSpPr>
@@ -3002,23 +5585,23 @@
             <p:ph type="sldNum" sz="quarter" idx="4"/>
           </p:nvPr>
         </p:nvSpPr>
-        <p:spPr>
+        <p:spPr bwMode="gray">
           <a:xfrm>
-            <a:off x="8610600" y="6356350"/>
-            <a:ext cx="2743200" cy="365125"/>
+            <a:off x="10352540" y="295729"/>
+            <a:ext cx="838199" cy="767687"/>
           </a:xfrm>
           <a:prstGeom prst="rect">
             <a:avLst/>
           </a:prstGeom>
         </p:spPr>
         <p:txBody>
-          <a:bodyPr vert="horz" lIns="91440" tIns="45720" rIns="91440" bIns="45720" rtlCol="0" anchor="ctr"/>
+          <a:bodyPr vert="horz" lIns="91440" tIns="45720" rIns="91440" bIns="45720" rtlCol="0" anchor="b"/>
           <a:lstStyle>
-            <a:lvl1pPr algn="r">
-              <a:defRPr sz="1200">
+            <a:lvl1pPr algn="ctr">
+              <a:defRPr sz="2800" b="0" i="0">
                 <a:solidFill>
                   <a:schemeClr val="tx1">
-                    <a:tint val="82000"/>
+                    <a:tint val="75000"/>
                   </a:schemeClr>
                 </a:solidFill>
               </a:defRPr>
@@ -3036,35 +5619,121 @@
     </p:spTree>
     <p:extLst>
       <p:ext uri="{BB962C8B-B14F-4D97-AF65-F5344CB8AC3E}">
-        <p14:creationId xmlns:p14="http://schemas.microsoft.com/office/powerpoint/2010/main" val="105748943"/>
+        <p14:creationId xmlns:p14="http://schemas.microsoft.com/office/powerpoint/2010/main" val="1244942653"/>
       </p:ext>
     </p:extLst>
   </p:cSld>
-  <p:clrMap bg1="lt1" tx1="dk1" bg2="lt2" tx2="dk2" accent1="accent1" accent2="accent2" accent3="accent3" accent4="accent4" accent5="accent5" accent6="accent6" hlink="hlink" folHlink="folHlink"/>
+  <p:clrMap bg1="dk1" tx1="lt1" bg2="dk2" tx2="lt2" accent1="accent1" accent2="accent2" accent3="accent3" accent4="accent4" accent5="accent5" accent6="accent6" hlink="hlink" folHlink="folHlink"/>
   <p:sldLayoutIdLst>
-    <p:sldLayoutId id="2147483649" r:id="rId1"/>
-    <p:sldLayoutId id="2147483650" r:id="rId2"/>
-    <p:sldLayoutId id="2147483651" r:id="rId3"/>
-    <p:sldLayoutId id="2147483652" r:id="rId4"/>
-    <p:sldLayoutId id="2147483653" r:id="rId5"/>
-    <p:sldLayoutId id="2147483654" r:id="rId6"/>
-    <p:sldLayoutId id="2147483655" r:id="rId7"/>
-    <p:sldLayoutId id="2147483656" r:id="rId8"/>
-    <p:sldLayoutId id="2147483657" r:id="rId9"/>
-    <p:sldLayoutId id="2147483658" r:id="rId10"/>
-    <p:sldLayoutId id="2147483659" r:id="rId11"/>
+    <p:sldLayoutId id="2147483679" r:id="rId1"/>
+    <p:sldLayoutId id="2147483680" r:id="rId2"/>
+    <p:sldLayoutId id="2147483681" r:id="rId3"/>
+    <p:sldLayoutId id="2147483682" r:id="rId4"/>
+    <p:sldLayoutId id="2147483683" r:id="rId5"/>
+    <p:sldLayoutId id="2147483684" r:id="rId6"/>
+    <p:sldLayoutId id="2147483685" r:id="rId7"/>
+    <p:sldLayoutId id="2147483686" r:id="rId8"/>
+    <p:sldLayoutId id="2147483687" r:id="rId9"/>
+    <p:sldLayoutId id="2147483688" r:id="rId10"/>
+    <p:sldLayoutId id="2147483689" r:id="rId11"/>
+    <p:sldLayoutId id="2147483690" r:id="rId12"/>
+    <p:sldLayoutId id="2147483691" r:id="rId13"/>
+    <p:sldLayoutId id="2147483692" r:id="rId14"/>
+    <p:sldLayoutId id="2147483693" r:id="rId15"/>
+    <p:sldLayoutId id="2147483694" r:id="rId16"/>
+    <p:sldLayoutId id="2147483695" r:id="rId17"/>
   </p:sldLayoutIdLst>
   <p:txStyles>
     <p:titleStyle>
-      <a:lvl1pPr algn="l" defTabSz="914400" rtl="0" eaLnBrk="1" latinLnBrk="0" hangingPunct="1">
-        <a:lnSpc>
-          <a:spcPct val="90000"/>
-        </a:lnSpc>
+      <a:lvl1pPr algn="l" defTabSz="457200" rtl="0" eaLnBrk="1" latinLnBrk="0" hangingPunct="1">
         <a:spcBef>
           <a:spcPct val="0"/>
         </a:spcBef>
         <a:buNone/>
-        <a:defRPr sz="4400" kern="1200">
+        <a:defRPr sz="4200" b="0" i="0" kern="1200">
+          <a:solidFill>
+            <a:schemeClr val="tx2"/>
+          </a:solidFill>
+          <a:latin typeface="+mj-lt"/>
+          <a:ea typeface="+mj-ea"/>
+          <a:cs typeface="+mj-cs"/>
+        </a:defRPr>
+      </a:lvl1pPr>
+      <a:lvl2pPr eaLnBrk="1" hangingPunct="1">
+        <a:defRPr>
+          <a:solidFill>
+            <a:schemeClr val="tx2"/>
+          </a:solidFill>
+        </a:defRPr>
+      </a:lvl2pPr>
+      <a:lvl3pPr eaLnBrk="1" hangingPunct="1">
+        <a:defRPr>
+          <a:solidFill>
+            <a:schemeClr val="tx2"/>
+          </a:solidFill>
+        </a:defRPr>
+      </a:lvl3pPr>
+      <a:lvl4pPr eaLnBrk="1" hangingPunct="1">
+        <a:defRPr>
+          <a:solidFill>
+            <a:schemeClr val="tx2"/>
+          </a:solidFill>
+        </a:defRPr>
+      </a:lvl4pPr>
+      <a:lvl5pPr eaLnBrk="1" hangingPunct="1">
+        <a:defRPr>
+          <a:solidFill>
+            <a:schemeClr val="tx2"/>
+          </a:solidFill>
+        </a:defRPr>
+      </a:lvl5pPr>
+      <a:lvl6pPr eaLnBrk="1" hangingPunct="1">
+        <a:defRPr>
+          <a:solidFill>
+            <a:schemeClr val="tx2"/>
+          </a:solidFill>
+        </a:defRPr>
+      </a:lvl6pPr>
+      <a:lvl7pPr eaLnBrk="1" hangingPunct="1">
+        <a:defRPr>
+          <a:solidFill>
+            <a:schemeClr val="tx2"/>
+          </a:solidFill>
+        </a:defRPr>
+      </a:lvl7pPr>
+      <a:lvl8pPr eaLnBrk="1" hangingPunct="1">
+        <a:defRPr>
+          <a:solidFill>
+            <a:schemeClr val="tx2"/>
+          </a:solidFill>
+        </a:defRPr>
+      </a:lvl8pPr>
+      <a:lvl9pPr eaLnBrk="1" hangingPunct="1">
+        <a:defRPr>
+          <a:solidFill>
+            <a:schemeClr val="tx2"/>
+          </a:solidFill>
+        </a:defRPr>
+      </a:lvl9pPr>
+    </p:titleStyle>
+    <p:bodyStyle>
+      <a:lvl1pPr marL="342900" indent="-342900" algn="l" defTabSz="457200" rtl="0" eaLnBrk="1" latinLnBrk="0" hangingPunct="1">
+        <a:spcBef>
+          <a:spcPts val="1000"/>
+        </a:spcBef>
+        <a:spcAft>
+          <a:spcPts val="0"/>
+        </a:spcAft>
+        <a:buClr>
+          <a:schemeClr val="accent1">
+            <a:lumMod val="60000"/>
+            <a:lumOff val="40000"/>
+          </a:schemeClr>
+        </a:buClr>
+        <a:buSzPct val="80000"/>
+        <a:buFont typeface="Wingdings 3" charset="2"/>
+        <a:buChar char=""/>
+        <a:defRPr sz="2000" b="0" i="0" kern="1200">
           <a:solidFill>
             <a:schemeClr val="tx1"/>
           </a:solidFill>
@@ -3073,18 +5742,213 @@
           <a:cs typeface="+mj-cs"/>
         </a:defRPr>
       </a:lvl1pPr>
-    </p:titleStyle>
-    <p:bodyStyle>
-      <a:lvl1pPr marL="228600" indent="-228600" algn="l" defTabSz="914400" rtl="0" eaLnBrk="1" latinLnBrk="0" hangingPunct="1">
-        <a:lnSpc>
-          <a:spcPct val="90000"/>
-        </a:lnSpc>
+      <a:lvl2pPr marL="742950" indent="-285750" algn="l" defTabSz="457200" rtl="0" eaLnBrk="1" latinLnBrk="0" hangingPunct="1">
         <a:spcBef>
           <a:spcPts val="1000"/>
         </a:spcBef>
-        <a:buFont typeface="Arial" panose="020B0604020202020204" pitchFamily="34" charset="0"/>
-        <a:buChar char="•"/>
-        <a:defRPr sz="2800" kern="1200">
+        <a:spcAft>
+          <a:spcPts val="0"/>
+        </a:spcAft>
+        <a:buClr>
+          <a:schemeClr val="accent1">
+            <a:lumMod val="60000"/>
+            <a:lumOff val="40000"/>
+          </a:schemeClr>
+        </a:buClr>
+        <a:buSzPct val="80000"/>
+        <a:buFont typeface="Wingdings 3" charset="2"/>
+        <a:buChar char=""/>
+        <a:defRPr sz="1800" b="0" i="0" kern="1200">
+          <a:solidFill>
+            <a:schemeClr val="tx1"/>
+          </a:solidFill>
+          <a:latin typeface="+mj-lt"/>
+          <a:ea typeface="+mj-ea"/>
+          <a:cs typeface="+mj-cs"/>
+        </a:defRPr>
+      </a:lvl2pPr>
+      <a:lvl3pPr marL="1143000" indent="-228600" algn="l" defTabSz="457200" rtl="0" eaLnBrk="1" latinLnBrk="0" hangingPunct="1">
+        <a:spcBef>
+          <a:spcPts val="1000"/>
+        </a:spcBef>
+        <a:spcAft>
+          <a:spcPts val="0"/>
+        </a:spcAft>
+        <a:buClr>
+          <a:schemeClr val="accent1">
+            <a:lumMod val="60000"/>
+            <a:lumOff val="40000"/>
+          </a:schemeClr>
+        </a:buClr>
+        <a:buSzPct val="80000"/>
+        <a:buFont typeface="Wingdings 3" charset="2"/>
+        <a:buChar char=""/>
+        <a:defRPr sz="1600" b="0" i="0" kern="1200">
+          <a:solidFill>
+            <a:schemeClr val="tx1"/>
+          </a:solidFill>
+          <a:latin typeface="+mj-lt"/>
+          <a:ea typeface="+mj-ea"/>
+          <a:cs typeface="+mj-cs"/>
+        </a:defRPr>
+      </a:lvl3pPr>
+      <a:lvl4pPr marL="1600200" indent="-228600" algn="l" defTabSz="457200" rtl="0" eaLnBrk="1" latinLnBrk="0" hangingPunct="1">
+        <a:spcBef>
+          <a:spcPts val="1000"/>
+        </a:spcBef>
+        <a:spcAft>
+          <a:spcPts val="0"/>
+        </a:spcAft>
+        <a:buClr>
+          <a:schemeClr val="accent1">
+            <a:lumMod val="60000"/>
+            <a:lumOff val="40000"/>
+          </a:schemeClr>
+        </a:buClr>
+        <a:buSzPct val="80000"/>
+        <a:buFont typeface="Wingdings 3" charset="2"/>
+        <a:buChar char=""/>
+        <a:defRPr sz="1400" b="0" i="0" kern="1200">
+          <a:solidFill>
+            <a:schemeClr val="tx1"/>
+          </a:solidFill>
+          <a:latin typeface="+mj-lt"/>
+          <a:ea typeface="+mj-ea"/>
+          <a:cs typeface="+mj-cs"/>
+        </a:defRPr>
+      </a:lvl4pPr>
+      <a:lvl5pPr marL="2057400" indent="-228600" algn="l" defTabSz="457200" rtl="0" eaLnBrk="1" latinLnBrk="0" hangingPunct="1">
+        <a:spcBef>
+          <a:spcPts val="1000"/>
+        </a:spcBef>
+        <a:spcAft>
+          <a:spcPts val="0"/>
+        </a:spcAft>
+        <a:buClr>
+          <a:schemeClr val="accent1">
+            <a:lumMod val="60000"/>
+            <a:lumOff val="40000"/>
+          </a:schemeClr>
+        </a:buClr>
+        <a:buSzPct val="80000"/>
+        <a:buFont typeface="Wingdings 3" charset="2"/>
+        <a:buChar char=""/>
+        <a:defRPr sz="1400" b="0" i="0" kern="1200">
+          <a:solidFill>
+            <a:schemeClr val="tx1"/>
+          </a:solidFill>
+          <a:latin typeface="+mj-lt"/>
+          <a:ea typeface="+mj-ea"/>
+          <a:cs typeface="+mj-cs"/>
+        </a:defRPr>
+      </a:lvl5pPr>
+      <a:lvl6pPr marL="2514600" indent="-228600" algn="l" defTabSz="457200" rtl="0" eaLnBrk="1" latinLnBrk="0" hangingPunct="1">
+        <a:spcBef>
+          <a:spcPts val="1000"/>
+        </a:spcBef>
+        <a:spcAft>
+          <a:spcPts val="0"/>
+        </a:spcAft>
+        <a:buClr>
+          <a:schemeClr val="accent1">
+            <a:lumMod val="60000"/>
+            <a:lumOff val="40000"/>
+          </a:schemeClr>
+        </a:buClr>
+        <a:buSzPct val="80000"/>
+        <a:buFont typeface="Wingdings 3" charset="2"/>
+        <a:buChar char=""/>
+        <a:defRPr sz="1400" b="0" i="0" kern="1200">
+          <a:solidFill>
+            <a:schemeClr val="tx1"/>
+          </a:solidFill>
+          <a:latin typeface="+mj-lt"/>
+          <a:ea typeface="+mj-ea"/>
+          <a:cs typeface="+mj-cs"/>
+        </a:defRPr>
+      </a:lvl6pPr>
+      <a:lvl7pPr marL="2971800" indent="-228600" algn="l" defTabSz="457200" rtl="0" eaLnBrk="1" latinLnBrk="0" hangingPunct="1">
+        <a:spcBef>
+          <a:spcPts val="1000"/>
+        </a:spcBef>
+        <a:spcAft>
+          <a:spcPts val="0"/>
+        </a:spcAft>
+        <a:buClr>
+          <a:schemeClr val="accent1">
+            <a:lumMod val="60000"/>
+            <a:lumOff val="40000"/>
+          </a:schemeClr>
+        </a:buClr>
+        <a:buSzPct val="80000"/>
+        <a:buFont typeface="Wingdings 3" charset="2"/>
+        <a:buChar char=""/>
+        <a:defRPr sz="1400" b="0" i="0" kern="1200">
+          <a:solidFill>
+            <a:schemeClr val="tx1"/>
+          </a:solidFill>
+          <a:latin typeface="+mj-lt"/>
+          <a:ea typeface="+mj-ea"/>
+          <a:cs typeface="+mj-cs"/>
+        </a:defRPr>
+      </a:lvl7pPr>
+      <a:lvl8pPr marL="3429000" indent="-228600" algn="l" defTabSz="457200" rtl="0" eaLnBrk="1" latinLnBrk="0" hangingPunct="1">
+        <a:spcBef>
+          <a:spcPts val="1000"/>
+        </a:spcBef>
+        <a:spcAft>
+          <a:spcPts val="0"/>
+        </a:spcAft>
+        <a:buClr>
+          <a:schemeClr val="accent1">
+            <a:lumMod val="60000"/>
+            <a:lumOff val="40000"/>
+          </a:schemeClr>
+        </a:buClr>
+        <a:buSzPct val="80000"/>
+        <a:buFont typeface="Wingdings 3" charset="2"/>
+        <a:buChar char=""/>
+        <a:defRPr sz="1400" b="0" i="0" kern="1200">
+          <a:solidFill>
+            <a:schemeClr val="tx1"/>
+          </a:solidFill>
+          <a:latin typeface="+mj-lt"/>
+          <a:ea typeface="+mj-ea"/>
+          <a:cs typeface="+mj-cs"/>
+        </a:defRPr>
+      </a:lvl8pPr>
+      <a:lvl9pPr marL="3886200" indent="-228600" algn="l" defTabSz="457200" rtl="0" eaLnBrk="1" latinLnBrk="0" hangingPunct="1">
+        <a:spcBef>
+          <a:spcPts val="1000"/>
+        </a:spcBef>
+        <a:spcAft>
+          <a:spcPts val="0"/>
+        </a:spcAft>
+        <a:buClr>
+          <a:schemeClr val="accent1">
+            <a:lumMod val="60000"/>
+            <a:lumOff val="40000"/>
+          </a:schemeClr>
+        </a:buClr>
+        <a:buSzPct val="80000"/>
+        <a:buFont typeface="Wingdings 3" charset="2"/>
+        <a:buChar char=""/>
+        <a:defRPr sz="1400" b="0" i="0" kern="1200">
+          <a:solidFill>
+            <a:schemeClr val="tx1"/>
+          </a:solidFill>
+          <a:latin typeface="+mj-lt"/>
+          <a:ea typeface="+mj-ea"/>
+          <a:cs typeface="+mj-cs"/>
+        </a:defRPr>
+      </a:lvl9pPr>
+    </p:bodyStyle>
+    <p:otherStyle>
+      <a:defPPr>
+        <a:defRPr lang="en-US"/>
+      </a:defPPr>
+      <a:lvl1pPr marL="0" algn="l" defTabSz="457200" rtl="0" eaLnBrk="1" latinLnBrk="0" hangingPunct="1">
+        <a:defRPr sz="1800" kern="1200">
           <a:solidFill>
             <a:schemeClr val="tx1"/>
           </a:solidFill>
@@ -3093,16 +5957,8 @@
           <a:cs typeface="+mn-cs"/>
         </a:defRPr>
       </a:lvl1pPr>
-      <a:lvl2pPr marL="685800" indent="-228600" algn="l" defTabSz="914400" rtl="0" eaLnBrk="1" latinLnBrk="0" hangingPunct="1">
-        <a:lnSpc>
-          <a:spcPct val="90000"/>
-        </a:lnSpc>
-        <a:spcBef>
-          <a:spcPts val="500"/>
-        </a:spcBef>
-        <a:buFont typeface="Arial" panose="020B0604020202020204" pitchFamily="34" charset="0"/>
-        <a:buChar char="•"/>
-        <a:defRPr sz="2400" kern="1200">
+      <a:lvl2pPr marL="457200" algn="l" defTabSz="457200" rtl="0" eaLnBrk="1" latinLnBrk="0" hangingPunct="1">
+        <a:defRPr sz="1800" kern="1200">
           <a:solidFill>
             <a:schemeClr val="tx1"/>
           </a:solidFill>
@@ -3111,16 +5967,8 @@
           <a:cs typeface="+mn-cs"/>
         </a:defRPr>
       </a:lvl2pPr>
-      <a:lvl3pPr marL="1143000" indent="-228600" algn="l" defTabSz="914400" rtl="0" eaLnBrk="1" latinLnBrk="0" hangingPunct="1">
-        <a:lnSpc>
-          <a:spcPct val="90000"/>
-        </a:lnSpc>
-        <a:spcBef>
-          <a:spcPts val="500"/>
-        </a:spcBef>
-        <a:buFont typeface="Arial" panose="020B0604020202020204" pitchFamily="34" charset="0"/>
-        <a:buChar char="•"/>
-        <a:defRPr sz="2000" kern="1200">
+      <a:lvl3pPr marL="914400" algn="l" defTabSz="457200" rtl="0" eaLnBrk="1" latinLnBrk="0" hangingPunct="1">
+        <a:defRPr sz="1800" kern="1200">
           <a:solidFill>
             <a:schemeClr val="tx1"/>
           </a:solidFill>
@@ -3129,15 +5977,7 @@
           <a:cs typeface="+mn-cs"/>
         </a:defRPr>
       </a:lvl3pPr>
-      <a:lvl4pPr marL="1600200" indent="-228600" algn="l" defTabSz="914400" rtl="0" eaLnBrk="1" latinLnBrk="0" hangingPunct="1">
-        <a:lnSpc>
-          <a:spcPct val="90000"/>
-        </a:lnSpc>
-        <a:spcBef>
-          <a:spcPts val="500"/>
-        </a:spcBef>
-        <a:buFont typeface="Arial" panose="020B0604020202020204" pitchFamily="34" charset="0"/>
-        <a:buChar char="•"/>
+      <a:lvl4pPr marL="1371600" algn="l" defTabSz="457200" rtl="0" eaLnBrk="1" latinLnBrk="0" hangingPunct="1">
         <a:defRPr sz="1800" kern="1200">
           <a:solidFill>
             <a:schemeClr val="tx1"/>
@@ -3147,15 +5987,7 @@
           <a:cs typeface="+mn-cs"/>
         </a:defRPr>
       </a:lvl4pPr>
-      <a:lvl5pPr marL="2057400" indent="-228600" algn="l" defTabSz="914400" rtl="0" eaLnBrk="1" latinLnBrk="0" hangingPunct="1">
-        <a:lnSpc>
-          <a:spcPct val="90000"/>
-        </a:lnSpc>
-        <a:spcBef>
-          <a:spcPts val="500"/>
-        </a:spcBef>
-        <a:buFont typeface="Arial" panose="020B0604020202020204" pitchFamily="34" charset="0"/>
-        <a:buChar char="•"/>
+      <a:lvl5pPr marL="1828800" algn="l" defTabSz="457200" rtl="0" eaLnBrk="1" latinLnBrk="0" hangingPunct="1">
         <a:defRPr sz="1800" kern="1200">
           <a:solidFill>
             <a:schemeClr val="tx1"/>
@@ -3165,15 +5997,7 @@
           <a:cs typeface="+mn-cs"/>
         </a:defRPr>
       </a:lvl5pPr>
-      <a:lvl6pPr marL="2514600" indent="-228600" algn="l" defTabSz="914400" rtl="0" eaLnBrk="1" latinLnBrk="0" hangingPunct="1">
-        <a:lnSpc>
-          <a:spcPct val="90000"/>
-        </a:lnSpc>
-        <a:spcBef>
-          <a:spcPts val="500"/>
-        </a:spcBef>
-        <a:buFont typeface="Arial" panose="020B0604020202020204" pitchFamily="34" charset="0"/>
-        <a:buChar char="•"/>
+      <a:lvl6pPr marL="2286000" algn="l" defTabSz="457200" rtl="0" eaLnBrk="1" latinLnBrk="0" hangingPunct="1">
         <a:defRPr sz="1800" kern="1200">
           <a:solidFill>
             <a:schemeClr val="tx1"/>
@@ -3183,15 +6007,7 @@
           <a:cs typeface="+mn-cs"/>
         </a:defRPr>
       </a:lvl6pPr>
-      <a:lvl7pPr marL="2971800" indent="-228600" algn="l" defTabSz="914400" rtl="0" eaLnBrk="1" latinLnBrk="0" hangingPunct="1">
-        <a:lnSpc>
-          <a:spcPct val="90000"/>
-        </a:lnSpc>
-        <a:spcBef>
-          <a:spcPts val="500"/>
-        </a:spcBef>
-        <a:buFont typeface="Arial" panose="020B0604020202020204" pitchFamily="34" charset="0"/>
-        <a:buChar char="•"/>
+      <a:lvl7pPr marL="2743200" algn="l" defTabSz="457200" rtl="0" eaLnBrk="1" latinLnBrk="0" hangingPunct="1">
         <a:defRPr sz="1800" kern="1200">
           <a:solidFill>
             <a:schemeClr val="tx1"/>
@@ -3201,15 +6017,7 @@
           <a:cs typeface="+mn-cs"/>
         </a:defRPr>
       </a:lvl7pPr>
-      <a:lvl8pPr marL="3429000" indent="-228600" algn="l" defTabSz="914400" rtl="0" eaLnBrk="1" latinLnBrk="0" hangingPunct="1">
-        <a:lnSpc>
-          <a:spcPct val="90000"/>
-        </a:lnSpc>
-        <a:spcBef>
-          <a:spcPts val="500"/>
-        </a:spcBef>
-        <a:buFont typeface="Arial" panose="020B0604020202020204" pitchFamily="34" charset="0"/>
-        <a:buChar char="•"/>
+      <a:lvl8pPr marL="3200400" algn="l" defTabSz="457200" rtl="0" eaLnBrk="1" latinLnBrk="0" hangingPunct="1">
         <a:defRPr sz="1800" kern="1200">
           <a:solidFill>
             <a:schemeClr val="tx1"/>
@@ -3219,110 +6027,7 @@
           <a:cs typeface="+mn-cs"/>
         </a:defRPr>
       </a:lvl8pPr>
-      <a:lvl9pPr marL="3886200" indent="-228600" algn="l" defTabSz="914400" rtl="0" eaLnBrk="1" latinLnBrk="0" hangingPunct="1">
-        <a:lnSpc>
-          <a:spcPct val="90000"/>
-        </a:lnSpc>
-        <a:spcBef>
-          <a:spcPts val="500"/>
-        </a:spcBef>
-        <a:buFont typeface="Arial" panose="020B0604020202020204" pitchFamily="34" charset="0"/>
-        <a:buChar char="•"/>
-        <a:defRPr sz="1800" kern="1200">
-          <a:solidFill>
-            <a:schemeClr val="tx1"/>
-          </a:solidFill>
-          <a:latin typeface="+mn-lt"/>
-          <a:ea typeface="+mn-ea"/>
-          <a:cs typeface="+mn-cs"/>
-        </a:defRPr>
-      </a:lvl9pPr>
-    </p:bodyStyle>
-    <p:otherStyle>
-      <a:defPPr>
-        <a:defRPr lang="en-US"/>
-      </a:defPPr>
-      <a:lvl1pPr marL="0" algn="l" defTabSz="914400" rtl="0" eaLnBrk="1" latinLnBrk="0" hangingPunct="1">
-        <a:defRPr sz="1800" kern="1200">
-          <a:solidFill>
-            <a:schemeClr val="tx1"/>
-          </a:solidFill>
-          <a:latin typeface="+mn-lt"/>
-          <a:ea typeface="+mn-ea"/>
-          <a:cs typeface="+mn-cs"/>
-        </a:defRPr>
-      </a:lvl1pPr>
-      <a:lvl2pPr marL="457200" algn="l" defTabSz="914400" rtl="0" eaLnBrk="1" latinLnBrk="0" hangingPunct="1">
-        <a:defRPr sz="1800" kern="1200">
-          <a:solidFill>
-            <a:schemeClr val="tx1"/>
-          </a:solidFill>
-          <a:latin typeface="+mn-lt"/>
-          <a:ea typeface="+mn-ea"/>
-          <a:cs typeface="+mn-cs"/>
-        </a:defRPr>
-      </a:lvl2pPr>
-      <a:lvl3pPr marL="914400" algn="l" defTabSz="914400" rtl="0" eaLnBrk="1" latinLnBrk="0" hangingPunct="1">
-        <a:defRPr sz="1800" kern="1200">
-          <a:solidFill>
-            <a:schemeClr val="tx1"/>
-          </a:solidFill>
-          <a:latin typeface="+mn-lt"/>
-          <a:ea typeface="+mn-ea"/>
-          <a:cs typeface="+mn-cs"/>
-        </a:defRPr>
-      </a:lvl3pPr>
-      <a:lvl4pPr marL="1371600" algn="l" defTabSz="914400" rtl="0" eaLnBrk="1" latinLnBrk="0" hangingPunct="1">
-        <a:defRPr sz="1800" kern="1200">
-          <a:solidFill>
-            <a:schemeClr val="tx1"/>
-          </a:solidFill>
-          <a:latin typeface="+mn-lt"/>
-          <a:ea typeface="+mn-ea"/>
-          <a:cs typeface="+mn-cs"/>
-        </a:defRPr>
-      </a:lvl4pPr>
-      <a:lvl5pPr marL="1828800" algn="l" defTabSz="914400" rtl="0" eaLnBrk="1" latinLnBrk="0" hangingPunct="1">
-        <a:defRPr sz="1800" kern="1200">
-          <a:solidFill>
-            <a:schemeClr val="tx1"/>
-          </a:solidFill>
-          <a:latin typeface="+mn-lt"/>
-          <a:ea typeface="+mn-ea"/>
-          <a:cs typeface="+mn-cs"/>
-        </a:defRPr>
-      </a:lvl5pPr>
-      <a:lvl6pPr marL="2286000" algn="l" defTabSz="914400" rtl="0" eaLnBrk="1" latinLnBrk="0" hangingPunct="1">
-        <a:defRPr sz="1800" kern="1200">
-          <a:solidFill>
-            <a:schemeClr val="tx1"/>
-          </a:solidFill>
-          <a:latin typeface="+mn-lt"/>
-          <a:ea typeface="+mn-ea"/>
-          <a:cs typeface="+mn-cs"/>
-        </a:defRPr>
-      </a:lvl6pPr>
-      <a:lvl7pPr marL="2743200" algn="l" defTabSz="914400" rtl="0" eaLnBrk="1" latinLnBrk="0" hangingPunct="1">
-        <a:defRPr sz="1800" kern="1200">
-          <a:solidFill>
-            <a:schemeClr val="tx1"/>
-          </a:solidFill>
-          <a:latin typeface="+mn-lt"/>
-          <a:ea typeface="+mn-ea"/>
-          <a:cs typeface="+mn-cs"/>
-        </a:defRPr>
-      </a:lvl7pPr>
-      <a:lvl8pPr marL="3200400" algn="l" defTabSz="914400" rtl="0" eaLnBrk="1" latinLnBrk="0" hangingPunct="1">
-        <a:defRPr sz="1800" kern="1200">
-          <a:solidFill>
-            <a:schemeClr val="tx1"/>
-          </a:solidFill>
-          <a:latin typeface="+mn-lt"/>
-          <a:ea typeface="+mn-ea"/>
-          <a:cs typeface="+mn-cs"/>
-        </a:defRPr>
-      </a:lvl8pPr>
-      <a:lvl9pPr marL="3657600" algn="l" defTabSz="914400" rtl="0" eaLnBrk="1" latinLnBrk="0" hangingPunct="1">
+      <a:lvl9pPr marL="3657600" algn="l" defTabSz="457200" rtl="0" eaLnBrk="1" latinLnBrk="0" hangingPunct="1">
         <a:defRPr sz="1800" kern="1200">
           <a:solidFill>
             <a:schemeClr val="tx1"/>
@@ -3370,24 +6075,139 @@
             <p:ph type="ctrTitle"/>
           </p:nvPr>
         </p:nvSpPr>
-        <p:spPr/>
+        <p:spPr>
+          <a:xfrm>
+            <a:off x="421175" y="688266"/>
+            <a:ext cx="10293215" cy="1843749"/>
+          </a:xfrm>
+        </p:spPr>
         <p:txBody>
           <a:bodyPr/>
           <a:lstStyle/>
           <a:p>
-            <a:endParaRPr lang="en-GB" dirty="0"/>
-          </a:p>
-        </p:txBody>
-      </p:sp>
-      <p:sp>
-        <p:nvSpPr>
-          <p:cNvPr id="3" name="Subtitle 2">
+            <a:r>
+              <a:rPr lang="en-GB" sz="3600" dirty="0"/>
+              <a:t>Environmental Guidance in Digital Games: Influencing Player Navigation Without Explicit Instruction </a:t>
+            </a:r>
+          </a:p>
+        </p:txBody>
+      </p:sp>
+      <p:sp>
+        <p:nvSpPr>
+          <p:cNvPr id="4" name="Title 1">
             <a:extLst>
               <a:ext uri="{FF2B5EF4-FFF2-40B4-BE49-F238E27FC236}">
-                <a16:creationId xmlns:a16="http://schemas.microsoft.com/office/drawing/2014/main" id="{99EC89FD-D363-55C5-4885-248E9F33C8C7}"/>
+                <a16:creationId xmlns:a16="http://schemas.microsoft.com/office/drawing/2014/main" id="{D602293E-1EFA-592D-8FD0-D6E28D7D5C0D}"/>
               </a:ext>
             </a:extLst>
           </p:cNvPr>
+          <p:cNvSpPr txBox="1">
+            <a:spLocks/>
+          </p:cNvSpPr>
+          <p:nvPr/>
+        </p:nvSpPr>
+        <p:spPr>
+          <a:xfrm>
+            <a:off x="421175" y="2669175"/>
+            <a:ext cx="2605488" cy="450521"/>
+          </a:xfrm>
+          <a:prstGeom prst="rect">
+            <a:avLst/>
+          </a:prstGeom>
+        </p:spPr>
+        <p:txBody>
+          <a:bodyPr vert="horz" lIns="91440" tIns="45720" rIns="91440" bIns="45720" rtlCol="0" anchor="b">
+            <a:noAutofit/>
+          </a:bodyPr>
+          <a:lstStyle>
+            <a:lvl1pPr algn="l" defTabSz="457200" rtl="0" eaLnBrk="1" latinLnBrk="0" hangingPunct="1">
+              <a:spcBef>
+                <a:spcPct val="0"/>
+              </a:spcBef>
+              <a:buNone/>
+              <a:defRPr sz="7200" b="0" i="0" kern="1200">
+                <a:solidFill>
+                  <a:schemeClr val="tx2"/>
+                </a:solidFill>
+                <a:latin typeface="+mj-lt"/>
+                <a:ea typeface="+mj-ea"/>
+                <a:cs typeface="+mj-cs"/>
+              </a:defRPr>
+            </a:lvl1pPr>
+            <a:lvl2pPr eaLnBrk="1" hangingPunct="1">
+              <a:defRPr>
+                <a:solidFill>
+                  <a:schemeClr val="tx2"/>
+                </a:solidFill>
+              </a:defRPr>
+            </a:lvl2pPr>
+            <a:lvl3pPr eaLnBrk="1" hangingPunct="1">
+              <a:defRPr>
+                <a:solidFill>
+                  <a:schemeClr val="tx2"/>
+                </a:solidFill>
+              </a:defRPr>
+            </a:lvl3pPr>
+            <a:lvl4pPr eaLnBrk="1" hangingPunct="1">
+              <a:defRPr>
+                <a:solidFill>
+                  <a:schemeClr val="tx2"/>
+                </a:solidFill>
+              </a:defRPr>
+            </a:lvl4pPr>
+            <a:lvl5pPr eaLnBrk="1" hangingPunct="1">
+              <a:defRPr>
+                <a:solidFill>
+                  <a:schemeClr val="tx2"/>
+                </a:solidFill>
+              </a:defRPr>
+            </a:lvl5pPr>
+            <a:lvl6pPr eaLnBrk="1" hangingPunct="1">
+              <a:defRPr>
+                <a:solidFill>
+                  <a:schemeClr val="tx2"/>
+                </a:solidFill>
+              </a:defRPr>
+            </a:lvl6pPr>
+            <a:lvl7pPr eaLnBrk="1" hangingPunct="1">
+              <a:defRPr>
+                <a:solidFill>
+                  <a:schemeClr val="tx2"/>
+                </a:solidFill>
+              </a:defRPr>
+            </a:lvl7pPr>
+            <a:lvl8pPr eaLnBrk="1" hangingPunct="1">
+              <a:defRPr>
+                <a:solidFill>
+                  <a:schemeClr val="tx2"/>
+                </a:solidFill>
+              </a:defRPr>
+            </a:lvl8pPr>
+            <a:lvl9pPr eaLnBrk="1" hangingPunct="1">
+              <a:defRPr>
+                <a:solidFill>
+                  <a:schemeClr val="tx2"/>
+                </a:solidFill>
+              </a:defRPr>
+            </a:lvl9pPr>
+          </a:lstStyle>
+          <a:p>
+            <a:r>
+              <a:rPr lang="en-GB" sz="2400" dirty="0"/>
+              <a:t>Morgan Hodge</a:t>
+            </a:r>
+          </a:p>
+        </p:txBody>
+      </p:sp>
+      <p:sp>
+        <p:nvSpPr>
+          <p:cNvPr id="6" name="Subtitle 5">
+            <a:extLst>
+              <a:ext uri="{FF2B5EF4-FFF2-40B4-BE49-F238E27FC236}">
+                <a16:creationId xmlns:a16="http://schemas.microsoft.com/office/drawing/2014/main" id="{1C77D5BD-7574-0068-A0C6-D5B9D308C1D6}"/>
+              </a:ext>
+            </a:extLst>
+          </p:cNvPr>
           <p:cNvSpPr>
             <a:spLocks noGrp="1"/>
           </p:cNvSpPr>
@@ -3395,20 +6215,27 @@
             <p:ph type="subTitle" idx="1"/>
           </p:nvPr>
         </p:nvSpPr>
-        <p:spPr/>
-        <p:txBody>
-          <a:bodyPr/>
+        <p:spPr>
+          <a:xfrm>
+            <a:off x="1852155" y="3738305"/>
+            <a:ext cx="8825658" cy="861420"/>
+          </a:xfrm>
+        </p:spPr>
+        <p:txBody>
+          <a:bodyPr>
+            <a:normAutofit/>
+          </a:bodyPr>
           <a:lstStyle/>
           <a:p>
             <a:r>
               <a:rPr lang="en-GB" dirty="0"/>
-              <a:t>Welcome slide</a:t>
+              <a:t>GitHub Repo:</a:t>
             </a:r>
           </a:p>
           <a:p>
             <a:r>
               <a:rPr lang="en-GB" dirty="0"/>
-              <a:t>Links to my blog and repo </a:t>
+              <a:t>Blog:</a:t>
             </a:r>
           </a:p>
           <a:p>
@@ -3462,7 +6289,12 @@
             <p:ph type="title"/>
           </p:nvPr>
         </p:nvSpPr>
-        <p:spPr/>
+        <p:spPr>
+          <a:xfrm>
+            <a:off x="2421603" y="218699"/>
+            <a:ext cx="6349049" cy="928026"/>
+          </a:xfrm>
+        </p:spPr>
         <p:txBody>
           <a:bodyPr/>
           <a:lstStyle/>
@@ -3490,52 +6322,198 @@
             <p:ph idx="1"/>
           </p:nvPr>
         </p:nvSpPr>
-        <p:spPr/>
-        <p:txBody>
-          <a:bodyPr/>
-          <a:lstStyle/>
-          <a:p>
+        <p:spPr>
+          <a:xfrm>
+            <a:off x="238223" y="1411901"/>
+            <a:ext cx="5233481" cy="4867655"/>
+          </a:xfrm>
+        </p:spPr>
+        <p:txBody>
+          <a:bodyPr>
+            <a:normAutofit lnSpcReduction="10000"/>
+          </a:bodyPr>
+          <a:lstStyle/>
+          <a:p>
+            <a:pPr marL="0" indent="0">
+              <a:buNone/>
+            </a:pPr>
+            <a:r>
+              <a:rPr lang="en-GB" sz="2400" dirty="0"/>
+              <a:t>The Problem </a:t>
+            </a:r>
+          </a:p>
+          <a:p>
+            <a:pPr>
+              <a:buFont typeface="Wingdings" panose="05000000000000000000" pitchFamily="2" charset="2"/>
+              <a:buChar char="Ø"/>
+            </a:pPr>
             <a:r>
               <a:rPr lang="en-GB" dirty="0"/>
-              <a:t>Yellow box method (RE)</a:t>
-            </a:r>
-          </a:p>
-          <a:p>
+              <a:t>Players need guidance to navigate game worlds</a:t>
+            </a:r>
+          </a:p>
+          <a:p>
+            <a:pPr>
+              <a:buFont typeface="Wingdings" panose="05000000000000000000" pitchFamily="2" charset="2"/>
+              <a:buChar char="Ø"/>
+            </a:pPr>
+            <a:endParaRPr lang="en-GB" dirty="0"/>
+          </a:p>
+          <a:p>
+            <a:pPr>
+              <a:buFont typeface="Wingdings" panose="05000000000000000000" pitchFamily="2" charset="2"/>
+              <a:buChar char="Ø"/>
+            </a:pPr>
             <a:r>
               <a:rPr lang="en-GB" dirty="0"/>
-              <a:t>What is my project (idk if  this means context of my project if its not then that’s probs a new slide job)(</a:t>
-            </a:r>
-          </a:p>
-          <a:p>
-            <a:endParaRPr lang="en-GB" dirty="0"/>
+              <a:t>Traditional guidance systems include:</a:t>
+            </a:r>
+          </a:p>
+          <a:p>
+            <a:pPr lvl="1">
+              <a:buFont typeface="Courier New" panose="02070309020205020404" pitchFamily="49" charset="0"/>
+              <a:buChar char="o"/>
+            </a:pPr>
+            <a:r>
+              <a:rPr lang="en-GB" sz="2000" dirty="0"/>
+              <a:t>Quest markers </a:t>
+            </a:r>
+          </a:p>
+          <a:p>
+            <a:pPr lvl="1">
+              <a:buFont typeface="Courier New" panose="02070309020205020404" pitchFamily="49" charset="0"/>
+              <a:buChar char="o"/>
+            </a:pPr>
+            <a:r>
+              <a:rPr lang="en-GB" sz="2000" dirty="0"/>
+              <a:t>Mini map indicators</a:t>
+            </a:r>
+          </a:p>
+          <a:p>
+            <a:pPr lvl="1">
+              <a:buFont typeface="Courier New" panose="02070309020205020404" pitchFamily="49" charset="0"/>
+              <a:buChar char="o"/>
+            </a:pPr>
+            <a:r>
+              <a:rPr lang="en-GB" sz="2000" dirty="0"/>
+              <a:t>Tutorial Prompts</a:t>
+            </a:r>
+          </a:p>
+          <a:p>
+            <a:pPr lvl="1">
+              <a:buFont typeface="Courier New" panose="02070309020205020404" pitchFamily="49" charset="0"/>
+              <a:buChar char="o"/>
+            </a:pPr>
+            <a:r>
+              <a:rPr lang="en-GB" sz="2000" dirty="0"/>
+              <a:t>Coloured assets </a:t>
+            </a:r>
+          </a:p>
+          <a:p>
+            <a:pPr lvl="1">
+              <a:buFont typeface="Courier New" panose="02070309020205020404" pitchFamily="49" charset="0"/>
+              <a:buChar char="o"/>
+            </a:pPr>
+            <a:endParaRPr lang="en-GB" sz="2000" dirty="0"/>
           </a:p>
           <a:p>
             <a:r>
               <a:rPr lang="en-GB" dirty="0"/>
-              <a:t>I will be </a:t>
-            </a:r>
-            <a:r>
-              <a:rPr lang="en-GB" dirty="0" err="1"/>
-              <a:t>investgating</a:t>
-            </a:r>
-            <a:r>
-              <a:rPr lang="en-GB" dirty="0"/>
-              <a:t> different guidance techniques and then how they work together and when to use them combined</a:t>
-            </a:r>
-          </a:p>
-          <a:p>
-            <a:r>
-              <a:rPr lang="en-GB" dirty="0"/>
-              <a:t>For example if you want the player to go into a room you may have audio coming from the room with maybe a light sign above it </a:t>
-            </a:r>
-            <a:r>
-              <a:rPr lang="en-GB"/>
-              <a:t>or something or have the door open </a:t>
-            </a:r>
-            <a:endParaRPr lang="en-GB" dirty="0"/>
-          </a:p>
-        </p:txBody>
-      </p:sp>
+              <a:t>While these traditional methods are effective, they can reduce immersion and player discovery </a:t>
+            </a:r>
+          </a:p>
+        </p:txBody>
+      </p:sp>
+      <p:pic>
+        <p:nvPicPr>
+          <p:cNvPr id="4" name="Picture 3" descr="Step 8 Play the objective.">
+            <a:extLst>
+              <a:ext uri="{FF2B5EF4-FFF2-40B4-BE49-F238E27FC236}">
+                <a16:creationId xmlns:a16="http://schemas.microsoft.com/office/drawing/2014/main" id="{0FCEFB87-E5B3-DF2E-28F1-20733659483E}"/>
+              </a:ext>
+            </a:extLst>
+          </p:cNvPr>
+          <p:cNvPicPr>
+            <a:picLocks noChangeAspect="1"/>
+          </p:cNvPicPr>
+          <p:nvPr/>
+        </p:nvPicPr>
+        <p:blipFill>
+          <a:blip r:embed="rId2"/>
+          <a:stretch>
+            <a:fillRect/>
+          </a:stretch>
+        </p:blipFill>
+        <p:spPr>
+          <a:xfrm>
+            <a:off x="5511505" y="4846320"/>
+            <a:ext cx="2601918" cy="1951439"/>
+          </a:xfrm>
+          <a:prstGeom prst="rect">
+            <a:avLst/>
+          </a:prstGeom>
+        </p:spPr>
+      </p:pic>
+      <p:pic>
+        <p:nvPicPr>
+          <p:cNvPr id="5" name="Picture 4" descr="Red Dead Online Introduction Tutorial Walkthrough">
+            <a:extLst>
+              <a:ext uri="{FF2B5EF4-FFF2-40B4-BE49-F238E27FC236}">
+                <a16:creationId xmlns:a16="http://schemas.microsoft.com/office/drawing/2014/main" id="{3207058F-157F-FD6A-01FA-3A16BD1E9AF6}"/>
+              </a:ext>
+            </a:extLst>
+          </p:cNvPr>
+          <p:cNvPicPr>
+            <a:picLocks noChangeAspect="1"/>
+          </p:cNvPicPr>
+          <p:nvPr/>
+        </p:nvPicPr>
+        <p:blipFill>
+          <a:blip r:embed="rId3"/>
+          <a:stretch>
+            <a:fillRect/>
+          </a:stretch>
+        </p:blipFill>
+        <p:spPr>
+          <a:xfrm>
+            <a:off x="8193024" y="5018058"/>
+            <a:ext cx="3925030" cy="1651155"/>
+          </a:xfrm>
+          <a:prstGeom prst="rect">
+            <a:avLst/>
+          </a:prstGeom>
+        </p:spPr>
+      </p:pic>
+      <p:pic>
+        <p:nvPicPr>
+          <p:cNvPr id="6" name="Picture 5" descr="game ui design mechanics">
+            <a:extLst>
+              <a:ext uri="{FF2B5EF4-FFF2-40B4-BE49-F238E27FC236}">
+                <a16:creationId xmlns:a16="http://schemas.microsoft.com/office/drawing/2014/main" id="{EC286032-803B-723A-2764-9FC8E3E6C0B0}"/>
+              </a:ext>
+            </a:extLst>
+          </p:cNvPr>
+          <p:cNvPicPr>
+            <a:picLocks noChangeAspect="1"/>
+          </p:cNvPicPr>
+          <p:nvPr/>
+        </p:nvPicPr>
+        <p:blipFill>
+          <a:blip r:embed="rId4"/>
+          <a:stretch>
+            <a:fillRect/>
+          </a:stretch>
+        </p:blipFill>
+        <p:spPr>
+          <a:xfrm>
+            <a:off x="6812464" y="1229021"/>
+            <a:ext cx="5305590" cy="3535003"/>
+          </a:xfrm>
+          <a:prstGeom prst="rect">
+            <a:avLst/>
+          </a:prstGeom>
+        </p:spPr>
+      </p:pic>
     </p:spTree>
     <p:extLst>
       <p:ext uri="{BB962C8B-B14F-4D97-AF65-F5344CB8AC3E}">
@@ -3584,8 +6562,8 @@
         </p:nvSpPr>
         <p:spPr>
           <a:xfrm>
-            <a:off x="1837944" y="136525"/>
-            <a:ext cx="8516112" cy="1325563"/>
+            <a:off x="603504" y="355981"/>
+            <a:ext cx="9750552" cy="814451"/>
           </a:xfrm>
         </p:spPr>
         <p:txBody>
@@ -4088,9 +7066,9 @@
 </file>
 
 <file path=ppt/theme/theme1.xml><?xml version="1.0" encoding="utf-8"?>
-<a:theme xmlns:a="http://schemas.openxmlformats.org/drawingml/2006/main" name="Office Theme">
+<a:theme xmlns:a="http://schemas.openxmlformats.org/drawingml/2006/main" name="Ion">
   <a:themeElements>
-    <a:clrScheme name="Office">
+    <a:clrScheme name="Office 2013 - 2022">
       <a:dk1>
         <a:sysClr val="windowText" lastClr="000000"/>
       </a:dk1>
@@ -4098,44 +7076,44 @@
         <a:sysClr val="window" lastClr="FFFFFF"/>
       </a:lt1>
       <a:dk2>
-        <a:srgbClr val="0E2841"/>
+        <a:srgbClr val="44546A"/>
       </a:dk2>
       <a:lt2>
-        <a:srgbClr val="E8E8E8"/>
+        <a:srgbClr val="E7E6E6"/>
       </a:lt2>
       <a:accent1>
-        <a:srgbClr val="156082"/>
+        <a:srgbClr val="4472C4"/>
       </a:accent1>
       <a:accent2>
-        <a:srgbClr val="E97132"/>
+        <a:srgbClr val="ED7D31"/>
       </a:accent2>
       <a:accent3>
-        <a:srgbClr val="196B24"/>
+        <a:srgbClr val="A5A5A5"/>
       </a:accent3>
       <a:accent4>
-        <a:srgbClr val="0F9ED5"/>
+        <a:srgbClr val="FFC000"/>
       </a:accent4>
       <a:accent5>
-        <a:srgbClr val="A02B93"/>
+        <a:srgbClr val="5B9BD5"/>
       </a:accent5>
       <a:accent6>
-        <a:srgbClr val="4EA72E"/>
+        <a:srgbClr val="70AD47"/>
       </a:accent6>
       <a:hlink>
-        <a:srgbClr val="467886"/>
+        <a:srgbClr val="0563C1"/>
       </a:hlink>
       <a:folHlink>
-        <a:srgbClr val="96607D"/>
+        <a:srgbClr val="954F72"/>
       </a:folHlink>
     </a:clrScheme>
-    <a:fontScheme name="Office">
+    <a:fontScheme name="Ion">
       <a:majorFont>
-        <a:latin typeface="Aptos Display" panose="02110004020202020204"/>
+        <a:latin typeface="Century Gothic" panose="020B0502020202020204"/>
         <a:ea typeface=""/>
         <a:cs typeface=""/>
-        <a:font script="Jpan" typeface="游ゴシック Light"/>
+        <a:font script="Jpan" typeface="メイリオ"/>
         <a:font script="Hang" typeface="맑은 고딕"/>
-        <a:font script="Hans" typeface="等线 Light"/>
+        <a:font script="Hans" typeface="宋体"/>
         <a:font script="Hant" typeface="新細明體"/>
         <a:font script="Arab" typeface="Times New Roman"/>
         <a:font script="Hebr" typeface="Times New Roman"/>
@@ -4163,31 +7141,14 @@
         <a:font script="Viet" typeface="Times New Roman"/>
         <a:font script="Uigh" typeface="Microsoft Uighur"/>
         <a:font script="Geor" typeface="Sylfaen"/>
-        <a:font script="Armn" typeface="Arial"/>
-        <a:font script="Bugi" typeface="Leelawadee UI"/>
-        <a:font script="Bopo" typeface="Microsoft JhengHei"/>
-        <a:font script="Java" typeface="Javanese Text"/>
-        <a:font script="Lisu" typeface="Segoe UI"/>
-        <a:font script="Mymr" typeface="Myanmar Text"/>
-        <a:font script="Nkoo" typeface="Ebrima"/>
-        <a:font script="Olck" typeface="Nirmala UI"/>
-        <a:font script="Osma" typeface="Ebrima"/>
-        <a:font script="Phag" typeface="Phagspa"/>
-        <a:font script="Syrn" typeface="Estrangelo Edessa"/>
-        <a:font script="Syrj" typeface="Estrangelo Edessa"/>
-        <a:font script="Syre" typeface="Estrangelo Edessa"/>
-        <a:font script="Sora" typeface="Nirmala UI"/>
-        <a:font script="Tale" typeface="Microsoft Tai Le"/>
-        <a:font script="Talu" typeface="Microsoft New Tai Lue"/>
-        <a:font script="Tfng" typeface="Ebrima"/>
       </a:majorFont>
       <a:minorFont>
-        <a:latin typeface="Aptos" panose="02110004020202020204"/>
+        <a:latin typeface="Century Gothic" panose="020B0502020202020204"/>
         <a:ea typeface=""/>
         <a:cs typeface=""/>
-        <a:font script="Jpan" typeface="游ゴシック"/>
+        <a:font script="Jpan" typeface="メイリオ"/>
         <a:font script="Hang" typeface="맑은 고딕"/>
-        <a:font script="Hans" typeface="等线"/>
+        <a:font script="Hans" typeface="宋体"/>
         <a:font script="Hant" typeface="新細明體"/>
         <a:font script="Arab" typeface="Arial"/>
         <a:font script="Hebr" typeface="Arial"/>
@@ -4215,26 +7176,9 @@
         <a:font script="Viet" typeface="Arial"/>
         <a:font script="Uigh" typeface="Microsoft Uighur"/>
         <a:font script="Geor" typeface="Sylfaen"/>
-        <a:font script="Armn" typeface="Arial"/>
-        <a:font script="Bugi" typeface="Leelawadee UI"/>
-        <a:font script="Bopo" typeface="Microsoft JhengHei"/>
-        <a:font script="Java" typeface="Javanese Text"/>
-        <a:font script="Lisu" typeface="Segoe UI"/>
-        <a:font script="Mymr" typeface="Myanmar Text"/>
-        <a:font script="Nkoo" typeface="Ebrima"/>
-        <a:font script="Olck" typeface="Nirmala UI"/>
-        <a:font script="Osma" typeface="Ebrima"/>
-        <a:font script="Phag" typeface="Phagspa"/>
-        <a:font script="Syrn" typeface="Estrangelo Edessa"/>
-        <a:font script="Syrj" typeface="Estrangelo Edessa"/>
-        <a:font script="Syre" typeface="Estrangelo Edessa"/>
-        <a:font script="Sora" typeface="Nirmala UI"/>
-        <a:font script="Tale" typeface="Microsoft Tai Le"/>
-        <a:font script="Talu" typeface="Microsoft New Tai Lue"/>
-        <a:font script="Tfng" typeface="Ebrima"/>
       </a:minorFont>
     </a:fontScheme>
-    <a:fmtScheme name="Office">
+    <a:fmtScheme name="Ion">
       <a:fillStyleLst>
         <a:solidFill>
           <a:schemeClr val="phClr"/>
@@ -4243,23 +7187,15 @@
           <a:gsLst>
             <a:gs pos="0">
               <a:schemeClr val="phClr">
-                <a:lumMod val="110000"/>
-                <a:satMod val="105000"/>
-                <a:tint val="67000"/>
-              </a:schemeClr>
-            </a:gs>
-            <a:gs pos="50000">
-              <a:schemeClr val="phClr">
-                <a:lumMod val="105000"/>
-                <a:satMod val="103000"/>
-                <a:tint val="73000"/>
+                <a:tint val="64000"/>
+                <a:lumMod val="118000"/>
               </a:schemeClr>
             </a:gs>
             <a:gs pos="100000">
               <a:schemeClr val="phClr">
-                <a:lumMod val="105000"/>
-                <a:satMod val="109000"/>
-                <a:tint val="81000"/>
+                <a:tint val="92000"/>
+                <a:alpha val="100000"/>
+                <a:lumMod val="110000"/>
               </a:schemeClr>
             </a:gs>
           </a:gsLst>
@@ -4269,23 +7205,14 @@
           <a:gsLst>
             <a:gs pos="0">
               <a:schemeClr val="phClr">
-                <a:satMod val="103000"/>
-                <a:lumMod val="102000"/>
-                <a:tint val="94000"/>
-              </a:schemeClr>
-            </a:gs>
-            <a:gs pos="50000">
-              <a:schemeClr val="phClr">
-                <a:satMod val="110000"/>
-                <a:lumMod val="100000"/>
-                <a:shade val="100000"/>
+                <a:tint val="98000"/>
+                <a:lumMod val="114000"/>
               </a:schemeClr>
             </a:gs>
             <a:gs pos="100000">
               <a:schemeClr val="phClr">
-                <a:lumMod val="99000"/>
-                <a:satMod val="120000"/>
-                <a:shade val="78000"/>
+                <a:shade val="90000"/>
+                <a:lumMod val="84000"/>
               </a:schemeClr>
             </a:gs>
           </a:gsLst>
@@ -4293,26 +7220,23 @@
         </a:gradFill>
       </a:fillStyleLst>
       <a:lnStyleLst>
-        <a:ln w="12700" cap="flat" cmpd="sng" algn="ctr">
+        <a:ln w="9525" cap="rnd" cmpd="sng" algn="ctr">
           <a:solidFill>
             <a:schemeClr val="phClr"/>
           </a:solidFill>
           <a:prstDash val="solid"/>
-          <a:miter lim="800000"/>
         </a:ln>
-        <a:ln w="19050" cap="flat" cmpd="sng" algn="ctr">
+        <a:ln w="19050" cap="rnd" cmpd="sng" algn="ctr">
           <a:solidFill>
             <a:schemeClr val="phClr"/>
           </a:solidFill>
           <a:prstDash val="solid"/>
-          <a:miter lim="800000"/>
         </a:ln>
-        <a:ln w="25400" cap="flat" cmpd="sng" algn="ctr">
+        <a:ln w="28575" cap="rnd" cmpd="sng" algn="ctr">
           <a:solidFill>
             <a:schemeClr val="phClr"/>
           </a:solidFill>
           <a:prstDash val="solid"/>
-          <a:miter lim="800000"/>
         </a:ln>
       </a:lnStyleLst>
       <a:effectStyleLst>
@@ -4320,83 +7244,86 @@
           <a:effectLst/>
         </a:effectStyle>
         <a:effectStyle>
-          <a:effectLst/>
+          <a:effectLst>
+            <a:outerShdw blurRad="38100" dist="25400" dir="5400000" rotWithShape="0">
+              <a:srgbClr val="000000">
+                <a:alpha val="45000"/>
+              </a:srgbClr>
+            </a:outerShdw>
+          </a:effectLst>
         </a:effectStyle>
         <a:effectStyle>
           <a:effectLst>
-            <a:outerShdw blurRad="57150" dist="19050" dir="5400000" algn="ctr" rotWithShape="0">
+            <a:outerShdw blurRad="63500" dist="38100" dir="5400000" rotWithShape="0">
               <a:srgbClr val="000000">
-                <a:alpha val="63000"/>
+                <a:alpha val="60000"/>
               </a:srgbClr>
             </a:outerShdw>
           </a:effectLst>
+          <a:scene3d>
+            <a:camera prst="orthographicFront">
+              <a:rot lat="0" lon="0" rev="0"/>
+            </a:camera>
+            <a:lightRig rig="threePt" dir="tl"/>
+          </a:scene3d>
+          <a:sp3d prstMaterial="plastic">
+            <a:bevelT w="0" h="0"/>
+          </a:sp3d>
         </a:effectStyle>
       </a:effectStyleLst>
       <a:bgFillStyleLst>
         <a:solidFill>
           <a:schemeClr val="phClr"/>
         </a:solidFill>
-        <a:solidFill>
-          <a:schemeClr val="phClr">
-            <a:tint val="95000"/>
-            <a:satMod val="170000"/>
-          </a:schemeClr>
-        </a:solidFill>
         <a:gradFill rotWithShape="1">
           <a:gsLst>
             <a:gs pos="0">
               <a:schemeClr val="phClr">
-                <a:tint val="93000"/>
-                <a:satMod val="150000"/>
-                <a:shade val="98000"/>
-                <a:lumMod val="102000"/>
-              </a:schemeClr>
-            </a:gs>
-            <a:gs pos="50000">
-              <a:schemeClr val="phClr">
                 <a:tint val="98000"/>
-                <a:satMod val="130000"/>
-                <a:shade val="90000"/>
-                <a:lumMod val="103000"/>
+                <a:hueMod val="124000"/>
+                <a:satMod val="148000"/>
+                <a:lumMod val="124000"/>
               </a:schemeClr>
             </a:gs>
             <a:gs pos="100000">
               <a:schemeClr val="phClr">
-                <a:shade val="63000"/>
-                <a:satMod val="120000"/>
+                <a:shade val="76000"/>
+                <a:hueMod val="89000"/>
+                <a:satMod val="164000"/>
+                <a:lumMod val="56000"/>
               </a:schemeClr>
             </a:gs>
           </a:gsLst>
-          <a:lin ang="5400000" scaled="0"/>
+          <a:path path="circle">
+            <a:fillToRect l="45000" t="65000" r="125000" b="100000"/>
+          </a:path>
         </a:gradFill>
+        <a:blipFill rotWithShape="1">
+          <a:blip xmlns:r="http://schemas.openxmlformats.org/officeDocument/2006/relationships" r:embed="rId1">
+            <a:duotone>
+              <a:schemeClr val="phClr">
+                <a:shade val="69000"/>
+                <a:hueMod val="91000"/>
+                <a:satMod val="164000"/>
+                <a:lumMod val="74000"/>
+              </a:schemeClr>
+              <a:schemeClr val="phClr">
+                <a:hueMod val="124000"/>
+                <a:satMod val="140000"/>
+                <a:lumMod val="142000"/>
+              </a:schemeClr>
+            </a:duotone>
+          </a:blip>
+          <a:stretch/>
+        </a:blipFill>
       </a:bgFillStyleLst>
     </a:fmtScheme>
   </a:themeElements>
-  <a:objectDefaults>
-    <a:lnDef>
-      <a:spPr/>
-      <a:bodyPr/>
-      <a:lstStyle/>
-      <a:style>
-        <a:lnRef idx="2">
-          <a:schemeClr val="accent1"/>
-        </a:lnRef>
-        <a:fillRef idx="0">
-          <a:schemeClr val="accent1"/>
-        </a:fillRef>
-        <a:effectRef idx="1">
-          <a:schemeClr val="accent1"/>
-        </a:effectRef>
-        <a:fontRef idx="minor">
-          <a:schemeClr val="tx1"/>
-        </a:fontRef>
-      </a:style>
-    </a:lnDef>
-  </a:objectDefaults>
+  <a:objectDefaults/>
   <a:extraClrSchemeLst/>
   <a:extLst>
     <a:ext uri="{05A4C25C-085E-4340-85A3-A5531E510DB2}">
-      <thm15:themeFamily xmlns:thm15="http://schemas.microsoft.com/office/thememl/2012/main" name="Office Theme" id="{2E142A2C-CD16-42D6-873A-C26D2A0506FA}" vid="{1BDDFF52-6CD6-40A5-AB3C-68EB2F1E4D0A}"/>
+      <thm15:themeFamily xmlns:thm15="http://schemas.microsoft.com/office/thememl/2012/main" name="Ion" id="{B8441ADB-2E43-4AF7-B97A-BD870242C6A8}" vid="{A207AED3-9ABC-4A18-9978-A59B65688B15}"/>
     </a:ext>
   </a:extLst>
 </a:theme>

--- a/Project Proposal/GAM708 Proposal Presentation.pptx
+++ b/Project Proposal/GAM708 Proposal Presentation.pptx
@@ -7,12 +7,13 @@
   <p:sldIdLst>
     <p:sldId id="256" r:id="rId2"/>
     <p:sldId id="257" r:id="rId3"/>
-    <p:sldId id="258" r:id="rId4"/>
-    <p:sldId id="259" r:id="rId5"/>
-    <p:sldId id="260" r:id="rId6"/>
-    <p:sldId id="261" r:id="rId7"/>
-    <p:sldId id="262" r:id="rId8"/>
-    <p:sldId id="263" r:id="rId9"/>
+    <p:sldId id="264" r:id="rId4"/>
+    <p:sldId id="258" r:id="rId5"/>
+    <p:sldId id="259" r:id="rId6"/>
+    <p:sldId id="260" r:id="rId7"/>
+    <p:sldId id="261" r:id="rId8"/>
+    <p:sldId id="262" r:id="rId9"/>
+    <p:sldId id="263" r:id="rId10"/>
   </p:sldIdLst>
   <p:sldSz cx="12192000" cy="6858000"/>
   <p:notesSz cx="6858000" cy="9144000"/>
@@ -305,7 +306,7 @@
           <a:p>
             <a:fld id="{A960F2F5-2F2F-4A65-8AC6-0AF42D8123C9}" type="datetimeFigureOut">
               <a:rPr lang="en-GB" smtClean="0"/>
-              <a:t>15/06/2026</a:t>
+              <a:t>17/06/2026</a:t>
             </a:fld>
             <a:endParaRPr lang="en-GB"/>
           </a:p>
@@ -580,7 +581,7 @@
           <a:p>
             <a:fld id="{A960F2F5-2F2F-4A65-8AC6-0AF42D8123C9}" type="datetimeFigureOut">
               <a:rPr lang="en-GB" smtClean="0"/>
-              <a:t>15/06/2026</a:t>
+              <a:t>17/06/2026</a:t>
             </a:fld>
             <a:endParaRPr lang="en-GB"/>
           </a:p>
@@ -774,7 +775,7 @@
           <a:p>
             <a:fld id="{A960F2F5-2F2F-4A65-8AC6-0AF42D8123C9}" type="datetimeFigureOut">
               <a:rPr lang="en-GB" smtClean="0"/>
-              <a:t>15/06/2026</a:t>
+              <a:t>17/06/2026</a:t>
             </a:fld>
             <a:endParaRPr lang="en-GB"/>
           </a:p>
@@ -1045,7 +1046,7 @@
           <a:p>
             <a:fld id="{A960F2F5-2F2F-4A65-8AC6-0AF42D8123C9}" type="datetimeFigureOut">
               <a:rPr lang="en-GB" smtClean="0"/>
-              <a:t>15/06/2026</a:t>
+              <a:t>17/06/2026</a:t>
             </a:fld>
             <a:endParaRPr lang="en-GB"/>
           </a:p>
@@ -1372,7 +1373,7 @@
           <a:p>
             <a:fld id="{A960F2F5-2F2F-4A65-8AC6-0AF42D8123C9}" type="datetimeFigureOut">
               <a:rPr lang="en-GB" smtClean="0"/>
-              <a:t>15/06/2026</a:t>
+              <a:t>17/06/2026</a:t>
             </a:fld>
             <a:endParaRPr lang="en-GB"/>
           </a:p>
@@ -1991,7 +1992,7 @@
           <a:p>
             <a:fld id="{A960F2F5-2F2F-4A65-8AC6-0AF42D8123C9}" type="datetimeFigureOut">
               <a:rPr lang="en-GB" smtClean="0"/>
-              <a:t>15/06/2026</a:t>
+              <a:t>17/06/2026</a:t>
             </a:fld>
             <a:endParaRPr lang="en-GB"/>
           </a:p>
@@ -2838,7 +2839,7 @@
           <a:p>
             <a:fld id="{A960F2F5-2F2F-4A65-8AC6-0AF42D8123C9}" type="datetimeFigureOut">
               <a:rPr lang="en-GB" smtClean="0"/>
-              <a:t>15/06/2026</a:t>
+              <a:t>17/06/2026</a:t>
             </a:fld>
             <a:endParaRPr lang="en-GB"/>
           </a:p>
@@ -3008,7 +3009,7 @@
           <a:p>
             <a:fld id="{A960F2F5-2F2F-4A65-8AC6-0AF42D8123C9}" type="datetimeFigureOut">
               <a:rPr lang="en-GB" smtClean="0"/>
-              <a:t>15/06/2026</a:t>
+              <a:t>17/06/2026</a:t>
             </a:fld>
             <a:endParaRPr lang="en-GB"/>
           </a:p>
@@ -3188,7 +3189,7 @@
           <a:p>
             <a:fld id="{A960F2F5-2F2F-4A65-8AC6-0AF42D8123C9}" type="datetimeFigureOut">
               <a:rPr lang="en-GB" smtClean="0"/>
-              <a:t>15/06/2026</a:t>
+              <a:t>17/06/2026</a:t>
             </a:fld>
             <a:endParaRPr lang="en-GB"/>
           </a:p>
@@ -3358,7 +3359,7 @@
           <a:p>
             <a:fld id="{A960F2F5-2F2F-4A65-8AC6-0AF42D8123C9}" type="datetimeFigureOut">
               <a:rPr lang="en-GB" smtClean="0"/>
-              <a:t>15/06/2026</a:t>
+              <a:t>17/06/2026</a:t>
             </a:fld>
             <a:endParaRPr lang="en-GB"/>
           </a:p>
@@ -3605,7 +3606,7 @@
           <a:p>
             <a:fld id="{A960F2F5-2F2F-4A65-8AC6-0AF42D8123C9}" type="datetimeFigureOut">
               <a:rPr lang="en-GB" smtClean="0"/>
-              <a:t>15/06/2026</a:t>
+              <a:t>17/06/2026</a:t>
             </a:fld>
             <a:endParaRPr lang="en-GB"/>
           </a:p>
@@ -3897,7 +3898,7 @@
           <a:p>
             <a:fld id="{A960F2F5-2F2F-4A65-8AC6-0AF42D8123C9}" type="datetimeFigureOut">
               <a:rPr lang="en-GB" smtClean="0"/>
-              <a:t>15/06/2026</a:t>
+              <a:t>17/06/2026</a:t>
             </a:fld>
             <a:endParaRPr lang="en-GB"/>
           </a:p>
@@ -4341,7 +4342,7 @@
           <a:p>
             <a:fld id="{A960F2F5-2F2F-4A65-8AC6-0AF42D8123C9}" type="datetimeFigureOut">
               <a:rPr lang="en-GB" smtClean="0"/>
-              <a:t>15/06/2026</a:t>
+              <a:t>17/06/2026</a:t>
             </a:fld>
             <a:endParaRPr lang="en-GB"/>
           </a:p>
@@ -4459,7 +4460,7 @@
           <a:p>
             <a:fld id="{A960F2F5-2F2F-4A65-8AC6-0AF42D8123C9}" type="datetimeFigureOut">
               <a:rPr lang="en-GB" smtClean="0"/>
-              <a:t>15/06/2026</a:t>
+              <a:t>17/06/2026</a:t>
             </a:fld>
             <a:endParaRPr lang="en-GB"/>
           </a:p>
@@ -4554,7 +4555,7 @@
           <a:p>
             <a:fld id="{A960F2F5-2F2F-4A65-8AC6-0AF42D8123C9}" type="datetimeFigureOut">
               <a:rPr lang="en-GB" smtClean="0"/>
-              <a:t>15/06/2026</a:t>
+              <a:t>17/06/2026</a:t>
             </a:fld>
             <a:endParaRPr lang="en-GB"/>
           </a:p>
@@ -4833,7 +4834,7 @@
           <a:p>
             <a:fld id="{A960F2F5-2F2F-4A65-8AC6-0AF42D8123C9}" type="datetimeFigureOut">
               <a:rPr lang="en-GB" smtClean="0"/>
-              <a:t>15/06/2026</a:t>
+              <a:t>17/06/2026</a:t>
             </a:fld>
             <a:endParaRPr lang="en-GB"/>
           </a:p>
@@ -5108,7 +5109,7 @@
           <a:p>
             <a:fld id="{A960F2F5-2F2F-4A65-8AC6-0AF42D8123C9}" type="datetimeFigureOut">
               <a:rPr lang="en-GB" smtClean="0"/>
-              <a:t>15/06/2026</a:t>
+              <a:t>17/06/2026</a:t>
             </a:fld>
             <a:endParaRPr lang="en-GB"/>
           </a:p>
@@ -5305,6 +5306,13 @@
             <a:schemeClr val="lt1"/>
           </a:fontRef>
         </p:style>
+        <p:txBody>
+          <a:bodyPr/>
+          <a:lstStyle/>
+          <a:p>
+            <a:endParaRPr lang="en-GB"/>
+          </a:p>
+        </p:txBody>
       </p:sp>
       <p:pic>
         <p:nvPicPr>
@@ -5399,6 +5407,13 @@
             <a:schemeClr val="lt1"/>
           </a:fontRef>
         </p:style>
+        <p:txBody>
+          <a:bodyPr/>
+          <a:lstStyle/>
+          <a:p>
+            <a:endParaRPr lang="en-GB"/>
+          </a:p>
+        </p:txBody>
       </p:sp>
       <p:sp>
         <p:nvSpPr>
@@ -5531,7 +5546,7 @@
           <a:p>
             <a:fld id="{A960F2F5-2F2F-4A65-8AC6-0AF42D8123C9}" type="datetimeFigureOut">
               <a:rPr lang="en-GB" smtClean="0"/>
-              <a:t>15/06/2026</a:t>
+              <a:t>17/06/2026</a:t>
             </a:fld>
             <a:endParaRPr lang="en-GB"/>
           </a:p>
@@ -6549,7 +6564,7 @@
           <p:cNvPr id="2" name="Title 1">
             <a:extLst>
               <a:ext uri="{FF2B5EF4-FFF2-40B4-BE49-F238E27FC236}">
-                <a16:creationId xmlns:a16="http://schemas.microsoft.com/office/drawing/2014/main" id="{0CCA055B-BA0E-7B6B-4790-266BCA568317}"/>
+                <a16:creationId xmlns:a16="http://schemas.microsoft.com/office/drawing/2014/main" id="{B4B02BDC-636E-09DE-53FF-1A91D597CD2B}"/>
               </a:ext>
             </a:extLst>
           </p:cNvPr>
@@ -6560,19 +6575,14 @@
             <p:ph type="title"/>
           </p:nvPr>
         </p:nvSpPr>
-        <p:spPr>
-          <a:xfrm>
-            <a:off x="603504" y="355981"/>
-            <a:ext cx="9750552" cy="814451"/>
-          </a:xfrm>
-        </p:spPr>
+        <p:spPr/>
         <p:txBody>
           <a:bodyPr/>
           <a:lstStyle/>
           <a:p>
             <a:r>
               <a:rPr lang="en-GB" dirty="0"/>
-              <a:t>How does it fit into my specific field</a:t>
+              <a:t>Solution?</a:t>
             </a:r>
           </a:p>
         </p:txBody>
@@ -6582,7 +6592,7 @@
           <p:cNvPr id="3" name="Content Placeholder 2">
             <a:extLst>
               <a:ext uri="{FF2B5EF4-FFF2-40B4-BE49-F238E27FC236}">
-                <a16:creationId xmlns:a16="http://schemas.microsoft.com/office/drawing/2014/main" id="{3A757F52-2185-E498-10FE-0C655B7F6AF1}"/>
+                <a16:creationId xmlns:a16="http://schemas.microsoft.com/office/drawing/2014/main" id="{082C162C-113D-2609-C341-FB4E56DDF045}"/>
               </a:ext>
             </a:extLst>
           </p:cNvPr>
@@ -6593,33 +6603,27 @@
             <p:ph idx="1"/>
           </p:nvPr>
         </p:nvSpPr>
-        <p:spPr>
-          <a:xfrm>
-            <a:off x="838200" y="1633601"/>
-            <a:ext cx="10515600" cy="4351338"/>
-          </a:xfrm>
-        </p:spPr>
+        <p:spPr/>
         <p:txBody>
           <a:bodyPr/>
           <a:lstStyle/>
           <a:p>
             <a:r>
               <a:rPr lang="en-GB" dirty="0"/>
-              <a:t>As a game designer I believe this project is highly relevant to my field as player guidance plays a significant role in how players navigate, understand, and interact with game environments</a:t>
-            </a:r>
-          </a:p>
-          <a:p>
-            <a:r>
-              <a:rPr lang="en-GB" dirty="0"/>
-              <a:t>The ability to direct player behaviour through level design and environmental cues if a fundamental design skill that can improve immersion while reducing reliance on explicit guidance systems such as objective markers or tutorials.</a:t>
-            </a:r>
+              <a:t>Also </a:t>
+            </a:r>
+            <a:r>
+              <a:rPr lang="en-GB"/>
+              <a:t>concept images </a:t>
+            </a:r>
+            <a:endParaRPr lang="en-GB" dirty="0"/>
           </a:p>
         </p:txBody>
       </p:sp>
     </p:spTree>
     <p:extLst>
       <p:ext uri="{BB962C8B-B14F-4D97-AF65-F5344CB8AC3E}">
-        <p14:creationId xmlns:p14="http://schemas.microsoft.com/office/powerpoint/2010/main" val="1403049803"/>
+        <p14:creationId xmlns:p14="http://schemas.microsoft.com/office/powerpoint/2010/main" val="2837445301"/>
       </p:ext>
     </p:extLst>
   </p:cSld>
@@ -6651,7 +6655,7 @@
           <p:cNvPr id="2" name="Title 1">
             <a:extLst>
               <a:ext uri="{FF2B5EF4-FFF2-40B4-BE49-F238E27FC236}">
-                <a16:creationId xmlns:a16="http://schemas.microsoft.com/office/drawing/2014/main" id="{C6950BC8-5934-97AC-5455-91A61D9FED8D}"/>
+                <a16:creationId xmlns:a16="http://schemas.microsoft.com/office/drawing/2014/main" id="{0CCA055B-BA0E-7B6B-4790-266BCA568317}"/>
               </a:ext>
             </a:extLst>
           </p:cNvPr>
@@ -6662,16 +6666,19 @@
             <p:ph type="title"/>
           </p:nvPr>
         </p:nvSpPr>
-        <p:spPr/>
-        <p:txBody>
-          <a:bodyPr>
-            <a:normAutofit fontScale="90000"/>
-          </a:bodyPr>
+        <p:spPr>
+          <a:xfrm>
+            <a:off x="603504" y="355981"/>
+            <a:ext cx="9750552" cy="814451"/>
+          </a:xfrm>
+        </p:spPr>
+        <p:txBody>
+          <a:bodyPr/>
           <a:lstStyle/>
           <a:p>
             <a:r>
               <a:rPr lang="en-GB" dirty="0"/>
-              <a:t>What are the key results, from academic literature and/or from state-of-the-art, upon which your project will be built? </a:t>
+              <a:t>How does it fit into my specific field</a:t>
             </a:r>
           </a:p>
         </p:txBody>
@@ -6681,7 +6688,7 @@
           <p:cNvPr id="3" name="Content Placeholder 2">
             <a:extLst>
               <a:ext uri="{FF2B5EF4-FFF2-40B4-BE49-F238E27FC236}">
-                <a16:creationId xmlns:a16="http://schemas.microsoft.com/office/drawing/2014/main" id="{565D156B-516D-4D68-D36F-EE86596D4AA4}"/>
+                <a16:creationId xmlns:a16="http://schemas.microsoft.com/office/drawing/2014/main" id="{3A757F52-2185-E498-10FE-0C655B7F6AF1}"/>
               </a:ext>
             </a:extLst>
           </p:cNvPr>
@@ -6694,8 +6701,8 @@
         </p:nvSpPr>
         <p:spPr>
           <a:xfrm>
-            <a:off x="838200" y="2075687"/>
-            <a:ext cx="10515600" cy="4101275"/>
+            <a:off x="838200" y="1633601"/>
+            <a:ext cx="10515600" cy="4351338"/>
           </a:xfrm>
         </p:spPr>
         <p:txBody>
@@ -6704,16 +6711,13 @@
           <a:p>
             <a:r>
               <a:rPr lang="en-GB" dirty="0"/>
-              <a:t>What professional designers and academics already know about player navigation </a:t>
-            </a:r>
-          </a:p>
-          <a:p>
-            <a:endParaRPr lang="en-GB" dirty="0"/>
+              <a:t>As a game designer I believe this project is highly relevant to my field as player guidance plays a significant role in how players navigate, understand, and interact with game environments</a:t>
+            </a:r>
           </a:p>
           <a:p>
             <a:r>
               <a:rPr lang="en-GB" dirty="0"/>
-              <a:t>Research – Design Decisions – Prototyping – Testing </a:t>
+              <a:t>The ability to direct player behaviour through level design and environmental cues if a fundamental design skill that can improve immersion while reducing reliance on explicit guidance systems such as objective markers or tutorials.</a:t>
             </a:r>
           </a:p>
         </p:txBody>
@@ -6721,7 +6725,7 @@
     </p:spTree>
     <p:extLst>
       <p:ext uri="{BB962C8B-B14F-4D97-AF65-F5344CB8AC3E}">
-        <p14:creationId xmlns:p14="http://schemas.microsoft.com/office/powerpoint/2010/main" val="27654245"/>
+        <p14:creationId xmlns:p14="http://schemas.microsoft.com/office/powerpoint/2010/main" val="1403049803"/>
       </p:ext>
     </p:extLst>
   </p:cSld>
@@ -6753,7 +6757,7 @@
           <p:cNvPr id="2" name="Title 1">
             <a:extLst>
               <a:ext uri="{FF2B5EF4-FFF2-40B4-BE49-F238E27FC236}">
-                <a16:creationId xmlns:a16="http://schemas.microsoft.com/office/drawing/2014/main" id="{02ED499B-D391-1998-8220-49BBE4D548A9}"/>
+                <a16:creationId xmlns:a16="http://schemas.microsoft.com/office/drawing/2014/main" id="{C6950BC8-5934-97AC-5455-91A61D9FED8D}"/>
               </a:ext>
             </a:extLst>
           </p:cNvPr>
@@ -6766,12 +6770,14 @@
         </p:nvSpPr>
         <p:spPr/>
         <p:txBody>
-          <a:bodyPr/>
+          <a:bodyPr>
+            <a:normAutofit fontScale="90000"/>
+          </a:bodyPr>
           <a:lstStyle/>
           <a:p>
             <a:r>
               <a:rPr lang="en-GB" dirty="0"/>
-              <a:t>What are the key research questions that you will seek to answer in your project? </a:t>
+              <a:t>What are the key results, from academic literature and/or from state-of-the-art, upon which your project will be built? </a:t>
             </a:r>
           </a:p>
         </p:txBody>
@@ -6781,7 +6787,7 @@
           <p:cNvPr id="3" name="Content Placeholder 2">
             <a:extLst>
               <a:ext uri="{FF2B5EF4-FFF2-40B4-BE49-F238E27FC236}">
-                <a16:creationId xmlns:a16="http://schemas.microsoft.com/office/drawing/2014/main" id="{C02697F5-3BF2-E88E-4728-39D1C5BBD9BF}"/>
+                <a16:creationId xmlns:a16="http://schemas.microsoft.com/office/drawing/2014/main" id="{565D156B-516D-4D68-D36F-EE86596D4AA4}"/>
               </a:ext>
             </a:extLst>
           </p:cNvPr>
@@ -6792,19 +6798,36 @@
             <p:ph idx="1"/>
           </p:nvPr>
         </p:nvSpPr>
-        <p:spPr/>
-        <p:txBody>
-          <a:bodyPr/>
-          <a:lstStyle/>
-          <a:p>
-            <a:endParaRPr lang="en-GB"/>
+        <p:spPr>
+          <a:xfrm>
+            <a:off x="838200" y="3520440"/>
+            <a:ext cx="10515600" cy="2656522"/>
+          </a:xfrm>
+        </p:spPr>
+        <p:txBody>
+          <a:bodyPr/>
+          <a:lstStyle/>
+          <a:p>
+            <a:r>
+              <a:rPr lang="en-GB" dirty="0"/>
+              <a:t>What professional designers and academics already know about player navigation </a:t>
+            </a:r>
+          </a:p>
+          <a:p>
+            <a:endParaRPr lang="en-GB" dirty="0"/>
+          </a:p>
+          <a:p>
+            <a:r>
+              <a:rPr lang="en-GB" dirty="0"/>
+              <a:t>Research – Design Decisions – Prototyping – Testing </a:t>
+            </a:r>
           </a:p>
         </p:txBody>
       </p:sp>
     </p:spTree>
     <p:extLst>
       <p:ext uri="{BB962C8B-B14F-4D97-AF65-F5344CB8AC3E}">
-        <p14:creationId xmlns:p14="http://schemas.microsoft.com/office/powerpoint/2010/main" val="1206744013"/>
+        <p14:creationId xmlns:p14="http://schemas.microsoft.com/office/powerpoint/2010/main" val="27654245"/>
       </p:ext>
     </p:extLst>
   </p:cSld>
@@ -6836,7 +6859,7 @@
           <p:cNvPr id="2" name="Title 1">
             <a:extLst>
               <a:ext uri="{FF2B5EF4-FFF2-40B4-BE49-F238E27FC236}">
-                <a16:creationId xmlns:a16="http://schemas.microsoft.com/office/drawing/2014/main" id="{E4FF66F7-7AB2-C807-5800-FC353C35F740}"/>
+                <a16:creationId xmlns:a16="http://schemas.microsoft.com/office/drawing/2014/main" id="{02ED499B-D391-1998-8220-49BBE4D548A9}"/>
               </a:ext>
             </a:extLst>
           </p:cNvPr>
@@ -6854,7 +6877,7 @@
           <a:p>
             <a:r>
               <a:rPr lang="en-GB" dirty="0"/>
-              <a:t>What will be the final format of your artefact?</a:t>
+              <a:t>What are the key research questions that you will seek to answer in your project? </a:t>
             </a:r>
           </a:p>
         </p:txBody>
@@ -6864,7 +6887,7 @@
           <p:cNvPr id="3" name="Content Placeholder 2">
             <a:extLst>
               <a:ext uri="{FF2B5EF4-FFF2-40B4-BE49-F238E27FC236}">
-                <a16:creationId xmlns:a16="http://schemas.microsoft.com/office/drawing/2014/main" id="{62C57817-3008-A9C8-81C4-BA5477735626}"/>
+                <a16:creationId xmlns:a16="http://schemas.microsoft.com/office/drawing/2014/main" id="{C02697F5-3BF2-E88E-4728-39D1C5BBD9BF}"/>
               </a:ext>
             </a:extLst>
           </p:cNvPr>
@@ -6887,7 +6910,7 @@
     </p:spTree>
     <p:extLst>
       <p:ext uri="{BB962C8B-B14F-4D97-AF65-F5344CB8AC3E}">
-        <p14:creationId xmlns:p14="http://schemas.microsoft.com/office/powerpoint/2010/main" val="2858686636"/>
+        <p14:creationId xmlns:p14="http://schemas.microsoft.com/office/powerpoint/2010/main" val="1206744013"/>
       </p:ext>
     </p:extLst>
   </p:cSld>
@@ -6919,6 +6942,89 @@
           <p:cNvPr id="2" name="Title 1">
             <a:extLst>
               <a:ext uri="{FF2B5EF4-FFF2-40B4-BE49-F238E27FC236}">
+                <a16:creationId xmlns:a16="http://schemas.microsoft.com/office/drawing/2014/main" id="{E4FF66F7-7AB2-C807-5800-FC353C35F740}"/>
+              </a:ext>
+            </a:extLst>
+          </p:cNvPr>
+          <p:cNvSpPr>
+            <a:spLocks noGrp="1"/>
+          </p:cNvSpPr>
+          <p:nvPr>
+            <p:ph type="title"/>
+          </p:nvPr>
+        </p:nvSpPr>
+        <p:spPr/>
+        <p:txBody>
+          <a:bodyPr/>
+          <a:lstStyle/>
+          <a:p>
+            <a:r>
+              <a:rPr lang="en-GB" dirty="0"/>
+              <a:t>What will be the final format of your artefact?</a:t>
+            </a:r>
+          </a:p>
+        </p:txBody>
+      </p:sp>
+      <p:sp>
+        <p:nvSpPr>
+          <p:cNvPr id="3" name="Content Placeholder 2">
+            <a:extLst>
+              <a:ext uri="{FF2B5EF4-FFF2-40B4-BE49-F238E27FC236}">
+                <a16:creationId xmlns:a16="http://schemas.microsoft.com/office/drawing/2014/main" id="{62C57817-3008-A9C8-81C4-BA5477735626}"/>
+              </a:ext>
+            </a:extLst>
+          </p:cNvPr>
+          <p:cNvSpPr>
+            <a:spLocks noGrp="1"/>
+          </p:cNvSpPr>
+          <p:nvPr>
+            <p:ph idx="1"/>
+          </p:nvPr>
+        </p:nvSpPr>
+        <p:spPr/>
+        <p:txBody>
+          <a:bodyPr/>
+          <a:lstStyle/>
+          <a:p>
+            <a:endParaRPr lang="en-GB"/>
+          </a:p>
+        </p:txBody>
+      </p:sp>
+    </p:spTree>
+    <p:extLst>
+      <p:ext uri="{BB962C8B-B14F-4D97-AF65-F5344CB8AC3E}">
+        <p14:creationId xmlns:p14="http://schemas.microsoft.com/office/powerpoint/2010/main" val="2858686636"/>
+      </p:ext>
+    </p:extLst>
+  </p:cSld>
+  <p:clrMapOvr>
+    <a:masterClrMapping/>
+  </p:clrMapOvr>
+</p:sld>
+</file>
+
+<file path=ppt/slides/slide8.xml><?xml version="1.0" encoding="utf-8"?>
+<p:sld xmlns:a="http://schemas.openxmlformats.org/drawingml/2006/main" xmlns:r="http://schemas.openxmlformats.org/officeDocument/2006/relationships" xmlns:p="http://schemas.openxmlformats.org/presentationml/2006/main">
+  <p:cSld>
+    <p:spTree>
+      <p:nvGrpSpPr>
+        <p:cNvPr id="1" name=""/>
+        <p:cNvGrpSpPr/>
+        <p:nvPr/>
+      </p:nvGrpSpPr>
+      <p:grpSpPr>
+        <a:xfrm>
+          <a:off x="0" y="0"/>
+          <a:ext cx="0" cy="0"/>
+          <a:chOff x="0" y="0"/>
+          <a:chExt cx="0" cy="0"/>
+        </a:xfrm>
+      </p:grpSpPr>
+      <p:sp>
+        <p:nvSpPr>
+          <p:cNvPr id="2" name="Title 1">
+            <a:extLst>
+              <a:ext uri="{FF2B5EF4-FFF2-40B4-BE49-F238E27FC236}">
                 <a16:creationId xmlns:a16="http://schemas.microsoft.com/office/drawing/2014/main" id="{D880C7A1-0989-23EA-C5E2-C7D35C50D590}"/>
               </a:ext>
             </a:extLst>
@@ -6958,12 +7064,64 @@
             <p:ph idx="1"/>
           </p:nvPr>
         </p:nvSpPr>
-        <p:spPr/>
-        <p:txBody>
-          <a:bodyPr/>
-          <a:lstStyle/>
-          <a:p>
-            <a:endParaRPr lang="en-GB"/>
+        <p:spPr>
+          <a:xfrm>
+            <a:off x="448056" y="2532888"/>
+            <a:ext cx="9601797" cy="3715511"/>
+          </a:xfrm>
+        </p:spPr>
+        <p:txBody>
+          <a:bodyPr/>
+          <a:lstStyle/>
+          <a:p>
+            <a:pPr marL="457200" lvl="1" indent="0">
+              <a:buNone/>
+            </a:pPr>
+            <a:r>
+              <a:rPr lang="en-GB" dirty="0"/>
+              <a:t>Myself and Future Employers</a:t>
+            </a:r>
+          </a:p>
+          <a:p>
+            <a:pPr lvl="1"/>
+            <a:r>
+              <a:rPr lang="en-GB" dirty="0"/>
+              <a:t> Portfolio piece showcasing Technical Design, Level Design , and System Design</a:t>
+            </a:r>
+          </a:p>
+          <a:p>
+            <a:pPr lvl="1"/>
+            <a:r>
+              <a:rPr lang="en-GB" dirty="0"/>
+              <a:t>Demonstrates my design process and research abilities </a:t>
+            </a:r>
+          </a:p>
+          <a:p>
+            <a:pPr marL="457200" lvl="1" indent="0">
+              <a:buNone/>
+            </a:pPr>
+            <a:r>
+              <a:rPr lang="en-GB" dirty="0"/>
+              <a:t>Secondary Audience </a:t>
+            </a:r>
+          </a:p>
+          <a:p>
+            <a:pPr lvl="1"/>
+            <a:r>
+              <a:rPr lang="en-GB" dirty="0"/>
+              <a:t>Game and Level Designers</a:t>
+            </a:r>
+          </a:p>
+          <a:p>
+            <a:pPr lvl="1"/>
+            <a:r>
+              <a:rPr lang="en-GB" dirty="0"/>
+              <a:t>Indie studios without designated designers </a:t>
+            </a:r>
+          </a:p>
+          <a:p>
+            <a:pPr lvl="1"/>
+            <a:endParaRPr lang="en-GB" dirty="0"/>
           </a:p>
         </p:txBody>
       </p:sp>
@@ -6980,7 +7138,7 @@
 </p:sld>
 </file>
 
-<file path=ppt/slides/slide8.xml><?xml version="1.0" encoding="utf-8"?>
+<file path=ppt/slides/slide9.xml><?xml version="1.0" encoding="utf-8"?>
 <p:sld xmlns:a="http://schemas.openxmlformats.org/drawingml/2006/main" xmlns:r="http://schemas.openxmlformats.org/officeDocument/2006/relationships" xmlns:p="http://schemas.openxmlformats.org/presentationml/2006/main">
   <p:cSld>
     <p:spTree>

--- a/Project Proposal/GAM708 Proposal Presentation.pptx
+++ b/Project Proposal/GAM708 Proposal Presentation.pptx
@@ -6,14 +6,13 @@
   </p:sldMasterIdLst>
   <p:sldIdLst>
     <p:sldId id="256" r:id="rId2"/>
-    <p:sldId id="257" r:id="rId3"/>
-    <p:sldId id="264" r:id="rId4"/>
+    <p:sldId id="260" r:id="rId3"/>
+    <p:sldId id="257" r:id="rId4"/>
     <p:sldId id="258" r:id="rId5"/>
     <p:sldId id="259" r:id="rId6"/>
-    <p:sldId id="260" r:id="rId7"/>
-    <p:sldId id="261" r:id="rId8"/>
+    <p:sldId id="261" r:id="rId7"/>
+    <p:sldId id="264" r:id="rId8"/>
     <p:sldId id="262" r:id="rId9"/>
-    <p:sldId id="263" r:id="rId10"/>
   </p:sldIdLst>
   <p:sldSz cx="12192000" cy="6858000"/>
   <p:notesSz cx="6858000" cy="9144000"/>
@@ -306,7 +305,7 @@
           <a:p>
             <a:fld id="{A960F2F5-2F2F-4A65-8AC6-0AF42D8123C9}" type="datetimeFigureOut">
               <a:rPr lang="en-GB" smtClean="0"/>
-              <a:t>17/06/2026</a:t>
+              <a:t>23/06/2026</a:t>
             </a:fld>
             <a:endParaRPr lang="en-GB"/>
           </a:p>
@@ -581,7 +580,7 @@
           <a:p>
             <a:fld id="{A960F2F5-2F2F-4A65-8AC6-0AF42D8123C9}" type="datetimeFigureOut">
               <a:rPr lang="en-GB" smtClean="0"/>
-              <a:t>17/06/2026</a:t>
+              <a:t>23/06/2026</a:t>
             </a:fld>
             <a:endParaRPr lang="en-GB"/>
           </a:p>
@@ -775,7 +774,7 @@
           <a:p>
             <a:fld id="{A960F2F5-2F2F-4A65-8AC6-0AF42D8123C9}" type="datetimeFigureOut">
               <a:rPr lang="en-GB" smtClean="0"/>
-              <a:t>17/06/2026</a:t>
+              <a:t>23/06/2026</a:t>
             </a:fld>
             <a:endParaRPr lang="en-GB"/>
           </a:p>
@@ -1046,7 +1045,7 @@
           <a:p>
             <a:fld id="{A960F2F5-2F2F-4A65-8AC6-0AF42D8123C9}" type="datetimeFigureOut">
               <a:rPr lang="en-GB" smtClean="0"/>
-              <a:t>17/06/2026</a:t>
+              <a:t>23/06/2026</a:t>
             </a:fld>
             <a:endParaRPr lang="en-GB"/>
           </a:p>
@@ -1373,7 +1372,7 @@
           <a:p>
             <a:fld id="{A960F2F5-2F2F-4A65-8AC6-0AF42D8123C9}" type="datetimeFigureOut">
               <a:rPr lang="en-GB" smtClean="0"/>
-              <a:t>17/06/2026</a:t>
+              <a:t>23/06/2026</a:t>
             </a:fld>
             <a:endParaRPr lang="en-GB"/>
           </a:p>
@@ -1992,7 +1991,7 @@
           <a:p>
             <a:fld id="{A960F2F5-2F2F-4A65-8AC6-0AF42D8123C9}" type="datetimeFigureOut">
               <a:rPr lang="en-GB" smtClean="0"/>
-              <a:t>17/06/2026</a:t>
+              <a:t>23/06/2026</a:t>
             </a:fld>
             <a:endParaRPr lang="en-GB"/>
           </a:p>
@@ -2839,7 +2838,7 @@
           <a:p>
             <a:fld id="{A960F2F5-2F2F-4A65-8AC6-0AF42D8123C9}" type="datetimeFigureOut">
               <a:rPr lang="en-GB" smtClean="0"/>
-              <a:t>17/06/2026</a:t>
+              <a:t>23/06/2026</a:t>
             </a:fld>
             <a:endParaRPr lang="en-GB"/>
           </a:p>
@@ -3009,7 +3008,7 @@
           <a:p>
             <a:fld id="{A960F2F5-2F2F-4A65-8AC6-0AF42D8123C9}" type="datetimeFigureOut">
               <a:rPr lang="en-GB" smtClean="0"/>
-              <a:t>17/06/2026</a:t>
+              <a:t>23/06/2026</a:t>
             </a:fld>
             <a:endParaRPr lang="en-GB"/>
           </a:p>
@@ -3189,7 +3188,7 @@
           <a:p>
             <a:fld id="{A960F2F5-2F2F-4A65-8AC6-0AF42D8123C9}" type="datetimeFigureOut">
               <a:rPr lang="en-GB" smtClean="0"/>
-              <a:t>17/06/2026</a:t>
+              <a:t>23/06/2026</a:t>
             </a:fld>
             <a:endParaRPr lang="en-GB"/>
           </a:p>
@@ -3359,7 +3358,7 @@
           <a:p>
             <a:fld id="{A960F2F5-2F2F-4A65-8AC6-0AF42D8123C9}" type="datetimeFigureOut">
               <a:rPr lang="en-GB" smtClean="0"/>
-              <a:t>17/06/2026</a:t>
+              <a:t>23/06/2026</a:t>
             </a:fld>
             <a:endParaRPr lang="en-GB"/>
           </a:p>
@@ -3606,7 +3605,7 @@
           <a:p>
             <a:fld id="{A960F2F5-2F2F-4A65-8AC6-0AF42D8123C9}" type="datetimeFigureOut">
               <a:rPr lang="en-GB" smtClean="0"/>
-              <a:t>17/06/2026</a:t>
+              <a:t>23/06/2026</a:t>
             </a:fld>
             <a:endParaRPr lang="en-GB"/>
           </a:p>
@@ -3898,7 +3897,7 @@
           <a:p>
             <a:fld id="{A960F2F5-2F2F-4A65-8AC6-0AF42D8123C9}" type="datetimeFigureOut">
               <a:rPr lang="en-GB" smtClean="0"/>
-              <a:t>17/06/2026</a:t>
+              <a:t>23/06/2026</a:t>
             </a:fld>
             <a:endParaRPr lang="en-GB"/>
           </a:p>
@@ -4342,7 +4341,7 @@
           <a:p>
             <a:fld id="{A960F2F5-2F2F-4A65-8AC6-0AF42D8123C9}" type="datetimeFigureOut">
               <a:rPr lang="en-GB" smtClean="0"/>
-              <a:t>17/06/2026</a:t>
+              <a:t>23/06/2026</a:t>
             </a:fld>
             <a:endParaRPr lang="en-GB"/>
           </a:p>
@@ -4460,7 +4459,7 @@
           <a:p>
             <a:fld id="{A960F2F5-2F2F-4A65-8AC6-0AF42D8123C9}" type="datetimeFigureOut">
               <a:rPr lang="en-GB" smtClean="0"/>
-              <a:t>17/06/2026</a:t>
+              <a:t>23/06/2026</a:t>
             </a:fld>
             <a:endParaRPr lang="en-GB"/>
           </a:p>
@@ -4555,7 +4554,7 @@
           <a:p>
             <a:fld id="{A960F2F5-2F2F-4A65-8AC6-0AF42D8123C9}" type="datetimeFigureOut">
               <a:rPr lang="en-GB" smtClean="0"/>
-              <a:t>17/06/2026</a:t>
+              <a:t>23/06/2026</a:t>
             </a:fld>
             <a:endParaRPr lang="en-GB"/>
           </a:p>
@@ -4834,7 +4833,7 @@
           <a:p>
             <a:fld id="{A960F2F5-2F2F-4A65-8AC6-0AF42D8123C9}" type="datetimeFigureOut">
               <a:rPr lang="en-GB" smtClean="0"/>
-              <a:t>17/06/2026</a:t>
+              <a:t>23/06/2026</a:t>
             </a:fld>
             <a:endParaRPr lang="en-GB"/>
           </a:p>
@@ -5109,7 +5108,7 @@
           <a:p>
             <a:fld id="{A960F2F5-2F2F-4A65-8AC6-0AF42D8123C9}" type="datetimeFigureOut">
               <a:rPr lang="en-GB" smtClean="0"/>
-              <a:t>17/06/2026</a:t>
+              <a:t>23/06/2026</a:t>
             </a:fld>
             <a:endParaRPr lang="en-GB"/>
           </a:p>
@@ -5546,7 +5545,7 @@
           <a:p>
             <a:fld id="{A960F2F5-2F2F-4A65-8AC6-0AF42D8123C9}" type="datetimeFigureOut">
               <a:rPr lang="en-GB" smtClean="0"/>
-              <a:t>17/06/2026</a:t>
+              <a:t>23/06/2026</a:t>
             </a:fld>
             <a:endParaRPr lang="en-GB"/>
           </a:p>
@@ -6092,7 +6091,7 @@
         </p:nvSpPr>
         <p:spPr>
           <a:xfrm>
-            <a:off x="421175" y="688266"/>
+            <a:off x="704639" y="1502082"/>
             <a:ext cx="10293215" cy="1843749"/>
           </a:xfrm>
         </p:spPr>
@@ -6100,6 +6099,7 @@
           <a:bodyPr/>
           <a:lstStyle/>
           <a:p>
+            <a:pPr algn="ctr"/>
             <a:r>
               <a:rPr lang="en-GB" sz="3600" dirty="0"/>
               <a:t>Environmental Guidance in Digital Games: Influencing Player Navigation Without Explicit Instruction </a:t>
@@ -6123,7 +6123,7 @@
         </p:nvSpPr>
         <p:spPr>
           <a:xfrm>
-            <a:off x="421175" y="2669175"/>
+            <a:off x="4793256" y="4232799"/>
             <a:ext cx="2605488" cy="450521"/>
           </a:xfrm>
           <a:prstGeom prst="rect">
@@ -6214,50 +6214,6 @@
           </a:p>
         </p:txBody>
       </p:sp>
-      <p:sp>
-        <p:nvSpPr>
-          <p:cNvPr id="6" name="Subtitle 5">
-            <a:extLst>
-              <a:ext uri="{FF2B5EF4-FFF2-40B4-BE49-F238E27FC236}">
-                <a16:creationId xmlns:a16="http://schemas.microsoft.com/office/drawing/2014/main" id="{1C77D5BD-7574-0068-A0C6-D5B9D308C1D6}"/>
-              </a:ext>
-            </a:extLst>
-          </p:cNvPr>
-          <p:cNvSpPr>
-            <a:spLocks noGrp="1"/>
-          </p:cNvSpPr>
-          <p:nvPr>
-            <p:ph type="subTitle" idx="1"/>
-          </p:nvPr>
-        </p:nvSpPr>
-        <p:spPr>
-          <a:xfrm>
-            <a:off x="1852155" y="3738305"/>
-            <a:ext cx="8825658" cy="861420"/>
-          </a:xfrm>
-        </p:spPr>
-        <p:txBody>
-          <a:bodyPr>
-            <a:normAutofit/>
-          </a:bodyPr>
-          <a:lstStyle/>
-          <a:p>
-            <a:r>
-              <a:rPr lang="en-GB" dirty="0"/>
-              <a:t>GitHub Repo:</a:t>
-            </a:r>
-          </a:p>
-          <a:p>
-            <a:r>
-              <a:rPr lang="en-GB" dirty="0"/>
-              <a:t>Blog:</a:t>
-            </a:r>
-          </a:p>
-          <a:p>
-            <a:endParaRPr lang="en-GB" dirty="0"/>
-          </a:p>
-        </p:txBody>
-      </p:sp>
     </p:spTree>
     <p:extLst>
       <p:ext uri="{BB962C8B-B14F-4D97-AF65-F5344CB8AC3E}">
@@ -6293,7 +6249,7 @@
           <p:cNvPr id="2" name="Title 1">
             <a:extLst>
               <a:ext uri="{FF2B5EF4-FFF2-40B4-BE49-F238E27FC236}">
-                <a16:creationId xmlns:a16="http://schemas.microsoft.com/office/drawing/2014/main" id="{A8E57FC2-57B1-E355-B6E9-11837AE43E54}"/>
+                <a16:creationId xmlns:a16="http://schemas.microsoft.com/office/drawing/2014/main" id="{02ED499B-D391-1998-8220-49BBE4D548A9}"/>
               </a:ext>
             </a:extLst>
           </p:cNvPr>
@@ -6306,8 +6262,8 @@
         </p:nvSpPr>
         <p:spPr>
           <a:xfrm>
-            <a:off x="2421603" y="218699"/>
-            <a:ext cx="6349049" cy="928026"/>
+            <a:off x="3488403" y="342990"/>
+            <a:ext cx="5215193" cy="918882"/>
           </a:xfrm>
         </p:spPr>
         <p:txBody>
@@ -6316,223 +6272,59 @@
           <a:p>
             <a:r>
               <a:rPr lang="en-GB" dirty="0"/>
-              <a:t>Context of my project</a:t>
-            </a:r>
-          </a:p>
-        </p:txBody>
-      </p:sp>
-      <p:sp>
-        <p:nvSpPr>
-          <p:cNvPr id="3" name="Content Placeholder 2">
+              <a:t>Research Question </a:t>
+            </a:r>
+          </a:p>
+        </p:txBody>
+      </p:sp>
+      <p:sp>
+        <p:nvSpPr>
+          <p:cNvPr id="4" name="TextBox 3">
             <a:extLst>
               <a:ext uri="{FF2B5EF4-FFF2-40B4-BE49-F238E27FC236}">
-                <a16:creationId xmlns:a16="http://schemas.microsoft.com/office/drawing/2014/main" id="{B842CF51-1570-31C6-608A-BF8D56AD6E9C}"/>
+                <a16:creationId xmlns:a16="http://schemas.microsoft.com/office/drawing/2014/main" id="{84BBB4E8-9CD9-54B3-6303-20D7037C9656}"/>
               </a:ext>
             </a:extLst>
           </p:cNvPr>
-          <p:cNvSpPr>
-            <a:spLocks noGrp="1"/>
-          </p:cNvSpPr>
-          <p:nvPr>
-            <p:ph idx="1"/>
-          </p:nvPr>
+          <p:cNvSpPr txBox="1"/>
+          <p:nvPr/>
         </p:nvSpPr>
         <p:spPr>
           <a:xfrm>
-            <a:off x="238223" y="1411901"/>
-            <a:ext cx="5233481" cy="4867655"/>
-          </a:xfrm>
-        </p:spPr>
-        <p:txBody>
-          <a:bodyPr>
-            <a:normAutofit lnSpcReduction="10000"/>
-          </a:bodyPr>
-          <a:lstStyle/>
-          <a:p>
-            <a:pPr marL="0" indent="0">
-              <a:buNone/>
-            </a:pPr>
-            <a:r>
-              <a:rPr lang="en-GB" sz="2400" dirty="0"/>
-              <a:t>The Problem </a:t>
-            </a:r>
-          </a:p>
-          <a:p>
-            <a:pPr>
-              <a:buFont typeface="Wingdings" panose="05000000000000000000" pitchFamily="2" charset="2"/>
-              <a:buChar char="Ø"/>
-            </a:pPr>
-            <a:r>
-              <a:rPr lang="en-GB" dirty="0"/>
-              <a:t>Players need guidance to navigate game worlds</a:t>
-            </a:r>
-          </a:p>
-          <a:p>
-            <a:pPr>
-              <a:buFont typeface="Wingdings" panose="05000000000000000000" pitchFamily="2" charset="2"/>
-              <a:buChar char="Ø"/>
-            </a:pPr>
-            <a:endParaRPr lang="en-GB" dirty="0"/>
-          </a:p>
-          <a:p>
-            <a:pPr>
-              <a:buFont typeface="Wingdings" panose="05000000000000000000" pitchFamily="2" charset="2"/>
-              <a:buChar char="Ø"/>
-            </a:pPr>
-            <a:r>
-              <a:rPr lang="en-GB" dirty="0"/>
-              <a:t>Traditional guidance systems include:</a:t>
-            </a:r>
-          </a:p>
-          <a:p>
-            <a:pPr lvl="1">
-              <a:buFont typeface="Courier New" panose="02070309020205020404" pitchFamily="49" charset="0"/>
-              <a:buChar char="o"/>
-            </a:pPr>
-            <a:r>
-              <a:rPr lang="en-GB" sz="2000" dirty="0"/>
-              <a:t>Quest markers </a:t>
-            </a:r>
-          </a:p>
-          <a:p>
-            <a:pPr lvl="1">
-              <a:buFont typeface="Courier New" panose="02070309020205020404" pitchFamily="49" charset="0"/>
-              <a:buChar char="o"/>
-            </a:pPr>
-            <a:r>
-              <a:rPr lang="en-GB" sz="2000" dirty="0"/>
-              <a:t>Mini map indicators</a:t>
-            </a:r>
-          </a:p>
-          <a:p>
-            <a:pPr lvl="1">
-              <a:buFont typeface="Courier New" panose="02070309020205020404" pitchFamily="49" charset="0"/>
-              <a:buChar char="o"/>
-            </a:pPr>
-            <a:r>
-              <a:rPr lang="en-GB" sz="2000" dirty="0"/>
-              <a:t>Tutorial Prompts</a:t>
-            </a:r>
-          </a:p>
-          <a:p>
-            <a:pPr lvl="1">
-              <a:buFont typeface="Courier New" panose="02070309020205020404" pitchFamily="49" charset="0"/>
-              <a:buChar char="o"/>
-            </a:pPr>
-            <a:r>
-              <a:rPr lang="en-GB" sz="2000" dirty="0"/>
-              <a:t>Coloured assets </a:t>
-            </a:r>
-          </a:p>
-          <a:p>
-            <a:pPr lvl="1">
-              <a:buFont typeface="Courier New" panose="02070309020205020404" pitchFamily="49" charset="0"/>
-              <a:buChar char="o"/>
-            </a:pPr>
-            <a:endParaRPr lang="en-GB" sz="2000" dirty="0"/>
-          </a:p>
-          <a:p>
-            <a:r>
-              <a:rPr lang="en-GB" dirty="0"/>
-              <a:t>While these traditional methods are effective, they can reduce immersion and player discovery </a:t>
-            </a:r>
-          </a:p>
-        </p:txBody>
-      </p:sp>
-      <p:pic>
-        <p:nvPicPr>
-          <p:cNvPr id="4" name="Picture 3" descr="Step 8 Play the objective.">
-            <a:extLst>
-              <a:ext uri="{FF2B5EF4-FFF2-40B4-BE49-F238E27FC236}">
-                <a16:creationId xmlns:a16="http://schemas.microsoft.com/office/drawing/2014/main" id="{0FCEFB87-E5B3-DF2E-28F1-20733659483E}"/>
-              </a:ext>
-            </a:extLst>
-          </p:cNvPr>
-          <p:cNvPicPr>
-            <a:picLocks noChangeAspect="1"/>
-          </p:cNvPicPr>
-          <p:nvPr/>
-        </p:nvPicPr>
-        <p:blipFill>
-          <a:blip r:embed="rId2"/>
-          <a:stretch>
-            <a:fillRect/>
-          </a:stretch>
-        </p:blipFill>
-        <p:spPr>
-          <a:xfrm>
-            <a:off x="5511505" y="4846320"/>
-            <a:ext cx="2601918" cy="1951439"/>
+            <a:off x="402336" y="1737360"/>
+            <a:ext cx="11045952" cy="1477328"/>
           </a:xfrm>
           <a:prstGeom prst="rect">
             <a:avLst/>
           </a:prstGeom>
-        </p:spPr>
-      </p:pic>
-      <p:pic>
-        <p:nvPicPr>
-          <p:cNvPr id="5" name="Picture 4" descr="Red Dead Online Introduction Tutorial Walkthrough">
-            <a:extLst>
-              <a:ext uri="{FF2B5EF4-FFF2-40B4-BE49-F238E27FC236}">
-                <a16:creationId xmlns:a16="http://schemas.microsoft.com/office/drawing/2014/main" id="{3207058F-157F-FD6A-01FA-3A16BD1E9AF6}"/>
-              </a:ext>
-            </a:extLst>
-          </p:cNvPr>
-          <p:cNvPicPr>
-            <a:picLocks noChangeAspect="1"/>
-          </p:cNvPicPr>
-          <p:nvPr/>
-        </p:nvPicPr>
-        <p:blipFill>
-          <a:blip r:embed="rId3"/>
-          <a:stretch>
-            <a:fillRect/>
-          </a:stretch>
-        </p:blipFill>
-        <p:spPr>
-          <a:xfrm>
-            <a:off x="8193024" y="5018058"/>
-            <a:ext cx="3925030" cy="1651155"/>
-          </a:xfrm>
-          <a:prstGeom prst="rect">
-            <a:avLst/>
-          </a:prstGeom>
-        </p:spPr>
-      </p:pic>
-      <p:pic>
-        <p:nvPicPr>
-          <p:cNvPr id="6" name="Picture 5" descr="game ui design mechanics">
-            <a:extLst>
-              <a:ext uri="{FF2B5EF4-FFF2-40B4-BE49-F238E27FC236}">
-                <a16:creationId xmlns:a16="http://schemas.microsoft.com/office/drawing/2014/main" id="{EC286032-803B-723A-2764-9FC8E3E6C0B0}"/>
-              </a:ext>
-            </a:extLst>
-          </p:cNvPr>
-          <p:cNvPicPr>
-            <a:picLocks noChangeAspect="1"/>
-          </p:cNvPicPr>
-          <p:nvPr/>
-        </p:nvPicPr>
-        <p:blipFill>
-          <a:blip r:embed="rId4"/>
-          <a:stretch>
-            <a:fillRect/>
-          </a:stretch>
-        </p:blipFill>
-        <p:spPr>
-          <a:xfrm>
-            <a:off x="6812464" y="1229021"/>
-            <a:ext cx="5305590" cy="3535003"/>
-          </a:xfrm>
-          <a:prstGeom prst="rect">
-            <a:avLst/>
-          </a:prstGeom>
-        </p:spPr>
-      </p:pic>
+          <a:noFill/>
+        </p:spPr>
+        <p:txBody>
+          <a:bodyPr wrap="square" rtlCol="0">
+            <a:spAutoFit/>
+          </a:bodyPr>
+          <a:lstStyle/>
+          <a:p>
+            <a:r>
+              <a:rPr lang="en-GB" dirty="0"/>
+              <a:t>Which environmental design techniques are most effective at influencing player navigation and decision making without explicit guidance systems?</a:t>
+            </a:r>
+          </a:p>
+          <a:p>
+            <a:endParaRPr lang="en-GB" dirty="0"/>
+          </a:p>
+          <a:p>
+            <a:endParaRPr lang="en-GB" dirty="0"/>
+          </a:p>
+          <a:p>
+            <a:endParaRPr lang="en-GB" dirty="0"/>
+          </a:p>
+        </p:txBody>
+      </p:sp>
     </p:spTree>
     <p:extLst>
       <p:ext uri="{BB962C8B-B14F-4D97-AF65-F5344CB8AC3E}">
-        <p14:creationId xmlns:p14="http://schemas.microsoft.com/office/powerpoint/2010/main" val="2878888682"/>
+        <p14:creationId xmlns:p14="http://schemas.microsoft.com/office/powerpoint/2010/main" val="1206744013"/>
       </p:ext>
     </p:extLst>
   </p:cSld>
@@ -6564,7 +6356,7 @@
           <p:cNvPr id="2" name="Title 1">
             <a:extLst>
               <a:ext uri="{FF2B5EF4-FFF2-40B4-BE49-F238E27FC236}">
-                <a16:creationId xmlns:a16="http://schemas.microsoft.com/office/drawing/2014/main" id="{B4B02BDC-636E-09DE-53FF-1A91D597CD2B}"/>
+                <a16:creationId xmlns:a16="http://schemas.microsoft.com/office/drawing/2014/main" id="{A8E57FC2-57B1-E355-B6E9-11837AE43E54}"/>
               </a:ext>
             </a:extLst>
           </p:cNvPr>
@@ -6575,14 +6367,19 @@
             <p:ph type="title"/>
           </p:nvPr>
         </p:nvSpPr>
-        <p:spPr/>
+        <p:spPr>
+          <a:xfrm>
+            <a:off x="2421603" y="218699"/>
+            <a:ext cx="6349049" cy="928026"/>
+          </a:xfrm>
+        </p:spPr>
         <p:txBody>
           <a:bodyPr/>
           <a:lstStyle/>
           <a:p>
             <a:r>
               <a:rPr lang="en-GB" dirty="0"/>
-              <a:t>Solution?</a:t>
+              <a:t>Context of my project</a:t>
             </a:r>
           </a:p>
         </p:txBody>
@@ -6592,7 +6389,7 @@
           <p:cNvPr id="3" name="Content Placeholder 2">
             <a:extLst>
               <a:ext uri="{FF2B5EF4-FFF2-40B4-BE49-F238E27FC236}">
-                <a16:creationId xmlns:a16="http://schemas.microsoft.com/office/drawing/2014/main" id="{082C162C-113D-2609-C341-FB4E56DDF045}"/>
+                <a16:creationId xmlns:a16="http://schemas.microsoft.com/office/drawing/2014/main" id="{B842CF51-1570-31C6-608A-BF8D56AD6E9C}"/>
               </a:ext>
             </a:extLst>
           </p:cNvPr>
@@ -6603,27 +6400,202 @@
             <p:ph idx="1"/>
           </p:nvPr>
         </p:nvSpPr>
-        <p:spPr/>
-        <p:txBody>
-          <a:bodyPr/>
+        <p:spPr>
+          <a:xfrm>
+            <a:off x="238223" y="1411901"/>
+            <a:ext cx="5233481" cy="4867655"/>
+          </a:xfrm>
+        </p:spPr>
+        <p:txBody>
+          <a:bodyPr>
+            <a:normAutofit lnSpcReduction="10000"/>
+          </a:bodyPr>
           <a:lstStyle/>
           <a:p>
+            <a:pPr marL="0" indent="0">
+              <a:buNone/>
+            </a:pPr>
+            <a:r>
+              <a:rPr lang="en-GB" sz="2400" dirty="0"/>
+              <a:t>The Problem </a:t>
+            </a:r>
+          </a:p>
+          <a:p>
+            <a:pPr>
+              <a:buFont typeface="Wingdings" panose="05000000000000000000" pitchFamily="2" charset="2"/>
+              <a:buChar char="Ø"/>
+            </a:pPr>
             <a:r>
               <a:rPr lang="en-GB" dirty="0"/>
-              <a:t>Also </a:t>
-            </a:r>
-            <a:r>
-              <a:rPr lang="en-GB"/>
-              <a:t>concept images </a:t>
-            </a:r>
+              <a:t>Players need guidance to navigate game worlds</a:t>
+            </a:r>
+          </a:p>
+          <a:p>
+            <a:pPr>
+              <a:buFont typeface="Wingdings" panose="05000000000000000000" pitchFamily="2" charset="2"/>
+              <a:buChar char="Ø"/>
+            </a:pPr>
             <a:endParaRPr lang="en-GB" dirty="0"/>
           </a:p>
-        </p:txBody>
-      </p:sp>
+          <a:p>
+            <a:pPr>
+              <a:buFont typeface="Wingdings" panose="05000000000000000000" pitchFamily="2" charset="2"/>
+              <a:buChar char="Ø"/>
+            </a:pPr>
+            <a:r>
+              <a:rPr lang="en-GB" dirty="0"/>
+              <a:t>Traditional guidance systems include:</a:t>
+            </a:r>
+          </a:p>
+          <a:p>
+            <a:pPr lvl="1">
+              <a:buFont typeface="Courier New" panose="02070309020205020404" pitchFamily="49" charset="0"/>
+              <a:buChar char="o"/>
+            </a:pPr>
+            <a:r>
+              <a:rPr lang="en-GB" sz="2000" dirty="0"/>
+              <a:t>Quest markers </a:t>
+            </a:r>
+          </a:p>
+          <a:p>
+            <a:pPr lvl="1">
+              <a:buFont typeface="Courier New" panose="02070309020205020404" pitchFamily="49" charset="0"/>
+              <a:buChar char="o"/>
+            </a:pPr>
+            <a:r>
+              <a:rPr lang="en-GB" sz="2000" dirty="0"/>
+              <a:t>Mini map indicators</a:t>
+            </a:r>
+          </a:p>
+          <a:p>
+            <a:pPr lvl="1">
+              <a:buFont typeface="Courier New" panose="02070309020205020404" pitchFamily="49" charset="0"/>
+              <a:buChar char="o"/>
+            </a:pPr>
+            <a:r>
+              <a:rPr lang="en-GB" sz="2000" dirty="0"/>
+              <a:t>Tutorial Prompts</a:t>
+            </a:r>
+          </a:p>
+          <a:p>
+            <a:pPr lvl="1">
+              <a:buFont typeface="Courier New" panose="02070309020205020404" pitchFamily="49" charset="0"/>
+              <a:buChar char="o"/>
+            </a:pPr>
+            <a:r>
+              <a:rPr lang="en-GB" sz="2000" dirty="0"/>
+              <a:t>Coloured assets </a:t>
+            </a:r>
+          </a:p>
+          <a:p>
+            <a:pPr lvl="1">
+              <a:buFont typeface="Courier New" panose="02070309020205020404" pitchFamily="49" charset="0"/>
+              <a:buChar char="o"/>
+            </a:pPr>
+            <a:endParaRPr lang="en-GB" sz="2000" dirty="0"/>
+          </a:p>
+          <a:p>
+            <a:r>
+              <a:rPr lang="en-GB" dirty="0"/>
+              <a:t>While these traditional methods are effective, they can reduce immersion and player discovery </a:t>
+            </a:r>
+          </a:p>
+        </p:txBody>
+      </p:sp>
+      <p:pic>
+        <p:nvPicPr>
+          <p:cNvPr id="4" name="Picture 3" descr="Step 8 Play the objective.">
+            <a:extLst>
+              <a:ext uri="{FF2B5EF4-FFF2-40B4-BE49-F238E27FC236}">
+                <a16:creationId xmlns:a16="http://schemas.microsoft.com/office/drawing/2014/main" id="{0FCEFB87-E5B3-DF2E-28F1-20733659483E}"/>
+              </a:ext>
+            </a:extLst>
+          </p:cNvPr>
+          <p:cNvPicPr>
+            <a:picLocks noChangeAspect="1"/>
+          </p:cNvPicPr>
+          <p:nvPr/>
+        </p:nvPicPr>
+        <p:blipFill>
+          <a:blip r:embed="rId2"/>
+          <a:stretch>
+            <a:fillRect/>
+          </a:stretch>
+        </p:blipFill>
+        <p:spPr>
+          <a:xfrm>
+            <a:off x="5511505" y="4846320"/>
+            <a:ext cx="2601918" cy="1951439"/>
+          </a:xfrm>
+          <a:prstGeom prst="rect">
+            <a:avLst/>
+          </a:prstGeom>
+        </p:spPr>
+      </p:pic>
+      <p:pic>
+        <p:nvPicPr>
+          <p:cNvPr id="5" name="Picture 4" descr="Red Dead Online Introduction Tutorial Walkthrough">
+            <a:extLst>
+              <a:ext uri="{FF2B5EF4-FFF2-40B4-BE49-F238E27FC236}">
+                <a16:creationId xmlns:a16="http://schemas.microsoft.com/office/drawing/2014/main" id="{3207058F-157F-FD6A-01FA-3A16BD1E9AF6}"/>
+              </a:ext>
+            </a:extLst>
+          </p:cNvPr>
+          <p:cNvPicPr>
+            <a:picLocks noChangeAspect="1"/>
+          </p:cNvPicPr>
+          <p:nvPr/>
+        </p:nvPicPr>
+        <p:blipFill>
+          <a:blip r:embed="rId3"/>
+          <a:stretch>
+            <a:fillRect/>
+          </a:stretch>
+        </p:blipFill>
+        <p:spPr>
+          <a:xfrm>
+            <a:off x="8193024" y="5018058"/>
+            <a:ext cx="3925030" cy="1651155"/>
+          </a:xfrm>
+          <a:prstGeom prst="rect">
+            <a:avLst/>
+          </a:prstGeom>
+        </p:spPr>
+      </p:pic>
+      <p:pic>
+        <p:nvPicPr>
+          <p:cNvPr id="6" name="Picture 5" descr="game ui design mechanics">
+            <a:extLst>
+              <a:ext uri="{FF2B5EF4-FFF2-40B4-BE49-F238E27FC236}">
+                <a16:creationId xmlns:a16="http://schemas.microsoft.com/office/drawing/2014/main" id="{EC286032-803B-723A-2764-9FC8E3E6C0B0}"/>
+              </a:ext>
+            </a:extLst>
+          </p:cNvPr>
+          <p:cNvPicPr>
+            <a:picLocks noChangeAspect="1"/>
+          </p:cNvPicPr>
+          <p:nvPr/>
+        </p:nvPicPr>
+        <p:blipFill>
+          <a:blip r:embed="rId4"/>
+          <a:stretch>
+            <a:fillRect/>
+          </a:stretch>
+        </p:blipFill>
+        <p:spPr>
+          <a:xfrm>
+            <a:off x="6812464" y="1229021"/>
+            <a:ext cx="5305590" cy="3535003"/>
+          </a:xfrm>
+          <a:prstGeom prst="rect">
+            <a:avLst/>
+          </a:prstGeom>
+        </p:spPr>
+      </p:pic>
     </p:spTree>
     <p:extLst>
       <p:ext uri="{BB962C8B-B14F-4D97-AF65-F5344CB8AC3E}">
-        <p14:creationId xmlns:p14="http://schemas.microsoft.com/office/powerpoint/2010/main" val="2837445301"/>
+        <p14:creationId xmlns:p14="http://schemas.microsoft.com/office/powerpoint/2010/main" val="2878888682"/>
       </p:ext>
     </p:extLst>
   </p:cSld>
@@ -6701,27 +6673,487 @@
         </p:nvSpPr>
         <p:spPr>
           <a:xfrm>
-            <a:off x="838200" y="1633601"/>
-            <a:ext cx="10515600" cy="4351338"/>
+            <a:off x="704088" y="1803209"/>
+            <a:ext cx="4309872" cy="4351338"/>
           </a:xfrm>
         </p:spPr>
         <p:txBody>
           <a:bodyPr/>
           <a:lstStyle/>
           <a:p>
+            <a:pPr marL="0" indent="0" algn="ctr">
+              <a:buNone/>
+            </a:pPr>
             <a:r>
               <a:rPr lang="en-GB" dirty="0"/>
-              <a:t>As a game designer I believe this project is highly relevant to my field as player guidance plays a significant role in how players navigate, understand, and interact with game environments</a:t>
-            </a:r>
+              <a:t>Design</a:t>
+            </a:r>
+          </a:p>
+          <a:p>
+            <a:pPr marL="0" indent="0" algn="ctr">
+              <a:buNone/>
+            </a:pPr>
+            <a:endParaRPr lang="en-GB" dirty="0"/>
           </a:p>
           <a:p>
             <a:r>
               <a:rPr lang="en-GB" dirty="0"/>
-              <a:t>The ability to direct player behaviour through level design and environmental cues if a fundamental design skill that can improve immersion while reducing reliance on explicit guidance systems such as objective markers or tutorials.</a:t>
-            </a:r>
-          </a:p>
-        </p:txBody>
-      </p:sp>
+              <a:t>Level Design </a:t>
+            </a:r>
+          </a:p>
+          <a:p>
+            <a:r>
+              <a:rPr lang="en-GB" dirty="0"/>
+              <a:t>Wayfinding</a:t>
+            </a:r>
+          </a:p>
+          <a:p>
+            <a:r>
+              <a:rPr lang="en-GB" dirty="0"/>
+              <a:t>Technical Design (Prototyping)</a:t>
+            </a:r>
+          </a:p>
+          <a:p>
+            <a:r>
+              <a:rPr lang="en-GB" dirty="0"/>
+              <a:t>Environmental Storytelling</a:t>
+            </a:r>
+          </a:p>
+          <a:p>
+            <a:r>
+              <a:rPr lang="en-GB" dirty="0"/>
+              <a:t>Player Psychology</a:t>
+            </a:r>
+          </a:p>
+        </p:txBody>
+      </p:sp>
+      <p:sp>
+        <p:nvSpPr>
+          <p:cNvPr id="4" name="Content Placeholder 2">
+            <a:extLst>
+              <a:ext uri="{FF2B5EF4-FFF2-40B4-BE49-F238E27FC236}">
+                <a16:creationId xmlns:a16="http://schemas.microsoft.com/office/drawing/2014/main" id="{DA40B481-5625-FAFE-2150-FA82F83CB1BC}"/>
+              </a:ext>
+            </a:extLst>
+          </p:cNvPr>
+          <p:cNvSpPr txBox="1">
+            <a:spLocks/>
+          </p:cNvSpPr>
+          <p:nvPr/>
+        </p:nvSpPr>
+        <p:spPr>
+          <a:xfrm>
+            <a:off x="6818376" y="2026793"/>
+            <a:ext cx="4309872" cy="4351338"/>
+          </a:xfrm>
+          <a:prstGeom prst="rect">
+            <a:avLst/>
+          </a:prstGeom>
+        </p:spPr>
+        <p:txBody>
+          <a:bodyPr vert="horz" lIns="91440" tIns="45720" rIns="91440" bIns="45720" rtlCol="0">
+            <a:normAutofit/>
+          </a:bodyPr>
+          <a:lstStyle>
+            <a:lvl1pPr marL="342900" indent="-342900" algn="l" defTabSz="457200" rtl="0" eaLnBrk="1" latinLnBrk="0" hangingPunct="1">
+              <a:spcBef>
+                <a:spcPts val="1000"/>
+              </a:spcBef>
+              <a:spcAft>
+                <a:spcPts val="0"/>
+              </a:spcAft>
+              <a:buClr>
+                <a:schemeClr val="accent1">
+                  <a:lumMod val="60000"/>
+                  <a:lumOff val="40000"/>
+                </a:schemeClr>
+              </a:buClr>
+              <a:buSzPct val="80000"/>
+              <a:buFont typeface="Wingdings 3" charset="2"/>
+              <a:buChar char=""/>
+              <a:defRPr sz="2000" b="0" i="0" kern="1200">
+                <a:solidFill>
+                  <a:schemeClr val="tx1"/>
+                </a:solidFill>
+                <a:latin typeface="+mj-lt"/>
+                <a:ea typeface="+mj-ea"/>
+                <a:cs typeface="+mj-cs"/>
+              </a:defRPr>
+            </a:lvl1pPr>
+            <a:lvl2pPr marL="742950" indent="-285750" algn="l" defTabSz="457200" rtl="0" eaLnBrk="1" latinLnBrk="0" hangingPunct="1">
+              <a:spcBef>
+                <a:spcPts val="1000"/>
+              </a:spcBef>
+              <a:spcAft>
+                <a:spcPts val="0"/>
+              </a:spcAft>
+              <a:buClr>
+                <a:schemeClr val="accent1">
+                  <a:lumMod val="60000"/>
+                  <a:lumOff val="40000"/>
+                </a:schemeClr>
+              </a:buClr>
+              <a:buSzPct val="80000"/>
+              <a:buFont typeface="Wingdings 3" charset="2"/>
+              <a:buChar char=""/>
+              <a:defRPr sz="1800" b="0" i="0" kern="1200">
+                <a:solidFill>
+                  <a:schemeClr val="tx1"/>
+                </a:solidFill>
+                <a:latin typeface="+mj-lt"/>
+                <a:ea typeface="+mj-ea"/>
+                <a:cs typeface="+mj-cs"/>
+              </a:defRPr>
+            </a:lvl2pPr>
+            <a:lvl3pPr marL="1143000" indent="-228600" algn="l" defTabSz="457200" rtl="0" eaLnBrk="1" latinLnBrk="0" hangingPunct="1">
+              <a:spcBef>
+                <a:spcPts val="1000"/>
+              </a:spcBef>
+              <a:spcAft>
+                <a:spcPts val="0"/>
+              </a:spcAft>
+              <a:buClr>
+                <a:schemeClr val="accent1">
+                  <a:lumMod val="60000"/>
+                  <a:lumOff val="40000"/>
+                </a:schemeClr>
+              </a:buClr>
+              <a:buSzPct val="80000"/>
+              <a:buFont typeface="Wingdings 3" charset="2"/>
+              <a:buChar char=""/>
+              <a:defRPr sz="1600" b="0" i="0" kern="1200">
+                <a:solidFill>
+                  <a:schemeClr val="tx1"/>
+                </a:solidFill>
+                <a:latin typeface="+mj-lt"/>
+                <a:ea typeface="+mj-ea"/>
+                <a:cs typeface="+mj-cs"/>
+              </a:defRPr>
+            </a:lvl3pPr>
+            <a:lvl4pPr marL="1600200" indent="-228600" algn="l" defTabSz="457200" rtl="0" eaLnBrk="1" latinLnBrk="0" hangingPunct="1">
+              <a:spcBef>
+                <a:spcPts val="1000"/>
+              </a:spcBef>
+              <a:spcAft>
+                <a:spcPts val="0"/>
+              </a:spcAft>
+              <a:buClr>
+                <a:schemeClr val="accent1">
+                  <a:lumMod val="60000"/>
+                  <a:lumOff val="40000"/>
+                </a:schemeClr>
+              </a:buClr>
+              <a:buSzPct val="80000"/>
+              <a:buFont typeface="Wingdings 3" charset="2"/>
+              <a:buChar char=""/>
+              <a:defRPr sz="1400" b="0" i="0" kern="1200">
+                <a:solidFill>
+                  <a:schemeClr val="tx1"/>
+                </a:solidFill>
+                <a:latin typeface="+mj-lt"/>
+                <a:ea typeface="+mj-ea"/>
+                <a:cs typeface="+mj-cs"/>
+              </a:defRPr>
+            </a:lvl4pPr>
+            <a:lvl5pPr marL="2057400" indent="-228600" algn="l" defTabSz="457200" rtl="0" eaLnBrk="1" latinLnBrk="0" hangingPunct="1">
+              <a:spcBef>
+                <a:spcPts val="1000"/>
+              </a:spcBef>
+              <a:spcAft>
+                <a:spcPts val="0"/>
+              </a:spcAft>
+              <a:buClr>
+                <a:schemeClr val="accent1">
+                  <a:lumMod val="60000"/>
+                  <a:lumOff val="40000"/>
+                </a:schemeClr>
+              </a:buClr>
+              <a:buSzPct val="80000"/>
+              <a:buFont typeface="Wingdings 3" charset="2"/>
+              <a:buChar char=""/>
+              <a:defRPr sz="1400" b="0" i="0" kern="1200">
+                <a:solidFill>
+                  <a:schemeClr val="tx1"/>
+                </a:solidFill>
+                <a:latin typeface="+mj-lt"/>
+                <a:ea typeface="+mj-ea"/>
+                <a:cs typeface="+mj-cs"/>
+              </a:defRPr>
+            </a:lvl5pPr>
+            <a:lvl6pPr marL="2514600" indent="-228600" algn="l" defTabSz="457200" rtl="0" eaLnBrk="1" latinLnBrk="0" hangingPunct="1">
+              <a:spcBef>
+                <a:spcPts val="1000"/>
+              </a:spcBef>
+              <a:spcAft>
+                <a:spcPts val="0"/>
+              </a:spcAft>
+              <a:buClr>
+                <a:schemeClr val="accent1">
+                  <a:lumMod val="60000"/>
+                  <a:lumOff val="40000"/>
+                </a:schemeClr>
+              </a:buClr>
+              <a:buSzPct val="80000"/>
+              <a:buFont typeface="Wingdings 3" charset="2"/>
+              <a:buChar char=""/>
+              <a:defRPr sz="1400" b="0" i="0" kern="1200">
+                <a:solidFill>
+                  <a:schemeClr val="tx1"/>
+                </a:solidFill>
+                <a:latin typeface="+mj-lt"/>
+                <a:ea typeface="+mj-ea"/>
+                <a:cs typeface="+mj-cs"/>
+              </a:defRPr>
+            </a:lvl6pPr>
+            <a:lvl7pPr marL="2971800" indent="-228600" algn="l" defTabSz="457200" rtl="0" eaLnBrk="1" latinLnBrk="0" hangingPunct="1">
+              <a:spcBef>
+                <a:spcPts val="1000"/>
+              </a:spcBef>
+              <a:spcAft>
+                <a:spcPts val="0"/>
+              </a:spcAft>
+              <a:buClr>
+                <a:schemeClr val="accent1">
+                  <a:lumMod val="60000"/>
+                  <a:lumOff val="40000"/>
+                </a:schemeClr>
+              </a:buClr>
+              <a:buSzPct val="80000"/>
+              <a:buFont typeface="Wingdings 3" charset="2"/>
+              <a:buChar char=""/>
+              <a:defRPr sz="1400" b="0" i="0" kern="1200">
+                <a:solidFill>
+                  <a:schemeClr val="tx1"/>
+                </a:solidFill>
+                <a:latin typeface="+mj-lt"/>
+                <a:ea typeface="+mj-ea"/>
+                <a:cs typeface="+mj-cs"/>
+              </a:defRPr>
+            </a:lvl7pPr>
+            <a:lvl8pPr marL="3429000" indent="-228600" algn="l" defTabSz="457200" rtl="0" eaLnBrk="1" latinLnBrk="0" hangingPunct="1">
+              <a:spcBef>
+                <a:spcPts val="1000"/>
+              </a:spcBef>
+              <a:spcAft>
+                <a:spcPts val="0"/>
+              </a:spcAft>
+              <a:buClr>
+                <a:schemeClr val="accent1">
+                  <a:lumMod val="60000"/>
+                  <a:lumOff val="40000"/>
+                </a:schemeClr>
+              </a:buClr>
+              <a:buSzPct val="80000"/>
+              <a:buFont typeface="Wingdings 3" charset="2"/>
+              <a:buChar char=""/>
+              <a:defRPr sz="1400" b="0" i="0" kern="1200">
+                <a:solidFill>
+                  <a:schemeClr val="tx1"/>
+                </a:solidFill>
+                <a:latin typeface="+mj-lt"/>
+                <a:ea typeface="+mj-ea"/>
+                <a:cs typeface="+mj-cs"/>
+              </a:defRPr>
+            </a:lvl8pPr>
+            <a:lvl9pPr marL="3886200" indent="-228600" algn="l" defTabSz="457200" rtl="0" eaLnBrk="1" latinLnBrk="0" hangingPunct="1">
+              <a:spcBef>
+                <a:spcPts val="1000"/>
+              </a:spcBef>
+              <a:spcAft>
+                <a:spcPts val="0"/>
+              </a:spcAft>
+              <a:buClr>
+                <a:schemeClr val="accent1">
+                  <a:lumMod val="60000"/>
+                  <a:lumOff val="40000"/>
+                </a:schemeClr>
+              </a:buClr>
+              <a:buSzPct val="80000"/>
+              <a:buFont typeface="Wingdings 3" charset="2"/>
+              <a:buChar char=""/>
+              <a:defRPr sz="1400" b="0" i="0" kern="1200">
+                <a:solidFill>
+                  <a:schemeClr val="tx1"/>
+                </a:solidFill>
+                <a:latin typeface="+mj-lt"/>
+                <a:ea typeface="+mj-ea"/>
+                <a:cs typeface="+mj-cs"/>
+              </a:defRPr>
+            </a:lvl9pPr>
+          </a:lstStyle>
+          <a:p>
+            <a:pPr marL="0" indent="0" algn="ctr">
+              <a:buNone/>
+            </a:pPr>
+            <a:r>
+              <a:rPr lang="en-GB" dirty="0"/>
+              <a:t>Environmental Design</a:t>
+            </a:r>
+          </a:p>
+          <a:p>
+            <a:pPr marL="0" indent="0" algn="ctr">
+              <a:buNone/>
+            </a:pPr>
+            <a:endParaRPr lang="en-GB" dirty="0"/>
+          </a:p>
+          <a:p>
+            <a:pPr marL="0" indent="0" algn="ctr">
+              <a:buNone/>
+            </a:pPr>
+            <a:r>
+              <a:rPr lang="en-GB" dirty="0"/>
+              <a:t>Player Attention </a:t>
+            </a:r>
+          </a:p>
+          <a:p>
+            <a:pPr marL="0" indent="0" algn="ctr">
+              <a:buNone/>
+            </a:pPr>
+            <a:endParaRPr lang="en-GB" dirty="0"/>
+          </a:p>
+          <a:p>
+            <a:pPr marL="0" indent="0" algn="ctr">
+              <a:buNone/>
+            </a:pPr>
+            <a:r>
+              <a:rPr lang="en-GB" dirty="0"/>
+              <a:t>Navigation Decisions </a:t>
+            </a:r>
+          </a:p>
+          <a:p>
+            <a:pPr marL="0" indent="0" algn="ctr">
+              <a:buNone/>
+            </a:pPr>
+            <a:endParaRPr lang="en-GB" dirty="0"/>
+          </a:p>
+          <a:p>
+            <a:pPr marL="0" indent="0" algn="ctr">
+              <a:buNone/>
+            </a:pPr>
+            <a:r>
+              <a:rPr lang="en-GB" dirty="0"/>
+              <a:t>Player Experience</a:t>
+            </a:r>
+          </a:p>
+        </p:txBody>
+      </p:sp>
+      <p:cxnSp>
+        <p:nvCxnSpPr>
+          <p:cNvPr id="6" name="Straight Arrow Connector 5">
+            <a:extLst>
+              <a:ext uri="{FF2B5EF4-FFF2-40B4-BE49-F238E27FC236}">
+                <a16:creationId xmlns:a16="http://schemas.microsoft.com/office/drawing/2014/main" id="{203018F0-1C7B-073B-E40B-17374F32C13C}"/>
+              </a:ext>
+            </a:extLst>
+          </p:cNvPr>
+          <p:cNvCxnSpPr/>
+          <p:nvPr/>
+        </p:nvCxnSpPr>
+        <p:spPr>
+          <a:xfrm>
+            <a:off x="8973312" y="2404872"/>
+            <a:ext cx="0" cy="502920"/>
+          </a:xfrm>
+          <a:prstGeom prst="straightConnector1">
+            <a:avLst/>
+          </a:prstGeom>
+          <a:ln>
+            <a:tailEnd type="triangle"/>
+          </a:ln>
+        </p:spPr>
+        <p:style>
+          <a:lnRef idx="3">
+            <a:schemeClr val="dk1"/>
+          </a:lnRef>
+          <a:fillRef idx="0">
+            <a:schemeClr val="dk1"/>
+          </a:fillRef>
+          <a:effectRef idx="2">
+            <a:schemeClr val="dk1"/>
+          </a:effectRef>
+          <a:fontRef idx="minor">
+            <a:schemeClr val="tx1"/>
+          </a:fontRef>
+        </p:style>
+      </p:cxnSp>
+      <p:cxnSp>
+        <p:nvCxnSpPr>
+          <p:cNvPr id="7" name="Straight Arrow Connector 6">
+            <a:extLst>
+              <a:ext uri="{FF2B5EF4-FFF2-40B4-BE49-F238E27FC236}">
+                <a16:creationId xmlns:a16="http://schemas.microsoft.com/office/drawing/2014/main" id="{039A3B40-6D40-6F1D-B75C-4F09CCE72D22}"/>
+              </a:ext>
+            </a:extLst>
+          </p:cNvPr>
+          <p:cNvCxnSpPr/>
+          <p:nvPr/>
+        </p:nvCxnSpPr>
+        <p:spPr>
+          <a:xfrm>
+            <a:off x="8973312" y="3346704"/>
+            <a:ext cx="0" cy="502920"/>
+          </a:xfrm>
+          <a:prstGeom prst="straightConnector1">
+            <a:avLst/>
+          </a:prstGeom>
+          <a:ln>
+            <a:tailEnd type="triangle"/>
+          </a:ln>
+        </p:spPr>
+        <p:style>
+          <a:lnRef idx="3">
+            <a:schemeClr val="dk1"/>
+          </a:lnRef>
+          <a:fillRef idx="0">
+            <a:schemeClr val="dk1"/>
+          </a:fillRef>
+          <a:effectRef idx="2">
+            <a:schemeClr val="dk1"/>
+          </a:effectRef>
+          <a:fontRef idx="minor">
+            <a:schemeClr val="tx1"/>
+          </a:fontRef>
+        </p:style>
+      </p:cxnSp>
+      <p:cxnSp>
+        <p:nvCxnSpPr>
+          <p:cNvPr id="8" name="Straight Arrow Connector 7">
+            <a:extLst>
+              <a:ext uri="{FF2B5EF4-FFF2-40B4-BE49-F238E27FC236}">
+                <a16:creationId xmlns:a16="http://schemas.microsoft.com/office/drawing/2014/main" id="{DB9C50F3-D10A-35D4-98BA-BD5A4F99649F}"/>
+              </a:ext>
+            </a:extLst>
+          </p:cNvPr>
+          <p:cNvCxnSpPr/>
+          <p:nvPr/>
+        </p:nvCxnSpPr>
+        <p:spPr>
+          <a:xfrm>
+            <a:off x="8982456" y="4202462"/>
+            <a:ext cx="0" cy="502920"/>
+          </a:xfrm>
+          <a:prstGeom prst="straightConnector1">
+            <a:avLst/>
+          </a:prstGeom>
+          <a:ln>
+            <a:tailEnd type="triangle"/>
+          </a:ln>
+        </p:spPr>
+        <p:style>
+          <a:lnRef idx="3">
+            <a:schemeClr val="dk1"/>
+          </a:lnRef>
+          <a:fillRef idx="0">
+            <a:schemeClr val="dk1"/>
+          </a:fillRef>
+          <a:effectRef idx="2">
+            <a:schemeClr val="dk1"/>
+          </a:effectRef>
+          <a:fontRef idx="minor">
+            <a:schemeClr val="tx1"/>
+          </a:fontRef>
+        </p:style>
+      </p:cxnSp>
     </p:spTree>
     <p:extLst>
       <p:ext uri="{BB962C8B-B14F-4D97-AF65-F5344CB8AC3E}">
@@ -6768,16 +7200,21 @@
             <p:ph type="title"/>
           </p:nvPr>
         </p:nvSpPr>
-        <p:spPr/>
+        <p:spPr>
+          <a:xfrm>
+            <a:off x="646111" y="452718"/>
+            <a:ext cx="9404723" cy="937170"/>
+          </a:xfrm>
+        </p:spPr>
         <p:txBody>
           <a:bodyPr>
-            <a:normAutofit fontScale="90000"/>
+            <a:normAutofit/>
           </a:bodyPr>
           <a:lstStyle/>
           <a:p>
             <a:r>
               <a:rPr lang="en-GB" dirty="0"/>
-              <a:t>What are the key results, from academic literature and/or from state-of-the-art, upon which your project will be built? </a:t>
+              <a:t>Existing Research &amp; State of the art</a:t>
             </a:r>
           </a:p>
         </p:txBody>
@@ -6800,27 +7237,602 @@
         </p:nvSpPr>
         <p:spPr>
           <a:xfrm>
-            <a:off x="838200" y="3520440"/>
-            <a:ext cx="10515600" cy="2656522"/>
+            <a:off x="1249680" y="1581912"/>
+            <a:ext cx="3916680" cy="1847088"/>
           </a:xfrm>
         </p:spPr>
         <p:txBody>
           <a:bodyPr/>
           <a:lstStyle/>
           <a:p>
+            <a:pPr marL="0" indent="0">
+              <a:buNone/>
+            </a:pPr>
             <a:r>
               <a:rPr lang="en-GB" dirty="0"/>
-              <a:t>What professional designers and academics already know about player navigation </a:t>
-            </a:r>
-          </a:p>
-          <a:p>
+              <a:t>Academic Sources </a:t>
+            </a:r>
+          </a:p>
+          <a:p>
+            <a:r>
+              <a:rPr lang="en-GB" dirty="0"/>
+              <a:t>Wayfinding research </a:t>
+            </a:r>
+          </a:p>
+          <a:p>
+            <a:r>
+              <a:rPr lang="en-GB" dirty="0"/>
+              <a:t>Cognitive maps</a:t>
+            </a:r>
+          </a:p>
+          <a:p>
+            <a:r>
+              <a:rPr lang="en-GB" dirty="0"/>
+              <a:t>Environmental cues </a:t>
+            </a:r>
+          </a:p>
+          <a:p>
+            <a:pPr marL="0" indent="0">
+              <a:buNone/>
+            </a:pPr>
             <a:endParaRPr lang="en-GB" dirty="0"/>
           </a:p>
-          <a:p>
+        </p:txBody>
+      </p:sp>
+      <p:sp>
+        <p:nvSpPr>
+          <p:cNvPr id="4" name="Content Placeholder 2">
+            <a:extLst>
+              <a:ext uri="{FF2B5EF4-FFF2-40B4-BE49-F238E27FC236}">
+                <a16:creationId xmlns:a16="http://schemas.microsoft.com/office/drawing/2014/main" id="{99033305-6AD8-7969-69BF-11336851190F}"/>
+              </a:ext>
+            </a:extLst>
+          </p:cNvPr>
+          <p:cNvSpPr txBox="1">
+            <a:spLocks/>
+          </p:cNvSpPr>
+          <p:nvPr/>
+        </p:nvSpPr>
+        <p:spPr>
+          <a:xfrm>
+            <a:off x="6239256" y="1581912"/>
+            <a:ext cx="3916680" cy="1847088"/>
+          </a:xfrm>
+          <a:prstGeom prst="rect">
+            <a:avLst/>
+          </a:prstGeom>
+        </p:spPr>
+        <p:txBody>
+          <a:bodyPr vert="horz" lIns="91440" tIns="45720" rIns="91440" bIns="45720" rtlCol="0">
+            <a:normAutofit/>
+          </a:bodyPr>
+          <a:lstStyle>
+            <a:lvl1pPr marL="342900" indent="-342900" algn="l" defTabSz="457200" rtl="0" eaLnBrk="1" latinLnBrk="0" hangingPunct="1">
+              <a:spcBef>
+                <a:spcPts val="1000"/>
+              </a:spcBef>
+              <a:spcAft>
+                <a:spcPts val="0"/>
+              </a:spcAft>
+              <a:buClr>
+                <a:schemeClr val="accent1">
+                  <a:lumMod val="60000"/>
+                  <a:lumOff val="40000"/>
+                </a:schemeClr>
+              </a:buClr>
+              <a:buSzPct val="80000"/>
+              <a:buFont typeface="Wingdings 3" charset="2"/>
+              <a:buChar char=""/>
+              <a:defRPr sz="2000" b="0" i="0" kern="1200">
+                <a:solidFill>
+                  <a:schemeClr val="tx1"/>
+                </a:solidFill>
+                <a:latin typeface="+mj-lt"/>
+                <a:ea typeface="+mj-ea"/>
+                <a:cs typeface="+mj-cs"/>
+              </a:defRPr>
+            </a:lvl1pPr>
+            <a:lvl2pPr marL="742950" indent="-285750" algn="l" defTabSz="457200" rtl="0" eaLnBrk="1" latinLnBrk="0" hangingPunct="1">
+              <a:spcBef>
+                <a:spcPts val="1000"/>
+              </a:spcBef>
+              <a:spcAft>
+                <a:spcPts val="0"/>
+              </a:spcAft>
+              <a:buClr>
+                <a:schemeClr val="accent1">
+                  <a:lumMod val="60000"/>
+                  <a:lumOff val="40000"/>
+                </a:schemeClr>
+              </a:buClr>
+              <a:buSzPct val="80000"/>
+              <a:buFont typeface="Wingdings 3" charset="2"/>
+              <a:buChar char=""/>
+              <a:defRPr sz="1800" b="0" i="0" kern="1200">
+                <a:solidFill>
+                  <a:schemeClr val="tx1"/>
+                </a:solidFill>
+                <a:latin typeface="+mj-lt"/>
+                <a:ea typeface="+mj-ea"/>
+                <a:cs typeface="+mj-cs"/>
+              </a:defRPr>
+            </a:lvl2pPr>
+            <a:lvl3pPr marL="1143000" indent="-228600" algn="l" defTabSz="457200" rtl="0" eaLnBrk="1" latinLnBrk="0" hangingPunct="1">
+              <a:spcBef>
+                <a:spcPts val="1000"/>
+              </a:spcBef>
+              <a:spcAft>
+                <a:spcPts val="0"/>
+              </a:spcAft>
+              <a:buClr>
+                <a:schemeClr val="accent1">
+                  <a:lumMod val="60000"/>
+                  <a:lumOff val="40000"/>
+                </a:schemeClr>
+              </a:buClr>
+              <a:buSzPct val="80000"/>
+              <a:buFont typeface="Wingdings 3" charset="2"/>
+              <a:buChar char=""/>
+              <a:defRPr sz="1600" b="0" i="0" kern="1200">
+                <a:solidFill>
+                  <a:schemeClr val="tx1"/>
+                </a:solidFill>
+                <a:latin typeface="+mj-lt"/>
+                <a:ea typeface="+mj-ea"/>
+                <a:cs typeface="+mj-cs"/>
+              </a:defRPr>
+            </a:lvl3pPr>
+            <a:lvl4pPr marL="1600200" indent="-228600" algn="l" defTabSz="457200" rtl="0" eaLnBrk="1" latinLnBrk="0" hangingPunct="1">
+              <a:spcBef>
+                <a:spcPts val="1000"/>
+              </a:spcBef>
+              <a:spcAft>
+                <a:spcPts val="0"/>
+              </a:spcAft>
+              <a:buClr>
+                <a:schemeClr val="accent1">
+                  <a:lumMod val="60000"/>
+                  <a:lumOff val="40000"/>
+                </a:schemeClr>
+              </a:buClr>
+              <a:buSzPct val="80000"/>
+              <a:buFont typeface="Wingdings 3" charset="2"/>
+              <a:buChar char=""/>
+              <a:defRPr sz="1400" b="0" i="0" kern="1200">
+                <a:solidFill>
+                  <a:schemeClr val="tx1"/>
+                </a:solidFill>
+                <a:latin typeface="+mj-lt"/>
+                <a:ea typeface="+mj-ea"/>
+                <a:cs typeface="+mj-cs"/>
+              </a:defRPr>
+            </a:lvl4pPr>
+            <a:lvl5pPr marL="2057400" indent="-228600" algn="l" defTabSz="457200" rtl="0" eaLnBrk="1" latinLnBrk="0" hangingPunct="1">
+              <a:spcBef>
+                <a:spcPts val="1000"/>
+              </a:spcBef>
+              <a:spcAft>
+                <a:spcPts val="0"/>
+              </a:spcAft>
+              <a:buClr>
+                <a:schemeClr val="accent1">
+                  <a:lumMod val="60000"/>
+                  <a:lumOff val="40000"/>
+                </a:schemeClr>
+              </a:buClr>
+              <a:buSzPct val="80000"/>
+              <a:buFont typeface="Wingdings 3" charset="2"/>
+              <a:buChar char=""/>
+              <a:defRPr sz="1400" b="0" i="0" kern="1200">
+                <a:solidFill>
+                  <a:schemeClr val="tx1"/>
+                </a:solidFill>
+                <a:latin typeface="+mj-lt"/>
+                <a:ea typeface="+mj-ea"/>
+                <a:cs typeface="+mj-cs"/>
+              </a:defRPr>
+            </a:lvl5pPr>
+            <a:lvl6pPr marL="2514600" indent="-228600" algn="l" defTabSz="457200" rtl="0" eaLnBrk="1" latinLnBrk="0" hangingPunct="1">
+              <a:spcBef>
+                <a:spcPts val="1000"/>
+              </a:spcBef>
+              <a:spcAft>
+                <a:spcPts val="0"/>
+              </a:spcAft>
+              <a:buClr>
+                <a:schemeClr val="accent1">
+                  <a:lumMod val="60000"/>
+                  <a:lumOff val="40000"/>
+                </a:schemeClr>
+              </a:buClr>
+              <a:buSzPct val="80000"/>
+              <a:buFont typeface="Wingdings 3" charset="2"/>
+              <a:buChar char=""/>
+              <a:defRPr sz="1400" b="0" i="0" kern="1200">
+                <a:solidFill>
+                  <a:schemeClr val="tx1"/>
+                </a:solidFill>
+                <a:latin typeface="+mj-lt"/>
+                <a:ea typeface="+mj-ea"/>
+                <a:cs typeface="+mj-cs"/>
+              </a:defRPr>
+            </a:lvl6pPr>
+            <a:lvl7pPr marL="2971800" indent="-228600" algn="l" defTabSz="457200" rtl="0" eaLnBrk="1" latinLnBrk="0" hangingPunct="1">
+              <a:spcBef>
+                <a:spcPts val="1000"/>
+              </a:spcBef>
+              <a:spcAft>
+                <a:spcPts val="0"/>
+              </a:spcAft>
+              <a:buClr>
+                <a:schemeClr val="accent1">
+                  <a:lumMod val="60000"/>
+                  <a:lumOff val="40000"/>
+                </a:schemeClr>
+              </a:buClr>
+              <a:buSzPct val="80000"/>
+              <a:buFont typeface="Wingdings 3" charset="2"/>
+              <a:buChar char=""/>
+              <a:defRPr sz="1400" b="0" i="0" kern="1200">
+                <a:solidFill>
+                  <a:schemeClr val="tx1"/>
+                </a:solidFill>
+                <a:latin typeface="+mj-lt"/>
+                <a:ea typeface="+mj-ea"/>
+                <a:cs typeface="+mj-cs"/>
+              </a:defRPr>
+            </a:lvl7pPr>
+            <a:lvl8pPr marL="3429000" indent="-228600" algn="l" defTabSz="457200" rtl="0" eaLnBrk="1" latinLnBrk="0" hangingPunct="1">
+              <a:spcBef>
+                <a:spcPts val="1000"/>
+              </a:spcBef>
+              <a:spcAft>
+                <a:spcPts val="0"/>
+              </a:spcAft>
+              <a:buClr>
+                <a:schemeClr val="accent1">
+                  <a:lumMod val="60000"/>
+                  <a:lumOff val="40000"/>
+                </a:schemeClr>
+              </a:buClr>
+              <a:buSzPct val="80000"/>
+              <a:buFont typeface="Wingdings 3" charset="2"/>
+              <a:buChar char=""/>
+              <a:defRPr sz="1400" b="0" i="0" kern="1200">
+                <a:solidFill>
+                  <a:schemeClr val="tx1"/>
+                </a:solidFill>
+                <a:latin typeface="+mj-lt"/>
+                <a:ea typeface="+mj-ea"/>
+                <a:cs typeface="+mj-cs"/>
+              </a:defRPr>
+            </a:lvl8pPr>
+            <a:lvl9pPr marL="3886200" indent="-228600" algn="l" defTabSz="457200" rtl="0" eaLnBrk="1" latinLnBrk="0" hangingPunct="1">
+              <a:spcBef>
+                <a:spcPts val="1000"/>
+              </a:spcBef>
+              <a:spcAft>
+                <a:spcPts val="0"/>
+              </a:spcAft>
+              <a:buClr>
+                <a:schemeClr val="accent1">
+                  <a:lumMod val="60000"/>
+                  <a:lumOff val="40000"/>
+                </a:schemeClr>
+              </a:buClr>
+              <a:buSzPct val="80000"/>
+              <a:buFont typeface="Wingdings 3" charset="2"/>
+              <a:buChar char=""/>
+              <a:defRPr sz="1400" b="0" i="0" kern="1200">
+                <a:solidFill>
+                  <a:schemeClr val="tx1"/>
+                </a:solidFill>
+                <a:latin typeface="+mj-lt"/>
+                <a:ea typeface="+mj-ea"/>
+                <a:cs typeface="+mj-cs"/>
+              </a:defRPr>
+            </a:lvl9pPr>
+          </a:lstStyle>
+          <a:p>
+            <a:pPr marL="0" indent="0">
+              <a:buFont typeface="Wingdings 3" charset="2"/>
+              <a:buNone/>
+            </a:pPr>
             <a:r>
               <a:rPr lang="en-GB" dirty="0"/>
-              <a:t>Research – Design Decisions – Prototyping – Testing </a:t>
-            </a:r>
+              <a:t>Industry sources </a:t>
+            </a:r>
+          </a:p>
+          <a:p>
+            <a:r>
+              <a:rPr lang="en-GB" dirty="0"/>
+              <a:t>Totten</a:t>
+            </a:r>
+          </a:p>
+          <a:p>
+            <a:r>
+              <a:rPr lang="en-GB" dirty="0"/>
+              <a:t>Kremers </a:t>
+            </a:r>
+          </a:p>
+          <a:p>
+            <a:r>
+              <a:rPr lang="en-GB" dirty="0"/>
+              <a:t>GDC talks</a:t>
+            </a:r>
+          </a:p>
+        </p:txBody>
+      </p:sp>
+      <p:sp>
+        <p:nvSpPr>
+          <p:cNvPr id="5" name="Content Placeholder 2">
+            <a:extLst>
+              <a:ext uri="{FF2B5EF4-FFF2-40B4-BE49-F238E27FC236}">
+                <a16:creationId xmlns:a16="http://schemas.microsoft.com/office/drawing/2014/main" id="{78D328CF-A0DC-F782-5BF2-D2F5C325301C}"/>
+              </a:ext>
+            </a:extLst>
+          </p:cNvPr>
+          <p:cNvSpPr txBox="1">
+            <a:spLocks/>
+          </p:cNvSpPr>
+          <p:nvPr/>
+        </p:nvSpPr>
+        <p:spPr>
+          <a:xfrm>
+            <a:off x="507459" y="5111496"/>
+            <a:ext cx="11177081" cy="502920"/>
+          </a:xfrm>
+          <a:prstGeom prst="rect">
+            <a:avLst/>
+          </a:prstGeom>
+        </p:spPr>
+        <p:txBody>
+          <a:bodyPr vert="horz" lIns="91440" tIns="45720" rIns="91440" bIns="45720" rtlCol="0">
+            <a:normAutofit/>
+          </a:bodyPr>
+          <a:lstStyle>
+            <a:lvl1pPr marL="342900" indent="-342900" algn="l" defTabSz="457200" rtl="0" eaLnBrk="1" latinLnBrk="0" hangingPunct="1">
+              <a:spcBef>
+                <a:spcPts val="1000"/>
+              </a:spcBef>
+              <a:spcAft>
+                <a:spcPts val="0"/>
+              </a:spcAft>
+              <a:buClr>
+                <a:schemeClr val="accent1">
+                  <a:lumMod val="60000"/>
+                  <a:lumOff val="40000"/>
+                </a:schemeClr>
+              </a:buClr>
+              <a:buSzPct val="80000"/>
+              <a:buFont typeface="Wingdings 3" charset="2"/>
+              <a:buChar char=""/>
+              <a:defRPr sz="2000" b="0" i="0" kern="1200">
+                <a:solidFill>
+                  <a:schemeClr val="tx1"/>
+                </a:solidFill>
+                <a:latin typeface="+mj-lt"/>
+                <a:ea typeface="+mj-ea"/>
+                <a:cs typeface="+mj-cs"/>
+              </a:defRPr>
+            </a:lvl1pPr>
+            <a:lvl2pPr marL="742950" indent="-285750" algn="l" defTabSz="457200" rtl="0" eaLnBrk="1" latinLnBrk="0" hangingPunct="1">
+              <a:spcBef>
+                <a:spcPts val="1000"/>
+              </a:spcBef>
+              <a:spcAft>
+                <a:spcPts val="0"/>
+              </a:spcAft>
+              <a:buClr>
+                <a:schemeClr val="accent1">
+                  <a:lumMod val="60000"/>
+                  <a:lumOff val="40000"/>
+                </a:schemeClr>
+              </a:buClr>
+              <a:buSzPct val="80000"/>
+              <a:buFont typeface="Wingdings 3" charset="2"/>
+              <a:buChar char=""/>
+              <a:defRPr sz="1800" b="0" i="0" kern="1200">
+                <a:solidFill>
+                  <a:schemeClr val="tx1"/>
+                </a:solidFill>
+                <a:latin typeface="+mj-lt"/>
+                <a:ea typeface="+mj-ea"/>
+                <a:cs typeface="+mj-cs"/>
+              </a:defRPr>
+            </a:lvl2pPr>
+            <a:lvl3pPr marL="1143000" indent="-228600" algn="l" defTabSz="457200" rtl="0" eaLnBrk="1" latinLnBrk="0" hangingPunct="1">
+              <a:spcBef>
+                <a:spcPts val="1000"/>
+              </a:spcBef>
+              <a:spcAft>
+                <a:spcPts val="0"/>
+              </a:spcAft>
+              <a:buClr>
+                <a:schemeClr val="accent1">
+                  <a:lumMod val="60000"/>
+                  <a:lumOff val="40000"/>
+                </a:schemeClr>
+              </a:buClr>
+              <a:buSzPct val="80000"/>
+              <a:buFont typeface="Wingdings 3" charset="2"/>
+              <a:buChar char=""/>
+              <a:defRPr sz="1600" b="0" i="0" kern="1200">
+                <a:solidFill>
+                  <a:schemeClr val="tx1"/>
+                </a:solidFill>
+                <a:latin typeface="+mj-lt"/>
+                <a:ea typeface="+mj-ea"/>
+                <a:cs typeface="+mj-cs"/>
+              </a:defRPr>
+            </a:lvl3pPr>
+            <a:lvl4pPr marL="1600200" indent="-228600" algn="l" defTabSz="457200" rtl="0" eaLnBrk="1" latinLnBrk="0" hangingPunct="1">
+              <a:spcBef>
+                <a:spcPts val="1000"/>
+              </a:spcBef>
+              <a:spcAft>
+                <a:spcPts val="0"/>
+              </a:spcAft>
+              <a:buClr>
+                <a:schemeClr val="accent1">
+                  <a:lumMod val="60000"/>
+                  <a:lumOff val="40000"/>
+                </a:schemeClr>
+              </a:buClr>
+              <a:buSzPct val="80000"/>
+              <a:buFont typeface="Wingdings 3" charset="2"/>
+              <a:buChar char=""/>
+              <a:defRPr sz="1400" b="0" i="0" kern="1200">
+                <a:solidFill>
+                  <a:schemeClr val="tx1"/>
+                </a:solidFill>
+                <a:latin typeface="+mj-lt"/>
+                <a:ea typeface="+mj-ea"/>
+                <a:cs typeface="+mj-cs"/>
+              </a:defRPr>
+            </a:lvl4pPr>
+            <a:lvl5pPr marL="2057400" indent="-228600" algn="l" defTabSz="457200" rtl="0" eaLnBrk="1" latinLnBrk="0" hangingPunct="1">
+              <a:spcBef>
+                <a:spcPts val="1000"/>
+              </a:spcBef>
+              <a:spcAft>
+                <a:spcPts val="0"/>
+              </a:spcAft>
+              <a:buClr>
+                <a:schemeClr val="accent1">
+                  <a:lumMod val="60000"/>
+                  <a:lumOff val="40000"/>
+                </a:schemeClr>
+              </a:buClr>
+              <a:buSzPct val="80000"/>
+              <a:buFont typeface="Wingdings 3" charset="2"/>
+              <a:buChar char=""/>
+              <a:defRPr sz="1400" b="0" i="0" kern="1200">
+                <a:solidFill>
+                  <a:schemeClr val="tx1"/>
+                </a:solidFill>
+                <a:latin typeface="+mj-lt"/>
+                <a:ea typeface="+mj-ea"/>
+                <a:cs typeface="+mj-cs"/>
+              </a:defRPr>
+            </a:lvl5pPr>
+            <a:lvl6pPr marL="2514600" indent="-228600" algn="l" defTabSz="457200" rtl="0" eaLnBrk="1" latinLnBrk="0" hangingPunct="1">
+              <a:spcBef>
+                <a:spcPts val="1000"/>
+              </a:spcBef>
+              <a:spcAft>
+                <a:spcPts val="0"/>
+              </a:spcAft>
+              <a:buClr>
+                <a:schemeClr val="accent1">
+                  <a:lumMod val="60000"/>
+                  <a:lumOff val="40000"/>
+                </a:schemeClr>
+              </a:buClr>
+              <a:buSzPct val="80000"/>
+              <a:buFont typeface="Wingdings 3" charset="2"/>
+              <a:buChar char=""/>
+              <a:defRPr sz="1400" b="0" i="0" kern="1200">
+                <a:solidFill>
+                  <a:schemeClr val="tx1"/>
+                </a:solidFill>
+                <a:latin typeface="+mj-lt"/>
+                <a:ea typeface="+mj-ea"/>
+                <a:cs typeface="+mj-cs"/>
+              </a:defRPr>
+            </a:lvl6pPr>
+            <a:lvl7pPr marL="2971800" indent="-228600" algn="l" defTabSz="457200" rtl="0" eaLnBrk="1" latinLnBrk="0" hangingPunct="1">
+              <a:spcBef>
+                <a:spcPts val="1000"/>
+              </a:spcBef>
+              <a:spcAft>
+                <a:spcPts val="0"/>
+              </a:spcAft>
+              <a:buClr>
+                <a:schemeClr val="accent1">
+                  <a:lumMod val="60000"/>
+                  <a:lumOff val="40000"/>
+                </a:schemeClr>
+              </a:buClr>
+              <a:buSzPct val="80000"/>
+              <a:buFont typeface="Wingdings 3" charset="2"/>
+              <a:buChar char=""/>
+              <a:defRPr sz="1400" b="0" i="0" kern="1200">
+                <a:solidFill>
+                  <a:schemeClr val="tx1"/>
+                </a:solidFill>
+                <a:latin typeface="+mj-lt"/>
+                <a:ea typeface="+mj-ea"/>
+                <a:cs typeface="+mj-cs"/>
+              </a:defRPr>
+            </a:lvl7pPr>
+            <a:lvl8pPr marL="3429000" indent="-228600" algn="l" defTabSz="457200" rtl="0" eaLnBrk="1" latinLnBrk="0" hangingPunct="1">
+              <a:spcBef>
+                <a:spcPts val="1000"/>
+              </a:spcBef>
+              <a:spcAft>
+                <a:spcPts val="0"/>
+              </a:spcAft>
+              <a:buClr>
+                <a:schemeClr val="accent1">
+                  <a:lumMod val="60000"/>
+                  <a:lumOff val="40000"/>
+                </a:schemeClr>
+              </a:buClr>
+              <a:buSzPct val="80000"/>
+              <a:buFont typeface="Wingdings 3" charset="2"/>
+              <a:buChar char=""/>
+              <a:defRPr sz="1400" b="0" i="0" kern="1200">
+                <a:solidFill>
+                  <a:schemeClr val="tx1"/>
+                </a:solidFill>
+                <a:latin typeface="+mj-lt"/>
+                <a:ea typeface="+mj-ea"/>
+                <a:cs typeface="+mj-cs"/>
+              </a:defRPr>
+            </a:lvl8pPr>
+            <a:lvl9pPr marL="3886200" indent="-228600" algn="l" defTabSz="457200" rtl="0" eaLnBrk="1" latinLnBrk="0" hangingPunct="1">
+              <a:spcBef>
+                <a:spcPts val="1000"/>
+              </a:spcBef>
+              <a:spcAft>
+                <a:spcPts val="0"/>
+              </a:spcAft>
+              <a:buClr>
+                <a:schemeClr val="accent1">
+                  <a:lumMod val="60000"/>
+                  <a:lumOff val="40000"/>
+                </a:schemeClr>
+              </a:buClr>
+              <a:buSzPct val="80000"/>
+              <a:buFont typeface="Wingdings 3" charset="2"/>
+              <a:buChar char=""/>
+              <a:defRPr sz="1400" b="0" i="0" kern="1200">
+                <a:solidFill>
+                  <a:schemeClr val="tx1"/>
+                </a:solidFill>
+                <a:latin typeface="+mj-lt"/>
+                <a:ea typeface="+mj-ea"/>
+                <a:cs typeface="+mj-cs"/>
+              </a:defRPr>
+            </a:lvl9pPr>
+          </a:lstStyle>
+          <a:p>
+            <a:pPr marL="0" indent="0">
+              <a:buFont typeface="Wingdings 3" charset="2"/>
+              <a:buNone/>
+            </a:pPr>
+            <a:r>
+              <a:rPr lang="en-GB" dirty="0"/>
+              <a:t>Extensive list of videos, books, and educational articles are listed in my proposal form</a:t>
+            </a:r>
+          </a:p>
+          <a:p>
+            <a:pPr marL="0" indent="0">
+              <a:buFont typeface="Wingdings 3" charset="2"/>
+              <a:buNone/>
+            </a:pPr>
+            <a:endParaRPr lang="en-GB" dirty="0"/>
           </a:p>
         </p:txBody>
       </p:sp>
@@ -6859,7 +7871,7 @@
           <p:cNvPr id="2" name="Title 1">
             <a:extLst>
               <a:ext uri="{FF2B5EF4-FFF2-40B4-BE49-F238E27FC236}">
-                <a16:creationId xmlns:a16="http://schemas.microsoft.com/office/drawing/2014/main" id="{02ED499B-D391-1998-8220-49BBE4D548A9}"/>
+                <a16:creationId xmlns:a16="http://schemas.microsoft.com/office/drawing/2014/main" id="{E4FF66F7-7AB2-C807-5800-FC353C35F740}"/>
               </a:ext>
             </a:extLst>
           </p:cNvPr>
@@ -6870,14 +7882,19 @@
             <p:ph type="title"/>
           </p:nvPr>
         </p:nvSpPr>
-        <p:spPr/>
+        <p:spPr>
+          <a:xfrm>
+            <a:off x="4410705" y="297270"/>
+            <a:ext cx="2331753" cy="928026"/>
+          </a:xfrm>
+        </p:spPr>
         <p:txBody>
           <a:bodyPr/>
           <a:lstStyle/>
           <a:p>
             <a:r>
               <a:rPr lang="en-GB" dirty="0"/>
-              <a:t>What are the key research questions that you will seek to answer in your project? </a:t>
+              <a:t>Artefact</a:t>
             </a:r>
           </a:p>
         </p:txBody>
@@ -6887,7 +7904,7 @@
           <p:cNvPr id="3" name="Content Placeholder 2">
             <a:extLst>
               <a:ext uri="{FF2B5EF4-FFF2-40B4-BE49-F238E27FC236}">
-                <a16:creationId xmlns:a16="http://schemas.microsoft.com/office/drawing/2014/main" id="{C02697F5-3BF2-E88E-4728-39D1C5BBD9BF}"/>
+                <a16:creationId xmlns:a16="http://schemas.microsoft.com/office/drawing/2014/main" id="{62C57817-3008-A9C8-81C4-BA5477735626}"/>
               </a:ext>
             </a:extLst>
           </p:cNvPr>
@@ -6898,19 +7915,442 @@
             <p:ph idx="1"/>
           </p:nvPr>
         </p:nvSpPr>
-        <p:spPr/>
+        <p:spPr>
+          <a:xfrm>
+            <a:off x="371793" y="2365249"/>
+            <a:ext cx="5388928" cy="4195481"/>
+          </a:xfrm>
+        </p:spPr>
         <p:txBody>
           <a:bodyPr/>
           <a:lstStyle/>
           <a:p>
-            <a:endParaRPr lang="en-GB"/>
-          </a:p>
-        </p:txBody>
-      </p:sp>
+            <a:pPr marL="0" indent="0">
+              <a:buNone/>
+            </a:pPr>
+            <a:r>
+              <a:rPr lang="en-GB" dirty="0"/>
+              <a:t>Primary Artefact:</a:t>
+            </a:r>
+          </a:p>
+          <a:p>
+            <a:r>
+              <a:rPr lang="en-GB" dirty="0"/>
+              <a:t>4 Unreal Engine Prototypes</a:t>
+            </a:r>
+          </a:p>
+          <a:p>
+            <a:r>
+              <a:rPr lang="en-GB" dirty="0"/>
+              <a:t>Prototype 1  - Lighting</a:t>
+            </a:r>
+          </a:p>
+          <a:p>
+            <a:r>
+              <a:rPr lang="en-GB" dirty="0"/>
+              <a:t>Prototype 2 – Landmarks </a:t>
+            </a:r>
+          </a:p>
+          <a:p>
+            <a:r>
+              <a:rPr lang="en-GB" dirty="0"/>
+              <a:t>Prototype 3 – Audio </a:t>
+            </a:r>
+          </a:p>
+          <a:p>
+            <a:r>
+              <a:rPr lang="en-GB" dirty="0"/>
+              <a:t>Prototype 4 – Combined Techniques </a:t>
+            </a:r>
+          </a:p>
+          <a:p>
+            <a:pPr marL="0" indent="0">
+              <a:buNone/>
+            </a:pPr>
+            <a:r>
+              <a:rPr lang="en-GB" dirty="0"/>
+              <a:t>Supporting Artefact:</a:t>
+            </a:r>
+          </a:p>
+          <a:p>
+            <a:r>
+              <a:rPr lang="en-GB" dirty="0"/>
+              <a:t>Research Blog/ development vlog</a:t>
+            </a:r>
+          </a:p>
+          <a:p>
+            <a:endParaRPr lang="en-GB" dirty="0"/>
+          </a:p>
+        </p:txBody>
+      </p:sp>
+      <p:sp>
+        <p:nvSpPr>
+          <p:cNvPr id="4" name="TextBox 3">
+            <a:extLst>
+              <a:ext uri="{FF2B5EF4-FFF2-40B4-BE49-F238E27FC236}">
+                <a16:creationId xmlns:a16="http://schemas.microsoft.com/office/drawing/2014/main" id="{9CB855F5-2AED-6AD8-6509-89CF2184D21A}"/>
+              </a:ext>
+            </a:extLst>
+          </p:cNvPr>
+          <p:cNvSpPr txBox="1"/>
+          <p:nvPr/>
+        </p:nvSpPr>
+        <p:spPr>
+          <a:xfrm>
+            <a:off x="371793" y="1169966"/>
+            <a:ext cx="7854696" cy="646331"/>
+          </a:xfrm>
+          <a:prstGeom prst="rect">
+            <a:avLst/>
+          </a:prstGeom>
+          <a:noFill/>
+        </p:spPr>
+        <p:txBody>
+          <a:bodyPr wrap="square" rtlCol="0">
+            <a:spAutoFit/>
+          </a:bodyPr>
+          <a:lstStyle/>
+          <a:p>
+            <a:r>
+              <a:rPr lang="en-GB" dirty="0"/>
+              <a:t>Title - Environmental Guidance in Digital Games: Influencing Player Navigation Without Explicit Instruction  </a:t>
+            </a:r>
+          </a:p>
+        </p:txBody>
+      </p:sp>
+      <p:sp>
+        <p:nvSpPr>
+          <p:cNvPr id="5" name="Content Placeholder 2">
+            <a:extLst>
+              <a:ext uri="{FF2B5EF4-FFF2-40B4-BE49-F238E27FC236}">
+                <a16:creationId xmlns:a16="http://schemas.microsoft.com/office/drawing/2014/main" id="{548A7C16-D21C-BA58-FA68-A945D829D6BB}"/>
+              </a:ext>
+            </a:extLst>
+          </p:cNvPr>
+          <p:cNvSpPr txBox="1">
+            <a:spLocks/>
+          </p:cNvSpPr>
+          <p:nvPr/>
+        </p:nvSpPr>
+        <p:spPr>
+          <a:xfrm>
+            <a:off x="8612546" y="1275930"/>
+            <a:ext cx="1316735" cy="434404"/>
+          </a:xfrm>
+          <a:prstGeom prst="rect">
+            <a:avLst/>
+          </a:prstGeom>
+        </p:spPr>
+        <p:txBody>
+          <a:bodyPr vert="horz" lIns="91440" tIns="45720" rIns="91440" bIns="45720" rtlCol="0">
+            <a:normAutofit/>
+          </a:bodyPr>
+          <a:lstStyle>
+            <a:lvl1pPr marL="342900" indent="-342900" algn="l" defTabSz="457200" rtl="0" eaLnBrk="1" latinLnBrk="0" hangingPunct="1">
+              <a:spcBef>
+                <a:spcPts val="1000"/>
+              </a:spcBef>
+              <a:spcAft>
+                <a:spcPts val="0"/>
+              </a:spcAft>
+              <a:buClr>
+                <a:schemeClr val="accent1">
+                  <a:lumMod val="60000"/>
+                  <a:lumOff val="40000"/>
+                </a:schemeClr>
+              </a:buClr>
+              <a:buSzPct val="80000"/>
+              <a:buFont typeface="Wingdings 3" charset="2"/>
+              <a:buChar char=""/>
+              <a:defRPr sz="2000" b="0" i="0" kern="1200">
+                <a:solidFill>
+                  <a:schemeClr val="tx1"/>
+                </a:solidFill>
+                <a:latin typeface="+mj-lt"/>
+                <a:ea typeface="+mj-ea"/>
+                <a:cs typeface="+mj-cs"/>
+              </a:defRPr>
+            </a:lvl1pPr>
+            <a:lvl2pPr marL="742950" indent="-285750" algn="l" defTabSz="457200" rtl="0" eaLnBrk="1" latinLnBrk="0" hangingPunct="1">
+              <a:spcBef>
+                <a:spcPts val="1000"/>
+              </a:spcBef>
+              <a:spcAft>
+                <a:spcPts val="0"/>
+              </a:spcAft>
+              <a:buClr>
+                <a:schemeClr val="accent1">
+                  <a:lumMod val="60000"/>
+                  <a:lumOff val="40000"/>
+                </a:schemeClr>
+              </a:buClr>
+              <a:buSzPct val="80000"/>
+              <a:buFont typeface="Wingdings 3" charset="2"/>
+              <a:buChar char=""/>
+              <a:defRPr sz="1800" b="0" i="0" kern="1200">
+                <a:solidFill>
+                  <a:schemeClr val="tx1"/>
+                </a:solidFill>
+                <a:latin typeface="+mj-lt"/>
+                <a:ea typeface="+mj-ea"/>
+                <a:cs typeface="+mj-cs"/>
+              </a:defRPr>
+            </a:lvl2pPr>
+            <a:lvl3pPr marL="1143000" indent="-228600" algn="l" defTabSz="457200" rtl="0" eaLnBrk="1" latinLnBrk="0" hangingPunct="1">
+              <a:spcBef>
+                <a:spcPts val="1000"/>
+              </a:spcBef>
+              <a:spcAft>
+                <a:spcPts val="0"/>
+              </a:spcAft>
+              <a:buClr>
+                <a:schemeClr val="accent1">
+                  <a:lumMod val="60000"/>
+                  <a:lumOff val="40000"/>
+                </a:schemeClr>
+              </a:buClr>
+              <a:buSzPct val="80000"/>
+              <a:buFont typeface="Wingdings 3" charset="2"/>
+              <a:buChar char=""/>
+              <a:defRPr sz="1600" b="0" i="0" kern="1200">
+                <a:solidFill>
+                  <a:schemeClr val="tx1"/>
+                </a:solidFill>
+                <a:latin typeface="+mj-lt"/>
+                <a:ea typeface="+mj-ea"/>
+                <a:cs typeface="+mj-cs"/>
+              </a:defRPr>
+            </a:lvl3pPr>
+            <a:lvl4pPr marL="1600200" indent="-228600" algn="l" defTabSz="457200" rtl="0" eaLnBrk="1" latinLnBrk="0" hangingPunct="1">
+              <a:spcBef>
+                <a:spcPts val="1000"/>
+              </a:spcBef>
+              <a:spcAft>
+                <a:spcPts val="0"/>
+              </a:spcAft>
+              <a:buClr>
+                <a:schemeClr val="accent1">
+                  <a:lumMod val="60000"/>
+                  <a:lumOff val="40000"/>
+                </a:schemeClr>
+              </a:buClr>
+              <a:buSzPct val="80000"/>
+              <a:buFont typeface="Wingdings 3" charset="2"/>
+              <a:buChar char=""/>
+              <a:defRPr sz="1400" b="0" i="0" kern="1200">
+                <a:solidFill>
+                  <a:schemeClr val="tx1"/>
+                </a:solidFill>
+                <a:latin typeface="+mj-lt"/>
+                <a:ea typeface="+mj-ea"/>
+                <a:cs typeface="+mj-cs"/>
+              </a:defRPr>
+            </a:lvl4pPr>
+            <a:lvl5pPr marL="2057400" indent="-228600" algn="l" defTabSz="457200" rtl="0" eaLnBrk="1" latinLnBrk="0" hangingPunct="1">
+              <a:spcBef>
+                <a:spcPts val="1000"/>
+              </a:spcBef>
+              <a:spcAft>
+                <a:spcPts val="0"/>
+              </a:spcAft>
+              <a:buClr>
+                <a:schemeClr val="accent1">
+                  <a:lumMod val="60000"/>
+                  <a:lumOff val="40000"/>
+                </a:schemeClr>
+              </a:buClr>
+              <a:buSzPct val="80000"/>
+              <a:buFont typeface="Wingdings 3" charset="2"/>
+              <a:buChar char=""/>
+              <a:defRPr sz="1400" b="0" i="0" kern="1200">
+                <a:solidFill>
+                  <a:schemeClr val="tx1"/>
+                </a:solidFill>
+                <a:latin typeface="+mj-lt"/>
+                <a:ea typeface="+mj-ea"/>
+                <a:cs typeface="+mj-cs"/>
+              </a:defRPr>
+            </a:lvl5pPr>
+            <a:lvl6pPr marL="2514600" indent="-228600" algn="l" defTabSz="457200" rtl="0" eaLnBrk="1" latinLnBrk="0" hangingPunct="1">
+              <a:spcBef>
+                <a:spcPts val="1000"/>
+              </a:spcBef>
+              <a:spcAft>
+                <a:spcPts val="0"/>
+              </a:spcAft>
+              <a:buClr>
+                <a:schemeClr val="accent1">
+                  <a:lumMod val="60000"/>
+                  <a:lumOff val="40000"/>
+                </a:schemeClr>
+              </a:buClr>
+              <a:buSzPct val="80000"/>
+              <a:buFont typeface="Wingdings 3" charset="2"/>
+              <a:buChar char=""/>
+              <a:defRPr sz="1400" b="0" i="0" kern="1200">
+                <a:solidFill>
+                  <a:schemeClr val="tx1"/>
+                </a:solidFill>
+                <a:latin typeface="+mj-lt"/>
+                <a:ea typeface="+mj-ea"/>
+                <a:cs typeface="+mj-cs"/>
+              </a:defRPr>
+            </a:lvl6pPr>
+            <a:lvl7pPr marL="2971800" indent="-228600" algn="l" defTabSz="457200" rtl="0" eaLnBrk="1" latinLnBrk="0" hangingPunct="1">
+              <a:spcBef>
+                <a:spcPts val="1000"/>
+              </a:spcBef>
+              <a:spcAft>
+                <a:spcPts val="0"/>
+              </a:spcAft>
+              <a:buClr>
+                <a:schemeClr val="accent1">
+                  <a:lumMod val="60000"/>
+                  <a:lumOff val="40000"/>
+                </a:schemeClr>
+              </a:buClr>
+              <a:buSzPct val="80000"/>
+              <a:buFont typeface="Wingdings 3" charset="2"/>
+              <a:buChar char=""/>
+              <a:defRPr sz="1400" b="0" i="0" kern="1200">
+                <a:solidFill>
+                  <a:schemeClr val="tx1"/>
+                </a:solidFill>
+                <a:latin typeface="+mj-lt"/>
+                <a:ea typeface="+mj-ea"/>
+                <a:cs typeface="+mj-cs"/>
+              </a:defRPr>
+            </a:lvl7pPr>
+            <a:lvl8pPr marL="3429000" indent="-228600" algn="l" defTabSz="457200" rtl="0" eaLnBrk="1" latinLnBrk="0" hangingPunct="1">
+              <a:spcBef>
+                <a:spcPts val="1000"/>
+              </a:spcBef>
+              <a:spcAft>
+                <a:spcPts val="0"/>
+              </a:spcAft>
+              <a:buClr>
+                <a:schemeClr val="accent1">
+                  <a:lumMod val="60000"/>
+                  <a:lumOff val="40000"/>
+                </a:schemeClr>
+              </a:buClr>
+              <a:buSzPct val="80000"/>
+              <a:buFont typeface="Wingdings 3" charset="2"/>
+              <a:buChar char=""/>
+              <a:defRPr sz="1400" b="0" i="0" kern="1200">
+                <a:solidFill>
+                  <a:schemeClr val="tx1"/>
+                </a:solidFill>
+                <a:latin typeface="+mj-lt"/>
+                <a:ea typeface="+mj-ea"/>
+                <a:cs typeface="+mj-cs"/>
+              </a:defRPr>
+            </a:lvl8pPr>
+            <a:lvl9pPr marL="3886200" indent="-228600" algn="l" defTabSz="457200" rtl="0" eaLnBrk="1" latinLnBrk="0" hangingPunct="1">
+              <a:spcBef>
+                <a:spcPts val="1000"/>
+              </a:spcBef>
+              <a:spcAft>
+                <a:spcPts val="0"/>
+              </a:spcAft>
+              <a:buClr>
+                <a:schemeClr val="accent1">
+                  <a:lumMod val="60000"/>
+                  <a:lumOff val="40000"/>
+                </a:schemeClr>
+              </a:buClr>
+              <a:buSzPct val="80000"/>
+              <a:buFont typeface="Wingdings 3" charset="2"/>
+              <a:buChar char=""/>
+              <a:defRPr sz="1400" b="0" i="0" kern="1200">
+                <a:solidFill>
+                  <a:schemeClr val="tx1"/>
+                </a:solidFill>
+                <a:latin typeface="+mj-lt"/>
+                <a:ea typeface="+mj-ea"/>
+                <a:cs typeface="+mj-cs"/>
+              </a:defRPr>
+            </a:lvl9pPr>
+          </a:lstStyle>
+          <a:p>
+            <a:pPr marL="0" indent="0">
+              <a:buFont typeface="Wingdings 3" charset="2"/>
+              <a:buNone/>
+            </a:pPr>
+            <a:r>
+              <a:rPr lang="en-GB" dirty="0"/>
+              <a:t>TimeLine</a:t>
+            </a:r>
+          </a:p>
+          <a:p>
+            <a:endParaRPr lang="en-GB" dirty="0"/>
+          </a:p>
+        </p:txBody>
+      </p:sp>
+      <p:pic>
+        <p:nvPicPr>
+          <p:cNvPr id="9" name="Picture 8">
+            <a:extLst>
+              <a:ext uri="{FF2B5EF4-FFF2-40B4-BE49-F238E27FC236}">
+                <a16:creationId xmlns:a16="http://schemas.microsoft.com/office/drawing/2014/main" id="{BAA7F541-F548-F85E-96E8-453738829E4E}"/>
+              </a:ext>
+            </a:extLst>
+          </p:cNvPr>
+          <p:cNvPicPr>
+            <a:picLocks noChangeAspect="1"/>
+          </p:cNvPicPr>
+          <p:nvPr/>
+        </p:nvPicPr>
+        <p:blipFill>
+          <a:blip r:embed="rId2"/>
+          <a:stretch>
+            <a:fillRect/>
+          </a:stretch>
+        </p:blipFill>
+        <p:spPr>
+          <a:xfrm>
+            <a:off x="6861330" y="1760968"/>
+            <a:ext cx="4819169" cy="3738399"/>
+          </a:xfrm>
+          <a:prstGeom prst="rect">
+            <a:avLst/>
+          </a:prstGeom>
+        </p:spPr>
+      </p:pic>
+      <p:pic>
+        <p:nvPicPr>
+          <p:cNvPr id="11" name="Picture 10">
+            <a:extLst>
+              <a:ext uri="{FF2B5EF4-FFF2-40B4-BE49-F238E27FC236}">
+                <a16:creationId xmlns:a16="http://schemas.microsoft.com/office/drawing/2014/main" id="{43246778-FC3A-C688-DFE9-331141E0E26D}"/>
+              </a:ext>
+            </a:extLst>
+          </p:cNvPr>
+          <p:cNvPicPr>
+            <a:picLocks noChangeAspect="1"/>
+          </p:cNvPicPr>
+          <p:nvPr/>
+        </p:nvPicPr>
+        <p:blipFill>
+          <a:blip r:embed="rId3"/>
+          <a:stretch>
+            <a:fillRect/>
+          </a:stretch>
+        </p:blipFill>
+        <p:spPr>
+          <a:xfrm>
+            <a:off x="6861330" y="5499367"/>
+            <a:ext cx="4819169" cy="1223617"/>
+          </a:xfrm>
+          <a:prstGeom prst="rect">
+            <a:avLst/>
+          </a:prstGeom>
+        </p:spPr>
+      </p:pic>
     </p:spTree>
     <p:extLst>
       <p:ext uri="{BB962C8B-B14F-4D97-AF65-F5344CB8AC3E}">
-        <p14:creationId xmlns:p14="http://schemas.microsoft.com/office/powerpoint/2010/main" val="1206744013"/>
+        <p14:creationId xmlns:p14="http://schemas.microsoft.com/office/powerpoint/2010/main" val="2858686636"/>
       </p:ext>
     </p:extLst>
   </p:cSld>
@@ -6942,7 +8382,7 @@
           <p:cNvPr id="2" name="Title 1">
             <a:extLst>
               <a:ext uri="{FF2B5EF4-FFF2-40B4-BE49-F238E27FC236}">
-                <a16:creationId xmlns:a16="http://schemas.microsoft.com/office/drawing/2014/main" id="{E4FF66F7-7AB2-C807-5800-FC353C35F740}"/>
+                <a16:creationId xmlns:a16="http://schemas.microsoft.com/office/drawing/2014/main" id="{6FE3C765-55EB-3296-4026-BC08AEB8CC4F}"/>
               </a:ext>
             </a:extLst>
           </p:cNvPr>
@@ -6953,14 +8393,19 @@
             <p:ph type="title"/>
           </p:nvPr>
         </p:nvSpPr>
-        <p:spPr/>
+        <p:spPr>
+          <a:xfrm>
+            <a:off x="645130" y="288126"/>
+            <a:ext cx="9404723" cy="1400530"/>
+          </a:xfrm>
+        </p:spPr>
         <p:txBody>
           <a:bodyPr/>
           <a:lstStyle/>
           <a:p>
             <a:r>
               <a:rPr lang="en-GB" dirty="0"/>
-              <a:t>What will be the final format of your artefact?</a:t>
+              <a:t>Research &amp; Development Approach</a:t>
             </a:r>
           </a:p>
         </p:txBody>
@@ -6970,7 +8415,7 @@
           <p:cNvPr id="3" name="Content Placeholder 2">
             <a:extLst>
               <a:ext uri="{FF2B5EF4-FFF2-40B4-BE49-F238E27FC236}">
-                <a16:creationId xmlns:a16="http://schemas.microsoft.com/office/drawing/2014/main" id="{62C57817-3008-A9C8-81C4-BA5477735626}"/>
+                <a16:creationId xmlns:a16="http://schemas.microsoft.com/office/drawing/2014/main" id="{A7A3EA8E-A18A-E00D-D6B4-440D0F5532D3}"/>
               </a:ext>
             </a:extLst>
           </p:cNvPr>
@@ -6981,19 +8426,322 @@
             <p:ph idx="1"/>
           </p:nvPr>
         </p:nvSpPr>
-        <p:spPr/>
-        <p:txBody>
-          <a:bodyPr/>
+        <p:spPr>
+          <a:xfrm>
+            <a:off x="4452169" y="1645920"/>
+            <a:ext cx="3679000" cy="4923954"/>
+          </a:xfrm>
+          <a:ln>
+            <a:solidFill>
+              <a:schemeClr val="tx1"/>
+            </a:solidFill>
+          </a:ln>
+        </p:spPr>
+        <p:txBody>
+          <a:bodyPr>
+            <a:normAutofit/>
+          </a:bodyPr>
           <a:lstStyle/>
           <a:p>
-            <a:endParaRPr lang="en-GB"/>
-          </a:p>
-        </p:txBody>
-      </p:sp>
+            <a:pPr marL="0" indent="0" algn="ctr">
+              <a:buNone/>
+            </a:pPr>
+            <a:r>
+              <a:rPr lang="en-GB" dirty="0"/>
+              <a:t>Literature Review</a:t>
+            </a:r>
+          </a:p>
+          <a:p>
+            <a:pPr marL="0" indent="0" algn="ctr">
+              <a:buNone/>
+            </a:pPr>
+            <a:endParaRPr lang="en-GB" dirty="0"/>
+          </a:p>
+          <a:p>
+            <a:pPr marL="0" indent="0" algn="ctr">
+              <a:buNone/>
+            </a:pPr>
+            <a:r>
+              <a:rPr lang="en-GB" dirty="0"/>
+              <a:t>Contextual Review </a:t>
+            </a:r>
+          </a:p>
+          <a:p>
+            <a:pPr marL="0" indent="0" algn="ctr">
+              <a:buNone/>
+            </a:pPr>
+            <a:endParaRPr lang="en-GB" dirty="0"/>
+          </a:p>
+          <a:p>
+            <a:pPr marL="0" indent="0" algn="ctr">
+              <a:buNone/>
+            </a:pPr>
+            <a:r>
+              <a:rPr lang="en-GB" dirty="0"/>
+              <a:t>Prototype Development </a:t>
+            </a:r>
+          </a:p>
+          <a:p>
+            <a:pPr marL="0" indent="0" algn="ctr">
+              <a:buNone/>
+            </a:pPr>
+            <a:endParaRPr lang="en-GB" dirty="0"/>
+          </a:p>
+          <a:p>
+            <a:pPr marL="0" indent="0" algn="ctr">
+              <a:buNone/>
+            </a:pPr>
+            <a:r>
+              <a:rPr lang="en-GB" dirty="0"/>
+              <a:t>Playtesting</a:t>
+            </a:r>
+          </a:p>
+          <a:p>
+            <a:pPr marL="0" indent="0" algn="ctr">
+              <a:buNone/>
+            </a:pPr>
+            <a:endParaRPr lang="en-GB" dirty="0"/>
+          </a:p>
+          <a:p>
+            <a:pPr marL="0" indent="0" algn="ctr">
+              <a:buNone/>
+            </a:pPr>
+            <a:r>
+              <a:rPr lang="en-GB" dirty="0"/>
+              <a:t>Analysis</a:t>
+            </a:r>
+          </a:p>
+          <a:p>
+            <a:pPr marL="0" indent="0" algn="ctr">
+              <a:buNone/>
+            </a:pPr>
+            <a:endParaRPr lang="en-GB" dirty="0"/>
+          </a:p>
+          <a:p>
+            <a:pPr marL="0" indent="0" algn="ctr">
+              <a:buNone/>
+            </a:pPr>
+            <a:r>
+              <a:rPr lang="en-GB" dirty="0"/>
+              <a:t>Recommendations</a:t>
+            </a:r>
+          </a:p>
+        </p:txBody>
+      </p:sp>
+      <p:cxnSp>
+        <p:nvCxnSpPr>
+          <p:cNvPr id="5" name="Straight Arrow Connector 4">
+            <a:extLst>
+              <a:ext uri="{FF2B5EF4-FFF2-40B4-BE49-F238E27FC236}">
+                <a16:creationId xmlns:a16="http://schemas.microsoft.com/office/drawing/2014/main" id="{93BB1966-599E-D86B-A6FF-47F864C0E7A0}"/>
+              </a:ext>
+            </a:extLst>
+          </p:cNvPr>
+          <p:cNvCxnSpPr/>
+          <p:nvPr/>
+        </p:nvCxnSpPr>
+        <p:spPr>
+          <a:xfrm>
+            <a:off x="6284080" y="1997874"/>
+            <a:ext cx="0" cy="603504"/>
+          </a:xfrm>
+          <a:prstGeom prst="straightConnector1">
+            <a:avLst/>
+          </a:prstGeom>
+          <a:ln>
+            <a:solidFill>
+              <a:schemeClr val="tx1"/>
+            </a:solidFill>
+            <a:tailEnd type="triangle"/>
+          </a:ln>
+        </p:spPr>
+        <p:style>
+          <a:lnRef idx="3">
+            <a:schemeClr val="dk1"/>
+          </a:lnRef>
+          <a:fillRef idx="0">
+            <a:schemeClr val="dk1"/>
+          </a:fillRef>
+          <a:effectRef idx="2">
+            <a:schemeClr val="dk1"/>
+          </a:effectRef>
+          <a:fontRef idx="minor">
+            <a:schemeClr val="tx1"/>
+          </a:fontRef>
+        </p:style>
+      </p:cxnSp>
+      <p:cxnSp>
+        <p:nvCxnSpPr>
+          <p:cNvPr id="9" name="Straight Arrow Connector 8">
+            <a:extLst>
+              <a:ext uri="{FF2B5EF4-FFF2-40B4-BE49-F238E27FC236}">
+                <a16:creationId xmlns:a16="http://schemas.microsoft.com/office/drawing/2014/main" id="{49C6E5ED-3BBD-61F3-93AB-026273106591}"/>
+              </a:ext>
+            </a:extLst>
+          </p:cNvPr>
+          <p:cNvCxnSpPr/>
+          <p:nvPr/>
+        </p:nvCxnSpPr>
+        <p:spPr>
+          <a:xfrm>
+            <a:off x="6271888" y="2845218"/>
+            <a:ext cx="0" cy="603504"/>
+          </a:xfrm>
+          <a:prstGeom prst="straightConnector1">
+            <a:avLst/>
+          </a:prstGeom>
+          <a:ln>
+            <a:solidFill>
+              <a:schemeClr val="tx1"/>
+            </a:solidFill>
+            <a:tailEnd type="triangle"/>
+          </a:ln>
+        </p:spPr>
+        <p:style>
+          <a:lnRef idx="3">
+            <a:schemeClr val="dk1"/>
+          </a:lnRef>
+          <a:fillRef idx="0">
+            <a:schemeClr val="dk1"/>
+          </a:fillRef>
+          <a:effectRef idx="2">
+            <a:schemeClr val="dk1"/>
+          </a:effectRef>
+          <a:fontRef idx="minor">
+            <a:schemeClr val="tx1"/>
+          </a:fontRef>
+        </p:style>
+      </p:cxnSp>
+      <p:cxnSp>
+        <p:nvCxnSpPr>
+          <p:cNvPr id="10" name="Straight Arrow Connector 9">
+            <a:extLst>
+              <a:ext uri="{FF2B5EF4-FFF2-40B4-BE49-F238E27FC236}">
+                <a16:creationId xmlns:a16="http://schemas.microsoft.com/office/drawing/2014/main" id="{64433AAA-DC88-5C16-1015-B1076BFF7F6E}"/>
+              </a:ext>
+            </a:extLst>
+          </p:cNvPr>
+          <p:cNvCxnSpPr/>
+          <p:nvPr/>
+        </p:nvCxnSpPr>
+        <p:spPr>
+          <a:xfrm>
+            <a:off x="6271888" y="3729138"/>
+            <a:ext cx="0" cy="603504"/>
+          </a:xfrm>
+          <a:prstGeom prst="straightConnector1">
+            <a:avLst/>
+          </a:prstGeom>
+          <a:ln>
+            <a:solidFill>
+              <a:schemeClr val="tx1"/>
+            </a:solidFill>
+            <a:tailEnd type="triangle"/>
+          </a:ln>
+        </p:spPr>
+        <p:style>
+          <a:lnRef idx="3">
+            <a:schemeClr val="dk1"/>
+          </a:lnRef>
+          <a:fillRef idx="0">
+            <a:schemeClr val="dk1"/>
+          </a:fillRef>
+          <a:effectRef idx="2">
+            <a:schemeClr val="dk1"/>
+          </a:effectRef>
+          <a:fontRef idx="minor">
+            <a:schemeClr val="tx1"/>
+          </a:fontRef>
+        </p:style>
+      </p:cxnSp>
+      <p:cxnSp>
+        <p:nvCxnSpPr>
+          <p:cNvPr id="14" name="Straight Arrow Connector 13">
+            <a:extLst>
+              <a:ext uri="{FF2B5EF4-FFF2-40B4-BE49-F238E27FC236}">
+                <a16:creationId xmlns:a16="http://schemas.microsoft.com/office/drawing/2014/main" id="{74A07619-2ACA-2B11-FEF8-991415409563}"/>
+              </a:ext>
+            </a:extLst>
+          </p:cNvPr>
+          <p:cNvCxnSpPr/>
+          <p:nvPr/>
+        </p:nvCxnSpPr>
+        <p:spPr>
+          <a:xfrm>
+            <a:off x="6265792" y="4622202"/>
+            <a:ext cx="0" cy="603504"/>
+          </a:xfrm>
+          <a:prstGeom prst="straightConnector1">
+            <a:avLst/>
+          </a:prstGeom>
+          <a:ln>
+            <a:solidFill>
+              <a:schemeClr val="tx1"/>
+            </a:solidFill>
+            <a:tailEnd type="triangle"/>
+          </a:ln>
+        </p:spPr>
+        <p:style>
+          <a:lnRef idx="3">
+            <a:schemeClr val="dk1"/>
+          </a:lnRef>
+          <a:fillRef idx="0">
+            <a:schemeClr val="dk1"/>
+          </a:fillRef>
+          <a:effectRef idx="2">
+            <a:schemeClr val="dk1"/>
+          </a:effectRef>
+          <a:fontRef idx="minor">
+            <a:schemeClr val="tx1"/>
+          </a:fontRef>
+        </p:style>
+      </p:cxnSp>
+      <p:cxnSp>
+        <p:nvCxnSpPr>
+          <p:cNvPr id="15" name="Straight Arrow Connector 14">
+            <a:extLst>
+              <a:ext uri="{FF2B5EF4-FFF2-40B4-BE49-F238E27FC236}">
+                <a16:creationId xmlns:a16="http://schemas.microsoft.com/office/drawing/2014/main" id="{913CDB61-368D-0F0E-5191-8A9AAC32FA66}"/>
+              </a:ext>
+            </a:extLst>
+          </p:cNvPr>
+          <p:cNvCxnSpPr/>
+          <p:nvPr/>
+        </p:nvCxnSpPr>
+        <p:spPr>
+          <a:xfrm>
+            <a:off x="6284080" y="5460402"/>
+            <a:ext cx="0" cy="603504"/>
+          </a:xfrm>
+          <a:prstGeom prst="straightConnector1">
+            <a:avLst/>
+          </a:prstGeom>
+          <a:ln>
+            <a:solidFill>
+              <a:schemeClr val="tx1"/>
+            </a:solidFill>
+            <a:tailEnd type="triangle"/>
+          </a:ln>
+        </p:spPr>
+        <p:style>
+          <a:lnRef idx="3">
+            <a:schemeClr val="dk1"/>
+          </a:lnRef>
+          <a:fillRef idx="0">
+            <a:schemeClr val="dk1"/>
+          </a:fillRef>
+          <a:effectRef idx="2">
+            <a:schemeClr val="dk1"/>
+          </a:effectRef>
+          <a:fontRef idx="minor">
+            <a:schemeClr val="tx1"/>
+          </a:fontRef>
+        </p:style>
+      </p:cxnSp>
     </p:spTree>
     <p:extLst>
       <p:ext uri="{BB962C8B-B14F-4D97-AF65-F5344CB8AC3E}">
-        <p14:creationId xmlns:p14="http://schemas.microsoft.com/office/powerpoint/2010/main" val="2858686636"/>
+        <p14:creationId xmlns:p14="http://schemas.microsoft.com/office/powerpoint/2010/main" val="2543584161"/>
       </p:ext>
     </p:extLst>
   </p:cSld>
@@ -7036,14 +8784,19 @@
             <p:ph type="title"/>
           </p:nvPr>
         </p:nvSpPr>
-        <p:spPr/>
+        <p:spPr>
+          <a:xfrm>
+            <a:off x="2980911" y="297270"/>
+            <a:ext cx="6230177" cy="1010322"/>
+          </a:xfrm>
+        </p:spPr>
         <p:txBody>
           <a:bodyPr/>
           <a:lstStyle/>
           <a:p>
             <a:r>
               <a:rPr lang="en-GB" dirty="0"/>
-              <a:t>Who is the audience for your artefact, and what need does it fulfil for them?</a:t>
+              <a:t>Who is the project for?</a:t>
             </a:r>
           </a:p>
         </p:txBody>
@@ -7066,8 +8819,8 @@
         </p:nvSpPr>
         <p:spPr>
           <a:xfrm>
-            <a:off x="448056" y="2532888"/>
-            <a:ext cx="9601797" cy="3715511"/>
+            <a:off x="512064" y="1673352"/>
+            <a:ext cx="10835640" cy="4556759"/>
           </a:xfrm>
         </p:spPr>
         <p:txBody>
@@ -7078,44 +8831,52 @@
               <a:buNone/>
             </a:pPr>
             <a:r>
-              <a:rPr lang="en-GB" dirty="0"/>
+              <a:rPr lang="en-GB" sz="2400" dirty="0"/>
               <a:t>Myself and Future Employers</a:t>
             </a:r>
           </a:p>
           <a:p>
             <a:pPr lvl="1"/>
             <a:r>
-              <a:rPr lang="en-GB" dirty="0"/>
+              <a:rPr lang="en-GB" sz="2400" dirty="0"/>
               <a:t> Portfolio piece showcasing Technical Design, Level Design , and System Design</a:t>
             </a:r>
           </a:p>
           <a:p>
             <a:pPr lvl="1"/>
             <a:r>
-              <a:rPr lang="en-GB" dirty="0"/>
+              <a:rPr lang="en-GB" sz="2400" dirty="0"/>
               <a:t>Demonstrates my design process and research abilities </a:t>
             </a:r>
           </a:p>
           <a:p>
+            <a:pPr lvl="1"/>
+            <a:endParaRPr lang="en-GB" sz="2400" dirty="0"/>
+          </a:p>
+          <a:p>
+            <a:pPr lvl="1"/>
+            <a:endParaRPr lang="en-GB" sz="2400" dirty="0"/>
+          </a:p>
+          <a:p>
             <a:pPr marL="457200" lvl="1" indent="0">
               <a:buNone/>
             </a:pPr>
             <a:r>
-              <a:rPr lang="en-GB" dirty="0"/>
+              <a:rPr lang="en-GB" sz="2400" dirty="0"/>
               <a:t>Secondary Audience </a:t>
             </a:r>
           </a:p>
           <a:p>
             <a:pPr lvl="1"/>
             <a:r>
-              <a:rPr lang="en-GB" dirty="0"/>
+              <a:rPr lang="en-GB" sz="2400" dirty="0"/>
               <a:t>Game and Level Designers</a:t>
             </a:r>
           </a:p>
           <a:p>
             <a:pPr lvl="1"/>
             <a:r>
-              <a:rPr lang="en-GB" dirty="0"/>
+              <a:rPr lang="en-GB" sz="2400" dirty="0"/>
               <a:t>Indie studios without designated designers </a:t>
             </a:r>
           </a:p>
@@ -7129,91 +8890,6 @@
     <p:extLst>
       <p:ext uri="{BB962C8B-B14F-4D97-AF65-F5344CB8AC3E}">
         <p14:creationId xmlns:p14="http://schemas.microsoft.com/office/powerpoint/2010/main" val="1314658011"/>
-      </p:ext>
-    </p:extLst>
-  </p:cSld>
-  <p:clrMapOvr>
-    <a:masterClrMapping/>
-  </p:clrMapOvr>
-</p:sld>
-</file>
-
-<file path=ppt/slides/slide9.xml><?xml version="1.0" encoding="utf-8"?>
-<p:sld xmlns:a="http://schemas.openxmlformats.org/drawingml/2006/main" xmlns:r="http://schemas.openxmlformats.org/officeDocument/2006/relationships" xmlns:p="http://schemas.openxmlformats.org/presentationml/2006/main">
-  <p:cSld>
-    <p:spTree>
-      <p:nvGrpSpPr>
-        <p:cNvPr id="1" name=""/>
-        <p:cNvGrpSpPr/>
-        <p:nvPr/>
-      </p:nvGrpSpPr>
-      <p:grpSpPr>
-        <a:xfrm>
-          <a:off x="0" y="0"/>
-          <a:ext cx="0" cy="0"/>
-          <a:chOff x="0" y="0"/>
-          <a:chExt cx="0" cy="0"/>
-        </a:xfrm>
-      </p:grpSpPr>
-      <p:sp>
-        <p:nvSpPr>
-          <p:cNvPr id="2" name="Title 1">
-            <a:extLst>
-              <a:ext uri="{FF2B5EF4-FFF2-40B4-BE49-F238E27FC236}">
-                <a16:creationId xmlns:a16="http://schemas.microsoft.com/office/drawing/2014/main" id="{B332A9B8-8A13-AD6F-D281-0E8E4EF52B4A}"/>
-              </a:ext>
-            </a:extLst>
-          </p:cNvPr>
-          <p:cNvSpPr>
-            <a:spLocks noGrp="1"/>
-          </p:cNvSpPr>
-          <p:nvPr>
-            <p:ph type="title"/>
-          </p:nvPr>
-        </p:nvSpPr>
-        <p:spPr/>
-        <p:txBody>
-          <a:bodyPr>
-            <a:normAutofit fontScale="90000"/>
-          </a:bodyPr>
-          <a:lstStyle/>
-          <a:p>
-            <a:r>
-              <a:rPr lang="en-GB" dirty="0"/>
-              <a:t>What are the key legal, social, ethical, and/or professional issues associated with your project? </a:t>
-            </a:r>
-          </a:p>
-        </p:txBody>
-      </p:sp>
-      <p:sp>
-        <p:nvSpPr>
-          <p:cNvPr id="3" name="Content Placeholder 2">
-            <a:extLst>
-              <a:ext uri="{FF2B5EF4-FFF2-40B4-BE49-F238E27FC236}">
-                <a16:creationId xmlns:a16="http://schemas.microsoft.com/office/drawing/2014/main" id="{299596B5-16F9-9216-9C80-11D70D664DFA}"/>
-              </a:ext>
-            </a:extLst>
-          </p:cNvPr>
-          <p:cNvSpPr>
-            <a:spLocks noGrp="1"/>
-          </p:cNvSpPr>
-          <p:nvPr>
-            <p:ph idx="1"/>
-          </p:nvPr>
-        </p:nvSpPr>
-        <p:spPr/>
-        <p:txBody>
-          <a:bodyPr/>
-          <a:lstStyle/>
-          <a:p>
-            <a:endParaRPr lang="en-GB"/>
-          </a:p>
-        </p:txBody>
-      </p:sp>
-    </p:spTree>
-    <p:extLst>
-      <p:ext uri="{BB962C8B-B14F-4D97-AF65-F5344CB8AC3E}">
-        <p14:creationId xmlns:p14="http://schemas.microsoft.com/office/powerpoint/2010/main" val="135739841"/>
       </p:ext>
     </p:extLst>
   </p:cSld>

--- a/Project Proposal/GAM708 Proposal Presentation.pptx
+++ b/Project Proposal/GAM708 Proposal Presentation.pptx
@@ -305,7 +305,7 @@
           <a:p>
             <a:fld id="{A960F2F5-2F2F-4A65-8AC6-0AF42D8123C9}" type="datetimeFigureOut">
               <a:rPr lang="en-GB" smtClean="0"/>
-              <a:t>23/06/2026</a:t>
+              <a:t>24/06/2026</a:t>
             </a:fld>
             <a:endParaRPr lang="en-GB"/>
           </a:p>
@@ -580,7 +580,7 @@
           <a:p>
             <a:fld id="{A960F2F5-2F2F-4A65-8AC6-0AF42D8123C9}" type="datetimeFigureOut">
               <a:rPr lang="en-GB" smtClean="0"/>
-              <a:t>23/06/2026</a:t>
+              <a:t>24/06/2026</a:t>
             </a:fld>
             <a:endParaRPr lang="en-GB"/>
           </a:p>
@@ -774,7 +774,7 @@
           <a:p>
             <a:fld id="{A960F2F5-2F2F-4A65-8AC6-0AF42D8123C9}" type="datetimeFigureOut">
               <a:rPr lang="en-GB" smtClean="0"/>
-              <a:t>23/06/2026</a:t>
+              <a:t>24/06/2026</a:t>
             </a:fld>
             <a:endParaRPr lang="en-GB"/>
           </a:p>
@@ -1045,7 +1045,7 @@
           <a:p>
             <a:fld id="{A960F2F5-2F2F-4A65-8AC6-0AF42D8123C9}" type="datetimeFigureOut">
               <a:rPr lang="en-GB" smtClean="0"/>
-              <a:t>23/06/2026</a:t>
+              <a:t>24/06/2026</a:t>
             </a:fld>
             <a:endParaRPr lang="en-GB"/>
           </a:p>
@@ -1372,7 +1372,7 @@
           <a:p>
             <a:fld id="{A960F2F5-2F2F-4A65-8AC6-0AF42D8123C9}" type="datetimeFigureOut">
               <a:rPr lang="en-GB" smtClean="0"/>
-              <a:t>23/06/2026</a:t>
+              <a:t>24/06/2026</a:t>
             </a:fld>
             <a:endParaRPr lang="en-GB"/>
           </a:p>
@@ -1991,7 +1991,7 @@
           <a:p>
             <a:fld id="{A960F2F5-2F2F-4A65-8AC6-0AF42D8123C9}" type="datetimeFigureOut">
               <a:rPr lang="en-GB" smtClean="0"/>
-              <a:t>23/06/2026</a:t>
+              <a:t>24/06/2026</a:t>
             </a:fld>
             <a:endParaRPr lang="en-GB"/>
           </a:p>
@@ -2838,7 +2838,7 @@
           <a:p>
             <a:fld id="{A960F2F5-2F2F-4A65-8AC6-0AF42D8123C9}" type="datetimeFigureOut">
               <a:rPr lang="en-GB" smtClean="0"/>
-              <a:t>23/06/2026</a:t>
+              <a:t>24/06/2026</a:t>
             </a:fld>
             <a:endParaRPr lang="en-GB"/>
           </a:p>
@@ -3008,7 +3008,7 @@
           <a:p>
             <a:fld id="{A960F2F5-2F2F-4A65-8AC6-0AF42D8123C9}" type="datetimeFigureOut">
               <a:rPr lang="en-GB" smtClean="0"/>
-              <a:t>23/06/2026</a:t>
+              <a:t>24/06/2026</a:t>
             </a:fld>
             <a:endParaRPr lang="en-GB"/>
           </a:p>
@@ -3188,7 +3188,7 @@
           <a:p>
             <a:fld id="{A960F2F5-2F2F-4A65-8AC6-0AF42D8123C9}" type="datetimeFigureOut">
               <a:rPr lang="en-GB" smtClean="0"/>
-              <a:t>23/06/2026</a:t>
+              <a:t>24/06/2026</a:t>
             </a:fld>
             <a:endParaRPr lang="en-GB"/>
           </a:p>
@@ -3358,7 +3358,7 @@
           <a:p>
             <a:fld id="{A960F2F5-2F2F-4A65-8AC6-0AF42D8123C9}" type="datetimeFigureOut">
               <a:rPr lang="en-GB" smtClean="0"/>
-              <a:t>23/06/2026</a:t>
+              <a:t>24/06/2026</a:t>
             </a:fld>
             <a:endParaRPr lang="en-GB"/>
           </a:p>
@@ -3605,7 +3605,7 @@
           <a:p>
             <a:fld id="{A960F2F5-2F2F-4A65-8AC6-0AF42D8123C9}" type="datetimeFigureOut">
               <a:rPr lang="en-GB" smtClean="0"/>
-              <a:t>23/06/2026</a:t>
+              <a:t>24/06/2026</a:t>
             </a:fld>
             <a:endParaRPr lang="en-GB"/>
           </a:p>
@@ -3897,7 +3897,7 @@
           <a:p>
             <a:fld id="{A960F2F5-2F2F-4A65-8AC6-0AF42D8123C9}" type="datetimeFigureOut">
               <a:rPr lang="en-GB" smtClean="0"/>
-              <a:t>23/06/2026</a:t>
+              <a:t>24/06/2026</a:t>
             </a:fld>
             <a:endParaRPr lang="en-GB"/>
           </a:p>
@@ -4341,7 +4341,7 @@
           <a:p>
             <a:fld id="{A960F2F5-2F2F-4A65-8AC6-0AF42D8123C9}" type="datetimeFigureOut">
               <a:rPr lang="en-GB" smtClean="0"/>
-              <a:t>23/06/2026</a:t>
+              <a:t>24/06/2026</a:t>
             </a:fld>
             <a:endParaRPr lang="en-GB"/>
           </a:p>
@@ -4459,7 +4459,7 @@
           <a:p>
             <a:fld id="{A960F2F5-2F2F-4A65-8AC6-0AF42D8123C9}" type="datetimeFigureOut">
               <a:rPr lang="en-GB" smtClean="0"/>
-              <a:t>23/06/2026</a:t>
+              <a:t>24/06/2026</a:t>
             </a:fld>
             <a:endParaRPr lang="en-GB"/>
           </a:p>
@@ -4554,7 +4554,7 @@
           <a:p>
             <a:fld id="{A960F2F5-2F2F-4A65-8AC6-0AF42D8123C9}" type="datetimeFigureOut">
               <a:rPr lang="en-GB" smtClean="0"/>
-              <a:t>23/06/2026</a:t>
+              <a:t>24/06/2026</a:t>
             </a:fld>
             <a:endParaRPr lang="en-GB"/>
           </a:p>
@@ -4833,7 +4833,7 @@
           <a:p>
             <a:fld id="{A960F2F5-2F2F-4A65-8AC6-0AF42D8123C9}" type="datetimeFigureOut">
               <a:rPr lang="en-GB" smtClean="0"/>
-              <a:t>23/06/2026</a:t>
+              <a:t>24/06/2026</a:t>
             </a:fld>
             <a:endParaRPr lang="en-GB"/>
           </a:p>
@@ -5108,7 +5108,7 @@
           <a:p>
             <a:fld id="{A960F2F5-2F2F-4A65-8AC6-0AF42D8123C9}" type="datetimeFigureOut">
               <a:rPr lang="en-GB" smtClean="0"/>
-              <a:t>23/06/2026</a:t>
+              <a:t>24/06/2026</a:t>
             </a:fld>
             <a:endParaRPr lang="en-GB"/>
           </a:p>
@@ -5545,7 +5545,7 @@
           <a:p>
             <a:fld id="{A960F2F5-2F2F-4A65-8AC6-0AF42D8123C9}" type="datetimeFigureOut">
               <a:rPr lang="en-GB" smtClean="0"/>
-              <a:t>23/06/2026</a:t>
+              <a:t>24/06/2026</a:t>
             </a:fld>
             <a:endParaRPr lang="en-GB"/>
           </a:p>
@@ -7552,12 +7552,6 @@
           <a:p>
             <a:r>
               <a:rPr lang="en-GB" dirty="0"/>
-              <a:t>Kremers </a:t>
-            </a:r>
-          </a:p>
-          <a:p>
-            <a:r>
-              <a:rPr lang="en-GB" dirty="0"/>
               <a:t>GDC talks</a:t>
             </a:r>
           </a:p>
@@ -7948,13 +7942,13 @@
           <a:p>
             <a:r>
               <a:rPr lang="en-GB" dirty="0"/>
-              <a:t>Prototype 2 – Landmarks </a:t>
+              <a:t>Prototype 2 – Architectural  </a:t>
             </a:r>
           </a:p>
           <a:p>
             <a:r>
               <a:rPr lang="en-GB" dirty="0"/>
-              <a:t>Prototype 3 – Audio </a:t>
+              <a:t>Prototype 3 – Landmark/Audio</a:t>
             </a:r>
           </a:p>
           <a:p>
